--- a/Liberty_Mutual_AI_Signals.pptx
+++ b/Liberty_Mutual_AI_Signals.pptx
@@ -972,7 +972,7 @@
         </p:nvSpPr>
         <p:spPr>
           <a:xfrm>
-            <a:off x="548640" y="457200"/>
+            <a:off x="457200" y="384048"/>
             <a:ext cx="7315200" cy="274320"/>
           </a:xfrm>
           <a:prstGeom prst="rect">
@@ -985,7 +985,7 @@
           <a:bodyPr wrap="square" lIns="0" tIns="0" rIns="0" bIns="0" rtlCol="0" anchor="ctr"/>
           <a:lstStyle/>
           <a:p>
-            <a:pPr algn="l" indent="0" marL="0">
+            <a:pPr indent="0" marL="0">
               <a:buNone/>
             </a:pPr>
             <a:r>
@@ -1011,8 +1011,8 @@
         </p:nvSpPr>
         <p:spPr>
           <a:xfrm>
-            <a:off x="548640" y="749808"/>
-            <a:ext cx="10607040" cy="868680"/>
+            <a:off x="457200" y="658368"/>
+            <a:ext cx="11247120" cy="566928"/>
           </a:xfrm>
           <a:prstGeom prst="rect">
             <a:avLst/>
@@ -1024,14 +1024,14 @@
           <a:bodyPr wrap="square" lIns="0" tIns="0" rIns="0" bIns="0" rtlCol="0" anchor="ctr"/>
           <a:lstStyle/>
           <a:p>
-            <a:pPr algn="l" indent="0" marL="0">
+            <a:pPr indent="0" marL="0">
               <a:lnSpc>
                 <a:spcPct val="95000"/>
               </a:lnSpc>
               <a:buNone/>
             </a:pPr>
             <a:r>
-              <a:rPr lang="en-US" sz="3200" b="1" dirty="0">
+              <a:rPr lang="en-US" sz="2700" b="1" dirty="0">
                 <a:solidFill>
                   <a:srgbClr val="1A2333"/>
                 </a:solidFill>
@@ -1041,7 +1041,7 @@
               </a:rPr>
               <a:t>Renewal Improvement: turning at-risk policies into retained premium</a:t>
             </a:r>
-            <a:endParaRPr lang="en-US" sz="3200" dirty="0"/>
+            <a:endParaRPr lang="en-US" sz="2700" dirty="0"/>
           </a:p>
         </p:txBody>
       </p:sp>
@@ -1053,8 +1053,8 @@
         </p:nvSpPr>
         <p:spPr>
           <a:xfrm>
-            <a:off x="548640" y="1627632"/>
-            <a:ext cx="10881360" cy="502920"/>
+            <a:off x="457200" y="1280160"/>
+            <a:ext cx="11247120" cy="365760"/>
           </a:xfrm>
           <a:prstGeom prst="rect">
             <a:avLst/>
@@ -1066,11 +1066,11 @@
           <a:bodyPr wrap="square" lIns="0" tIns="0" rIns="0" bIns="0" rtlCol="0" anchor="ctr"/>
           <a:lstStyle/>
           <a:p>
-            <a:pPr algn="l" indent="0" marL="0">
-              <a:buNone/>
-            </a:pPr>
-            <a:r>
-              <a:rPr lang="en-US" sz="1450" i="1" dirty="0">
+            <a:pPr indent="0" marL="0">
+              <a:buNone/>
+            </a:pPr>
+            <a:r>
+              <a:rPr lang="en-US" sz="1350" i="1" dirty="0">
                 <a:solidFill>
                   <a:srgbClr val="2E6FB5"/>
                 </a:solidFill>
@@ -1078,9 +1078,9 @@
                 <a:ea typeface="Calibri" pitchFamily="34" charset="-122"/>
                 <a:cs typeface="Calibri" pitchFamily="34" charset="-120"/>
               </a:rPr>
-              <a:t>An early-warning renewal signal flags churn 60–90 days ahead, so retention effort lands where it changes the outcome.</a:t>
-            </a:r>
-            <a:endParaRPr lang="en-US" sz="1450" dirty="0"/>
+              <a:t>A daily churn signal flags renewal risk 60–90 days out and drives the right retention action on the policies where it changes the outcome.</a:t>
+            </a:r>
+            <a:endParaRPr lang="en-US" sz="1350" dirty="0"/>
           </a:p>
         </p:txBody>
       </p:sp>
@@ -1092,8 +1092,8 @@
         </p:nvSpPr>
         <p:spPr>
           <a:xfrm>
-            <a:off x="548640" y="2423160"/>
-            <a:ext cx="6309360" cy="274320"/>
+            <a:off x="457200" y="1755648"/>
+            <a:ext cx="5486400" cy="256032"/>
           </a:xfrm>
           <a:prstGeom prst="rect">
             <a:avLst/>
@@ -1109,7 +1109,7 @@
               <a:buNone/>
             </a:pPr>
             <a:r>
-              <a:rPr lang="en-US" sz="1200" b="1" spc="200" kern="0" dirty="0">
+              <a:rPr lang="en-US" sz="1100" b="1" spc="200" kern="0" dirty="0">
                 <a:solidFill>
                   <a:srgbClr val="12315B"/>
                 </a:solidFill>
@@ -1117,9 +1117,9 @@
                 <a:ea typeface="Calibri" pitchFamily="34" charset="-122"/>
                 <a:cs typeface="Calibri" pitchFamily="34" charset="-120"/>
               </a:rPr>
-              <a:t>HOW THE SIGNAL WORKS</a:t>
-            </a:r>
-            <a:endParaRPr lang="en-US" sz="1200" dirty="0"/>
+              <a:t>END-TO-END JOURNEY</a:t>
+            </a:r>
+            <a:endParaRPr lang="en-US" sz="1100" dirty="0"/>
           </a:p>
         </p:txBody>
       </p:sp>
@@ -1131,439 +1131,17 @@
         </p:nvSpPr>
         <p:spPr>
           <a:xfrm>
-            <a:off x="548640" y="2880360"/>
-            <a:ext cx="384048" cy="384048"/>
+            <a:off x="457200" y="2084832"/>
+            <a:ext cx="2044598" cy="2286000"/>
           </a:xfrm>
           <a:prstGeom prst="roundRect">
             <a:avLst>
-              <a:gd name="adj" fmla="val 50000"/>
+              <a:gd name="adj" fmla="val 2236"/>
             </a:avLst>
           </a:prstGeom>
           <a:solidFill>
-            <a:srgbClr val="12315B"/>
-          </a:solidFill>
-          <a:ln/>
-        </p:spPr>
-      </p:sp>
-      <p:sp>
-        <p:nvSpPr>
-          <p:cNvPr id="7" name="Text 5"/>
-          <p:cNvSpPr/>
-          <p:nvPr/>
-        </p:nvSpPr>
-        <p:spPr>
-          <a:xfrm>
-            <a:off x="548640" y="2880360"/>
-            <a:ext cx="384048" cy="384048"/>
-          </a:xfrm>
-          <a:prstGeom prst="rect">
-            <a:avLst/>
-          </a:prstGeom>
-          <a:noFill/>
-          <a:ln/>
-        </p:spPr>
-        <p:txBody>
-          <a:bodyPr wrap="square" lIns="0" tIns="0" rIns="0" bIns="0" rtlCol="0" anchor="ctr"/>
-          <a:lstStyle/>
-          <a:p>
-            <a:pPr algn="ctr" indent="0" marL="0">
-              <a:buNone/>
-            </a:pPr>
-            <a:r>
-              <a:rPr lang="en-US" sz="1500" b="1" dirty="0">
-                <a:solidFill>
-                  <a:srgbClr val="FFFFFF"/>
-                </a:solidFill>
-                <a:latin typeface="Cambria" pitchFamily="34" charset="0"/>
-                <a:ea typeface="Cambria" pitchFamily="34" charset="-122"/>
-                <a:cs typeface="Cambria" pitchFamily="34" charset="-120"/>
-              </a:rPr>
-              <a:t>1</a:t>
-            </a:r>
-            <a:endParaRPr lang="en-US" sz="1500" dirty="0"/>
-          </a:p>
-        </p:txBody>
-      </p:sp>
-      <p:sp>
-        <p:nvSpPr>
-          <p:cNvPr id="8" name="Text 6"/>
-          <p:cNvSpPr/>
-          <p:nvPr/>
-        </p:nvSpPr>
-        <p:spPr>
-          <a:xfrm>
-            <a:off x="1097280" y="2852928"/>
-            <a:ext cx="5760720" cy="274320"/>
-          </a:xfrm>
-          <a:prstGeom prst="rect">
-            <a:avLst/>
-          </a:prstGeom>
-          <a:noFill/>
-          <a:ln/>
-        </p:spPr>
-        <p:txBody>
-          <a:bodyPr wrap="square" lIns="0" tIns="0" rIns="0" bIns="0" rtlCol="0" anchor="ctr"/>
-          <a:lstStyle/>
-          <a:p>
-            <a:pPr indent="0" marL="0">
-              <a:buNone/>
-            </a:pPr>
-            <a:r>
-              <a:rPr lang="en-US" sz="1350" b="1" dirty="0">
-                <a:solidFill>
-                  <a:srgbClr val="1A2333"/>
-                </a:solidFill>
-                <a:latin typeface="Calibri" pitchFamily="34" charset="0"/>
-                <a:ea typeface="Calibri" pitchFamily="34" charset="-122"/>
-                <a:cs typeface="Calibri" pitchFamily="34" charset="-120"/>
-              </a:rPr>
-              <a:t>Score every policy for churn risk</a:t>
-            </a:r>
-            <a:endParaRPr lang="en-US" sz="1350" dirty="0"/>
-          </a:p>
-        </p:txBody>
-      </p:sp>
-      <p:sp>
-        <p:nvSpPr>
-          <p:cNvPr id="9" name="Text 7"/>
-          <p:cNvSpPr/>
-          <p:nvPr/>
-        </p:nvSpPr>
-        <p:spPr>
-          <a:xfrm>
-            <a:off x="1097280" y="3127248"/>
-            <a:ext cx="5760720" cy="502920"/>
-          </a:xfrm>
-          <a:prstGeom prst="rect">
-            <a:avLst/>
-          </a:prstGeom>
-          <a:noFill/>
-          <a:ln/>
-        </p:spPr>
-        <p:txBody>
-          <a:bodyPr wrap="square" lIns="0" tIns="0" rIns="0" bIns="0" rtlCol="0" anchor="ctr"/>
-          <a:lstStyle/>
-          <a:p>
-            <a:pPr indent="0" marL="0">
-              <a:lnSpc>
-                <a:spcPct val="98000"/>
-              </a:lnSpc>
-              <a:buNone/>
-            </a:pPr>
-            <a:r>
-              <a:rPr lang="en-US" sz="1150" dirty="0">
-                <a:solidFill>
-                  <a:srgbClr val="5A6472"/>
-                </a:solidFill>
-                <a:latin typeface="Calibri" pitchFamily="34" charset="0"/>
-                <a:ea typeface="Calibri" pitchFamily="34" charset="-122"/>
-                <a:cs typeface="Calibri" pitchFamily="34" charset="-120"/>
-              </a:rPr>
-              <a:t>Model blends price sensitivity, service history, competitor pricing and life-event triggers into a single renewal-risk score refreshed daily.</a:t>
-            </a:r>
-            <a:endParaRPr lang="en-US" sz="1150" dirty="0"/>
-          </a:p>
-        </p:txBody>
-      </p:sp>
-      <p:sp>
-        <p:nvSpPr>
-          <p:cNvPr id="10" name="Shape 8"/>
-          <p:cNvSpPr/>
-          <p:nvPr/>
-        </p:nvSpPr>
-        <p:spPr>
-          <a:xfrm>
-            <a:off x="548640" y="3813048"/>
-            <a:ext cx="384048" cy="384048"/>
-          </a:xfrm>
-          <a:prstGeom prst="roundRect">
-            <a:avLst>
-              <a:gd name="adj" fmla="val 50000"/>
-            </a:avLst>
-          </a:prstGeom>
-          <a:solidFill>
-            <a:srgbClr val="12315B"/>
-          </a:solidFill>
-          <a:ln/>
-        </p:spPr>
-      </p:sp>
-      <p:sp>
-        <p:nvSpPr>
-          <p:cNvPr id="11" name="Text 9"/>
-          <p:cNvSpPr/>
-          <p:nvPr/>
-        </p:nvSpPr>
-        <p:spPr>
-          <a:xfrm>
-            <a:off x="548640" y="3813048"/>
-            <a:ext cx="384048" cy="384048"/>
-          </a:xfrm>
-          <a:prstGeom prst="rect">
-            <a:avLst/>
-          </a:prstGeom>
-          <a:noFill/>
-          <a:ln/>
-        </p:spPr>
-        <p:txBody>
-          <a:bodyPr wrap="square" lIns="0" tIns="0" rIns="0" bIns="0" rtlCol="0" anchor="ctr"/>
-          <a:lstStyle/>
-          <a:p>
-            <a:pPr algn="ctr" indent="0" marL="0">
-              <a:buNone/>
-            </a:pPr>
-            <a:r>
-              <a:rPr lang="en-US" sz="1500" b="1" dirty="0">
-                <a:solidFill>
-                  <a:srgbClr val="FFFFFF"/>
-                </a:solidFill>
-                <a:latin typeface="Cambria" pitchFamily="34" charset="0"/>
-                <a:ea typeface="Cambria" pitchFamily="34" charset="-122"/>
-                <a:cs typeface="Cambria" pitchFamily="34" charset="-120"/>
-              </a:rPr>
-              <a:t>2</a:t>
-            </a:r>
-            <a:endParaRPr lang="en-US" sz="1500" dirty="0"/>
-          </a:p>
-        </p:txBody>
-      </p:sp>
-      <p:sp>
-        <p:nvSpPr>
-          <p:cNvPr id="12" name="Text 10"/>
-          <p:cNvSpPr/>
-          <p:nvPr/>
-        </p:nvSpPr>
-        <p:spPr>
-          <a:xfrm>
-            <a:off x="1097280" y="3785616"/>
-            <a:ext cx="5760720" cy="274320"/>
-          </a:xfrm>
-          <a:prstGeom prst="rect">
-            <a:avLst/>
-          </a:prstGeom>
-          <a:noFill/>
-          <a:ln/>
-        </p:spPr>
-        <p:txBody>
-          <a:bodyPr wrap="square" lIns="0" tIns="0" rIns="0" bIns="0" rtlCol="0" anchor="ctr"/>
-          <a:lstStyle/>
-          <a:p>
-            <a:pPr indent="0" marL="0">
-              <a:buNone/>
-            </a:pPr>
-            <a:r>
-              <a:rPr lang="en-US" sz="1350" b="1" dirty="0">
-                <a:solidFill>
-                  <a:srgbClr val="1A2333"/>
-                </a:solidFill>
-                <a:latin typeface="Calibri" pitchFamily="34" charset="0"/>
-                <a:ea typeface="Calibri" pitchFamily="34" charset="-122"/>
-                <a:cs typeface="Calibri" pitchFamily="34" charset="-120"/>
-              </a:rPr>
-              <a:t>Prioritize the movable middle</a:t>
-            </a:r>
-            <a:endParaRPr lang="en-US" sz="1350" dirty="0"/>
-          </a:p>
-        </p:txBody>
-      </p:sp>
-      <p:sp>
-        <p:nvSpPr>
-          <p:cNvPr id="13" name="Text 11"/>
-          <p:cNvSpPr/>
-          <p:nvPr/>
-        </p:nvSpPr>
-        <p:spPr>
-          <a:xfrm>
-            <a:off x="1097280" y="4059936"/>
-            <a:ext cx="5760720" cy="502920"/>
-          </a:xfrm>
-          <a:prstGeom prst="rect">
-            <a:avLst/>
-          </a:prstGeom>
-          <a:noFill/>
-          <a:ln/>
-        </p:spPr>
-        <p:txBody>
-          <a:bodyPr wrap="square" lIns="0" tIns="0" rIns="0" bIns="0" rtlCol="0" anchor="ctr"/>
-          <a:lstStyle/>
-          <a:p>
-            <a:pPr indent="0" marL="0">
-              <a:lnSpc>
-                <a:spcPct val="98000"/>
-              </a:lnSpc>
-              <a:buNone/>
-            </a:pPr>
-            <a:r>
-              <a:rPr lang="en-US" sz="1150" dirty="0">
-                <a:solidFill>
-                  <a:srgbClr val="5A6472"/>
-                </a:solidFill>
-                <a:latin typeface="Calibri" pitchFamily="34" charset="0"/>
-                <a:ea typeface="Calibri" pitchFamily="34" charset="-122"/>
-                <a:cs typeface="Calibri" pitchFamily="34" charset="-120"/>
-              </a:rPr>
-              <a:t>Effort concentrates on high-value, high-uncertainty policies where a targeted offer or call actually shifts the renew decision.</a:t>
-            </a:r>
-            <a:endParaRPr lang="en-US" sz="1150" dirty="0"/>
-          </a:p>
-        </p:txBody>
-      </p:sp>
-      <p:sp>
-        <p:nvSpPr>
-          <p:cNvPr id="14" name="Shape 12"/>
-          <p:cNvSpPr/>
-          <p:nvPr/>
-        </p:nvSpPr>
-        <p:spPr>
-          <a:xfrm>
-            <a:off x="548640" y="4745736"/>
-            <a:ext cx="384048" cy="384048"/>
-          </a:xfrm>
-          <a:prstGeom prst="roundRect">
-            <a:avLst>
-              <a:gd name="adj" fmla="val 50000"/>
-            </a:avLst>
-          </a:prstGeom>
-          <a:solidFill>
-            <a:srgbClr val="12315B"/>
-          </a:solidFill>
-          <a:ln/>
-        </p:spPr>
-      </p:sp>
-      <p:sp>
-        <p:nvSpPr>
-          <p:cNvPr id="15" name="Text 13"/>
-          <p:cNvSpPr/>
-          <p:nvPr/>
-        </p:nvSpPr>
-        <p:spPr>
-          <a:xfrm>
-            <a:off x="548640" y="4745736"/>
-            <a:ext cx="384048" cy="384048"/>
-          </a:xfrm>
-          <a:prstGeom prst="rect">
-            <a:avLst/>
-          </a:prstGeom>
-          <a:noFill/>
-          <a:ln/>
-        </p:spPr>
-        <p:txBody>
-          <a:bodyPr wrap="square" lIns="0" tIns="0" rIns="0" bIns="0" rtlCol="0" anchor="ctr"/>
-          <a:lstStyle/>
-          <a:p>
-            <a:pPr algn="ctr" indent="0" marL="0">
-              <a:buNone/>
-            </a:pPr>
-            <a:r>
-              <a:rPr lang="en-US" sz="1500" b="1" dirty="0">
-                <a:solidFill>
-                  <a:srgbClr val="FFFFFF"/>
-                </a:solidFill>
-                <a:latin typeface="Cambria" pitchFamily="34" charset="0"/>
-                <a:ea typeface="Cambria" pitchFamily="34" charset="-122"/>
-                <a:cs typeface="Cambria" pitchFamily="34" charset="-120"/>
-              </a:rPr>
-              <a:t>3</a:t>
-            </a:r>
-            <a:endParaRPr lang="en-US" sz="1500" dirty="0"/>
-          </a:p>
-        </p:txBody>
-      </p:sp>
-      <p:sp>
-        <p:nvSpPr>
-          <p:cNvPr id="16" name="Text 14"/>
-          <p:cNvSpPr/>
-          <p:nvPr/>
-        </p:nvSpPr>
-        <p:spPr>
-          <a:xfrm>
-            <a:off x="1097280" y="4718304"/>
-            <a:ext cx="5760720" cy="274320"/>
-          </a:xfrm>
-          <a:prstGeom prst="rect">
-            <a:avLst/>
-          </a:prstGeom>
-          <a:noFill/>
-          <a:ln/>
-        </p:spPr>
-        <p:txBody>
-          <a:bodyPr wrap="square" lIns="0" tIns="0" rIns="0" bIns="0" rtlCol="0" anchor="ctr"/>
-          <a:lstStyle/>
-          <a:p>
-            <a:pPr indent="0" marL="0">
-              <a:buNone/>
-            </a:pPr>
-            <a:r>
-              <a:rPr lang="en-US" sz="1350" b="1" dirty="0">
-                <a:solidFill>
-                  <a:srgbClr val="1A2333"/>
-                </a:solidFill>
-                <a:latin typeface="Calibri" pitchFamily="34" charset="0"/>
-                <a:ea typeface="Calibri" pitchFamily="34" charset="-122"/>
-                <a:cs typeface="Calibri" pitchFamily="34" charset="-120"/>
-              </a:rPr>
-              <a:t>Match the right retention action</a:t>
-            </a:r>
-            <a:endParaRPr lang="en-US" sz="1350" dirty="0"/>
-          </a:p>
-        </p:txBody>
-      </p:sp>
-      <p:sp>
-        <p:nvSpPr>
-          <p:cNvPr id="17" name="Text 15"/>
-          <p:cNvSpPr/>
-          <p:nvPr/>
-        </p:nvSpPr>
-        <p:spPr>
-          <a:xfrm>
-            <a:off x="1097280" y="4992624"/>
-            <a:ext cx="5760720" cy="502920"/>
-          </a:xfrm>
-          <a:prstGeom prst="rect">
-            <a:avLst/>
-          </a:prstGeom>
-          <a:noFill/>
-          <a:ln/>
-        </p:spPr>
-        <p:txBody>
-          <a:bodyPr wrap="square" lIns="0" tIns="0" rIns="0" bIns="0" rtlCol="0" anchor="ctr"/>
-          <a:lstStyle/>
-          <a:p>
-            <a:pPr indent="0" marL="0">
-              <a:lnSpc>
-                <a:spcPct val="98000"/>
-              </a:lnSpc>
-              <a:buNone/>
-            </a:pPr>
-            <a:r>
-              <a:rPr lang="en-US" sz="1150" dirty="0">
-                <a:solidFill>
-                  <a:srgbClr val="5A6472"/>
-                </a:solidFill>
-                <a:latin typeface="Calibri" pitchFamily="34" charset="0"/>
-                <a:ea typeface="Calibri" pitchFamily="34" charset="-122"/>
-                <a:cs typeface="Calibri" pitchFamily="34" charset="-120"/>
-              </a:rPr>
-              <a:t>Signal routes each policy to the best lever — price, coverage bundling, or proactive outreach — and measures lift against a holdout.</a:t>
-            </a:r>
-            <a:endParaRPr lang="en-US" sz="1150" dirty="0"/>
-          </a:p>
-        </p:txBody>
-      </p:sp>
-      <p:sp>
-        <p:nvSpPr>
-          <p:cNvPr id="18" name="Shape 16"/>
-          <p:cNvSpPr/>
-          <p:nvPr/>
-        </p:nvSpPr>
-        <p:spPr>
-          <a:xfrm>
-            <a:off x="7086600" y="2423160"/>
-            <a:ext cx="0" cy="3566160"/>
-          </a:xfrm>
-          <a:prstGeom prst="line">
-            <a:avLst/>
-          </a:prstGeom>
-          <a:noFill/>
+            <a:srgbClr val="FFFFFF"/>
+          </a:solidFill>
           <a:ln w="12700">
             <a:solidFill>
               <a:srgbClr val="D3DCEA"/>
@@ -1574,14 +1152,36 @@
       </p:sp>
       <p:sp>
         <p:nvSpPr>
-          <p:cNvPr id="19" name="Text 17"/>
-          <p:cNvSpPr/>
-          <p:nvPr/>
-        </p:nvSpPr>
-        <p:spPr>
-          <a:xfrm>
-            <a:off x="7360920" y="2423160"/>
-            <a:ext cx="4251960" cy="274320"/>
+          <p:cNvPr id="7" name="Shape 5"/>
+          <p:cNvSpPr/>
+          <p:nvPr/>
+        </p:nvSpPr>
+        <p:spPr>
+          <a:xfrm>
+            <a:off x="603504" y="2231136"/>
+            <a:ext cx="365760" cy="365760"/>
+          </a:xfrm>
+          <a:prstGeom prst="roundRect">
+            <a:avLst>
+              <a:gd name="adj" fmla="val 50000"/>
+            </a:avLst>
+          </a:prstGeom>
+          <a:solidFill>
+            <a:srgbClr val="12315B"/>
+          </a:solidFill>
+          <a:ln/>
+        </p:spPr>
+      </p:sp>
+      <p:sp>
+        <p:nvSpPr>
+          <p:cNvPr id="8" name="Text 6"/>
+          <p:cNvSpPr/>
+          <p:nvPr/>
+        </p:nvSpPr>
+        <p:spPr>
+          <a:xfrm>
+            <a:off x="603504" y="2231136"/>
+            <a:ext cx="365760" cy="365760"/>
           </a:xfrm>
           <a:prstGeom prst="rect">
             <a:avLst/>
@@ -1593,11 +1193,53 @@
           <a:bodyPr wrap="square" lIns="0" tIns="0" rIns="0" bIns="0" rtlCol="0" anchor="ctr"/>
           <a:lstStyle/>
           <a:p>
+            <a:pPr algn="ctr" indent="0" marL="0">
+              <a:buNone/>
+            </a:pPr>
+            <a:r>
+              <a:rPr lang="en-US" sz="1400" b="1" dirty="0">
+                <a:solidFill>
+                  <a:srgbClr val="FFFFFF"/>
+                </a:solidFill>
+                <a:latin typeface="Cambria" pitchFamily="34" charset="0"/>
+                <a:ea typeface="Cambria" pitchFamily="34" charset="-122"/>
+                <a:cs typeface="Cambria" pitchFamily="34" charset="-120"/>
+              </a:rPr>
+              <a:t>1</a:t>
+            </a:r>
+            <a:endParaRPr lang="en-US" sz="1400" dirty="0"/>
+          </a:p>
+        </p:txBody>
+      </p:sp>
+      <p:sp>
+        <p:nvSpPr>
+          <p:cNvPr id="9" name="Text 7"/>
+          <p:cNvSpPr/>
+          <p:nvPr/>
+        </p:nvSpPr>
+        <p:spPr>
+          <a:xfrm>
+            <a:off x="1060704" y="2212848"/>
+            <a:ext cx="1313078" cy="640080"/>
+          </a:xfrm>
+          <a:prstGeom prst="rect">
+            <a:avLst/>
+          </a:prstGeom>
+          <a:noFill/>
+          <a:ln/>
+        </p:spPr>
+        <p:txBody>
+          <a:bodyPr wrap="square" lIns="0" tIns="0" rIns="0" bIns="0" rtlCol="0" anchor="ctr"/>
+          <a:lstStyle/>
+          <a:p>
             <a:pPr indent="0" marL="0">
-              <a:buNone/>
-            </a:pPr>
-            <a:r>
-              <a:rPr lang="en-US" sz="1200" b="1" spc="200" kern="0" dirty="0">
+              <a:lnSpc>
+                <a:spcPct val="95000"/>
+              </a:lnSpc>
+              <a:buNone/>
+            </a:pPr>
+            <a:r>
+              <a:rPr lang="en-US" sz="1250" b="1" dirty="0">
                 <a:solidFill>
                   <a:srgbClr val="12315B"/>
                 </a:solidFill>
@@ -1605,30 +1247,179 @@
                 <a:ea typeface="Calibri" pitchFamily="34" charset="-122"/>
                 <a:cs typeface="Calibri" pitchFamily="34" charset="-120"/>
               </a:rPr>
-              <a:t>IMPACT AT SCALE</a:t>
-            </a:r>
-            <a:endParaRPr lang="en-US" sz="1200" dirty="0"/>
-          </a:p>
-        </p:txBody>
-      </p:sp>
-      <p:sp>
-        <p:nvSpPr>
-          <p:cNvPr id="20" name="Shape 18"/>
-          <p:cNvSpPr/>
-          <p:nvPr/>
-        </p:nvSpPr>
-        <p:spPr>
-          <a:xfrm>
-            <a:off x="7360920" y="2880360"/>
-            <a:ext cx="2011680" cy="1234440"/>
+              <a:t>Trigger &amp; data capture</a:t>
+            </a:r>
+            <a:endParaRPr lang="en-US" sz="1250" dirty="0"/>
+          </a:p>
+        </p:txBody>
+      </p:sp>
+      <p:sp>
+        <p:nvSpPr>
+          <p:cNvPr id="10" name="Shape 8"/>
+          <p:cNvSpPr/>
+          <p:nvPr/>
+        </p:nvSpPr>
+        <p:spPr>
+          <a:xfrm>
+            <a:off x="640080" y="3008376"/>
+            <a:ext cx="73152" cy="73152"/>
+          </a:xfrm>
+          <a:prstGeom prst="rect">
+            <a:avLst/>
+          </a:prstGeom>
+          <a:solidFill>
+            <a:srgbClr val="2E6FB5"/>
+          </a:solidFill>
+          <a:ln/>
+        </p:spPr>
+      </p:sp>
+      <p:sp>
+        <p:nvSpPr>
+          <p:cNvPr id="11" name="Text 9"/>
+          <p:cNvSpPr/>
+          <p:nvPr/>
+        </p:nvSpPr>
+        <p:spPr>
+          <a:xfrm>
+            <a:off x="804672" y="2926080"/>
+            <a:ext cx="1532534" cy="566928"/>
+          </a:xfrm>
+          <a:prstGeom prst="rect">
+            <a:avLst/>
+          </a:prstGeom>
+          <a:noFill/>
+          <a:ln/>
+        </p:spPr>
+        <p:txBody>
+          <a:bodyPr wrap="square" lIns="0" tIns="0" rIns="0" bIns="0" rtlCol="0" anchor="t"/>
+          <a:lstStyle/>
+          <a:p>
+            <a:pPr indent="0" marL="0">
+              <a:lnSpc>
+                <a:spcPct val="95000"/>
+              </a:lnSpc>
+              <a:buNone/>
+            </a:pPr>
+            <a:r>
+              <a:rPr lang="en-US" sz="1000" dirty="0">
+                <a:solidFill>
+                  <a:srgbClr val="5A6472"/>
+                </a:solidFill>
+                <a:latin typeface="Calibri" pitchFamily="34" charset="0"/>
+                <a:ea typeface="Calibri" pitchFamily="34" charset="-122"/>
+                <a:cs typeface="Calibri" pitchFamily="34" charset="-120"/>
+              </a:rPr>
+              <a:t>Enters the 90-day renewal window</a:t>
+            </a:r>
+            <a:endParaRPr lang="en-US" sz="1000" dirty="0"/>
+          </a:p>
+        </p:txBody>
+      </p:sp>
+      <p:sp>
+        <p:nvSpPr>
+          <p:cNvPr id="12" name="Shape 10"/>
+          <p:cNvSpPr/>
+          <p:nvPr/>
+        </p:nvSpPr>
+        <p:spPr>
+          <a:xfrm>
+            <a:off x="640080" y="3611880"/>
+            <a:ext cx="73152" cy="73152"/>
+          </a:xfrm>
+          <a:prstGeom prst="rect">
+            <a:avLst/>
+          </a:prstGeom>
+          <a:solidFill>
+            <a:srgbClr val="2E6FB5"/>
+          </a:solidFill>
+          <a:ln/>
+        </p:spPr>
+      </p:sp>
+      <p:sp>
+        <p:nvSpPr>
+          <p:cNvPr id="13" name="Text 11"/>
+          <p:cNvSpPr/>
+          <p:nvPr/>
+        </p:nvSpPr>
+        <p:spPr>
+          <a:xfrm>
+            <a:off x="804672" y="3529584"/>
+            <a:ext cx="1532534" cy="566928"/>
+          </a:xfrm>
+          <a:prstGeom prst="rect">
+            <a:avLst/>
+          </a:prstGeom>
+          <a:noFill/>
+          <a:ln/>
+        </p:spPr>
+        <p:txBody>
+          <a:bodyPr wrap="square" lIns="0" tIns="0" rIns="0" bIns="0" rtlCol="0" anchor="t"/>
+          <a:lstStyle/>
+          <a:p>
+            <a:pPr indent="0" marL="0">
+              <a:lnSpc>
+                <a:spcPct val="95000"/>
+              </a:lnSpc>
+              <a:buNone/>
+            </a:pPr>
+            <a:r>
+              <a:rPr lang="en-US" sz="1000" dirty="0">
+                <a:solidFill>
+                  <a:srgbClr val="5A6472"/>
+                </a:solidFill>
+                <a:latin typeface="Calibri" pitchFamily="34" charset="0"/>
+                <a:ea typeface="Calibri" pitchFamily="34" charset="-122"/>
+                <a:cs typeface="Calibri" pitchFamily="34" charset="-120"/>
+              </a:rPr>
+              <a:t>Tenure, price, claims &amp; competitor rates</a:t>
+            </a:r>
+            <a:endParaRPr lang="en-US" sz="1000" dirty="0"/>
+          </a:p>
+        </p:txBody>
+      </p:sp>
+      <p:sp>
+        <p:nvSpPr>
+          <p:cNvPr id="14" name="Shape 12"/>
+          <p:cNvSpPr/>
+          <p:nvPr/>
+        </p:nvSpPr>
+        <p:spPr>
+          <a:xfrm>
+            <a:off x="2483510" y="3099816"/>
+            <a:ext cx="292608" cy="256032"/>
+          </a:xfrm>
+          <a:prstGeom prst="chevron">
+            <a:avLst/>
+          </a:prstGeom>
+          <a:solidFill>
+            <a:srgbClr val="DCE7F5"/>
+          </a:solidFill>
+          <a:ln w="12700">
+            <a:solidFill>
+              <a:srgbClr val="2E6FB5"/>
+            </a:solidFill>
+            <a:prstDash val="solid"/>
+          </a:ln>
+        </p:spPr>
+      </p:sp>
+      <p:sp>
+        <p:nvSpPr>
+          <p:cNvPr id="15" name="Shape 13"/>
+          <p:cNvSpPr/>
+          <p:nvPr/>
+        </p:nvSpPr>
+        <p:spPr>
+          <a:xfrm>
+            <a:off x="2757830" y="2084832"/>
+            <a:ext cx="2044598" cy="2286000"/>
           </a:xfrm>
           <a:prstGeom prst="roundRect">
             <a:avLst>
-              <a:gd name="adj" fmla="val 4444"/>
+              <a:gd name="adj" fmla="val 2236"/>
             </a:avLst>
           </a:prstGeom>
           <a:solidFill>
-            <a:srgbClr val="EAF1FA"/>
+            <a:srgbClr val="FFFFFF"/>
           </a:solidFill>
           <a:ln w="12700">
             <a:solidFill>
@@ -1640,14 +1431,36 @@
       </p:sp>
       <p:sp>
         <p:nvSpPr>
-          <p:cNvPr id="21" name="Text 19"/>
-          <p:cNvSpPr/>
-          <p:nvPr/>
-        </p:nvSpPr>
-        <p:spPr>
-          <a:xfrm>
-            <a:off x="7406640" y="3008376"/>
-            <a:ext cx="1920240" cy="548640"/>
+          <p:cNvPr id="16" name="Shape 14"/>
+          <p:cNvSpPr/>
+          <p:nvPr/>
+        </p:nvSpPr>
+        <p:spPr>
+          <a:xfrm>
+            <a:off x="2904134" y="2231136"/>
+            <a:ext cx="365760" cy="365760"/>
+          </a:xfrm>
+          <a:prstGeom prst="roundRect">
+            <a:avLst>
+              <a:gd name="adj" fmla="val 50000"/>
+            </a:avLst>
+          </a:prstGeom>
+          <a:solidFill>
+            <a:srgbClr val="12315B"/>
+          </a:solidFill>
+          <a:ln/>
+        </p:spPr>
+      </p:sp>
+      <p:sp>
+        <p:nvSpPr>
+          <p:cNvPr id="17" name="Text 15"/>
+          <p:cNvSpPr/>
+          <p:nvPr/>
+        </p:nvSpPr>
+        <p:spPr>
+          <a:xfrm>
+            <a:off x="2904134" y="2231136"/>
+            <a:ext cx="365760" cy="365760"/>
           </a:xfrm>
           <a:prstGeom prst="rect">
             <a:avLst/>
@@ -1663,70 +1476,183 @@
               <a:buNone/>
             </a:pPr>
             <a:r>
-              <a:rPr lang="en-US" sz="3000" b="1" dirty="0">
-                <a:solidFill>
-                  <a:srgbClr val="12315B"/>
+              <a:rPr lang="en-US" sz="1400" b="1" dirty="0">
+                <a:solidFill>
+                  <a:srgbClr val="FFFFFF"/>
                 </a:solidFill>
                 <a:latin typeface="Cambria" pitchFamily="34" charset="0"/>
                 <a:ea typeface="Cambria" pitchFamily="34" charset="-122"/>
                 <a:cs typeface="Cambria" pitchFamily="34" charset="-120"/>
               </a:rPr>
-              <a:t>3–5</a:t>
-            </a:r>
-            <a:pPr algn="ctr" indent="0" marL="0">
-              <a:buNone/>
-            </a:pPr>
-            <a:r>
-              <a:rPr lang="en-US" sz="1500" b="1" dirty="0">
-                <a:solidFill>
-                  <a:srgbClr val="2E6FB5"/>
-                </a:solidFill>
-                <a:latin typeface="Cambria" pitchFamily="34" charset="0"/>
-                <a:ea typeface="Cambria" pitchFamily="34" charset="-122"/>
-                <a:cs typeface="Cambria" pitchFamily="34" charset="-120"/>
-              </a:rPr>
-              <a:t>pts</a:t>
-            </a:r>
-            <a:endParaRPr lang="en-US" sz="3000" dirty="0"/>
-          </a:p>
-        </p:txBody>
-      </p:sp>
-      <p:sp>
-        <p:nvSpPr>
-          <p:cNvPr id="22" name="Text 20"/>
-          <p:cNvSpPr/>
-          <p:nvPr/>
-        </p:nvSpPr>
-        <p:spPr>
-          <a:xfrm>
-            <a:off x="7470648" y="3593592"/>
-            <a:ext cx="1792224" cy="457200"/>
-          </a:xfrm>
-          <a:prstGeom prst="rect">
-            <a:avLst/>
-          </a:prstGeom>
-          <a:noFill/>
-          <a:ln/>
-        </p:spPr>
-        <p:txBody>
-          <a:bodyPr wrap="square" lIns="0" tIns="0" rIns="0" bIns="0" rtlCol="0" anchor="t"/>
-          <a:lstStyle/>
-          <a:p>
-            <a:pPr algn="ctr" indent="0" marL="0">
-              <a:buNone/>
-            </a:pPr>
-            <a:r>
-              <a:rPr lang="en-US" sz="1050" dirty="0">
-                <a:solidFill>
-                  <a:srgbClr val="5A6472"/>
+              <a:t>2</a:t>
+            </a:r>
+            <a:endParaRPr lang="en-US" sz="1400" dirty="0"/>
+          </a:p>
+        </p:txBody>
+      </p:sp>
+      <p:sp>
+        <p:nvSpPr>
+          <p:cNvPr id="18" name="Text 16"/>
+          <p:cNvSpPr/>
+          <p:nvPr/>
+        </p:nvSpPr>
+        <p:spPr>
+          <a:xfrm>
+            <a:off x="3361334" y="2212848"/>
+            <a:ext cx="1313078" cy="640080"/>
+          </a:xfrm>
+          <a:prstGeom prst="rect">
+            <a:avLst/>
+          </a:prstGeom>
+          <a:noFill/>
+          <a:ln/>
+        </p:spPr>
+        <p:txBody>
+          <a:bodyPr wrap="square" lIns="0" tIns="0" rIns="0" bIns="0" rtlCol="0" anchor="ctr"/>
+          <a:lstStyle/>
+          <a:p>
+            <a:pPr indent="0" marL="0">
+              <a:lnSpc>
+                <a:spcPct val="95000"/>
+              </a:lnSpc>
+              <a:buNone/>
+            </a:pPr>
+            <a:r>
+              <a:rPr lang="en-US" sz="1250" b="1" dirty="0">
+                <a:solidFill>
+                  <a:srgbClr val="12315B"/>
                 </a:solidFill>
                 <a:latin typeface="Calibri" pitchFamily="34" charset="0"/>
                 <a:ea typeface="Calibri" pitchFamily="34" charset="-122"/>
                 <a:cs typeface="Calibri" pitchFamily="34" charset="-120"/>
               </a:rPr>
-              <a:t>Retention-rate lift on targeted segments</a:t>
-            </a:r>
-            <a:endParaRPr lang="en-US" sz="1050" dirty="0"/>
+              <a:t>Churn risk scoring</a:t>
+            </a:r>
+            <a:endParaRPr lang="en-US" sz="1250" dirty="0"/>
+          </a:p>
+        </p:txBody>
+      </p:sp>
+      <p:sp>
+        <p:nvSpPr>
+          <p:cNvPr id="19" name="Shape 17"/>
+          <p:cNvSpPr/>
+          <p:nvPr/>
+        </p:nvSpPr>
+        <p:spPr>
+          <a:xfrm>
+            <a:off x="2940710" y="3008376"/>
+            <a:ext cx="73152" cy="73152"/>
+          </a:xfrm>
+          <a:prstGeom prst="rect">
+            <a:avLst/>
+          </a:prstGeom>
+          <a:solidFill>
+            <a:srgbClr val="2E6FB5"/>
+          </a:solidFill>
+          <a:ln/>
+        </p:spPr>
+      </p:sp>
+      <p:sp>
+        <p:nvSpPr>
+          <p:cNvPr id="20" name="Text 18"/>
+          <p:cNvSpPr/>
+          <p:nvPr/>
+        </p:nvSpPr>
+        <p:spPr>
+          <a:xfrm>
+            <a:off x="3105302" y="2926080"/>
+            <a:ext cx="1532534" cy="566928"/>
+          </a:xfrm>
+          <a:prstGeom prst="rect">
+            <a:avLst/>
+          </a:prstGeom>
+          <a:noFill/>
+          <a:ln/>
+        </p:spPr>
+        <p:txBody>
+          <a:bodyPr wrap="square" lIns="0" tIns="0" rIns="0" bIns="0" rtlCol="0" anchor="t"/>
+          <a:lstStyle/>
+          <a:p>
+            <a:pPr indent="0" marL="0">
+              <a:lnSpc>
+                <a:spcPct val="95000"/>
+              </a:lnSpc>
+              <a:buNone/>
+            </a:pPr>
+            <a:r>
+              <a:rPr lang="en-US" sz="1000" dirty="0">
+                <a:solidFill>
+                  <a:srgbClr val="5A6472"/>
+                </a:solidFill>
+                <a:latin typeface="Calibri" pitchFamily="34" charset="0"/>
+                <a:ea typeface="Calibri" pitchFamily="34" charset="-122"/>
+                <a:cs typeface="Calibri" pitchFamily="34" charset="-120"/>
+              </a:rPr>
+              <a:t>Daily lapse-propensity score, 0–100</a:t>
+            </a:r>
+            <a:endParaRPr lang="en-US" sz="1000" dirty="0"/>
+          </a:p>
+        </p:txBody>
+      </p:sp>
+      <p:sp>
+        <p:nvSpPr>
+          <p:cNvPr id="21" name="Shape 19"/>
+          <p:cNvSpPr/>
+          <p:nvPr/>
+        </p:nvSpPr>
+        <p:spPr>
+          <a:xfrm>
+            <a:off x="2940710" y="3611880"/>
+            <a:ext cx="73152" cy="73152"/>
+          </a:xfrm>
+          <a:prstGeom prst="rect">
+            <a:avLst/>
+          </a:prstGeom>
+          <a:solidFill>
+            <a:srgbClr val="2E6FB5"/>
+          </a:solidFill>
+          <a:ln/>
+        </p:spPr>
+      </p:sp>
+      <p:sp>
+        <p:nvSpPr>
+          <p:cNvPr id="22" name="Text 20"/>
+          <p:cNvSpPr/>
+          <p:nvPr/>
+        </p:nvSpPr>
+        <p:spPr>
+          <a:xfrm>
+            <a:off x="3105302" y="3529584"/>
+            <a:ext cx="1532534" cy="566928"/>
+          </a:xfrm>
+          <a:prstGeom prst="rect">
+            <a:avLst/>
+          </a:prstGeom>
+          <a:noFill/>
+          <a:ln/>
+        </p:spPr>
+        <p:txBody>
+          <a:bodyPr wrap="square" lIns="0" tIns="0" rIns="0" bIns="0" rtlCol="0" anchor="t"/>
+          <a:lstStyle/>
+          <a:p>
+            <a:pPr indent="0" marL="0">
+              <a:lnSpc>
+                <a:spcPct val="95000"/>
+              </a:lnSpc>
+              <a:buNone/>
+            </a:pPr>
+            <a:r>
+              <a:rPr lang="en-US" sz="1000" dirty="0">
+                <a:solidFill>
+                  <a:srgbClr val="5A6472"/>
+                </a:solidFill>
+                <a:latin typeface="Calibri" pitchFamily="34" charset="0"/>
+                <a:ea typeface="Calibri" pitchFamily="34" charset="-122"/>
+                <a:cs typeface="Calibri" pitchFamily="34" charset="-120"/>
+              </a:rPr>
+              <a:t>Price sensitivity, life-events, engagement</a:t>
+            </a:r>
+            <a:endParaRPr lang="en-US" sz="1000" dirty="0"/>
           </a:p>
         </p:txBody>
       </p:sp>
@@ -1738,16 +1664,41 @@
         </p:nvSpPr>
         <p:spPr>
           <a:xfrm>
-            <a:off x="9601200" y="2880360"/>
-            <a:ext cx="2011680" cy="1234440"/>
+            <a:off x="4784141" y="3099816"/>
+            <a:ext cx="292608" cy="256032"/>
+          </a:xfrm>
+          <a:prstGeom prst="chevron">
+            <a:avLst/>
+          </a:prstGeom>
+          <a:solidFill>
+            <a:srgbClr val="DCE7F5"/>
+          </a:solidFill>
+          <a:ln w="12700">
+            <a:solidFill>
+              <a:srgbClr val="2E6FB5"/>
+            </a:solidFill>
+            <a:prstDash val="solid"/>
+          </a:ln>
+        </p:spPr>
+      </p:sp>
+      <p:sp>
+        <p:nvSpPr>
+          <p:cNvPr id="24" name="Shape 22"/>
+          <p:cNvSpPr/>
+          <p:nvPr/>
+        </p:nvSpPr>
+        <p:spPr>
+          <a:xfrm>
+            <a:off x="5058461" y="2084832"/>
+            <a:ext cx="2044598" cy="2286000"/>
           </a:xfrm>
           <a:prstGeom prst="roundRect">
             <a:avLst>
-              <a:gd name="adj" fmla="val 4444"/>
+              <a:gd name="adj" fmla="val 2236"/>
             </a:avLst>
           </a:prstGeom>
           <a:solidFill>
-            <a:srgbClr val="EAF1FA"/>
+            <a:srgbClr val="FFFFFF"/>
           </a:solidFill>
           <a:ln w="12700">
             <a:solidFill>
@@ -1759,14 +1710,36 @@
       </p:sp>
       <p:sp>
         <p:nvSpPr>
-          <p:cNvPr id="24" name="Text 22"/>
-          <p:cNvSpPr/>
-          <p:nvPr/>
-        </p:nvSpPr>
-        <p:spPr>
-          <a:xfrm>
-            <a:off x="9646920" y="3008376"/>
-            <a:ext cx="1920240" cy="548640"/>
+          <p:cNvPr id="25" name="Shape 23"/>
+          <p:cNvSpPr/>
+          <p:nvPr/>
+        </p:nvSpPr>
+        <p:spPr>
+          <a:xfrm>
+            <a:off x="5204765" y="2231136"/>
+            <a:ext cx="365760" cy="365760"/>
+          </a:xfrm>
+          <a:prstGeom prst="roundRect">
+            <a:avLst>
+              <a:gd name="adj" fmla="val 50000"/>
+            </a:avLst>
+          </a:prstGeom>
+          <a:solidFill>
+            <a:srgbClr val="12315B"/>
+          </a:solidFill>
+          <a:ln/>
+        </p:spPr>
+      </p:sp>
+      <p:sp>
+        <p:nvSpPr>
+          <p:cNvPr id="26" name="Text 24"/>
+          <p:cNvSpPr/>
+          <p:nvPr/>
+        </p:nvSpPr>
+        <p:spPr>
+          <a:xfrm>
+            <a:off x="5204765" y="2231136"/>
+            <a:ext cx="365760" cy="365760"/>
           </a:xfrm>
           <a:prstGeom prst="rect">
             <a:avLst/>
@@ -1782,180 +1755,230 @@
               <a:buNone/>
             </a:pPr>
             <a:r>
-              <a:rPr lang="en-US" sz="3000" b="1" dirty="0">
-                <a:solidFill>
-                  <a:srgbClr val="12315B"/>
+              <a:rPr lang="en-US" sz="1400" b="1" dirty="0">
+                <a:solidFill>
+                  <a:srgbClr val="FFFFFF"/>
                 </a:solidFill>
                 <a:latin typeface="Cambria" pitchFamily="34" charset="0"/>
                 <a:ea typeface="Cambria" pitchFamily="34" charset="-122"/>
                 <a:cs typeface="Cambria" pitchFamily="34" charset="-120"/>
               </a:rPr>
-              <a:t>8:1</a:t>
-            </a:r>
-            <a:pPr algn="ctr" indent="0" marL="0">
-              <a:buNone/>
-            </a:pPr>
-            <a:endParaRPr lang="en-US" sz="3000" dirty="0"/>
-          </a:p>
-        </p:txBody>
-      </p:sp>
-      <p:sp>
-        <p:nvSpPr>
-          <p:cNvPr id="25" name="Text 23"/>
-          <p:cNvSpPr/>
-          <p:nvPr/>
-        </p:nvSpPr>
-        <p:spPr>
-          <a:xfrm>
-            <a:off x="9710928" y="3593592"/>
-            <a:ext cx="1792224" cy="457200"/>
-          </a:xfrm>
-          <a:prstGeom prst="rect">
-            <a:avLst/>
-          </a:prstGeom>
-          <a:noFill/>
-          <a:ln/>
-        </p:spPr>
-        <p:txBody>
-          <a:bodyPr wrap="square" lIns="0" tIns="0" rIns="0" bIns="0" rtlCol="0" anchor="t"/>
-          <a:lstStyle/>
-          <a:p>
-            <a:pPr algn="ctr" indent="0" marL="0">
-              <a:buNone/>
-            </a:pPr>
-            <a:r>
-              <a:rPr lang="en-US" sz="1050" dirty="0">
-                <a:solidFill>
-                  <a:srgbClr val="5A6472"/>
+              <a:t>3</a:t>
+            </a:r>
+            <a:endParaRPr lang="en-US" sz="1400" dirty="0"/>
+          </a:p>
+        </p:txBody>
+      </p:sp>
+      <p:sp>
+        <p:nvSpPr>
+          <p:cNvPr id="27" name="Text 25"/>
+          <p:cNvSpPr/>
+          <p:nvPr/>
+        </p:nvSpPr>
+        <p:spPr>
+          <a:xfrm>
+            <a:off x="5661965" y="2212848"/>
+            <a:ext cx="1313078" cy="640080"/>
+          </a:xfrm>
+          <a:prstGeom prst="rect">
+            <a:avLst/>
+          </a:prstGeom>
+          <a:noFill/>
+          <a:ln/>
+        </p:spPr>
+        <p:txBody>
+          <a:bodyPr wrap="square" lIns="0" tIns="0" rIns="0" bIns="0" rtlCol="0" anchor="ctr"/>
+          <a:lstStyle/>
+          <a:p>
+            <a:pPr indent="0" marL="0">
+              <a:lnSpc>
+                <a:spcPct val="95000"/>
+              </a:lnSpc>
+              <a:buNone/>
+            </a:pPr>
+            <a:r>
+              <a:rPr lang="en-US" sz="1250" b="1" dirty="0">
+                <a:solidFill>
+                  <a:srgbClr val="12315B"/>
                 </a:solidFill>
                 <a:latin typeface="Calibri" pitchFamily="34" charset="0"/>
                 <a:ea typeface="Calibri" pitchFamily="34" charset="-122"/>
                 <a:cs typeface="Calibri" pitchFamily="34" charset="-120"/>
               </a:rPr>
-              <a:t>Return on retention spend vs. untargeted outreach</a:t>
-            </a:r>
-            <a:endParaRPr lang="en-US" sz="1050" dirty="0"/>
-          </a:p>
-        </p:txBody>
-      </p:sp>
-      <p:sp>
-        <p:nvSpPr>
-          <p:cNvPr id="26" name="Shape 24"/>
-          <p:cNvSpPr/>
-          <p:nvPr/>
-        </p:nvSpPr>
-        <p:spPr>
-          <a:xfrm>
-            <a:off x="7360920" y="4343400"/>
-            <a:ext cx="4251960" cy="1234440"/>
-          </a:xfrm>
-          <a:prstGeom prst="roundRect">
-            <a:avLst>
-              <a:gd name="adj" fmla="val 4444"/>
-            </a:avLst>
-          </a:prstGeom>
-          <a:solidFill>
-            <a:srgbClr val="12315B"/>
-          </a:solidFill>
-          <a:ln/>
-        </p:spPr>
-      </p:sp>
-      <p:sp>
-        <p:nvSpPr>
-          <p:cNvPr id="27" name="Text 25"/>
-          <p:cNvSpPr/>
-          <p:nvPr/>
-        </p:nvSpPr>
-        <p:spPr>
-          <a:xfrm>
-            <a:off x="7616952" y="4507992"/>
-            <a:ext cx="3794760" cy="274320"/>
-          </a:xfrm>
-          <a:prstGeom prst="rect">
-            <a:avLst/>
-          </a:prstGeom>
-          <a:noFill/>
-          <a:ln/>
-        </p:spPr>
-        <p:txBody>
-          <a:bodyPr wrap="square" lIns="0" tIns="0" rIns="0" bIns="0" rtlCol="0" anchor="ctr"/>
+              <a:t>Prioritize the movable middle</a:t>
+            </a:r>
+            <a:endParaRPr lang="en-US" sz="1250" dirty="0"/>
+          </a:p>
+        </p:txBody>
+      </p:sp>
+      <p:sp>
+        <p:nvSpPr>
+          <p:cNvPr id="28" name="Shape 26"/>
+          <p:cNvSpPr/>
+          <p:nvPr/>
+        </p:nvSpPr>
+        <p:spPr>
+          <a:xfrm>
+            <a:off x="5241341" y="3008376"/>
+            <a:ext cx="73152" cy="73152"/>
+          </a:xfrm>
+          <a:prstGeom prst="rect">
+            <a:avLst/>
+          </a:prstGeom>
+          <a:solidFill>
+            <a:srgbClr val="2E6FB5"/>
+          </a:solidFill>
+          <a:ln/>
+        </p:spPr>
+      </p:sp>
+      <p:sp>
+        <p:nvSpPr>
+          <p:cNvPr id="29" name="Text 27"/>
+          <p:cNvSpPr/>
+          <p:nvPr/>
+        </p:nvSpPr>
+        <p:spPr>
+          <a:xfrm>
+            <a:off x="5405933" y="2926080"/>
+            <a:ext cx="1532534" cy="566928"/>
+          </a:xfrm>
+          <a:prstGeom prst="rect">
+            <a:avLst/>
+          </a:prstGeom>
+          <a:noFill/>
+          <a:ln/>
+        </p:spPr>
+        <p:txBody>
+          <a:bodyPr wrap="square" lIns="0" tIns="0" rIns="0" bIns="0" rtlCol="0" anchor="t"/>
           <a:lstStyle/>
           <a:p>
             <a:pPr indent="0" marL="0">
-              <a:buNone/>
-            </a:pPr>
-            <a:r>
-              <a:rPr lang="en-US" sz="1100" b="1" spc="150" kern="0" dirty="0">
-                <a:solidFill>
-                  <a:srgbClr val="9DBDE6"/>
+              <a:lnSpc>
+                <a:spcPct val="95000"/>
+              </a:lnSpc>
+              <a:buNone/>
+            </a:pPr>
+            <a:r>
+              <a:rPr lang="en-US" sz="1000" dirty="0">
+                <a:solidFill>
+                  <a:srgbClr val="5A6472"/>
                 </a:solidFill>
                 <a:latin typeface="Calibri" pitchFamily="34" charset="0"/>
                 <a:ea typeface="Calibri" pitchFamily="34" charset="-122"/>
                 <a:cs typeface="Calibri" pitchFamily="34" charset="-120"/>
               </a:rPr>
-              <a:t>WHY IT MATTERS NOW</a:t>
-            </a:r>
-            <a:endParaRPr lang="en-US" sz="1100" dirty="0"/>
-          </a:p>
-        </p:txBody>
-      </p:sp>
-      <p:sp>
-        <p:nvSpPr>
-          <p:cNvPr id="28" name="Text 26"/>
-          <p:cNvSpPr/>
-          <p:nvPr/>
-        </p:nvSpPr>
-        <p:spPr>
-          <a:xfrm>
-            <a:off x="7616952" y="4800600"/>
-            <a:ext cx="3794760" cy="685800"/>
-          </a:xfrm>
-          <a:prstGeom prst="rect">
-            <a:avLst/>
-          </a:prstGeom>
-          <a:noFill/>
-          <a:ln/>
-        </p:spPr>
-        <p:txBody>
-          <a:bodyPr wrap="square" lIns="0" tIns="0" rIns="0" bIns="0" rtlCol="0" anchor="ctr"/>
+              <a:t>Ranked by value × movability</a:t>
+            </a:r>
+            <a:endParaRPr lang="en-US" sz="1000" dirty="0"/>
+          </a:p>
+        </p:txBody>
+      </p:sp>
+      <p:sp>
+        <p:nvSpPr>
+          <p:cNvPr id="30" name="Shape 28"/>
+          <p:cNvSpPr/>
+          <p:nvPr/>
+        </p:nvSpPr>
+        <p:spPr>
+          <a:xfrm>
+            <a:off x="5241341" y="3611880"/>
+            <a:ext cx="73152" cy="73152"/>
+          </a:xfrm>
+          <a:prstGeom prst="rect">
+            <a:avLst/>
+          </a:prstGeom>
+          <a:solidFill>
+            <a:srgbClr val="2E6FB5"/>
+          </a:solidFill>
+          <a:ln/>
+        </p:spPr>
+      </p:sp>
+      <p:sp>
+        <p:nvSpPr>
+          <p:cNvPr id="31" name="Text 29"/>
+          <p:cNvSpPr/>
+          <p:nvPr/>
+        </p:nvSpPr>
+        <p:spPr>
+          <a:xfrm>
+            <a:off x="5405933" y="3529584"/>
+            <a:ext cx="1532534" cy="566928"/>
+          </a:xfrm>
+          <a:prstGeom prst="rect">
+            <a:avLst/>
+          </a:prstGeom>
+          <a:noFill/>
+          <a:ln/>
+        </p:spPr>
+        <p:txBody>
+          <a:bodyPr wrap="square" lIns="0" tIns="0" rIns="0" bIns="0" rtlCol="0" anchor="t"/>
           <a:lstStyle/>
           <a:p>
             <a:pPr indent="0" marL="0">
               <a:lnSpc>
-                <a:spcPct val="100000"/>
+                <a:spcPct val="95000"/>
               </a:lnSpc>
               <a:buNone/>
             </a:pPr>
             <a:r>
-              <a:rPr lang="en-US" sz="1250" dirty="0">
-                <a:solidFill>
-                  <a:srgbClr val="FFFFFF"/>
+              <a:rPr lang="en-US" sz="1000" dirty="0">
+                <a:solidFill>
+                  <a:srgbClr val="5A6472"/>
                 </a:solidFill>
                 <a:latin typeface="Calibri" pitchFamily="34" charset="0"/>
                 <a:ea typeface="Calibri" pitchFamily="34" charset="-122"/>
                 <a:cs typeface="Calibri" pitchFamily="34" charset="-120"/>
               </a:rPr>
-              <a:t>Retaining one renewal point protects millions in in-force premium at a fraction of new-acquisition cost.</a:t>
-            </a:r>
-            <a:endParaRPr lang="en-US" sz="1250" dirty="0"/>
-          </a:p>
-        </p:txBody>
-      </p:sp>
-      <p:sp>
-        <p:nvSpPr>
-          <p:cNvPr id="29" name="Shape 27"/>
-          <p:cNvSpPr/>
-          <p:nvPr/>
-        </p:nvSpPr>
-        <p:spPr>
-          <a:xfrm>
-            <a:off x="548640" y="6419088"/>
-            <a:ext cx="11064240" cy="0"/>
-          </a:xfrm>
-          <a:prstGeom prst="line">
-            <a:avLst/>
-          </a:prstGeom>
-          <a:noFill/>
+              <a:t>Targets the high-premium middle</a:t>
+            </a:r>
+            <a:endParaRPr lang="en-US" sz="1000" dirty="0"/>
+          </a:p>
+        </p:txBody>
+      </p:sp>
+      <p:sp>
+        <p:nvSpPr>
+          <p:cNvPr id="32" name="Shape 30"/>
+          <p:cNvSpPr/>
+          <p:nvPr/>
+        </p:nvSpPr>
+        <p:spPr>
+          <a:xfrm>
+            <a:off x="7084771" y="3099816"/>
+            <a:ext cx="292608" cy="256032"/>
+          </a:xfrm>
+          <a:prstGeom prst="chevron">
+            <a:avLst/>
+          </a:prstGeom>
+          <a:solidFill>
+            <a:srgbClr val="DCE7F5"/>
+          </a:solidFill>
+          <a:ln w="12700">
+            <a:solidFill>
+              <a:srgbClr val="2E6FB5"/>
+            </a:solidFill>
+            <a:prstDash val="solid"/>
+          </a:ln>
+        </p:spPr>
+      </p:sp>
+      <p:sp>
+        <p:nvSpPr>
+          <p:cNvPr id="33" name="Shape 31"/>
+          <p:cNvSpPr/>
+          <p:nvPr/>
+        </p:nvSpPr>
+        <p:spPr>
+          <a:xfrm>
+            <a:off x="7359091" y="2084832"/>
+            <a:ext cx="2044598" cy="2286000"/>
+          </a:xfrm>
+          <a:prstGeom prst="roundRect">
+            <a:avLst>
+              <a:gd name="adj" fmla="val 2236"/>
+            </a:avLst>
+          </a:prstGeom>
+          <a:solidFill>
+            <a:srgbClr val="FFFFFF"/>
+          </a:solidFill>
           <a:ln w="12700">
             <a:solidFill>
               <a:srgbClr val="D3DCEA"/>
@@ -1966,14 +1989,36 @@
       </p:sp>
       <p:sp>
         <p:nvSpPr>
-          <p:cNvPr id="30" name="Text 28"/>
-          <p:cNvSpPr/>
-          <p:nvPr/>
-        </p:nvSpPr>
-        <p:spPr>
-          <a:xfrm>
-            <a:off x="548640" y="6473952"/>
-            <a:ext cx="7315200" cy="274320"/>
+          <p:cNvPr id="34" name="Shape 32"/>
+          <p:cNvSpPr/>
+          <p:nvPr/>
+        </p:nvSpPr>
+        <p:spPr>
+          <a:xfrm>
+            <a:off x="7505395" y="2231136"/>
+            <a:ext cx="365760" cy="365760"/>
+          </a:xfrm>
+          <a:prstGeom prst="roundRect">
+            <a:avLst>
+              <a:gd name="adj" fmla="val 50000"/>
+            </a:avLst>
+          </a:prstGeom>
+          <a:solidFill>
+            <a:srgbClr val="12315B"/>
+          </a:solidFill>
+          <a:ln/>
+        </p:spPr>
+      </p:sp>
+      <p:sp>
+        <p:nvSpPr>
+          <p:cNvPr id="35" name="Text 33"/>
+          <p:cNvSpPr/>
+          <p:nvPr/>
+        </p:nvSpPr>
+        <p:spPr>
+          <a:xfrm>
+            <a:off x="7505395" y="2231136"/>
+            <a:ext cx="365760" cy="365760"/>
           </a:xfrm>
           <a:prstGeom prst="rect">
             <a:avLst/>
@@ -1985,50 +2030,115 @@
           <a:bodyPr wrap="square" lIns="0" tIns="0" rIns="0" bIns="0" rtlCol="0" anchor="ctr"/>
           <a:lstStyle/>
           <a:p>
+            <a:pPr algn="ctr" indent="0" marL="0">
+              <a:buNone/>
+            </a:pPr>
+            <a:r>
+              <a:rPr lang="en-US" sz="1400" b="1" dirty="0">
+                <a:solidFill>
+                  <a:srgbClr val="FFFFFF"/>
+                </a:solidFill>
+                <a:latin typeface="Cambria" pitchFamily="34" charset="0"/>
+                <a:ea typeface="Cambria" pitchFamily="34" charset="-122"/>
+                <a:cs typeface="Cambria" pitchFamily="34" charset="-120"/>
+              </a:rPr>
+              <a:t>4</a:t>
+            </a:r>
+            <a:endParaRPr lang="en-US" sz="1400" dirty="0"/>
+          </a:p>
+        </p:txBody>
+      </p:sp>
+      <p:sp>
+        <p:nvSpPr>
+          <p:cNvPr id="36" name="Text 34"/>
+          <p:cNvSpPr/>
+          <p:nvPr/>
+        </p:nvSpPr>
+        <p:spPr>
+          <a:xfrm>
+            <a:off x="7962595" y="2212848"/>
+            <a:ext cx="1313078" cy="640080"/>
+          </a:xfrm>
+          <a:prstGeom prst="rect">
+            <a:avLst/>
+          </a:prstGeom>
+          <a:noFill/>
+          <a:ln/>
+        </p:spPr>
+        <p:txBody>
+          <a:bodyPr wrap="square" lIns="0" tIns="0" rIns="0" bIns="0" rtlCol="0" anchor="ctr"/>
+          <a:lstStyle/>
+          <a:p>
             <a:pPr indent="0" marL="0">
-              <a:buNone/>
-            </a:pPr>
-            <a:r>
-              <a:rPr lang="en-US" sz="900" dirty="0">
-                <a:solidFill>
-                  <a:srgbClr val="5A6472"/>
+              <a:lnSpc>
+                <a:spcPct val="95000"/>
+              </a:lnSpc>
+              <a:buNone/>
+            </a:pPr>
+            <a:r>
+              <a:rPr lang="en-US" sz="1250" b="1" dirty="0">
+                <a:solidFill>
+                  <a:srgbClr val="12315B"/>
                 </a:solidFill>
                 <a:latin typeface="Calibri" pitchFamily="34" charset="0"/>
                 <a:ea typeface="Calibri" pitchFamily="34" charset="-122"/>
                 <a:cs typeface="Calibri" pitchFamily="34" charset="-120"/>
               </a:rPr>
-              <a:t>Liberty Mutual  |  AI Signal Portfolio</a:t>
-            </a:r>
-            <a:endParaRPr lang="en-US" sz="900" dirty="0"/>
-          </a:p>
-        </p:txBody>
-      </p:sp>
-      <p:sp>
-        <p:nvSpPr>
-          <p:cNvPr id="31" name="Text 29"/>
-          <p:cNvSpPr/>
-          <p:nvPr/>
-        </p:nvSpPr>
-        <p:spPr>
-          <a:xfrm>
-            <a:off x="9784080" y="6473952"/>
-            <a:ext cx="1280160" cy="274320"/>
-          </a:xfrm>
-          <a:prstGeom prst="rect">
-            <a:avLst/>
-          </a:prstGeom>
-          <a:noFill/>
-          <a:ln/>
-        </p:spPr>
-        <p:txBody>
-          <a:bodyPr wrap="square" lIns="0" tIns="0" rIns="0" bIns="0" rtlCol="0" anchor="ctr"/>
-          <a:lstStyle/>
-          <a:p>
-            <a:pPr algn="r" indent="0" marL="0">
-              <a:buNone/>
-            </a:pPr>
-            <a:r>
-              <a:rPr lang="en-US" sz="900" dirty="0">
+              <a:t>Retention action orchestration</a:t>
+            </a:r>
+            <a:endParaRPr lang="en-US" sz="1250" dirty="0"/>
+          </a:p>
+        </p:txBody>
+      </p:sp>
+      <p:sp>
+        <p:nvSpPr>
+          <p:cNvPr id="37" name="Shape 35"/>
+          <p:cNvSpPr/>
+          <p:nvPr/>
+        </p:nvSpPr>
+        <p:spPr>
+          <a:xfrm>
+            <a:off x="7541971" y="3008376"/>
+            <a:ext cx="73152" cy="73152"/>
+          </a:xfrm>
+          <a:prstGeom prst="rect">
+            <a:avLst/>
+          </a:prstGeom>
+          <a:solidFill>
+            <a:srgbClr val="2E6FB5"/>
+          </a:solidFill>
+          <a:ln/>
+        </p:spPr>
+      </p:sp>
+      <p:sp>
+        <p:nvSpPr>
+          <p:cNvPr id="38" name="Text 36"/>
+          <p:cNvSpPr/>
+          <p:nvPr/>
+        </p:nvSpPr>
+        <p:spPr>
+          <a:xfrm>
+            <a:off x="7706563" y="2926080"/>
+            <a:ext cx="1532534" cy="566928"/>
+          </a:xfrm>
+          <a:prstGeom prst="rect">
+            <a:avLst/>
+          </a:prstGeom>
+          <a:noFill/>
+          <a:ln/>
+        </p:spPr>
+        <p:txBody>
+          <a:bodyPr wrap="square" lIns="0" tIns="0" rIns="0" bIns="0" rtlCol="0" anchor="t"/>
+          <a:lstStyle/>
+          <a:p>
+            <a:pPr indent="0" marL="0">
+              <a:lnSpc>
+                <a:spcPct val="95000"/>
+              </a:lnSpc>
+              <a:buNone/>
+            </a:pPr>
+            <a:r>
+              <a:rPr lang="en-US" sz="1000" dirty="0">
                 <a:solidFill>
                   <a:srgbClr val="5A6472"/>
                 </a:solidFill>
@@ -2036,6 +2146,1021 @@
                 <a:ea typeface="Calibri" pitchFamily="34" charset="-122"/>
                 <a:cs typeface="Calibri" pitchFamily="34" charset="-120"/>
               </a:rPr>
+              <a:t>Best next action: price, bundle or call</a:t>
+            </a:r>
+            <a:endParaRPr lang="en-US" sz="1000" dirty="0"/>
+          </a:p>
+        </p:txBody>
+      </p:sp>
+      <p:sp>
+        <p:nvSpPr>
+          <p:cNvPr id="39" name="Shape 37"/>
+          <p:cNvSpPr/>
+          <p:nvPr/>
+        </p:nvSpPr>
+        <p:spPr>
+          <a:xfrm>
+            <a:off x="7541971" y="3611880"/>
+            <a:ext cx="73152" cy="73152"/>
+          </a:xfrm>
+          <a:prstGeom prst="rect">
+            <a:avLst/>
+          </a:prstGeom>
+          <a:solidFill>
+            <a:srgbClr val="2E6FB5"/>
+          </a:solidFill>
+          <a:ln/>
+        </p:spPr>
+      </p:sp>
+      <p:sp>
+        <p:nvSpPr>
+          <p:cNvPr id="40" name="Text 38"/>
+          <p:cNvSpPr/>
+          <p:nvPr/>
+        </p:nvSpPr>
+        <p:spPr>
+          <a:xfrm>
+            <a:off x="7706563" y="3529584"/>
+            <a:ext cx="1532534" cy="566928"/>
+          </a:xfrm>
+          <a:prstGeom prst="rect">
+            <a:avLst/>
+          </a:prstGeom>
+          <a:noFill/>
+          <a:ln/>
+        </p:spPr>
+        <p:txBody>
+          <a:bodyPr wrap="square" lIns="0" tIns="0" rIns="0" bIns="0" rtlCol="0" anchor="t"/>
+          <a:lstStyle/>
+          <a:p>
+            <a:pPr indent="0" marL="0">
+              <a:lnSpc>
+                <a:spcPct val="95000"/>
+              </a:lnSpc>
+              <a:buNone/>
+            </a:pPr>
+            <a:r>
+              <a:rPr lang="en-US" sz="1000" dirty="0">
+                <a:solidFill>
+                  <a:srgbClr val="5A6472"/>
+                </a:solidFill>
+                <a:latin typeface="Calibri" pitchFamily="34" charset="0"/>
+                <a:ea typeface="Calibri" pitchFamily="34" charset="-122"/>
+                <a:cs typeface="Calibri" pitchFamily="34" charset="-120"/>
+              </a:rPr>
+              <a:t>Executed via CRM &amp; channel systems</a:t>
+            </a:r>
+            <a:endParaRPr lang="en-US" sz="1000" dirty="0"/>
+          </a:p>
+        </p:txBody>
+      </p:sp>
+      <p:sp>
+        <p:nvSpPr>
+          <p:cNvPr id="41" name="Shape 39"/>
+          <p:cNvSpPr/>
+          <p:nvPr/>
+        </p:nvSpPr>
+        <p:spPr>
+          <a:xfrm>
+            <a:off x="9385402" y="3099816"/>
+            <a:ext cx="292608" cy="256032"/>
+          </a:xfrm>
+          <a:prstGeom prst="chevron">
+            <a:avLst/>
+          </a:prstGeom>
+          <a:solidFill>
+            <a:srgbClr val="DCE7F5"/>
+          </a:solidFill>
+          <a:ln w="12700">
+            <a:solidFill>
+              <a:srgbClr val="2E6FB5"/>
+            </a:solidFill>
+            <a:prstDash val="solid"/>
+          </a:ln>
+        </p:spPr>
+      </p:sp>
+      <p:sp>
+        <p:nvSpPr>
+          <p:cNvPr id="42" name="Shape 40"/>
+          <p:cNvSpPr/>
+          <p:nvPr/>
+        </p:nvSpPr>
+        <p:spPr>
+          <a:xfrm>
+            <a:off x="9659722" y="2084832"/>
+            <a:ext cx="2044598" cy="2286000"/>
+          </a:xfrm>
+          <a:prstGeom prst="roundRect">
+            <a:avLst>
+              <a:gd name="adj" fmla="val 2236"/>
+            </a:avLst>
+          </a:prstGeom>
+          <a:solidFill>
+            <a:srgbClr val="FFFFFF"/>
+          </a:solidFill>
+          <a:ln w="12700">
+            <a:solidFill>
+              <a:srgbClr val="D3DCEA"/>
+            </a:solidFill>
+            <a:prstDash val="solid"/>
+          </a:ln>
+        </p:spPr>
+      </p:sp>
+      <p:sp>
+        <p:nvSpPr>
+          <p:cNvPr id="43" name="Shape 41"/>
+          <p:cNvSpPr/>
+          <p:nvPr/>
+        </p:nvSpPr>
+        <p:spPr>
+          <a:xfrm>
+            <a:off x="9806026" y="2231136"/>
+            <a:ext cx="365760" cy="365760"/>
+          </a:xfrm>
+          <a:prstGeom prst="roundRect">
+            <a:avLst>
+              <a:gd name="adj" fmla="val 50000"/>
+            </a:avLst>
+          </a:prstGeom>
+          <a:solidFill>
+            <a:srgbClr val="12315B"/>
+          </a:solidFill>
+          <a:ln/>
+        </p:spPr>
+      </p:sp>
+      <p:sp>
+        <p:nvSpPr>
+          <p:cNvPr id="44" name="Text 42"/>
+          <p:cNvSpPr/>
+          <p:nvPr/>
+        </p:nvSpPr>
+        <p:spPr>
+          <a:xfrm>
+            <a:off x="9806026" y="2231136"/>
+            <a:ext cx="365760" cy="365760"/>
+          </a:xfrm>
+          <a:prstGeom prst="rect">
+            <a:avLst/>
+          </a:prstGeom>
+          <a:noFill/>
+          <a:ln/>
+        </p:spPr>
+        <p:txBody>
+          <a:bodyPr wrap="square" lIns="0" tIns="0" rIns="0" bIns="0" rtlCol="0" anchor="ctr"/>
+          <a:lstStyle/>
+          <a:p>
+            <a:pPr algn="ctr" indent="0" marL="0">
+              <a:buNone/>
+            </a:pPr>
+            <a:r>
+              <a:rPr lang="en-US" sz="1400" b="1" dirty="0">
+                <a:solidFill>
+                  <a:srgbClr val="FFFFFF"/>
+                </a:solidFill>
+                <a:latin typeface="Cambria" pitchFamily="34" charset="0"/>
+                <a:ea typeface="Cambria" pitchFamily="34" charset="-122"/>
+                <a:cs typeface="Cambria" pitchFamily="34" charset="-120"/>
+              </a:rPr>
+              <a:t>5</a:t>
+            </a:r>
+            <a:endParaRPr lang="en-US" sz="1400" dirty="0"/>
+          </a:p>
+        </p:txBody>
+      </p:sp>
+      <p:sp>
+        <p:nvSpPr>
+          <p:cNvPr id="45" name="Text 43"/>
+          <p:cNvSpPr/>
+          <p:nvPr/>
+        </p:nvSpPr>
+        <p:spPr>
+          <a:xfrm>
+            <a:off x="10263226" y="2212848"/>
+            <a:ext cx="1313078" cy="640080"/>
+          </a:xfrm>
+          <a:prstGeom prst="rect">
+            <a:avLst/>
+          </a:prstGeom>
+          <a:noFill/>
+          <a:ln/>
+        </p:spPr>
+        <p:txBody>
+          <a:bodyPr wrap="square" lIns="0" tIns="0" rIns="0" bIns="0" rtlCol="0" anchor="ctr"/>
+          <a:lstStyle/>
+          <a:p>
+            <a:pPr indent="0" marL="0">
+              <a:lnSpc>
+                <a:spcPct val="95000"/>
+              </a:lnSpc>
+              <a:buNone/>
+            </a:pPr>
+            <a:r>
+              <a:rPr lang="en-US" sz="1250" b="1" dirty="0">
+                <a:solidFill>
+                  <a:srgbClr val="12315B"/>
+                </a:solidFill>
+                <a:latin typeface="Calibri" pitchFamily="34" charset="0"/>
+                <a:ea typeface="Calibri" pitchFamily="34" charset="-122"/>
+                <a:cs typeface="Calibri" pitchFamily="34" charset="-120"/>
+              </a:rPr>
+              <a:t>Measure &amp; learn</a:t>
+            </a:r>
+            <a:endParaRPr lang="en-US" sz="1250" dirty="0"/>
+          </a:p>
+        </p:txBody>
+      </p:sp>
+      <p:sp>
+        <p:nvSpPr>
+          <p:cNvPr id="46" name="Shape 44"/>
+          <p:cNvSpPr/>
+          <p:nvPr/>
+        </p:nvSpPr>
+        <p:spPr>
+          <a:xfrm>
+            <a:off x="9842602" y="3008376"/>
+            <a:ext cx="73152" cy="73152"/>
+          </a:xfrm>
+          <a:prstGeom prst="rect">
+            <a:avLst/>
+          </a:prstGeom>
+          <a:solidFill>
+            <a:srgbClr val="2E6FB5"/>
+          </a:solidFill>
+          <a:ln/>
+        </p:spPr>
+      </p:sp>
+      <p:sp>
+        <p:nvSpPr>
+          <p:cNvPr id="47" name="Text 45"/>
+          <p:cNvSpPr/>
+          <p:nvPr/>
+        </p:nvSpPr>
+        <p:spPr>
+          <a:xfrm>
+            <a:off x="10007194" y="2926080"/>
+            <a:ext cx="1532534" cy="566928"/>
+          </a:xfrm>
+          <a:prstGeom prst="rect">
+            <a:avLst/>
+          </a:prstGeom>
+          <a:noFill/>
+          <a:ln/>
+        </p:spPr>
+        <p:txBody>
+          <a:bodyPr wrap="square" lIns="0" tIns="0" rIns="0" bIns="0" rtlCol="0" anchor="t"/>
+          <a:lstStyle/>
+          <a:p>
+            <a:pPr indent="0" marL="0">
+              <a:lnSpc>
+                <a:spcPct val="95000"/>
+              </a:lnSpc>
+              <a:buNone/>
+            </a:pPr>
+            <a:r>
+              <a:rPr lang="en-US" sz="1000" dirty="0">
+                <a:solidFill>
+                  <a:srgbClr val="5A6472"/>
+                </a:solidFill>
+                <a:latin typeface="Calibri" pitchFamily="34" charset="0"/>
+                <a:ea typeface="Calibri" pitchFamily="34" charset="-122"/>
+                <a:cs typeface="Calibri" pitchFamily="34" charset="-120"/>
+              </a:rPr>
+              <a:t>Lift measured vs. a holdout</a:t>
+            </a:r>
+            <a:endParaRPr lang="en-US" sz="1000" dirty="0"/>
+          </a:p>
+        </p:txBody>
+      </p:sp>
+      <p:sp>
+        <p:nvSpPr>
+          <p:cNvPr id="48" name="Shape 46"/>
+          <p:cNvSpPr/>
+          <p:nvPr/>
+        </p:nvSpPr>
+        <p:spPr>
+          <a:xfrm>
+            <a:off x="9842602" y="3611880"/>
+            <a:ext cx="73152" cy="73152"/>
+          </a:xfrm>
+          <a:prstGeom prst="rect">
+            <a:avLst/>
+          </a:prstGeom>
+          <a:solidFill>
+            <a:srgbClr val="2E6FB5"/>
+          </a:solidFill>
+          <a:ln/>
+        </p:spPr>
+      </p:sp>
+      <p:sp>
+        <p:nvSpPr>
+          <p:cNvPr id="49" name="Text 47"/>
+          <p:cNvSpPr/>
+          <p:nvPr/>
+        </p:nvSpPr>
+        <p:spPr>
+          <a:xfrm>
+            <a:off x="10007194" y="3529584"/>
+            <a:ext cx="1532534" cy="566928"/>
+          </a:xfrm>
+          <a:prstGeom prst="rect">
+            <a:avLst/>
+          </a:prstGeom>
+          <a:noFill/>
+          <a:ln/>
+        </p:spPr>
+        <p:txBody>
+          <a:bodyPr wrap="square" lIns="0" tIns="0" rIns="0" bIns="0" rtlCol="0" anchor="t"/>
+          <a:lstStyle/>
+          <a:p>
+            <a:pPr indent="0" marL="0">
+              <a:lnSpc>
+                <a:spcPct val="95000"/>
+              </a:lnSpc>
+              <a:buNone/>
+            </a:pPr>
+            <a:r>
+              <a:rPr lang="en-US" sz="1000" dirty="0">
+                <a:solidFill>
+                  <a:srgbClr val="5A6472"/>
+                </a:solidFill>
+                <a:latin typeface="Calibri" pitchFamily="34" charset="0"/>
+                <a:ea typeface="Calibri" pitchFamily="34" charset="-122"/>
+                <a:cs typeface="Calibri" pitchFamily="34" charset="-120"/>
+              </a:rPr>
+              <a:t>Outcomes retrain the model weekly</a:t>
+            </a:r>
+            <a:endParaRPr lang="en-US" sz="1000" dirty="0"/>
+          </a:p>
+        </p:txBody>
+      </p:sp>
+      <p:sp>
+        <p:nvSpPr>
+          <p:cNvPr id="50" name="Text 48"/>
+          <p:cNvSpPr/>
+          <p:nvPr/>
+        </p:nvSpPr>
+        <p:spPr>
+          <a:xfrm>
+            <a:off x="457200" y="4498848"/>
+            <a:ext cx="11247120" cy="292608"/>
+          </a:xfrm>
+          <a:prstGeom prst="rect">
+            <a:avLst/>
+          </a:prstGeom>
+          <a:noFill/>
+          <a:ln/>
+        </p:spPr>
+        <p:txBody>
+          <a:bodyPr wrap="square" lIns="0" tIns="0" rIns="0" bIns="0" rtlCol="0" anchor="ctr"/>
+          <a:lstStyle/>
+          <a:p>
+            <a:pPr indent="0" marL="0">
+              <a:buNone/>
+            </a:pPr>
+            <a:r>
+              <a:rPr lang="en-US" sz="1050" b="1" dirty="0">
+                <a:solidFill>
+                  <a:srgbClr val="12315B"/>
+                </a:solidFill>
+                <a:latin typeface="Calibri" pitchFamily="34" charset="0"/>
+                <a:ea typeface="Calibri" pitchFamily="34" charset="-122"/>
+                <a:cs typeface="Calibri" pitchFamily="34" charset="-120"/>
+              </a:rPr>
+              <a:t>ENABLING DATA &amp; SYSTEMS   </a:t>
+            </a:r>
+            <a:pPr indent="0" marL="0">
+              <a:buNone/>
+            </a:pPr>
+            <a:r>
+              <a:rPr lang="en-US" sz="1050" dirty="0">
+                <a:solidFill>
+                  <a:srgbClr val="5A6472"/>
+                </a:solidFill>
+                <a:latin typeface="Calibri" pitchFamily="34" charset="0"/>
+                <a:ea typeface="Calibri" pitchFamily="34" charset="-122"/>
+                <a:cs typeface="Calibri" pitchFamily="34" charset="-120"/>
+              </a:rPr>
+              <a:t>Policy admin · Claims history · CRM &amp; agency · Pricing engine · Competitor rate feed · Marketing automation</a:t>
+            </a:r>
+            <a:endParaRPr lang="en-US" sz="1050" dirty="0"/>
+          </a:p>
+        </p:txBody>
+      </p:sp>
+      <p:sp>
+        <p:nvSpPr>
+          <p:cNvPr id="51" name="Shape 49"/>
+          <p:cNvSpPr/>
+          <p:nvPr/>
+        </p:nvSpPr>
+        <p:spPr>
+          <a:xfrm>
+            <a:off x="457200" y="4864608"/>
+            <a:ext cx="11247120" cy="0"/>
+          </a:xfrm>
+          <a:prstGeom prst="line">
+            <a:avLst/>
+          </a:prstGeom>
+          <a:noFill/>
+          <a:ln w="12700">
+            <a:solidFill>
+              <a:srgbClr val="D3DCEA"/>
+            </a:solidFill>
+            <a:prstDash val="solid"/>
+          </a:ln>
+        </p:spPr>
+      </p:sp>
+      <p:sp>
+        <p:nvSpPr>
+          <p:cNvPr id="52" name="Text 50"/>
+          <p:cNvSpPr/>
+          <p:nvPr/>
+        </p:nvSpPr>
+        <p:spPr>
+          <a:xfrm>
+            <a:off x="457200" y="4974336"/>
+            <a:ext cx="5486400" cy="256032"/>
+          </a:xfrm>
+          <a:prstGeom prst="rect">
+            <a:avLst/>
+          </a:prstGeom>
+          <a:noFill/>
+          <a:ln/>
+        </p:spPr>
+        <p:txBody>
+          <a:bodyPr wrap="square" lIns="0" tIns="0" rIns="0" bIns="0" rtlCol="0" anchor="ctr"/>
+          <a:lstStyle/>
+          <a:p>
+            <a:pPr indent="0" marL="0">
+              <a:buNone/>
+            </a:pPr>
+            <a:r>
+              <a:rPr lang="en-US" sz="1100" b="1" spc="200" kern="0" dirty="0">
+                <a:solidFill>
+                  <a:srgbClr val="12315B"/>
+                </a:solidFill>
+                <a:latin typeface="Calibri" pitchFamily="34" charset="0"/>
+                <a:ea typeface="Calibri" pitchFamily="34" charset="-122"/>
+                <a:cs typeface="Calibri" pitchFamily="34" charset="-120"/>
+              </a:rPr>
+              <a:t>PROOF OF VALUE</a:t>
+            </a:r>
+            <a:endParaRPr lang="en-US" sz="1100" dirty="0"/>
+          </a:p>
+        </p:txBody>
+      </p:sp>
+      <p:sp>
+        <p:nvSpPr>
+          <p:cNvPr id="53" name="Shape 51"/>
+          <p:cNvSpPr/>
+          <p:nvPr/>
+        </p:nvSpPr>
+        <p:spPr>
+          <a:xfrm>
+            <a:off x="457200" y="5285232"/>
+            <a:ext cx="2103120" cy="1188720"/>
+          </a:xfrm>
+          <a:prstGeom prst="roundRect">
+            <a:avLst>
+              <a:gd name="adj" fmla="val 4615"/>
+            </a:avLst>
+          </a:prstGeom>
+          <a:solidFill>
+            <a:srgbClr val="EAF1FA"/>
+          </a:solidFill>
+          <a:ln w="12700">
+            <a:solidFill>
+              <a:srgbClr val="D3DCEA"/>
+            </a:solidFill>
+            <a:prstDash val="solid"/>
+          </a:ln>
+        </p:spPr>
+      </p:sp>
+      <p:sp>
+        <p:nvSpPr>
+          <p:cNvPr id="54" name="Text 52"/>
+          <p:cNvSpPr/>
+          <p:nvPr/>
+        </p:nvSpPr>
+        <p:spPr>
+          <a:xfrm>
+            <a:off x="502920" y="5404104"/>
+            <a:ext cx="2011680" cy="457200"/>
+          </a:xfrm>
+          <a:prstGeom prst="rect">
+            <a:avLst/>
+          </a:prstGeom>
+          <a:noFill/>
+          <a:ln/>
+        </p:spPr>
+        <p:txBody>
+          <a:bodyPr wrap="square" lIns="0" tIns="0" rIns="0" bIns="0" rtlCol="0" anchor="ctr"/>
+          <a:lstStyle/>
+          <a:p>
+            <a:pPr algn="ctr" indent="0" marL="0">
+              <a:buNone/>
+            </a:pPr>
+            <a:r>
+              <a:rPr lang="en-US" sz="2600" b="1" dirty="0">
+                <a:solidFill>
+                  <a:srgbClr val="12315B"/>
+                </a:solidFill>
+                <a:latin typeface="Cambria" pitchFamily="34" charset="0"/>
+                <a:ea typeface="Cambria" pitchFamily="34" charset="-122"/>
+                <a:cs typeface="Cambria" pitchFamily="34" charset="-120"/>
+              </a:rPr>
+              <a:t>3–5</a:t>
+            </a:r>
+            <a:pPr algn="ctr" indent="0" marL="0">
+              <a:buNone/>
+            </a:pPr>
+            <a:r>
+              <a:rPr lang="en-US" sz="1300" b="1" dirty="0">
+                <a:solidFill>
+                  <a:srgbClr val="2E6FB5"/>
+                </a:solidFill>
+                <a:latin typeface="Cambria" pitchFamily="34" charset="0"/>
+                <a:ea typeface="Cambria" pitchFamily="34" charset="-122"/>
+                <a:cs typeface="Cambria" pitchFamily="34" charset="-120"/>
+              </a:rPr>
+              <a:t>pts</a:t>
+            </a:r>
+            <a:endParaRPr lang="en-US" sz="2600" dirty="0"/>
+          </a:p>
+        </p:txBody>
+      </p:sp>
+      <p:sp>
+        <p:nvSpPr>
+          <p:cNvPr id="55" name="Text 53"/>
+          <p:cNvSpPr/>
+          <p:nvPr/>
+        </p:nvSpPr>
+        <p:spPr>
+          <a:xfrm>
+            <a:off x="548640" y="5907024"/>
+            <a:ext cx="1920240" cy="502920"/>
+          </a:xfrm>
+          <a:prstGeom prst="rect">
+            <a:avLst/>
+          </a:prstGeom>
+          <a:noFill/>
+          <a:ln/>
+        </p:spPr>
+        <p:txBody>
+          <a:bodyPr wrap="square" lIns="0" tIns="0" rIns="0" bIns="0" rtlCol="0" anchor="t"/>
+          <a:lstStyle/>
+          <a:p>
+            <a:pPr algn="ctr" indent="0" marL="0">
+              <a:lnSpc>
+                <a:spcPct val="95000"/>
+              </a:lnSpc>
+              <a:buNone/>
+            </a:pPr>
+            <a:r>
+              <a:rPr lang="en-US" sz="950" dirty="0">
+                <a:solidFill>
+                  <a:srgbClr val="5A6472"/>
+                </a:solidFill>
+                <a:latin typeface="Calibri" pitchFamily="34" charset="0"/>
+                <a:ea typeface="Calibri" pitchFamily="34" charset="-122"/>
+                <a:cs typeface="Calibri" pitchFamily="34" charset="-120"/>
+              </a:rPr>
+              <a:t>Retention-rate lift on targeted segments</a:t>
+            </a:r>
+            <a:endParaRPr lang="en-US" sz="950" dirty="0"/>
+          </a:p>
+        </p:txBody>
+      </p:sp>
+      <p:sp>
+        <p:nvSpPr>
+          <p:cNvPr id="56" name="Shape 54"/>
+          <p:cNvSpPr/>
+          <p:nvPr/>
+        </p:nvSpPr>
+        <p:spPr>
+          <a:xfrm>
+            <a:off x="2743200" y="5285232"/>
+            <a:ext cx="2103120" cy="1188720"/>
+          </a:xfrm>
+          <a:prstGeom prst="roundRect">
+            <a:avLst>
+              <a:gd name="adj" fmla="val 4615"/>
+            </a:avLst>
+          </a:prstGeom>
+          <a:solidFill>
+            <a:srgbClr val="EAF1FA"/>
+          </a:solidFill>
+          <a:ln w="12700">
+            <a:solidFill>
+              <a:srgbClr val="D3DCEA"/>
+            </a:solidFill>
+            <a:prstDash val="solid"/>
+          </a:ln>
+        </p:spPr>
+      </p:sp>
+      <p:sp>
+        <p:nvSpPr>
+          <p:cNvPr id="57" name="Text 55"/>
+          <p:cNvSpPr/>
+          <p:nvPr/>
+        </p:nvSpPr>
+        <p:spPr>
+          <a:xfrm>
+            <a:off x="2788920" y="5404104"/>
+            <a:ext cx="2011680" cy="457200"/>
+          </a:xfrm>
+          <a:prstGeom prst="rect">
+            <a:avLst/>
+          </a:prstGeom>
+          <a:noFill/>
+          <a:ln/>
+        </p:spPr>
+        <p:txBody>
+          <a:bodyPr wrap="square" lIns="0" tIns="0" rIns="0" bIns="0" rtlCol="0" anchor="ctr"/>
+          <a:lstStyle/>
+          <a:p>
+            <a:pPr algn="ctr" indent="0" marL="0">
+              <a:buNone/>
+            </a:pPr>
+            <a:r>
+              <a:rPr lang="en-US" sz="2600" b="1" dirty="0">
+                <a:solidFill>
+                  <a:srgbClr val="12315B"/>
+                </a:solidFill>
+                <a:latin typeface="Cambria" pitchFamily="34" charset="0"/>
+                <a:ea typeface="Cambria" pitchFamily="34" charset="-122"/>
+                <a:cs typeface="Cambria" pitchFamily="34" charset="-120"/>
+              </a:rPr>
+              <a:t>8:1</a:t>
+            </a:r>
+            <a:pPr algn="ctr" indent="0" marL="0">
+              <a:buNone/>
+            </a:pPr>
+            <a:endParaRPr lang="en-US" sz="2600" dirty="0"/>
+          </a:p>
+        </p:txBody>
+      </p:sp>
+      <p:sp>
+        <p:nvSpPr>
+          <p:cNvPr id="58" name="Text 56"/>
+          <p:cNvSpPr/>
+          <p:nvPr/>
+        </p:nvSpPr>
+        <p:spPr>
+          <a:xfrm>
+            <a:off x="2834640" y="5907024"/>
+            <a:ext cx="1920240" cy="502920"/>
+          </a:xfrm>
+          <a:prstGeom prst="rect">
+            <a:avLst/>
+          </a:prstGeom>
+          <a:noFill/>
+          <a:ln/>
+        </p:spPr>
+        <p:txBody>
+          <a:bodyPr wrap="square" lIns="0" tIns="0" rIns="0" bIns="0" rtlCol="0" anchor="t"/>
+          <a:lstStyle/>
+          <a:p>
+            <a:pPr algn="ctr" indent="0" marL="0">
+              <a:lnSpc>
+                <a:spcPct val="95000"/>
+              </a:lnSpc>
+              <a:buNone/>
+            </a:pPr>
+            <a:r>
+              <a:rPr lang="en-US" sz="950" dirty="0">
+                <a:solidFill>
+                  <a:srgbClr val="5A6472"/>
+                </a:solidFill>
+                <a:latin typeface="Calibri" pitchFamily="34" charset="0"/>
+                <a:ea typeface="Calibri" pitchFamily="34" charset="-122"/>
+                <a:cs typeface="Calibri" pitchFamily="34" charset="-120"/>
+              </a:rPr>
+              <a:t>ROI vs. untargeted outreach</a:t>
+            </a:r>
+            <a:endParaRPr lang="en-US" sz="950" dirty="0"/>
+          </a:p>
+        </p:txBody>
+      </p:sp>
+      <p:sp>
+        <p:nvSpPr>
+          <p:cNvPr id="59" name="Shape 57"/>
+          <p:cNvSpPr/>
+          <p:nvPr/>
+        </p:nvSpPr>
+        <p:spPr>
+          <a:xfrm>
+            <a:off x="5029200" y="5285232"/>
+            <a:ext cx="2103120" cy="1188720"/>
+          </a:xfrm>
+          <a:prstGeom prst="roundRect">
+            <a:avLst>
+              <a:gd name="adj" fmla="val 4615"/>
+            </a:avLst>
+          </a:prstGeom>
+          <a:solidFill>
+            <a:srgbClr val="EAF1FA"/>
+          </a:solidFill>
+          <a:ln w="12700">
+            <a:solidFill>
+              <a:srgbClr val="D3DCEA"/>
+            </a:solidFill>
+            <a:prstDash val="solid"/>
+          </a:ln>
+        </p:spPr>
+      </p:sp>
+      <p:sp>
+        <p:nvSpPr>
+          <p:cNvPr id="60" name="Text 58"/>
+          <p:cNvSpPr/>
+          <p:nvPr/>
+        </p:nvSpPr>
+        <p:spPr>
+          <a:xfrm>
+            <a:off x="5074920" y="5404104"/>
+            <a:ext cx="2011680" cy="457200"/>
+          </a:xfrm>
+          <a:prstGeom prst="rect">
+            <a:avLst/>
+          </a:prstGeom>
+          <a:noFill/>
+          <a:ln/>
+        </p:spPr>
+        <p:txBody>
+          <a:bodyPr wrap="square" lIns="0" tIns="0" rIns="0" bIns="0" rtlCol="0" anchor="ctr"/>
+          <a:lstStyle/>
+          <a:p>
+            <a:pPr algn="ctr" indent="0" marL="0">
+              <a:buNone/>
+            </a:pPr>
+            <a:r>
+              <a:rPr lang="en-US" sz="2600" b="1" dirty="0">
+                <a:solidFill>
+                  <a:srgbClr val="12315B"/>
+                </a:solidFill>
+                <a:latin typeface="Cambria" pitchFamily="34" charset="0"/>
+                <a:ea typeface="Cambria" pitchFamily="34" charset="-122"/>
+                <a:cs typeface="Cambria" pitchFamily="34" charset="-120"/>
+              </a:rPr>
+              <a:t>60–90</a:t>
+            </a:r>
+            <a:pPr algn="ctr" indent="0" marL="0">
+              <a:buNone/>
+            </a:pPr>
+            <a:r>
+              <a:rPr lang="en-US" sz="1300" b="1" dirty="0">
+                <a:solidFill>
+                  <a:srgbClr val="2E6FB5"/>
+                </a:solidFill>
+                <a:latin typeface="Cambria" pitchFamily="34" charset="0"/>
+                <a:ea typeface="Cambria" pitchFamily="34" charset="-122"/>
+                <a:cs typeface="Cambria" pitchFamily="34" charset="-120"/>
+              </a:rPr>
+              <a:t>d</a:t>
+            </a:r>
+            <a:endParaRPr lang="en-US" sz="2600" dirty="0"/>
+          </a:p>
+        </p:txBody>
+      </p:sp>
+      <p:sp>
+        <p:nvSpPr>
+          <p:cNvPr id="61" name="Text 59"/>
+          <p:cNvSpPr/>
+          <p:nvPr/>
+        </p:nvSpPr>
+        <p:spPr>
+          <a:xfrm>
+            <a:off x="5120640" y="5907024"/>
+            <a:ext cx="1920240" cy="502920"/>
+          </a:xfrm>
+          <a:prstGeom prst="rect">
+            <a:avLst/>
+          </a:prstGeom>
+          <a:noFill/>
+          <a:ln/>
+        </p:spPr>
+        <p:txBody>
+          <a:bodyPr wrap="square" lIns="0" tIns="0" rIns="0" bIns="0" rtlCol="0" anchor="t"/>
+          <a:lstStyle/>
+          <a:p>
+            <a:pPr algn="ctr" indent="0" marL="0">
+              <a:lnSpc>
+                <a:spcPct val="95000"/>
+              </a:lnSpc>
+              <a:buNone/>
+            </a:pPr>
+            <a:r>
+              <a:rPr lang="en-US" sz="950" dirty="0">
+                <a:solidFill>
+                  <a:srgbClr val="5A6472"/>
+                </a:solidFill>
+                <a:latin typeface="Calibri" pitchFamily="34" charset="0"/>
+                <a:ea typeface="Calibri" pitchFamily="34" charset="-122"/>
+                <a:cs typeface="Calibri" pitchFamily="34" charset="-120"/>
+              </a:rPr>
+              <a:t>Lead time before renewal date</a:t>
+            </a:r>
+            <a:endParaRPr lang="en-US" sz="950" dirty="0"/>
+          </a:p>
+        </p:txBody>
+      </p:sp>
+      <p:sp>
+        <p:nvSpPr>
+          <p:cNvPr id="62" name="Shape 60"/>
+          <p:cNvSpPr/>
+          <p:nvPr/>
+        </p:nvSpPr>
+        <p:spPr>
+          <a:xfrm>
+            <a:off x="7406640" y="4974336"/>
+            <a:ext cx="4297680" cy="1298448"/>
+          </a:xfrm>
+          <a:prstGeom prst="roundRect">
+            <a:avLst>
+              <a:gd name="adj" fmla="val 4225"/>
+            </a:avLst>
+          </a:prstGeom>
+          <a:solidFill>
+            <a:srgbClr val="12315B"/>
+          </a:solidFill>
+          <a:ln/>
+        </p:spPr>
+      </p:sp>
+      <p:sp>
+        <p:nvSpPr>
+          <p:cNvPr id="63" name="Text 61"/>
+          <p:cNvSpPr/>
+          <p:nvPr/>
+        </p:nvSpPr>
+        <p:spPr>
+          <a:xfrm>
+            <a:off x="7662672" y="5120640"/>
+            <a:ext cx="3840480" cy="274320"/>
+          </a:xfrm>
+          <a:prstGeom prst="rect">
+            <a:avLst/>
+          </a:prstGeom>
+          <a:noFill/>
+          <a:ln/>
+        </p:spPr>
+        <p:txBody>
+          <a:bodyPr wrap="square" lIns="0" tIns="0" rIns="0" bIns="0" rtlCol="0" anchor="ctr"/>
+          <a:lstStyle/>
+          <a:p>
+            <a:pPr indent="0" marL="0">
+              <a:buNone/>
+            </a:pPr>
+            <a:r>
+              <a:rPr lang="en-US" sz="1100" b="1" spc="150" kern="0" dirty="0">
+                <a:solidFill>
+                  <a:srgbClr val="9DBDE6"/>
+                </a:solidFill>
+                <a:latin typeface="Calibri" pitchFamily="34" charset="0"/>
+                <a:ea typeface="Calibri" pitchFamily="34" charset="-122"/>
+                <a:cs typeface="Calibri" pitchFamily="34" charset="-120"/>
+              </a:rPr>
+              <a:t>CONTINUOUS FEEDBACK LOOP</a:t>
+            </a:r>
+            <a:endParaRPr lang="en-US" sz="1100" dirty="0"/>
+          </a:p>
+        </p:txBody>
+      </p:sp>
+      <p:sp>
+        <p:nvSpPr>
+          <p:cNvPr id="64" name="Text 62"/>
+          <p:cNvSpPr/>
+          <p:nvPr/>
+        </p:nvSpPr>
+        <p:spPr>
+          <a:xfrm>
+            <a:off x="7662672" y="5431536"/>
+            <a:ext cx="3840480" cy="777240"/>
+          </a:xfrm>
+          <a:prstGeom prst="rect">
+            <a:avLst/>
+          </a:prstGeom>
+          <a:noFill/>
+          <a:ln/>
+        </p:spPr>
+        <p:txBody>
+          <a:bodyPr wrap="square" lIns="0" tIns="0" rIns="0" bIns="0" rtlCol="0" anchor="ctr"/>
+          <a:lstStyle/>
+          <a:p>
+            <a:pPr indent="0" marL="0">
+              <a:lnSpc>
+                <a:spcPct val="100000"/>
+              </a:lnSpc>
+              <a:buNone/>
+            </a:pPr>
+            <a:r>
+              <a:rPr lang="en-US" sz="1200" dirty="0">
+                <a:solidFill>
+                  <a:srgbClr val="FFFFFF"/>
+                </a:solidFill>
+                <a:latin typeface="Calibri" pitchFamily="34" charset="0"/>
+                <a:ea typeface="Calibri" pitchFamily="34" charset="-122"/>
+                <a:cs typeface="Calibri" pitchFamily="34" charset="-120"/>
+              </a:rPr>
+              <a:t>Every renew / lapse result flows back into training, so targeting and offer economics sharpen with each renewal cycle.</a:t>
+            </a:r>
+            <a:endParaRPr lang="en-US" sz="1200" dirty="0"/>
+          </a:p>
+        </p:txBody>
+      </p:sp>
+      <p:sp>
+        <p:nvSpPr>
+          <p:cNvPr id="65" name="Shape 63"/>
+          <p:cNvSpPr/>
+          <p:nvPr/>
+        </p:nvSpPr>
+        <p:spPr>
+          <a:xfrm>
+            <a:off x="457200" y="6419088"/>
+            <a:ext cx="11247120" cy="0"/>
+          </a:xfrm>
+          <a:prstGeom prst="line">
+            <a:avLst/>
+          </a:prstGeom>
+          <a:noFill/>
+          <a:ln w="12700">
+            <a:solidFill>
+              <a:srgbClr val="D3DCEA"/>
+            </a:solidFill>
+            <a:prstDash val="solid"/>
+          </a:ln>
+        </p:spPr>
+      </p:sp>
+      <p:sp>
+        <p:nvSpPr>
+          <p:cNvPr id="66" name="Text 64"/>
+          <p:cNvSpPr/>
+          <p:nvPr/>
+        </p:nvSpPr>
+        <p:spPr>
+          <a:xfrm>
+            <a:off x="457200" y="6473952"/>
+            <a:ext cx="7315200" cy="274320"/>
+          </a:xfrm>
+          <a:prstGeom prst="rect">
+            <a:avLst/>
+          </a:prstGeom>
+          <a:noFill/>
+          <a:ln/>
+        </p:spPr>
+        <p:txBody>
+          <a:bodyPr wrap="square" lIns="0" tIns="0" rIns="0" bIns="0" rtlCol="0" anchor="ctr"/>
+          <a:lstStyle/>
+          <a:p>
+            <a:pPr indent="0" marL="0">
+              <a:buNone/>
+            </a:pPr>
+            <a:r>
+              <a:rPr lang="en-US" sz="900" dirty="0">
+                <a:solidFill>
+                  <a:srgbClr val="5A6472"/>
+                </a:solidFill>
+                <a:latin typeface="Calibri" pitchFamily="34" charset="0"/>
+                <a:ea typeface="Calibri" pitchFamily="34" charset="-122"/>
+                <a:cs typeface="Calibri" pitchFamily="34" charset="-120"/>
+              </a:rPr>
+              <a:t>Liberty Mutual  |  AI Signal Portfolio</a:t>
+            </a:r>
+            <a:endParaRPr lang="en-US" sz="900" dirty="0"/>
+          </a:p>
+        </p:txBody>
+      </p:sp>
+      <p:sp>
+        <p:nvSpPr>
+          <p:cNvPr id="67" name="Text 65"/>
+          <p:cNvSpPr/>
+          <p:nvPr/>
+        </p:nvSpPr>
+        <p:spPr>
+          <a:xfrm>
+            <a:off x="9875520" y="6473952"/>
+            <a:ext cx="1280160" cy="274320"/>
+          </a:xfrm>
+          <a:prstGeom prst="rect">
+            <a:avLst/>
+          </a:prstGeom>
+          <a:noFill/>
+          <a:ln/>
+        </p:spPr>
+        <p:txBody>
+          <a:bodyPr wrap="square" lIns="0" tIns="0" rIns="0" bIns="0" rtlCol="0" anchor="ctr"/>
+          <a:lstStyle/>
+          <a:p>
+            <a:pPr algn="r" indent="0" marL="0">
+              <a:buNone/>
+            </a:pPr>
+            <a:r>
+              <a:rPr lang="en-US" sz="900" dirty="0">
+                <a:solidFill>
+                  <a:srgbClr val="5A6472"/>
+                </a:solidFill>
+                <a:latin typeface="Calibri" pitchFamily="34" charset="0"/>
+                <a:ea typeface="Calibri" pitchFamily="34" charset="-122"/>
+                <a:cs typeface="Calibri" pitchFamily="34" charset="-120"/>
+              </a:rPr>
               <a:t>CONFIDENTIAL</a:t>
             </a:r>
             <a:endParaRPr lang="en-US" sz="900" dirty="0"/>
@@ -2044,13 +3169,13 @@
       </p:sp>
       <p:sp>
         <p:nvSpPr>
-          <p:cNvPr id="32" name="Text 30"/>
-          <p:cNvSpPr/>
-          <p:nvPr/>
-        </p:nvSpPr>
-        <p:spPr>
-          <a:xfrm>
-            <a:off x="11155680" y="6473952"/>
+          <p:cNvPr id="68" name="Text 66"/>
+          <p:cNvSpPr/>
+          <p:nvPr/>
+        </p:nvSpPr>
+        <p:spPr>
+          <a:xfrm>
+            <a:off x="11247120" y="6473952"/>
             <a:ext cx="457200" cy="274320"/>
           </a:xfrm>
           <a:prstGeom prst="rect">
@@ -2121,7 +3246,7 @@
         </p:nvSpPr>
         <p:spPr>
           <a:xfrm>
-            <a:off x="548640" y="457200"/>
+            <a:off x="457200" y="384048"/>
             <a:ext cx="7315200" cy="274320"/>
           </a:xfrm>
           <a:prstGeom prst="rect">
@@ -2134,7 +3259,7 @@
           <a:bodyPr wrap="square" lIns="0" tIns="0" rIns="0" bIns="0" rtlCol="0" anchor="ctr"/>
           <a:lstStyle/>
           <a:p>
-            <a:pPr algn="l" indent="0" marL="0">
+            <a:pPr indent="0" marL="0">
               <a:buNone/>
             </a:pPr>
             <a:r>
@@ -2160,8 +3285,8 @@
         </p:nvSpPr>
         <p:spPr>
           <a:xfrm>
-            <a:off x="548640" y="749808"/>
-            <a:ext cx="10607040" cy="868680"/>
+            <a:off x="457200" y="658368"/>
+            <a:ext cx="11247120" cy="566928"/>
           </a:xfrm>
           <a:prstGeom prst="rect">
             <a:avLst/>
@@ -2173,14 +3298,14 @@
           <a:bodyPr wrap="square" lIns="0" tIns="0" rIns="0" bIns="0" rtlCol="0" anchor="ctr"/>
           <a:lstStyle/>
           <a:p>
-            <a:pPr algn="l" indent="0" marL="0">
+            <a:pPr indent="0" marL="0">
               <a:lnSpc>
                 <a:spcPct val="95000"/>
               </a:lnSpc>
               <a:buNone/>
             </a:pPr>
             <a:r>
-              <a:rPr lang="en-US" sz="3200" b="1" dirty="0">
+              <a:rPr lang="en-US" sz="2700" b="1" dirty="0">
                 <a:solidFill>
                   <a:srgbClr val="1A2333"/>
                 </a:solidFill>
@@ -2190,7 +3315,7 @@
               </a:rPr>
               <a:t>Underwriting of the Future: augmenting the underwriter, not replacing judgment</a:t>
             </a:r>
-            <a:endParaRPr lang="en-US" sz="3200" dirty="0"/>
+            <a:endParaRPr lang="en-US" sz="2700" dirty="0"/>
           </a:p>
         </p:txBody>
       </p:sp>
@@ -2202,8 +3327,8 @@
         </p:nvSpPr>
         <p:spPr>
           <a:xfrm>
-            <a:off x="548640" y="1627632"/>
-            <a:ext cx="10881360" cy="502920"/>
+            <a:off x="457200" y="1280160"/>
+            <a:ext cx="11247120" cy="365760"/>
           </a:xfrm>
           <a:prstGeom prst="rect">
             <a:avLst/>
@@ -2215,11 +3340,11 @@
           <a:bodyPr wrap="square" lIns="0" tIns="0" rIns="0" bIns="0" rtlCol="0" anchor="ctr"/>
           <a:lstStyle/>
           <a:p>
-            <a:pPr algn="l" indent="0" marL="0">
-              <a:buNone/>
-            </a:pPr>
-            <a:r>
-              <a:rPr lang="en-US" sz="1450" i="1" dirty="0">
+            <a:pPr indent="0" marL="0">
+              <a:buNone/>
+            </a:pPr>
+            <a:r>
+              <a:rPr lang="en-US" sz="1350" i="1" dirty="0">
                 <a:solidFill>
                   <a:srgbClr val="2E6FB5"/>
                 </a:solidFill>
@@ -2227,9 +3352,9 @@
                 <a:ea typeface="Calibri" pitchFamily="34" charset="-122"/>
                 <a:cs typeface="Calibri" pitchFamily="34" charset="-120"/>
               </a:rPr>
-              <a:t>AI reads submissions, enriches risk, and pre-fills the decision — underwriters spend their time on the risks that need a human.</a:t>
-            </a:r>
-            <a:endParaRPr lang="en-US" sz="1450" dirty="0"/>
+              <a:t>AI structures the submission, enriches the risk and pre-fills the decision — underwriters spend their time on the accounts that need a human.</a:t>
+            </a:r>
+            <a:endParaRPr lang="en-US" sz="1350" dirty="0"/>
           </a:p>
         </p:txBody>
       </p:sp>
@@ -2241,8 +3366,8 @@
         </p:nvSpPr>
         <p:spPr>
           <a:xfrm>
-            <a:off x="548640" y="2423160"/>
-            <a:ext cx="6309360" cy="274320"/>
+            <a:off x="457200" y="1755648"/>
+            <a:ext cx="5486400" cy="256032"/>
           </a:xfrm>
           <a:prstGeom prst="rect">
             <a:avLst/>
@@ -2258,7 +3383,7 @@
               <a:buNone/>
             </a:pPr>
             <a:r>
-              <a:rPr lang="en-US" sz="1200" b="1" spc="200" kern="0" dirty="0">
+              <a:rPr lang="en-US" sz="1100" b="1" spc="200" kern="0" dirty="0">
                 <a:solidFill>
                   <a:srgbClr val="12315B"/>
                 </a:solidFill>
@@ -2266,9 +3391,9 @@
                 <a:ea typeface="Calibri" pitchFamily="34" charset="-122"/>
                 <a:cs typeface="Calibri" pitchFamily="34" charset="-120"/>
               </a:rPr>
-              <a:t>HOW THE SIGNAL WORKS</a:t>
-            </a:r>
-            <a:endParaRPr lang="en-US" sz="1200" dirty="0"/>
+              <a:t>END-TO-END JOURNEY</a:t>
+            </a:r>
+            <a:endParaRPr lang="en-US" sz="1100" dirty="0"/>
           </a:p>
         </p:txBody>
       </p:sp>
@@ -2280,439 +3405,17 @@
         </p:nvSpPr>
         <p:spPr>
           <a:xfrm>
-            <a:off x="548640" y="2880360"/>
-            <a:ext cx="384048" cy="384048"/>
+            <a:off x="457200" y="2084832"/>
+            <a:ext cx="2044598" cy="2286000"/>
           </a:xfrm>
           <a:prstGeom prst="roundRect">
             <a:avLst>
-              <a:gd name="adj" fmla="val 50000"/>
+              <a:gd name="adj" fmla="val 2236"/>
             </a:avLst>
           </a:prstGeom>
           <a:solidFill>
-            <a:srgbClr val="12315B"/>
-          </a:solidFill>
-          <a:ln/>
-        </p:spPr>
-      </p:sp>
-      <p:sp>
-        <p:nvSpPr>
-          <p:cNvPr id="7" name="Text 5"/>
-          <p:cNvSpPr/>
-          <p:nvPr/>
-        </p:nvSpPr>
-        <p:spPr>
-          <a:xfrm>
-            <a:off x="548640" y="2880360"/>
-            <a:ext cx="384048" cy="384048"/>
-          </a:xfrm>
-          <a:prstGeom prst="rect">
-            <a:avLst/>
-          </a:prstGeom>
-          <a:noFill/>
-          <a:ln/>
-        </p:spPr>
-        <p:txBody>
-          <a:bodyPr wrap="square" lIns="0" tIns="0" rIns="0" bIns="0" rtlCol="0" anchor="ctr"/>
-          <a:lstStyle/>
-          <a:p>
-            <a:pPr algn="ctr" indent="0" marL="0">
-              <a:buNone/>
-            </a:pPr>
-            <a:r>
-              <a:rPr lang="en-US" sz="1500" b="1" dirty="0">
-                <a:solidFill>
-                  <a:srgbClr val="FFFFFF"/>
-                </a:solidFill>
-                <a:latin typeface="Cambria" pitchFamily="34" charset="0"/>
-                <a:ea typeface="Cambria" pitchFamily="34" charset="-122"/>
-                <a:cs typeface="Cambria" pitchFamily="34" charset="-120"/>
-              </a:rPr>
-              <a:t>1</a:t>
-            </a:r>
-            <a:endParaRPr lang="en-US" sz="1500" dirty="0"/>
-          </a:p>
-        </p:txBody>
-      </p:sp>
-      <p:sp>
-        <p:nvSpPr>
-          <p:cNvPr id="8" name="Text 6"/>
-          <p:cNvSpPr/>
-          <p:nvPr/>
-        </p:nvSpPr>
-        <p:spPr>
-          <a:xfrm>
-            <a:off x="1097280" y="2852928"/>
-            <a:ext cx="5760720" cy="274320"/>
-          </a:xfrm>
-          <a:prstGeom prst="rect">
-            <a:avLst/>
-          </a:prstGeom>
-          <a:noFill/>
-          <a:ln/>
-        </p:spPr>
-        <p:txBody>
-          <a:bodyPr wrap="square" lIns="0" tIns="0" rIns="0" bIns="0" rtlCol="0" anchor="ctr"/>
-          <a:lstStyle/>
-          <a:p>
-            <a:pPr indent="0" marL="0">
-              <a:buNone/>
-            </a:pPr>
-            <a:r>
-              <a:rPr lang="en-US" sz="1350" b="1" dirty="0">
-                <a:solidFill>
-                  <a:srgbClr val="1A2333"/>
-                </a:solidFill>
-                <a:latin typeface="Calibri" pitchFamily="34" charset="0"/>
-                <a:ea typeface="Calibri" pitchFamily="34" charset="-122"/>
-                <a:cs typeface="Calibri" pitchFamily="34" charset="-120"/>
-              </a:rPr>
-              <a:t>Ingest and structure the submission</a:t>
-            </a:r>
-            <a:endParaRPr lang="en-US" sz="1350" dirty="0"/>
-          </a:p>
-        </p:txBody>
-      </p:sp>
-      <p:sp>
-        <p:nvSpPr>
-          <p:cNvPr id="9" name="Text 7"/>
-          <p:cNvSpPr/>
-          <p:nvPr/>
-        </p:nvSpPr>
-        <p:spPr>
-          <a:xfrm>
-            <a:off x="1097280" y="3127248"/>
-            <a:ext cx="5760720" cy="502920"/>
-          </a:xfrm>
-          <a:prstGeom prst="rect">
-            <a:avLst/>
-          </a:prstGeom>
-          <a:noFill/>
-          <a:ln/>
-        </p:spPr>
-        <p:txBody>
-          <a:bodyPr wrap="square" lIns="0" tIns="0" rIns="0" bIns="0" rtlCol="0" anchor="ctr"/>
-          <a:lstStyle/>
-          <a:p>
-            <a:pPr indent="0" marL="0">
-              <a:lnSpc>
-                <a:spcPct val="98000"/>
-              </a:lnSpc>
-              <a:buNone/>
-            </a:pPr>
-            <a:r>
-              <a:rPr lang="en-US" sz="1150" dirty="0">
-                <a:solidFill>
-                  <a:srgbClr val="5A6472"/>
-                </a:solidFill>
-                <a:latin typeface="Calibri" pitchFamily="34" charset="0"/>
-                <a:ea typeface="Calibri" pitchFamily="34" charset="-122"/>
-                <a:cs typeface="Calibri" pitchFamily="34" charset="-120"/>
-              </a:rPr>
-              <a:t>Documents, loss runs and third-party data are parsed automatically, removing hours of manual intake and re-keying per account.</a:t>
-            </a:r>
-            <a:endParaRPr lang="en-US" sz="1150" dirty="0"/>
-          </a:p>
-        </p:txBody>
-      </p:sp>
-      <p:sp>
-        <p:nvSpPr>
-          <p:cNvPr id="10" name="Shape 8"/>
-          <p:cNvSpPr/>
-          <p:nvPr/>
-        </p:nvSpPr>
-        <p:spPr>
-          <a:xfrm>
-            <a:off x="548640" y="3813048"/>
-            <a:ext cx="384048" cy="384048"/>
-          </a:xfrm>
-          <a:prstGeom prst="roundRect">
-            <a:avLst>
-              <a:gd name="adj" fmla="val 50000"/>
-            </a:avLst>
-          </a:prstGeom>
-          <a:solidFill>
-            <a:srgbClr val="12315B"/>
-          </a:solidFill>
-          <a:ln/>
-        </p:spPr>
-      </p:sp>
-      <p:sp>
-        <p:nvSpPr>
-          <p:cNvPr id="11" name="Text 9"/>
-          <p:cNvSpPr/>
-          <p:nvPr/>
-        </p:nvSpPr>
-        <p:spPr>
-          <a:xfrm>
-            <a:off x="548640" y="3813048"/>
-            <a:ext cx="384048" cy="384048"/>
-          </a:xfrm>
-          <a:prstGeom prst="rect">
-            <a:avLst/>
-          </a:prstGeom>
-          <a:noFill/>
-          <a:ln/>
-        </p:spPr>
-        <p:txBody>
-          <a:bodyPr wrap="square" lIns="0" tIns="0" rIns="0" bIns="0" rtlCol="0" anchor="ctr"/>
-          <a:lstStyle/>
-          <a:p>
-            <a:pPr algn="ctr" indent="0" marL="0">
-              <a:buNone/>
-            </a:pPr>
-            <a:r>
-              <a:rPr lang="en-US" sz="1500" b="1" dirty="0">
-                <a:solidFill>
-                  <a:srgbClr val="FFFFFF"/>
-                </a:solidFill>
-                <a:latin typeface="Cambria" pitchFamily="34" charset="0"/>
-                <a:ea typeface="Cambria" pitchFamily="34" charset="-122"/>
-                <a:cs typeface="Cambria" pitchFamily="34" charset="-120"/>
-              </a:rPr>
-              <a:t>2</a:t>
-            </a:r>
-            <a:endParaRPr lang="en-US" sz="1500" dirty="0"/>
-          </a:p>
-        </p:txBody>
-      </p:sp>
-      <p:sp>
-        <p:nvSpPr>
-          <p:cNvPr id="12" name="Text 10"/>
-          <p:cNvSpPr/>
-          <p:nvPr/>
-        </p:nvSpPr>
-        <p:spPr>
-          <a:xfrm>
-            <a:off x="1097280" y="3785616"/>
-            <a:ext cx="5760720" cy="274320"/>
-          </a:xfrm>
-          <a:prstGeom prst="rect">
-            <a:avLst/>
-          </a:prstGeom>
-          <a:noFill/>
-          <a:ln/>
-        </p:spPr>
-        <p:txBody>
-          <a:bodyPr wrap="square" lIns="0" tIns="0" rIns="0" bIns="0" rtlCol="0" anchor="ctr"/>
-          <a:lstStyle/>
-          <a:p>
-            <a:pPr indent="0" marL="0">
-              <a:buNone/>
-            </a:pPr>
-            <a:r>
-              <a:rPr lang="en-US" sz="1350" b="1" dirty="0">
-                <a:solidFill>
-                  <a:srgbClr val="1A2333"/>
-                </a:solidFill>
-                <a:latin typeface="Calibri" pitchFamily="34" charset="0"/>
-                <a:ea typeface="Calibri" pitchFamily="34" charset="-122"/>
-                <a:cs typeface="Calibri" pitchFamily="34" charset="-120"/>
-              </a:rPr>
-              <a:t>Enrich and price the risk</a:t>
-            </a:r>
-            <a:endParaRPr lang="en-US" sz="1350" dirty="0"/>
-          </a:p>
-        </p:txBody>
-      </p:sp>
-      <p:sp>
-        <p:nvSpPr>
-          <p:cNvPr id="13" name="Text 11"/>
-          <p:cNvSpPr/>
-          <p:nvPr/>
-        </p:nvSpPr>
-        <p:spPr>
-          <a:xfrm>
-            <a:off x="1097280" y="4059936"/>
-            <a:ext cx="5760720" cy="502920"/>
-          </a:xfrm>
-          <a:prstGeom prst="rect">
-            <a:avLst/>
-          </a:prstGeom>
-          <a:noFill/>
-          <a:ln/>
-        </p:spPr>
-        <p:txBody>
-          <a:bodyPr wrap="square" lIns="0" tIns="0" rIns="0" bIns="0" rtlCol="0" anchor="ctr"/>
-          <a:lstStyle/>
-          <a:p>
-            <a:pPr indent="0" marL="0">
-              <a:lnSpc>
-                <a:spcPct val="98000"/>
-              </a:lnSpc>
-              <a:buNone/>
-            </a:pPr>
-            <a:r>
-              <a:rPr lang="en-US" sz="1150" dirty="0">
-                <a:solidFill>
-                  <a:srgbClr val="5A6472"/>
-                </a:solidFill>
-                <a:latin typeface="Calibri" pitchFamily="34" charset="0"/>
-                <a:ea typeface="Calibri" pitchFamily="34" charset="-122"/>
-                <a:cs typeface="Calibri" pitchFamily="34" charset="-120"/>
-              </a:rPr>
-              <a:t>External signals — property, firmographic, catastrophe and exposure data — feed a model that recommends appetite fit and price.</a:t>
-            </a:r>
-            <a:endParaRPr lang="en-US" sz="1150" dirty="0"/>
-          </a:p>
-        </p:txBody>
-      </p:sp>
-      <p:sp>
-        <p:nvSpPr>
-          <p:cNvPr id="14" name="Shape 12"/>
-          <p:cNvSpPr/>
-          <p:nvPr/>
-        </p:nvSpPr>
-        <p:spPr>
-          <a:xfrm>
-            <a:off x="548640" y="4745736"/>
-            <a:ext cx="384048" cy="384048"/>
-          </a:xfrm>
-          <a:prstGeom prst="roundRect">
-            <a:avLst>
-              <a:gd name="adj" fmla="val 50000"/>
-            </a:avLst>
-          </a:prstGeom>
-          <a:solidFill>
-            <a:srgbClr val="12315B"/>
-          </a:solidFill>
-          <a:ln/>
-        </p:spPr>
-      </p:sp>
-      <p:sp>
-        <p:nvSpPr>
-          <p:cNvPr id="15" name="Text 13"/>
-          <p:cNvSpPr/>
-          <p:nvPr/>
-        </p:nvSpPr>
-        <p:spPr>
-          <a:xfrm>
-            <a:off x="548640" y="4745736"/>
-            <a:ext cx="384048" cy="384048"/>
-          </a:xfrm>
-          <a:prstGeom prst="rect">
-            <a:avLst/>
-          </a:prstGeom>
-          <a:noFill/>
-          <a:ln/>
-        </p:spPr>
-        <p:txBody>
-          <a:bodyPr wrap="square" lIns="0" tIns="0" rIns="0" bIns="0" rtlCol="0" anchor="ctr"/>
-          <a:lstStyle/>
-          <a:p>
-            <a:pPr algn="ctr" indent="0" marL="0">
-              <a:buNone/>
-            </a:pPr>
-            <a:r>
-              <a:rPr lang="en-US" sz="1500" b="1" dirty="0">
-                <a:solidFill>
-                  <a:srgbClr val="FFFFFF"/>
-                </a:solidFill>
-                <a:latin typeface="Cambria" pitchFamily="34" charset="0"/>
-                <a:ea typeface="Cambria" pitchFamily="34" charset="-122"/>
-                <a:cs typeface="Cambria" pitchFamily="34" charset="-120"/>
-              </a:rPr>
-              <a:t>3</a:t>
-            </a:r>
-            <a:endParaRPr lang="en-US" sz="1500" dirty="0"/>
-          </a:p>
-        </p:txBody>
-      </p:sp>
-      <p:sp>
-        <p:nvSpPr>
-          <p:cNvPr id="16" name="Text 14"/>
-          <p:cNvSpPr/>
-          <p:nvPr/>
-        </p:nvSpPr>
-        <p:spPr>
-          <a:xfrm>
-            <a:off x="1097280" y="4718304"/>
-            <a:ext cx="5760720" cy="274320"/>
-          </a:xfrm>
-          <a:prstGeom prst="rect">
-            <a:avLst/>
-          </a:prstGeom>
-          <a:noFill/>
-          <a:ln/>
-        </p:spPr>
-        <p:txBody>
-          <a:bodyPr wrap="square" lIns="0" tIns="0" rIns="0" bIns="0" rtlCol="0" anchor="ctr"/>
-          <a:lstStyle/>
-          <a:p>
-            <a:pPr indent="0" marL="0">
-              <a:buNone/>
-            </a:pPr>
-            <a:r>
-              <a:rPr lang="en-US" sz="1350" b="1" dirty="0">
-                <a:solidFill>
-                  <a:srgbClr val="1A2333"/>
-                </a:solidFill>
-                <a:latin typeface="Calibri" pitchFamily="34" charset="0"/>
-                <a:ea typeface="Calibri" pitchFamily="34" charset="-122"/>
-                <a:cs typeface="Calibri" pitchFamily="34" charset="-120"/>
-              </a:rPr>
-              <a:t>Surface a decision-ready package</a:t>
-            </a:r>
-            <a:endParaRPr lang="en-US" sz="1350" dirty="0"/>
-          </a:p>
-        </p:txBody>
-      </p:sp>
-      <p:sp>
-        <p:nvSpPr>
-          <p:cNvPr id="17" name="Text 15"/>
-          <p:cNvSpPr/>
-          <p:nvPr/>
-        </p:nvSpPr>
-        <p:spPr>
-          <a:xfrm>
-            <a:off x="1097280" y="4992624"/>
-            <a:ext cx="5760720" cy="502920"/>
-          </a:xfrm>
-          <a:prstGeom prst="rect">
-            <a:avLst/>
-          </a:prstGeom>
-          <a:noFill/>
-          <a:ln/>
-        </p:spPr>
-        <p:txBody>
-          <a:bodyPr wrap="square" lIns="0" tIns="0" rIns="0" bIns="0" rtlCol="0" anchor="ctr"/>
-          <a:lstStyle/>
-          <a:p>
-            <a:pPr indent="0" marL="0">
-              <a:lnSpc>
-                <a:spcPct val="98000"/>
-              </a:lnSpc>
-              <a:buNone/>
-            </a:pPr>
-            <a:r>
-              <a:rPr lang="en-US" sz="1150" dirty="0">
-                <a:solidFill>
-                  <a:srgbClr val="5A6472"/>
-                </a:solidFill>
-                <a:latin typeface="Calibri" pitchFamily="34" charset="0"/>
-                <a:ea typeface="Calibri" pitchFamily="34" charset="-122"/>
-                <a:cs typeface="Calibri" pitchFamily="34" charset="-120"/>
-              </a:rPr>
-              <a:t>Underwriter receives a triaged file with rationale and flags, focusing expert judgment on the complex, high-stakes accounts.</a:t>
-            </a:r>
-            <a:endParaRPr lang="en-US" sz="1150" dirty="0"/>
-          </a:p>
-        </p:txBody>
-      </p:sp>
-      <p:sp>
-        <p:nvSpPr>
-          <p:cNvPr id="18" name="Shape 16"/>
-          <p:cNvSpPr/>
-          <p:nvPr/>
-        </p:nvSpPr>
-        <p:spPr>
-          <a:xfrm>
-            <a:off x="7086600" y="2423160"/>
-            <a:ext cx="0" cy="3566160"/>
-          </a:xfrm>
-          <a:prstGeom prst="line">
-            <a:avLst/>
-          </a:prstGeom>
-          <a:noFill/>
+            <a:srgbClr val="FFFFFF"/>
+          </a:solidFill>
           <a:ln w="12700">
             <a:solidFill>
               <a:srgbClr val="D3DCEA"/>
@@ -2723,14 +3426,36 @@
       </p:sp>
       <p:sp>
         <p:nvSpPr>
-          <p:cNvPr id="19" name="Text 17"/>
-          <p:cNvSpPr/>
-          <p:nvPr/>
-        </p:nvSpPr>
-        <p:spPr>
-          <a:xfrm>
-            <a:off x="7360920" y="2423160"/>
-            <a:ext cx="4251960" cy="274320"/>
+          <p:cNvPr id="7" name="Shape 5"/>
+          <p:cNvSpPr/>
+          <p:nvPr/>
+        </p:nvSpPr>
+        <p:spPr>
+          <a:xfrm>
+            <a:off x="603504" y="2231136"/>
+            <a:ext cx="365760" cy="365760"/>
+          </a:xfrm>
+          <a:prstGeom prst="roundRect">
+            <a:avLst>
+              <a:gd name="adj" fmla="val 50000"/>
+            </a:avLst>
+          </a:prstGeom>
+          <a:solidFill>
+            <a:srgbClr val="12315B"/>
+          </a:solidFill>
+          <a:ln/>
+        </p:spPr>
+      </p:sp>
+      <p:sp>
+        <p:nvSpPr>
+          <p:cNvPr id="8" name="Text 6"/>
+          <p:cNvSpPr/>
+          <p:nvPr/>
+        </p:nvSpPr>
+        <p:spPr>
+          <a:xfrm>
+            <a:off x="603504" y="2231136"/>
+            <a:ext cx="365760" cy="365760"/>
           </a:xfrm>
           <a:prstGeom prst="rect">
             <a:avLst/>
@@ -2742,11 +3467,53 @@
           <a:bodyPr wrap="square" lIns="0" tIns="0" rIns="0" bIns="0" rtlCol="0" anchor="ctr"/>
           <a:lstStyle/>
           <a:p>
+            <a:pPr algn="ctr" indent="0" marL="0">
+              <a:buNone/>
+            </a:pPr>
+            <a:r>
+              <a:rPr lang="en-US" sz="1400" b="1" dirty="0">
+                <a:solidFill>
+                  <a:srgbClr val="FFFFFF"/>
+                </a:solidFill>
+                <a:latin typeface="Cambria" pitchFamily="34" charset="0"/>
+                <a:ea typeface="Cambria" pitchFamily="34" charset="-122"/>
+                <a:cs typeface="Cambria" pitchFamily="34" charset="-120"/>
+              </a:rPr>
+              <a:t>1</a:t>
+            </a:r>
+            <a:endParaRPr lang="en-US" sz="1400" dirty="0"/>
+          </a:p>
+        </p:txBody>
+      </p:sp>
+      <p:sp>
+        <p:nvSpPr>
+          <p:cNvPr id="9" name="Text 7"/>
+          <p:cNvSpPr/>
+          <p:nvPr/>
+        </p:nvSpPr>
+        <p:spPr>
+          <a:xfrm>
+            <a:off x="1060704" y="2212848"/>
+            <a:ext cx="1313078" cy="640080"/>
+          </a:xfrm>
+          <a:prstGeom prst="rect">
+            <a:avLst/>
+          </a:prstGeom>
+          <a:noFill/>
+          <a:ln/>
+        </p:spPr>
+        <p:txBody>
+          <a:bodyPr wrap="square" lIns="0" tIns="0" rIns="0" bIns="0" rtlCol="0" anchor="ctr"/>
+          <a:lstStyle/>
+          <a:p>
             <a:pPr indent="0" marL="0">
-              <a:buNone/>
-            </a:pPr>
-            <a:r>
-              <a:rPr lang="en-US" sz="1200" b="1" spc="200" kern="0" dirty="0">
+              <a:lnSpc>
+                <a:spcPct val="95000"/>
+              </a:lnSpc>
+              <a:buNone/>
+            </a:pPr>
+            <a:r>
+              <a:rPr lang="en-US" sz="1250" b="1" dirty="0">
                 <a:solidFill>
                   <a:srgbClr val="12315B"/>
                 </a:solidFill>
@@ -2754,30 +3521,179 @@
                 <a:ea typeface="Calibri" pitchFamily="34" charset="-122"/>
                 <a:cs typeface="Calibri" pitchFamily="34" charset="-120"/>
               </a:rPr>
-              <a:t>IMPACT AT SCALE</a:t>
-            </a:r>
-            <a:endParaRPr lang="en-US" sz="1200" dirty="0"/>
-          </a:p>
-        </p:txBody>
-      </p:sp>
-      <p:sp>
-        <p:nvSpPr>
-          <p:cNvPr id="20" name="Shape 18"/>
-          <p:cNvSpPr/>
-          <p:nvPr/>
-        </p:nvSpPr>
-        <p:spPr>
-          <a:xfrm>
-            <a:off x="7360920" y="2880360"/>
-            <a:ext cx="2011680" cy="1234440"/>
+              <a:t>Submission intake</a:t>
+            </a:r>
+            <a:endParaRPr lang="en-US" sz="1250" dirty="0"/>
+          </a:p>
+        </p:txBody>
+      </p:sp>
+      <p:sp>
+        <p:nvSpPr>
+          <p:cNvPr id="10" name="Shape 8"/>
+          <p:cNvSpPr/>
+          <p:nvPr/>
+        </p:nvSpPr>
+        <p:spPr>
+          <a:xfrm>
+            <a:off x="640080" y="3008376"/>
+            <a:ext cx="73152" cy="73152"/>
+          </a:xfrm>
+          <a:prstGeom prst="rect">
+            <a:avLst/>
+          </a:prstGeom>
+          <a:solidFill>
+            <a:srgbClr val="2E6FB5"/>
+          </a:solidFill>
+          <a:ln/>
+        </p:spPr>
+      </p:sp>
+      <p:sp>
+        <p:nvSpPr>
+          <p:cNvPr id="11" name="Text 9"/>
+          <p:cNvSpPr/>
+          <p:nvPr/>
+        </p:nvSpPr>
+        <p:spPr>
+          <a:xfrm>
+            <a:off x="804672" y="2926080"/>
+            <a:ext cx="1532534" cy="566928"/>
+          </a:xfrm>
+          <a:prstGeom prst="rect">
+            <a:avLst/>
+          </a:prstGeom>
+          <a:noFill/>
+          <a:ln/>
+        </p:spPr>
+        <p:txBody>
+          <a:bodyPr wrap="square" lIns="0" tIns="0" rIns="0" bIns="0" rtlCol="0" anchor="t"/>
+          <a:lstStyle/>
+          <a:p>
+            <a:pPr indent="0" marL="0">
+              <a:lnSpc>
+                <a:spcPct val="95000"/>
+              </a:lnSpc>
+              <a:buNone/>
+            </a:pPr>
+            <a:r>
+              <a:rPr lang="en-US" sz="1000" dirty="0">
+                <a:solidFill>
+                  <a:srgbClr val="5A6472"/>
+                </a:solidFill>
+                <a:latin typeface="Calibri" pitchFamily="34" charset="0"/>
+                <a:ea typeface="Calibri" pitchFamily="34" charset="-122"/>
+                <a:cs typeface="Calibri" pitchFamily="34" charset="-120"/>
+              </a:rPr>
+              <a:t>Lands in the UW workbench</a:t>
+            </a:r>
+            <a:endParaRPr lang="en-US" sz="1000" dirty="0"/>
+          </a:p>
+        </p:txBody>
+      </p:sp>
+      <p:sp>
+        <p:nvSpPr>
+          <p:cNvPr id="12" name="Shape 10"/>
+          <p:cNvSpPr/>
+          <p:nvPr/>
+        </p:nvSpPr>
+        <p:spPr>
+          <a:xfrm>
+            <a:off x="640080" y="3611880"/>
+            <a:ext cx="73152" cy="73152"/>
+          </a:xfrm>
+          <a:prstGeom prst="rect">
+            <a:avLst/>
+          </a:prstGeom>
+          <a:solidFill>
+            <a:srgbClr val="2E6FB5"/>
+          </a:solidFill>
+          <a:ln/>
+        </p:spPr>
+      </p:sp>
+      <p:sp>
+        <p:nvSpPr>
+          <p:cNvPr id="13" name="Text 11"/>
+          <p:cNvSpPr/>
+          <p:nvPr/>
+        </p:nvSpPr>
+        <p:spPr>
+          <a:xfrm>
+            <a:off x="804672" y="3529584"/>
+            <a:ext cx="1532534" cy="566928"/>
+          </a:xfrm>
+          <a:prstGeom prst="rect">
+            <a:avLst/>
+          </a:prstGeom>
+          <a:noFill/>
+          <a:ln/>
+        </p:spPr>
+        <p:txBody>
+          <a:bodyPr wrap="square" lIns="0" tIns="0" rIns="0" bIns="0" rtlCol="0" anchor="t"/>
+          <a:lstStyle/>
+          <a:p>
+            <a:pPr indent="0" marL="0">
+              <a:lnSpc>
+                <a:spcPct val="95000"/>
+              </a:lnSpc>
+              <a:buNone/>
+            </a:pPr>
+            <a:r>
+              <a:rPr lang="en-US" sz="1000" dirty="0">
+                <a:solidFill>
+                  <a:srgbClr val="5A6472"/>
+                </a:solidFill>
+                <a:latin typeface="Calibri" pitchFamily="34" charset="0"/>
+                <a:ea typeface="Calibri" pitchFamily="34" charset="-122"/>
+                <a:cs typeface="Calibri" pitchFamily="34" charset="-120"/>
+              </a:rPr>
+              <a:t>AI extracts ACORD, loss runs &amp; financials</a:t>
+            </a:r>
+            <a:endParaRPr lang="en-US" sz="1000" dirty="0"/>
+          </a:p>
+        </p:txBody>
+      </p:sp>
+      <p:sp>
+        <p:nvSpPr>
+          <p:cNvPr id="14" name="Shape 12"/>
+          <p:cNvSpPr/>
+          <p:nvPr/>
+        </p:nvSpPr>
+        <p:spPr>
+          <a:xfrm>
+            <a:off x="2483510" y="3099816"/>
+            <a:ext cx="292608" cy="256032"/>
+          </a:xfrm>
+          <a:prstGeom prst="chevron">
+            <a:avLst/>
+          </a:prstGeom>
+          <a:solidFill>
+            <a:srgbClr val="DCE7F5"/>
+          </a:solidFill>
+          <a:ln w="12700">
+            <a:solidFill>
+              <a:srgbClr val="2E6FB5"/>
+            </a:solidFill>
+            <a:prstDash val="solid"/>
+          </a:ln>
+        </p:spPr>
+      </p:sp>
+      <p:sp>
+        <p:nvSpPr>
+          <p:cNvPr id="15" name="Shape 13"/>
+          <p:cNvSpPr/>
+          <p:nvPr/>
+        </p:nvSpPr>
+        <p:spPr>
+          <a:xfrm>
+            <a:off x="2757830" y="2084832"/>
+            <a:ext cx="2044598" cy="2286000"/>
           </a:xfrm>
           <a:prstGeom prst="roundRect">
             <a:avLst>
-              <a:gd name="adj" fmla="val 4444"/>
+              <a:gd name="adj" fmla="val 2236"/>
             </a:avLst>
           </a:prstGeom>
           <a:solidFill>
-            <a:srgbClr val="EAF1FA"/>
+            <a:srgbClr val="FFFFFF"/>
           </a:solidFill>
           <a:ln w="12700">
             <a:solidFill>
@@ -2789,14 +3705,36 @@
       </p:sp>
       <p:sp>
         <p:nvSpPr>
-          <p:cNvPr id="21" name="Text 19"/>
-          <p:cNvSpPr/>
-          <p:nvPr/>
-        </p:nvSpPr>
-        <p:spPr>
-          <a:xfrm>
-            <a:off x="7406640" y="3008376"/>
-            <a:ext cx="1920240" cy="548640"/>
+          <p:cNvPr id="16" name="Shape 14"/>
+          <p:cNvSpPr/>
+          <p:nvPr/>
+        </p:nvSpPr>
+        <p:spPr>
+          <a:xfrm>
+            <a:off x="2904134" y="2231136"/>
+            <a:ext cx="365760" cy="365760"/>
+          </a:xfrm>
+          <a:prstGeom prst="roundRect">
+            <a:avLst>
+              <a:gd name="adj" fmla="val 50000"/>
+            </a:avLst>
+          </a:prstGeom>
+          <a:solidFill>
+            <a:srgbClr val="12315B"/>
+          </a:solidFill>
+          <a:ln/>
+        </p:spPr>
+      </p:sp>
+      <p:sp>
+        <p:nvSpPr>
+          <p:cNvPr id="17" name="Text 15"/>
+          <p:cNvSpPr/>
+          <p:nvPr/>
+        </p:nvSpPr>
+        <p:spPr>
+          <a:xfrm>
+            <a:off x="2904134" y="2231136"/>
+            <a:ext cx="365760" cy="365760"/>
           </a:xfrm>
           <a:prstGeom prst="rect">
             <a:avLst/>
@@ -2812,70 +3750,183 @@
               <a:buNone/>
             </a:pPr>
             <a:r>
-              <a:rPr lang="en-US" sz="3000" b="1" dirty="0">
-                <a:solidFill>
-                  <a:srgbClr val="12315B"/>
+              <a:rPr lang="en-US" sz="1400" b="1" dirty="0">
+                <a:solidFill>
+                  <a:srgbClr val="FFFFFF"/>
                 </a:solidFill>
                 <a:latin typeface="Cambria" pitchFamily="34" charset="0"/>
                 <a:ea typeface="Cambria" pitchFamily="34" charset="-122"/>
                 <a:cs typeface="Cambria" pitchFamily="34" charset="-120"/>
               </a:rPr>
-              <a:t>40</a:t>
-            </a:r>
-            <a:pPr algn="ctr" indent="0" marL="0">
-              <a:buNone/>
-            </a:pPr>
-            <a:r>
-              <a:rPr lang="en-US" sz="1500" b="1" dirty="0">
-                <a:solidFill>
-                  <a:srgbClr val="2E6FB5"/>
-                </a:solidFill>
-                <a:latin typeface="Cambria" pitchFamily="34" charset="0"/>
-                <a:ea typeface="Cambria" pitchFamily="34" charset="-122"/>
-                <a:cs typeface="Cambria" pitchFamily="34" charset="-120"/>
-              </a:rPr>
-              <a:t>%</a:t>
-            </a:r>
-            <a:endParaRPr lang="en-US" sz="3000" dirty="0"/>
-          </a:p>
-        </p:txBody>
-      </p:sp>
-      <p:sp>
-        <p:nvSpPr>
-          <p:cNvPr id="22" name="Text 20"/>
-          <p:cNvSpPr/>
-          <p:nvPr/>
-        </p:nvSpPr>
-        <p:spPr>
-          <a:xfrm>
-            <a:off x="7470648" y="3593592"/>
-            <a:ext cx="1792224" cy="457200"/>
-          </a:xfrm>
-          <a:prstGeom prst="rect">
-            <a:avLst/>
-          </a:prstGeom>
-          <a:noFill/>
-          <a:ln/>
-        </p:spPr>
-        <p:txBody>
-          <a:bodyPr wrap="square" lIns="0" tIns="0" rIns="0" bIns="0" rtlCol="0" anchor="t"/>
-          <a:lstStyle/>
-          <a:p>
-            <a:pPr algn="ctr" indent="0" marL="0">
-              <a:buNone/>
-            </a:pPr>
-            <a:r>
-              <a:rPr lang="en-US" sz="1050" dirty="0">
-                <a:solidFill>
-                  <a:srgbClr val="5A6472"/>
+              <a:t>2</a:t>
+            </a:r>
+            <a:endParaRPr lang="en-US" sz="1400" dirty="0"/>
+          </a:p>
+        </p:txBody>
+      </p:sp>
+      <p:sp>
+        <p:nvSpPr>
+          <p:cNvPr id="18" name="Text 16"/>
+          <p:cNvSpPr/>
+          <p:nvPr/>
+        </p:nvSpPr>
+        <p:spPr>
+          <a:xfrm>
+            <a:off x="3361334" y="2212848"/>
+            <a:ext cx="1313078" cy="640080"/>
+          </a:xfrm>
+          <a:prstGeom prst="rect">
+            <a:avLst/>
+          </a:prstGeom>
+          <a:noFill/>
+          <a:ln/>
+        </p:spPr>
+        <p:txBody>
+          <a:bodyPr wrap="square" lIns="0" tIns="0" rIns="0" bIns="0" rtlCol="0" anchor="ctr"/>
+          <a:lstStyle/>
+          <a:p>
+            <a:pPr indent="0" marL="0">
+              <a:lnSpc>
+                <a:spcPct val="95000"/>
+              </a:lnSpc>
+              <a:buNone/>
+            </a:pPr>
+            <a:r>
+              <a:rPr lang="en-US" sz="1250" b="1" dirty="0">
+                <a:solidFill>
+                  <a:srgbClr val="12315B"/>
                 </a:solidFill>
                 <a:latin typeface="Calibri" pitchFamily="34" charset="0"/>
                 <a:ea typeface="Calibri" pitchFamily="34" charset="-122"/>
                 <a:cs typeface="Calibri" pitchFamily="34" charset="-120"/>
               </a:rPr>
-              <a:t>Faster quote turnaround on in-appetite risks</a:t>
-            </a:r>
-            <a:endParaRPr lang="en-US" sz="1050" dirty="0"/>
+              <a:t>Risk enrichment</a:t>
+            </a:r>
+            <a:endParaRPr lang="en-US" sz="1250" dirty="0"/>
+          </a:p>
+        </p:txBody>
+      </p:sp>
+      <p:sp>
+        <p:nvSpPr>
+          <p:cNvPr id="19" name="Shape 17"/>
+          <p:cNvSpPr/>
+          <p:nvPr/>
+        </p:nvSpPr>
+        <p:spPr>
+          <a:xfrm>
+            <a:off x="2940710" y="3008376"/>
+            <a:ext cx="73152" cy="73152"/>
+          </a:xfrm>
+          <a:prstGeom prst="rect">
+            <a:avLst/>
+          </a:prstGeom>
+          <a:solidFill>
+            <a:srgbClr val="2E6FB5"/>
+          </a:solidFill>
+          <a:ln/>
+        </p:spPr>
+      </p:sp>
+      <p:sp>
+        <p:nvSpPr>
+          <p:cNvPr id="20" name="Text 18"/>
+          <p:cNvSpPr/>
+          <p:nvPr/>
+        </p:nvSpPr>
+        <p:spPr>
+          <a:xfrm>
+            <a:off x="3105302" y="2926080"/>
+            <a:ext cx="1532534" cy="566928"/>
+          </a:xfrm>
+          <a:prstGeom prst="rect">
+            <a:avLst/>
+          </a:prstGeom>
+          <a:noFill/>
+          <a:ln/>
+        </p:spPr>
+        <p:txBody>
+          <a:bodyPr wrap="square" lIns="0" tIns="0" rIns="0" bIns="0" rtlCol="0" anchor="t"/>
+          <a:lstStyle/>
+          <a:p>
+            <a:pPr indent="0" marL="0">
+              <a:lnSpc>
+                <a:spcPct val="95000"/>
+              </a:lnSpc>
+              <a:buNone/>
+            </a:pPr>
+            <a:r>
+              <a:rPr lang="en-US" sz="1000" dirty="0">
+                <a:solidFill>
+                  <a:srgbClr val="5A6472"/>
+                </a:solidFill>
+                <a:latin typeface="Calibri" pitchFamily="34" charset="0"/>
+                <a:ea typeface="Calibri" pitchFamily="34" charset="-122"/>
+                <a:cs typeface="Calibri" pitchFamily="34" charset="-120"/>
+              </a:rPr>
+              <a:t>Appends property, firmographic &amp; cat data</a:t>
+            </a:r>
+            <a:endParaRPr lang="en-US" sz="1000" dirty="0"/>
+          </a:p>
+        </p:txBody>
+      </p:sp>
+      <p:sp>
+        <p:nvSpPr>
+          <p:cNvPr id="21" name="Shape 19"/>
+          <p:cNvSpPr/>
+          <p:nvPr/>
+        </p:nvSpPr>
+        <p:spPr>
+          <a:xfrm>
+            <a:off x="2940710" y="3611880"/>
+            <a:ext cx="73152" cy="73152"/>
+          </a:xfrm>
+          <a:prstGeom prst="rect">
+            <a:avLst/>
+          </a:prstGeom>
+          <a:solidFill>
+            <a:srgbClr val="2E6FB5"/>
+          </a:solidFill>
+          <a:ln/>
+        </p:spPr>
+      </p:sp>
+      <p:sp>
+        <p:nvSpPr>
+          <p:cNvPr id="22" name="Text 20"/>
+          <p:cNvSpPr/>
+          <p:nvPr/>
+        </p:nvSpPr>
+        <p:spPr>
+          <a:xfrm>
+            <a:off x="3105302" y="3529584"/>
+            <a:ext cx="1532534" cy="566928"/>
+          </a:xfrm>
+          <a:prstGeom prst="rect">
+            <a:avLst/>
+          </a:prstGeom>
+          <a:noFill/>
+          <a:ln/>
+        </p:spPr>
+        <p:txBody>
+          <a:bodyPr wrap="square" lIns="0" tIns="0" rIns="0" bIns="0" rtlCol="0" anchor="t"/>
+          <a:lstStyle/>
+          <a:p>
+            <a:pPr indent="0" marL="0">
+              <a:lnSpc>
+                <a:spcPct val="95000"/>
+              </a:lnSpc>
+              <a:buNone/>
+            </a:pPr>
+            <a:r>
+              <a:rPr lang="en-US" sz="1000" dirty="0">
+                <a:solidFill>
+                  <a:srgbClr val="5A6472"/>
+                </a:solidFill>
+                <a:latin typeface="Calibri" pitchFamily="34" charset="0"/>
+                <a:ea typeface="Calibri" pitchFamily="34" charset="-122"/>
+                <a:cs typeface="Calibri" pitchFamily="34" charset="-120"/>
+              </a:rPr>
+              <a:t>Rebuilds exposure &amp; prior-loss view</a:t>
+            </a:r>
+            <a:endParaRPr lang="en-US" sz="1000" dirty="0"/>
           </a:p>
         </p:txBody>
       </p:sp>
@@ -2887,16 +3938,41 @@
         </p:nvSpPr>
         <p:spPr>
           <a:xfrm>
-            <a:off x="9601200" y="2880360"/>
-            <a:ext cx="2011680" cy="1234440"/>
+            <a:off x="4784141" y="3099816"/>
+            <a:ext cx="292608" cy="256032"/>
+          </a:xfrm>
+          <a:prstGeom prst="chevron">
+            <a:avLst/>
+          </a:prstGeom>
+          <a:solidFill>
+            <a:srgbClr val="DCE7F5"/>
+          </a:solidFill>
+          <a:ln w="12700">
+            <a:solidFill>
+              <a:srgbClr val="2E6FB5"/>
+            </a:solidFill>
+            <a:prstDash val="solid"/>
+          </a:ln>
+        </p:spPr>
+      </p:sp>
+      <p:sp>
+        <p:nvSpPr>
+          <p:cNvPr id="24" name="Shape 22"/>
+          <p:cNvSpPr/>
+          <p:nvPr/>
+        </p:nvSpPr>
+        <p:spPr>
+          <a:xfrm>
+            <a:off x="5058461" y="2084832"/>
+            <a:ext cx="2044598" cy="2286000"/>
           </a:xfrm>
           <a:prstGeom prst="roundRect">
             <a:avLst>
-              <a:gd name="adj" fmla="val 4444"/>
+              <a:gd name="adj" fmla="val 2236"/>
             </a:avLst>
           </a:prstGeom>
           <a:solidFill>
-            <a:srgbClr val="EAF1FA"/>
+            <a:srgbClr val="FFFFFF"/>
           </a:solidFill>
           <a:ln w="12700">
             <a:solidFill>
@@ -2908,14 +3984,36 @@
       </p:sp>
       <p:sp>
         <p:nvSpPr>
-          <p:cNvPr id="24" name="Text 22"/>
-          <p:cNvSpPr/>
-          <p:nvPr/>
-        </p:nvSpPr>
-        <p:spPr>
-          <a:xfrm>
-            <a:off x="9646920" y="3008376"/>
-            <a:ext cx="1920240" cy="548640"/>
+          <p:cNvPr id="25" name="Shape 23"/>
+          <p:cNvSpPr/>
+          <p:nvPr/>
+        </p:nvSpPr>
+        <p:spPr>
+          <a:xfrm>
+            <a:off x="5204765" y="2231136"/>
+            <a:ext cx="365760" cy="365760"/>
+          </a:xfrm>
+          <a:prstGeom prst="roundRect">
+            <a:avLst>
+              <a:gd name="adj" fmla="val 50000"/>
+            </a:avLst>
+          </a:prstGeom>
+          <a:solidFill>
+            <a:srgbClr val="12315B"/>
+          </a:solidFill>
+          <a:ln/>
+        </p:spPr>
+      </p:sp>
+      <p:sp>
+        <p:nvSpPr>
+          <p:cNvPr id="26" name="Text 24"/>
+          <p:cNvSpPr/>
+          <p:nvPr/>
+        </p:nvSpPr>
+        <p:spPr>
+          <a:xfrm>
+            <a:off x="5204765" y="2231136"/>
+            <a:ext cx="365760" cy="365760"/>
           </a:xfrm>
           <a:prstGeom prst="rect">
             <a:avLst/>
@@ -2931,191 +4029,230 @@
               <a:buNone/>
             </a:pPr>
             <a:r>
-              <a:rPr lang="en-US" sz="3000" b="1" dirty="0">
-                <a:solidFill>
-                  <a:srgbClr val="12315B"/>
+              <a:rPr lang="en-US" sz="1400" b="1" dirty="0">
+                <a:solidFill>
+                  <a:srgbClr val="FFFFFF"/>
                 </a:solidFill>
                 <a:latin typeface="Cambria" pitchFamily="34" charset="0"/>
                 <a:ea typeface="Cambria" pitchFamily="34" charset="-122"/>
                 <a:cs typeface="Cambria" pitchFamily="34" charset="-120"/>
               </a:rPr>
-              <a:t>2–3</a:t>
-            </a:r>
-            <a:pPr algn="ctr" indent="0" marL="0">
-              <a:buNone/>
-            </a:pPr>
-            <a:r>
-              <a:rPr lang="en-US" sz="1500" b="1" dirty="0">
-                <a:solidFill>
-                  <a:srgbClr val="2E6FB5"/>
-                </a:solidFill>
-                <a:latin typeface="Cambria" pitchFamily="34" charset="0"/>
-                <a:ea typeface="Cambria" pitchFamily="34" charset="-122"/>
-                <a:cs typeface="Cambria" pitchFamily="34" charset="-120"/>
-              </a:rPr>
-              <a:t>pts</a:t>
-            </a:r>
-            <a:endParaRPr lang="en-US" sz="3000" dirty="0"/>
-          </a:p>
-        </p:txBody>
-      </p:sp>
-      <p:sp>
-        <p:nvSpPr>
-          <p:cNvPr id="25" name="Text 23"/>
-          <p:cNvSpPr/>
-          <p:nvPr/>
-        </p:nvSpPr>
-        <p:spPr>
-          <a:xfrm>
-            <a:off x="9710928" y="3593592"/>
-            <a:ext cx="1792224" cy="457200"/>
-          </a:xfrm>
-          <a:prstGeom prst="rect">
-            <a:avLst/>
-          </a:prstGeom>
-          <a:noFill/>
-          <a:ln/>
-        </p:spPr>
-        <p:txBody>
-          <a:bodyPr wrap="square" lIns="0" tIns="0" rIns="0" bIns="0" rtlCol="0" anchor="t"/>
-          <a:lstStyle/>
-          <a:p>
-            <a:pPr algn="ctr" indent="0" marL="0">
-              <a:buNone/>
-            </a:pPr>
-            <a:r>
-              <a:rPr lang="en-US" sz="1050" dirty="0">
-                <a:solidFill>
-                  <a:srgbClr val="5A6472"/>
+              <a:t>3</a:t>
+            </a:r>
+            <a:endParaRPr lang="en-US" sz="1400" dirty="0"/>
+          </a:p>
+        </p:txBody>
+      </p:sp>
+      <p:sp>
+        <p:nvSpPr>
+          <p:cNvPr id="27" name="Text 25"/>
+          <p:cNvSpPr/>
+          <p:nvPr/>
+        </p:nvSpPr>
+        <p:spPr>
+          <a:xfrm>
+            <a:off x="5661965" y="2212848"/>
+            <a:ext cx="1313078" cy="640080"/>
+          </a:xfrm>
+          <a:prstGeom prst="rect">
+            <a:avLst/>
+          </a:prstGeom>
+          <a:noFill/>
+          <a:ln/>
+        </p:spPr>
+        <p:txBody>
+          <a:bodyPr wrap="square" lIns="0" tIns="0" rIns="0" bIns="0" rtlCol="0" anchor="ctr"/>
+          <a:lstStyle/>
+          <a:p>
+            <a:pPr indent="0" marL="0">
+              <a:lnSpc>
+                <a:spcPct val="95000"/>
+              </a:lnSpc>
+              <a:buNone/>
+            </a:pPr>
+            <a:r>
+              <a:rPr lang="en-US" sz="1250" b="1" dirty="0">
+                <a:solidFill>
+                  <a:srgbClr val="12315B"/>
                 </a:solidFill>
                 <a:latin typeface="Calibri" pitchFamily="34" charset="0"/>
                 <a:ea typeface="Calibri" pitchFamily="34" charset="-122"/>
                 <a:cs typeface="Calibri" pitchFamily="34" charset="-120"/>
               </a:rPr>
-              <a:t>Loss-ratio improvement from sharper risk selection</a:t>
-            </a:r>
-            <a:endParaRPr lang="en-US" sz="1050" dirty="0"/>
-          </a:p>
-        </p:txBody>
-      </p:sp>
-      <p:sp>
-        <p:nvSpPr>
-          <p:cNvPr id="26" name="Shape 24"/>
-          <p:cNvSpPr/>
-          <p:nvPr/>
-        </p:nvSpPr>
-        <p:spPr>
-          <a:xfrm>
-            <a:off x="7360920" y="4343400"/>
-            <a:ext cx="4251960" cy="1234440"/>
-          </a:xfrm>
-          <a:prstGeom prst="roundRect">
-            <a:avLst>
-              <a:gd name="adj" fmla="val 4444"/>
-            </a:avLst>
-          </a:prstGeom>
-          <a:solidFill>
-            <a:srgbClr val="12315B"/>
-          </a:solidFill>
-          <a:ln/>
-        </p:spPr>
-      </p:sp>
-      <p:sp>
-        <p:nvSpPr>
-          <p:cNvPr id="27" name="Text 25"/>
-          <p:cNvSpPr/>
-          <p:nvPr/>
-        </p:nvSpPr>
-        <p:spPr>
-          <a:xfrm>
-            <a:off x="7616952" y="4507992"/>
-            <a:ext cx="3794760" cy="274320"/>
-          </a:xfrm>
-          <a:prstGeom prst="rect">
-            <a:avLst/>
-          </a:prstGeom>
-          <a:noFill/>
-          <a:ln/>
-        </p:spPr>
-        <p:txBody>
-          <a:bodyPr wrap="square" lIns="0" tIns="0" rIns="0" bIns="0" rtlCol="0" anchor="ctr"/>
+              <a:t>Triage &amp; appetite check</a:t>
+            </a:r>
+            <a:endParaRPr lang="en-US" sz="1250" dirty="0"/>
+          </a:p>
+        </p:txBody>
+      </p:sp>
+      <p:sp>
+        <p:nvSpPr>
+          <p:cNvPr id="28" name="Shape 26"/>
+          <p:cNvSpPr/>
+          <p:nvPr/>
+        </p:nvSpPr>
+        <p:spPr>
+          <a:xfrm>
+            <a:off x="5241341" y="3008376"/>
+            <a:ext cx="73152" cy="73152"/>
+          </a:xfrm>
+          <a:prstGeom prst="rect">
+            <a:avLst/>
+          </a:prstGeom>
+          <a:solidFill>
+            <a:srgbClr val="2E6FB5"/>
+          </a:solidFill>
+          <a:ln/>
+        </p:spPr>
+      </p:sp>
+      <p:sp>
+        <p:nvSpPr>
+          <p:cNvPr id="29" name="Text 27"/>
+          <p:cNvSpPr/>
+          <p:nvPr/>
+        </p:nvSpPr>
+        <p:spPr>
+          <a:xfrm>
+            <a:off x="5405933" y="2926080"/>
+            <a:ext cx="1532534" cy="566928"/>
+          </a:xfrm>
+          <a:prstGeom prst="rect">
+            <a:avLst/>
+          </a:prstGeom>
+          <a:noFill/>
+          <a:ln/>
+        </p:spPr>
+        <p:txBody>
+          <a:bodyPr wrap="square" lIns="0" tIns="0" rIns="0" bIns="0" rtlCol="0" anchor="t"/>
           <a:lstStyle/>
           <a:p>
             <a:pPr indent="0" marL="0">
-              <a:buNone/>
-            </a:pPr>
-            <a:r>
-              <a:rPr lang="en-US" sz="1100" b="1" spc="150" kern="0" dirty="0">
-                <a:solidFill>
-                  <a:srgbClr val="9DBDE6"/>
+              <a:lnSpc>
+                <a:spcPct val="95000"/>
+              </a:lnSpc>
+              <a:buNone/>
+            </a:pPr>
+            <a:r>
+              <a:rPr lang="en-US" sz="1000" dirty="0">
+                <a:solidFill>
+                  <a:srgbClr val="5A6472"/>
                 </a:solidFill>
                 <a:latin typeface="Calibri" pitchFamily="34" charset="0"/>
                 <a:ea typeface="Calibri" pitchFamily="34" charset="-122"/>
                 <a:cs typeface="Calibri" pitchFamily="34" charset="-120"/>
               </a:rPr>
-              <a:t>WHY IT MATTERS NOW</a:t>
-            </a:r>
-            <a:endParaRPr lang="en-US" sz="1100" dirty="0"/>
-          </a:p>
-        </p:txBody>
-      </p:sp>
-      <p:sp>
-        <p:nvSpPr>
-          <p:cNvPr id="28" name="Text 26"/>
-          <p:cNvSpPr/>
-          <p:nvPr/>
-        </p:nvSpPr>
-        <p:spPr>
-          <a:xfrm>
-            <a:off x="7616952" y="4800600"/>
-            <a:ext cx="3794760" cy="685800"/>
-          </a:xfrm>
-          <a:prstGeom prst="rect">
-            <a:avLst/>
-          </a:prstGeom>
-          <a:noFill/>
-          <a:ln/>
-        </p:spPr>
-        <p:txBody>
-          <a:bodyPr wrap="square" lIns="0" tIns="0" rIns="0" bIns="0" rtlCol="0" anchor="ctr"/>
+              <a:t>Automated appetite-fit scoring</a:t>
+            </a:r>
+            <a:endParaRPr lang="en-US" sz="1000" dirty="0"/>
+          </a:p>
+        </p:txBody>
+      </p:sp>
+      <p:sp>
+        <p:nvSpPr>
+          <p:cNvPr id="30" name="Shape 28"/>
+          <p:cNvSpPr/>
+          <p:nvPr/>
+        </p:nvSpPr>
+        <p:spPr>
+          <a:xfrm>
+            <a:off x="5241341" y="3611880"/>
+            <a:ext cx="73152" cy="73152"/>
+          </a:xfrm>
+          <a:prstGeom prst="rect">
+            <a:avLst/>
+          </a:prstGeom>
+          <a:solidFill>
+            <a:srgbClr val="2E6FB5"/>
+          </a:solidFill>
+          <a:ln/>
+        </p:spPr>
+      </p:sp>
+      <p:sp>
+        <p:nvSpPr>
+          <p:cNvPr id="31" name="Text 29"/>
+          <p:cNvSpPr/>
+          <p:nvPr/>
+        </p:nvSpPr>
+        <p:spPr>
+          <a:xfrm>
+            <a:off x="5405933" y="3529584"/>
+            <a:ext cx="1532534" cy="566928"/>
+          </a:xfrm>
+          <a:prstGeom prst="rect">
+            <a:avLst/>
+          </a:prstGeom>
+          <a:noFill/>
+          <a:ln/>
+        </p:spPr>
+        <p:txBody>
+          <a:bodyPr wrap="square" lIns="0" tIns="0" rIns="0" bIns="0" rtlCol="0" anchor="t"/>
           <a:lstStyle/>
           <a:p>
             <a:pPr indent="0" marL="0">
               <a:lnSpc>
-                <a:spcPct val="100000"/>
+                <a:spcPct val="95000"/>
               </a:lnSpc>
               <a:buNone/>
             </a:pPr>
             <a:r>
-              <a:rPr lang="en-US" sz="1250" dirty="0">
-                <a:solidFill>
-                  <a:srgbClr val="FFFFFF"/>
+              <a:rPr lang="en-US" sz="1000" dirty="0">
+                <a:solidFill>
+                  <a:srgbClr val="5A6472"/>
                 </a:solidFill>
                 <a:latin typeface="Calibri" pitchFamily="34" charset="0"/>
                 <a:ea typeface="Calibri" pitchFamily="34" charset="-122"/>
                 <a:cs typeface="Calibri" pitchFamily="34" charset="-120"/>
               </a:rPr>
-              <a:t>Faster, more consistent decisions win better business first — and compound into a durable underwriting edge.</a:t>
-            </a:r>
-            <a:endParaRPr lang="en-US" sz="1250" dirty="0"/>
-          </a:p>
-        </p:txBody>
-      </p:sp>
-      <p:sp>
-        <p:nvSpPr>
-          <p:cNvPr id="29" name="Shape 27"/>
-          <p:cNvSpPr/>
-          <p:nvPr/>
-        </p:nvSpPr>
-        <p:spPr>
-          <a:xfrm>
-            <a:off x="548640" y="6419088"/>
-            <a:ext cx="11064240" cy="0"/>
-          </a:xfrm>
-          <a:prstGeom prst="line">
-            <a:avLst/>
-          </a:prstGeom>
-          <a:noFill/>
+              <a:t>Auto-declines misfits, speeds clean risks</a:t>
+            </a:r>
+            <a:endParaRPr lang="en-US" sz="1000" dirty="0"/>
+          </a:p>
+        </p:txBody>
+      </p:sp>
+      <p:sp>
+        <p:nvSpPr>
+          <p:cNvPr id="32" name="Shape 30"/>
+          <p:cNvSpPr/>
+          <p:nvPr/>
+        </p:nvSpPr>
+        <p:spPr>
+          <a:xfrm>
+            <a:off x="7084771" y="3099816"/>
+            <a:ext cx="292608" cy="256032"/>
+          </a:xfrm>
+          <a:prstGeom prst="chevron">
+            <a:avLst/>
+          </a:prstGeom>
+          <a:solidFill>
+            <a:srgbClr val="DCE7F5"/>
+          </a:solidFill>
+          <a:ln w="12700">
+            <a:solidFill>
+              <a:srgbClr val="2E6FB5"/>
+            </a:solidFill>
+            <a:prstDash val="solid"/>
+          </a:ln>
+        </p:spPr>
+      </p:sp>
+      <p:sp>
+        <p:nvSpPr>
+          <p:cNvPr id="33" name="Shape 31"/>
+          <p:cNvSpPr/>
+          <p:nvPr/>
+        </p:nvSpPr>
+        <p:spPr>
+          <a:xfrm>
+            <a:off x="7359091" y="2084832"/>
+            <a:ext cx="2044598" cy="2286000"/>
+          </a:xfrm>
+          <a:prstGeom prst="roundRect">
+            <a:avLst>
+              <a:gd name="adj" fmla="val 2236"/>
+            </a:avLst>
+          </a:prstGeom>
+          <a:solidFill>
+            <a:srgbClr val="FFFFFF"/>
+          </a:solidFill>
           <a:ln w="12700">
             <a:solidFill>
               <a:srgbClr val="D3DCEA"/>
@@ -3126,14 +4263,36 @@
       </p:sp>
       <p:sp>
         <p:nvSpPr>
-          <p:cNvPr id="30" name="Text 28"/>
-          <p:cNvSpPr/>
-          <p:nvPr/>
-        </p:nvSpPr>
-        <p:spPr>
-          <a:xfrm>
-            <a:off x="548640" y="6473952"/>
-            <a:ext cx="7315200" cy="274320"/>
+          <p:cNvPr id="34" name="Shape 32"/>
+          <p:cNvSpPr/>
+          <p:nvPr/>
+        </p:nvSpPr>
+        <p:spPr>
+          <a:xfrm>
+            <a:off x="7505395" y="2231136"/>
+            <a:ext cx="365760" cy="365760"/>
+          </a:xfrm>
+          <a:prstGeom prst="roundRect">
+            <a:avLst>
+              <a:gd name="adj" fmla="val 50000"/>
+            </a:avLst>
+          </a:prstGeom>
+          <a:solidFill>
+            <a:srgbClr val="12315B"/>
+          </a:solidFill>
+          <a:ln/>
+        </p:spPr>
+      </p:sp>
+      <p:sp>
+        <p:nvSpPr>
+          <p:cNvPr id="35" name="Text 33"/>
+          <p:cNvSpPr/>
+          <p:nvPr/>
+        </p:nvSpPr>
+        <p:spPr>
+          <a:xfrm>
+            <a:off x="7505395" y="2231136"/>
+            <a:ext cx="365760" cy="365760"/>
           </a:xfrm>
           <a:prstGeom prst="rect">
             <a:avLst/>
@@ -3145,50 +4304,115 @@
           <a:bodyPr wrap="square" lIns="0" tIns="0" rIns="0" bIns="0" rtlCol="0" anchor="ctr"/>
           <a:lstStyle/>
           <a:p>
+            <a:pPr algn="ctr" indent="0" marL="0">
+              <a:buNone/>
+            </a:pPr>
+            <a:r>
+              <a:rPr lang="en-US" sz="1400" b="1" dirty="0">
+                <a:solidFill>
+                  <a:srgbClr val="FFFFFF"/>
+                </a:solidFill>
+                <a:latin typeface="Cambria" pitchFamily="34" charset="0"/>
+                <a:ea typeface="Cambria" pitchFamily="34" charset="-122"/>
+                <a:cs typeface="Cambria" pitchFamily="34" charset="-120"/>
+              </a:rPr>
+              <a:t>4</a:t>
+            </a:r>
+            <a:endParaRPr lang="en-US" sz="1400" dirty="0"/>
+          </a:p>
+        </p:txBody>
+      </p:sp>
+      <p:sp>
+        <p:nvSpPr>
+          <p:cNvPr id="36" name="Text 34"/>
+          <p:cNvSpPr/>
+          <p:nvPr/>
+        </p:nvSpPr>
+        <p:spPr>
+          <a:xfrm>
+            <a:off x="7962595" y="2212848"/>
+            <a:ext cx="1313078" cy="640080"/>
+          </a:xfrm>
+          <a:prstGeom prst="rect">
+            <a:avLst/>
+          </a:prstGeom>
+          <a:noFill/>
+          <a:ln/>
+        </p:spPr>
+        <p:txBody>
+          <a:bodyPr wrap="square" lIns="0" tIns="0" rIns="0" bIns="0" rtlCol="0" anchor="ctr"/>
+          <a:lstStyle/>
+          <a:p>
             <a:pPr indent="0" marL="0">
-              <a:buNone/>
-            </a:pPr>
-            <a:r>
-              <a:rPr lang="en-US" sz="900" dirty="0">
-                <a:solidFill>
-                  <a:srgbClr val="5A6472"/>
+              <a:lnSpc>
+                <a:spcPct val="95000"/>
+              </a:lnSpc>
+              <a:buNone/>
+            </a:pPr>
+            <a:r>
+              <a:rPr lang="en-US" sz="1250" b="1" dirty="0">
+                <a:solidFill>
+                  <a:srgbClr val="12315B"/>
                 </a:solidFill>
                 <a:latin typeface="Calibri" pitchFamily="34" charset="0"/>
                 <a:ea typeface="Calibri" pitchFamily="34" charset="-122"/>
                 <a:cs typeface="Calibri" pitchFamily="34" charset="-120"/>
               </a:rPr>
-              <a:t>Liberty Mutual  |  AI Signal Portfolio</a:t>
-            </a:r>
-            <a:endParaRPr lang="en-US" sz="900" dirty="0"/>
-          </a:p>
-        </p:txBody>
-      </p:sp>
-      <p:sp>
-        <p:nvSpPr>
-          <p:cNvPr id="31" name="Text 29"/>
-          <p:cNvSpPr/>
-          <p:nvPr/>
-        </p:nvSpPr>
-        <p:spPr>
-          <a:xfrm>
-            <a:off x="9784080" y="6473952"/>
-            <a:ext cx="1280160" cy="274320"/>
-          </a:xfrm>
-          <a:prstGeom prst="rect">
-            <a:avLst/>
-          </a:prstGeom>
-          <a:noFill/>
-          <a:ln/>
-        </p:spPr>
-        <p:txBody>
-          <a:bodyPr wrap="square" lIns="0" tIns="0" rIns="0" bIns="0" rtlCol="0" anchor="ctr"/>
-          <a:lstStyle/>
-          <a:p>
-            <a:pPr algn="r" indent="0" marL="0">
-              <a:buNone/>
-            </a:pPr>
-            <a:r>
-              <a:rPr lang="en-US" sz="900" dirty="0">
+              <a:t>Pricing &amp; recommendation</a:t>
+            </a:r>
+            <a:endParaRPr lang="en-US" sz="1250" dirty="0"/>
+          </a:p>
+        </p:txBody>
+      </p:sp>
+      <p:sp>
+        <p:nvSpPr>
+          <p:cNvPr id="37" name="Shape 35"/>
+          <p:cNvSpPr/>
+          <p:nvPr/>
+        </p:nvSpPr>
+        <p:spPr>
+          <a:xfrm>
+            <a:off x="7541971" y="3008376"/>
+            <a:ext cx="73152" cy="73152"/>
+          </a:xfrm>
+          <a:prstGeom prst="rect">
+            <a:avLst/>
+          </a:prstGeom>
+          <a:solidFill>
+            <a:srgbClr val="2E6FB5"/>
+          </a:solidFill>
+          <a:ln/>
+        </p:spPr>
+      </p:sp>
+      <p:sp>
+        <p:nvSpPr>
+          <p:cNvPr id="38" name="Text 36"/>
+          <p:cNvSpPr/>
+          <p:nvPr/>
+        </p:nvSpPr>
+        <p:spPr>
+          <a:xfrm>
+            <a:off x="7706563" y="2926080"/>
+            <a:ext cx="1532534" cy="566928"/>
+          </a:xfrm>
+          <a:prstGeom prst="rect">
+            <a:avLst/>
+          </a:prstGeom>
+          <a:noFill/>
+          <a:ln/>
+        </p:spPr>
+        <p:txBody>
+          <a:bodyPr wrap="square" lIns="0" tIns="0" rIns="0" bIns="0" rtlCol="0" anchor="t"/>
+          <a:lstStyle/>
+          <a:p>
+            <a:pPr indent="0" marL="0">
+              <a:lnSpc>
+                <a:spcPct val="95000"/>
+              </a:lnSpc>
+              <a:buNone/>
+            </a:pPr>
+            <a:r>
+              <a:rPr lang="en-US" sz="1000" dirty="0">
                 <a:solidFill>
                   <a:srgbClr val="5A6472"/>
                 </a:solidFill>
@@ -3196,6 +4420,1032 @@
                 <a:ea typeface="Calibri" pitchFamily="34" charset="-122"/>
                 <a:cs typeface="Calibri" pitchFamily="34" charset="-120"/>
               </a:rPr>
+              <a:t>Model-suggested price &amp; terms</a:t>
+            </a:r>
+            <a:endParaRPr lang="en-US" sz="1000" dirty="0"/>
+          </a:p>
+        </p:txBody>
+      </p:sp>
+      <p:sp>
+        <p:nvSpPr>
+          <p:cNvPr id="39" name="Shape 37"/>
+          <p:cNvSpPr/>
+          <p:nvPr/>
+        </p:nvSpPr>
+        <p:spPr>
+          <a:xfrm>
+            <a:off x="7541971" y="3611880"/>
+            <a:ext cx="73152" cy="73152"/>
+          </a:xfrm>
+          <a:prstGeom prst="rect">
+            <a:avLst/>
+          </a:prstGeom>
+          <a:solidFill>
+            <a:srgbClr val="2E6FB5"/>
+          </a:solidFill>
+          <a:ln/>
+        </p:spPr>
+      </p:sp>
+      <p:sp>
+        <p:nvSpPr>
+          <p:cNvPr id="40" name="Text 38"/>
+          <p:cNvSpPr/>
+          <p:nvPr/>
+        </p:nvSpPr>
+        <p:spPr>
+          <a:xfrm>
+            <a:off x="7706563" y="3529584"/>
+            <a:ext cx="1532534" cy="566928"/>
+          </a:xfrm>
+          <a:prstGeom prst="rect">
+            <a:avLst/>
+          </a:prstGeom>
+          <a:noFill/>
+          <a:ln/>
+        </p:spPr>
+        <p:txBody>
+          <a:bodyPr wrap="square" lIns="0" tIns="0" rIns="0" bIns="0" rtlCol="0" anchor="t"/>
+          <a:lstStyle/>
+          <a:p>
+            <a:pPr indent="0" marL="0">
+              <a:lnSpc>
+                <a:spcPct val="95000"/>
+              </a:lnSpc>
+              <a:buNone/>
+            </a:pPr>
+            <a:r>
+              <a:rPr lang="en-US" sz="1000" dirty="0">
+                <a:solidFill>
+                  <a:srgbClr val="5A6472"/>
+                </a:solidFill>
+                <a:latin typeface="Calibri" pitchFamily="34" charset="0"/>
+                <a:ea typeface="Calibri" pitchFamily="34" charset="-122"/>
+                <a:cs typeface="Calibri" pitchFamily="34" charset="-120"/>
+              </a:rPr>
+              <a:t>With rationale and risk flags</a:t>
+            </a:r>
+            <a:endParaRPr lang="en-US" sz="1000" dirty="0"/>
+          </a:p>
+        </p:txBody>
+      </p:sp>
+      <p:sp>
+        <p:nvSpPr>
+          <p:cNvPr id="41" name="Shape 39"/>
+          <p:cNvSpPr/>
+          <p:nvPr/>
+        </p:nvSpPr>
+        <p:spPr>
+          <a:xfrm>
+            <a:off x="9385402" y="3099816"/>
+            <a:ext cx="292608" cy="256032"/>
+          </a:xfrm>
+          <a:prstGeom prst="chevron">
+            <a:avLst/>
+          </a:prstGeom>
+          <a:solidFill>
+            <a:srgbClr val="DCE7F5"/>
+          </a:solidFill>
+          <a:ln w="12700">
+            <a:solidFill>
+              <a:srgbClr val="2E6FB5"/>
+            </a:solidFill>
+            <a:prstDash val="solid"/>
+          </a:ln>
+        </p:spPr>
+      </p:sp>
+      <p:sp>
+        <p:nvSpPr>
+          <p:cNvPr id="42" name="Shape 40"/>
+          <p:cNvSpPr/>
+          <p:nvPr/>
+        </p:nvSpPr>
+        <p:spPr>
+          <a:xfrm>
+            <a:off x="9659722" y="2084832"/>
+            <a:ext cx="2044598" cy="2286000"/>
+          </a:xfrm>
+          <a:prstGeom prst="roundRect">
+            <a:avLst>
+              <a:gd name="adj" fmla="val 2236"/>
+            </a:avLst>
+          </a:prstGeom>
+          <a:solidFill>
+            <a:srgbClr val="FFFFFF"/>
+          </a:solidFill>
+          <a:ln w="12700">
+            <a:solidFill>
+              <a:srgbClr val="D3DCEA"/>
+            </a:solidFill>
+            <a:prstDash val="solid"/>
+          </a:ln>
+        </p:spPr>
+      </p:sp>
+      <p:sp>
+        <p:nvSpPr>
+          <p:cNvPr id="43" name="Shape 41"/>
+          <p:cNvSpPr/>
+          <p:nvPr/>
+        </p:nvSpPr>
+        <p:spPr>
+          <a:xfrm>
+            <a:off x="9806026" y="2231136"/>
+            <a:ext cx="365760" cy="365760"/>
+          </a:xfrm>
+          <a:prstGeom prst="roundRect">
+            <a:avLst>
+              <a:gd name="adj" fmla="val 50000"/>
+            </a:avLst>
+          </a:prstGeom>
+          <a:solidFill>
+            <a:srgbClr val="12315B"/>
+          </a:solidFill>
+          <a:ln/>
+        </p:spPr>
+      </p:sp>
+      <p:sp>
+        <p:nvSpPr>
+          <p:cNvPr id="44" name="Text 42"/>
+          <p:cNvSpPr/>
+          <p:nvPr/>
+        </p:nvSpPr>
+        <p:spPr>
+          <a:xfrm>
+            <a:off x="9806026" y="2231136"/>
+            <a:ext cx="365760" cy="365760"/>
+          </a:xfrm>
+          <a:prstGeom prst="rect">
+            <a:avLst/>
+          </a:prstGeom>
+          <a:noFill/>
+          <a:ln/>
+        </p:spPr>
+        <p:txBody>
+          <a:bodyPr wrap="square" lIns="0" tIns="0" rIns="0" bIns="0" rtlCol="0" anchor="ctr"/>
+          <a:lstStyle/>
+          <a:p>
+            <a:pPr algn="ctr" indent="0" marL="0">
+              <a:buNone/>
+            </a:pPr>
+            <a:r>
+              <a:rPr lang="en-US" sz="1400" b="1" dirty="0">
+                <a:solidFill>
+                  <a:srgbClr val="FFFFFF"/>
+                </a:solidFill>
+                <a:latin typeface="Cambria" pitchFamily="34" charset="0"/>
+                <a:ea typeface="Cambria" pitchFamily="34" charset="-122"/>
+                <a:cs typeface="Cambria" pitchFamily="34" charset="-120"/>
+              </a:rPr>
+              <a:t>5</a:t>
+            </a:r>
+            <a:endParaRPr lang="en-US" sz="1400" dirty="0"/>
+          </a:p>
+        </p:txBody>
+      </p:sp>
+      <p:sp>
+        <p:nvSpPr>
+          <p:cNvPr id="45" name="Text 43"/>
+          <p:cNvSpPr/>
+          <p:nvPr/>
+        </p:nvSpPr>
+        <p:spPr>
+          <a:xfrm>
+            <a:off x="10263226" y="2212848"/>
+            <a:ext cx="1313078" cy="640080"/>
+          </a:xfrm>
+          <a:prstGeom prst="rect">
+            <a:avLst/>
+          </a:prstGeom>
+          <a:noFill/>
+          <a:ln/>
+        </p:spPr>
+        <p:txBody>
+          <a:bodyPr wrap="square" lIns="0" tIns="0" rIns="0" bIns="0" rtlCol="0" anchor="ctr"/>
+          <a:lstStyle/>
+          <a:p>
+            <a:pPr indent="0" marL="0">
+              <a:lnSpc>
+                <a:spcPct val="95000"/>
+              </a:lnSpc>
+              <a:buNone/>
+            </a:pPr>
+            <a:r>
+              <a:rPr lang="en-US" sz="1250" b="1" dirty="0">
+                <a:solidFill>
+                  <a:srgbClr val="12315B"/>
+                </a:solidFill>
+                <a:latin typeface="Calibri" pitchFamily="34" charset="0"/>
+                <a:ea typeface="Calibri" pitchFamily="34" charset="-122"/>
+                <a:cs typeface="Calibri" pitchFamily="34" charset="-120"/>
+              </a:rPr>
+              <a:t>Underwriter decision</a:t>
+            </a:r>
+            <a:endParaRPr lang="en-US" sz="1250" dirty="0"/>
+          </a:p>
+        </p:txBody>
+      </p:sp>
+      <p:sp>
+        <p:nvSpPr>
+          <p:cNvPr id="46" name="Shape 44"/>
+          <p:cNvSpPr/>
+          <p:nvPr/>
+        </p:nvSpPr>
+        <p:spPr>
+          <a:xfrm>
+            <a:off x="9842602" y="3008376"/>
+            <a:ext cx="73152" cy="73152"/>
+          </a:xfrm>
+          <a:prstGeom prst="rect">
+            <a:avLst/>
+          </a:prstGeom>
+          <a:solidFill>
+            <a:srgbClr val="2E6FB5"/>
+          </a:solidFill>
+          <a:ln/>
+        </p:spPr>
+      </p:sp>
+      <p:sp>
+        <p:nvSpPr>
+          <p:cNvPr id="47" name="Text 45"/>
+          <p:cNvSpPr/>
+          <p:nvPr/>
+        </p:nvSpPr>
+        <p:spPr>
+          <a:xfrm>
+            <a:off x="10007194" y="2926080"/>
+            <a:ext cx="1532534" cy="566928"/>
+          </a:xfrm>
+          <a:prstGeom prst="rect">
+            <a:avLst/>
+          </a:prstGeom>
+          <a:noFill/>
+          <a:ln/>
+        </p:spPr>
+        <p:txBody>
+          <a:bodyPr wrap="square" lIns="0" tIns="0" rIns="0" bIns="0" rtlCol="0" anchor="t"/>
+          <a:lstStyle/>
+          <a:p>
+            <a:pPr indent="0" marL="0">
+              <a:lnSpc>
+                <a:spcPct val="95000"/>
+              </a:lnSpc>
+              <a:buNone/>
+            </a:pPr>
+            <a:r>
+              <a:rPr lang="en-US" sz="1000" dirty="0">
+                <a:solidFill>
+                  <a:srgbClr val="5A6472"/>
+                </a:solidFill>
+                <a:latin typeface="Calibri" pitchFamily="34" charset="0"/>
+                <a:ea typeface="Calibri" pitchFamily="34" charset="-122"/>
+                <a:cs typeface="Calibri" pitchFamily="34" charset="-120"/>
+              </a:rPr>
+              <a:t>Reviews the decision-ready package</a:t>
+            </a:r>
+            <a:endParaRPr lang="en-US" sz="1000" dirty="0"/>
+          </a:p>
+        </p:txBody>
+      </p:sp>
+      <p:sp>
+        <p:nvSpPr>
+          <p:cNvPr id="48" name="Shape 46"/>
+          <p:cNvSpPr/>
+          <p:nvPr/>
+        </p:nvSpPr>
+        <p:spPr>
+          <a:xfrm>
+            <a:off x="9842602" y="3611880"/>
+            <a:ext cx="73152" cy="73152"/>
+          </a:xfrm>
+          <a:prstGeom prst="rect">
+            <a:avLst/>
+          </a:prstGeom>
+          <a:solidFill>
+            <a:srgbClr val="2E6FB5"/>
+          </a:solidFill>
+          <a:ln/>
+        </p:spPr>
+      </p:sp>
+      <p:sp>
+        <p:nvSpPr>
+          <p:cNvPr id="49" name="Text 47"/>
+          <p:cNvSpPr/>
+          <p:nvPr/>
+        </p:nvSpPr>
+        <p:spPr>
+          <a:xfrm>
+            <a:off x="10007194" y="3529584"/>
+            <a:ext cx="1532534" cy="566928"/>
+          </a:xfrm>
+          <a:prstGeom prst="rect">
+            <a:avLst/>
+          </a:prstGeom>
+          <a:noFill/>
+          <a:ln/>
+        </p:spPr>
+        <p:txBody>
+          <a:bodyPr wrap="square" lIns="0" tIns="0" rIns="0" bIns="0" rtlCol="0" anchor="t"/>
+          <a:lstStyle/>
+          <a:p>
+            <a:pPr indent="0" marL="0">
+              <a:lnSpc>
+                <a:spcPct val="95000"/>
+              </a:lnSpc>
+              <a:buNone/>
+            </a:pPr>
+            <a:r>
+              <a:rPr lang="en-US" sz="1000" dirty="0">
+                <a:solidFill>
+                  <a:srgbClr val="5A6472"/>
+                </a:solidFill>
+                <a:latin typeface="Calibri" pitchFamily="34" charset="0"/>
+                <a:ea typeface="Calibri" pitchFamily="34" charset="-122"/>
+                <a:cs typeface="Calibri" pitchFamily="34" charset="-120"/>
+              </a:rPr>
+              <a:t>Judges complex risks, binds &amp; documents</a:t>
+            </a:r>
+            <a:endParaRPr lang="en-US" sz="1000" dirty="0"/>
+          </a:p>
+        </p:txBody>
+      </p:sp>
+      <p:sp>
+        <p:nvSpPr>
+          <p:cNvPr id="50" name="Text 48"/>
+          <p:cNvSpPr/>
+          <p:nvPr/>
+        </p:nvSpPr>
+        <p:spPr>
+          <a:xfrm>
+            <a:off x="457200" y="4498848"/>
+            <a:ext cx="11247120" cy="292608"/>
+          </a:xfrm>
+          <a:prstGeom prst="rect">
+            <a:avLst/>
+          </a:prstGeom>
+          <a:noFill/>
+          <a:ln/>
+        </p:spPr>
+        <p:txBody>
+          <a:bodyPr wrap="square" lIns="0" tIns="0" rIns="0" bIns="0" rtlCol="0" anchor="ctr"/>
+          <a:lstStyle/>
+          <a:p>
+            <a:pPr indent="0" marL="0">
+              <a:buNone/>
+            </a:pPr>
+            <a:r>
+              <a:rPr lang="en-US" sz="1050" b="1" dirty="0">
+                <a:solidFill>
+                  <a:srgbClr val="12315B"/>
+                </a:solidFill>
+                <a:latin typeface="Calibri" pitchFamily="34" charset="0"/>
+                <a:ea typeface="Calibri" pitchFamily="34" charset="-122"/>
+                <a:cs typeface="Calibri" pitchFamily="34" charset="-120"/>
+              </a:rPr>
+              <a:t>ENABLING DATA &amp; SYSTEMS   </a:t>
+            </a:r>
+            <a:pPr indent="0" marL="0">
+              <a:buNone/>
+            </a:pPr>
+            <a:r>
+              <a:rPr lang="en-US" sz="1050" dirty="0">
+                <a:solidFill>
+                  <a:srgbClr val="5A6472"/>
+                </a:solidFill>
+                <a:latin typeface="Calibri" pitchFamily="34" charset="0"/>
+                <a:ea typeface="Calibri" pitchFamily="34" charset="-122"/>
+                <a:cs typeface="Calibri" pitchFamily="34" charset="-120"/>
+              </a:rPr>
+              <a:t>UW workbench · Document AI · Third-party data vendors · Catastrophe models · Rating engine · Policy admin</a:t>
+            </a:r>
+            <a:endParaRPr lang="en-US" sz="1050" dirty="0"/>
+          </a:p>
+        </p:txBody>
+      </p:sp>
+      <p:sp>
+        <p:nvSpPr>
+          <p:cNvPr id="51" name="Shape 49"/>
+          <p:cNvSpPr/>
+          <p:nvPr/>
+        </p:nvSpPr>
+        <p:spPr>
+          <a:xfrm>
+            <a:off x="457200" y="4864608"/>
+            <a:ext cx="11247120" cy="0"/>
+          </a:xfrm>
+          <a:prstGeom prst="line">
+            <a:avLst/>
+          </a:prstGeom>
+          <a:noFill/>
+          <a:ln w="12700">
+            <a:solidFill>
+              <a:srgbClr val="D3DCEA"/>
+            </a:solidFill>
+            <a:prstDash val="solid"/>
+          </a:ln>
+        </p:spPr>
+      </p:sp>
+      <p:sp>
+        <p:nvSpPr>
+          <p:cNvPr id="52" name="Text 50"/>
+          <p:cNvSpPr/>
+          <p:nvPr/>
+        </p:nvSpPr>
+        <p:spPr>
+          <a:xfrm>
+            <a:off x="457200" y="4974336"/>
+            <a:ext cx="5486400" cy="256032"/>
+          </a:xfrm>
+          <a:prstGeom prst="rect">
+            <a:avLst/>
+          </a:prstGeom>
+          <a:noFill/>
+          <a:ln/>
+        </p:spPr>
+        <p:txBody>
+          <a:bodyPr wrap="square" lIns="0" tIns="0" rIns="0" bIns="0" rtlCol="0" anchor="ctr"/>
+          <a:lstStyle/>
+          <a:p>
+            <a:pPr indent="0" marL="0">
+              <a:buNone/>
+            </a:pPr>
+            <a:r>
+              <a:rPr lang="en-US" sz="1100" b="1" spc="200" kern="0" dirty="0">
+                <a:solidFill>
+                  <a:srgbClr val="12315B"/>
+                </a:solidFill>
+                <a:latin typeface="Calibri" pitchFamily="34" charset="0"/>
+                <a:ea typeface="Calibri" pitchFamily="34" charset="-122"/>
+                <a:cs typeface="Calibri" pitchFamily="34" charset="-120"/>
+              </a:rPr>
+              <a:t>PROOF OF VALUE</a:t>
+            </a:r>
+            <a:endParaRPr lang="en-US" sz="1100" dirty="0"/>
+          </a:p>
+        </p:txBody>
+      </p:sp>
+      <p:sp>
+        <p:nvSpPr>
+          <p:cNvPr id="53" name="Shape 51"/>
+          <p:cNvSpPr/>
+          <p:nvPr/>
+        </p:nvSpPr>
+        <p:spPr>
+          <a:xfrm>
+            <a:off x="457200" y="5285232"/>
+            <a:ext cx="2103120" cy="1188720"/>
+          </a:xfrm>
+          <a:prstGeom prst="roundRect">
+            <a:avLst>
+              <a:gd name="adj" fmla="val 4615"/>
+            </a:avLst>
+          </a:prstGeom>
+          <a:solidFill>
+            <a:srgbClr val="EAF1FA"/>
+          </a:solidFill>
+          <a:ln w="12700">
+            <a:solidFill>
+              <a:srgbClr val="D3DCEA"/>
+            </a:solidFill>
+            <a:prstDash val="solid"/>
+          </a:ln>
+        </p:spPr>
+      </p:sp>
+      <p:sp>
+        <p:nvSpPr>
+          <p:cNvPr id="54" name="Text 52"/>
+          <p:cNvSpPr/>
+          <p:nvPr/>
+        </p:nvSpPr>
+        <p:spPr>
+          <a:xfrm>
+            <a:off x="502920" y="5404104"/>
+            <a:ext cx="2011680" cy="457200"/>
+          </a:xfrm>
+          <a:prstGeom prst="rect">
+            <a:avLst/>
+          </a:prstGeom>
+          <a:noFill/>
+          <a:ln/>
+        </p:spPr>
+        <p:txBody>
+          <a:bodyPr wrap="square" lIns="0" tIns="0" rIns="0" bIns="0" rtlCol="0" anchor="ctr"/>
+          <a:lstStyle/>
+          <a:p>
+            <a:pPr algn="ctr" indent="0" marL="0">
+              <a:buNone/>
+            </a:pPr>
+            <a:r>
+              <a:rPr lang="en-US" sz="2600" b="1" dirty="0">
+                <a:solidFill>
+                  <a:srgbClr val="12315B"/>
+                </a:solidFill>
+                <a:latin typeface="Cambria" pitchFamily="34" charset="0"/>
+                <a:ea typeface="Cambria" pitchFamily="34" charset="-122"/>
+                <a:cs typeface="Cambria" pitchFamily="34" charset="-120"/>
+              </a:rPr>
+              <a:t>40</a:t>
+            </a:r>
+            <a:pPr algn="ctr" indent="0" marL="0">
+              <a:buNone/>
+            </a:pPr>
+            <a:r>
+              <a:rPr lang="en-US" sz="1300" b="1" dirty="0">
+                <a:solidFill>
+                  <a:srgbClr val="2E6FB5"/>
+                </a:solidFill>
+                <a:latin typeface="Cambria" pitchFamily="34" charset="0"/>
+                <a:ea typeface="Cambria" pitchFamily="34" charset="-122"/>
+                <a:cs typeface="Cambria" pitchFamily="34" charset="-120"/>
+              </a:rPr>
+              <a:t>%</a:t>
+            </a:r>
+            <a:endParaRPr lang="en-US" sz="2600" dirty="0"/>
+          </a:p>
+        </p:txBody>
+      </p:sp>
+      <p:sp>
+        <p:nvSpPr>
+          <p:cNvPr id="55" name="Text 53"/>
+          <p:cNvSpPr/>
+          <p:nvPr/>
+        </p:nvSpPr>
+        <p:spPr>
+          <a:xfrm>
+            <a:off x="548640" y="5907024"/>
+            <a:ext cx="1920240" cy="502920"/>
+          </a:xfrm>
+          <a:prstGeom prst="rect">
+            <a:avLst/>
+          </a:prstGeom>
+          <a:noFill/>
+          <a:ln/>
+        </p:spPr>
+        <p:txBody>
+          <a:bodyPr wrap="square" lIns="0" tIns="0" rIns="0" bIns="0" rtlCol="0" anchor="t"/>
+          <a:lstStyle/>
+          <a:p>
+            <a:pPr algn="ctr" indent="0" marL="0">
+              <a:lnSpc>
+                <a:spcPct val="95000"/>
+              </a:lnSpc>
+              <a:buNone/>
+            </a:pPr>
+            <a:r>
+              <a:rPr lang="en-US" sz="950" dirty="0">
+                <a:solidFill>
+                  <a:srgbClr val="5A6472"/>
+                </a:solidFill>
+                <a:latin typeface="Calibri" pitchFamily="34" charset="0"/>
+                <a:ea typeface="Calibri" pitchFamily="34" charset="-122"/>
+                <a:cs typeface="Calibri" pitchFamily="34" charset="-120"/>
+              </a:rPr>
+              <a:t>Faster quote turnaround on in-appetite risks</a:t>
+            </a:r>
+            <a:endParaRPr lang="en-US" sz="950" dirty="0"/>
+          </a:p>
+        </p:txBody>
+      </p:sp>
+      <p:sp>
+        <p:nvSpPr>
+          <p:cNvPr id="56" name="Shape 54"/>
+          <p:cNvSpPr/>
+          <p:nvPr/>
+        </p:nvSpPr>
+        <p:spPr>
+          <a:xfrm>
+            <a:off x="2743200" y="5285232"/>
+            <a:ext cx="2103120" cy="1188720"/>
+          </a:xfrm>
+          <a:prstGeom prst="roundRect">
+            <a:avLst>
+              <a:gd name="adj" fmla="val 4615"/>
+            </a:avLst>
+          </a:prstGeom>
+          <a:solidFill>
+            <a:srgbClr val="EAF1FA"/>
+          </a:solidFill>
+          <a:ln w="12700">
+            <a:solidFill>
+              <a:srgbClr val="D3DCEA"/>
+            </a:solidFill>
+            <a:prstDash val="solid"/>
+          </a:ln>
+        </p:spPr>
+      </p:sp>
+      <p:sp>
+        <p:nvSpPr>
+          <p:cNvPr id="57" name="Text 55"/>
+          <p:cNvSpPr/>
+          <p:nvPr/>
+        </p:nvSpPr>
+        <p:spPr>
+          <a:xfrm>
+            <a:off x="2788920" y="5404104"/>
+            <a:ext cx="2011680" cy="457200"/>
+          </a:xfrm>
+          <a:prstGeom prst="rect">
+            <a:avLst/>
+          </a:prstGeom>
+          <a:noFill/>
+          <a:ln/>
+        </p:spPr>
+        <p:txBody>
+          <a:bodyPr wrap="square" lIns="0" tIns="0" rIns="0" bIns="0" rtlCol="0" anchor="ctr"/>
+          <a:lstStyle/>
+          <a:p>
+            <a:pPr algn="ctr" indent="0" marL="0">
+              <a:buNone/>
+            </a:pPr>
+            <a:r>
+              <a:rPr lang="en-US" sz="2600" b="1" dirty="0">
+                <a:solidFill>
+                  <a:srgbClr val="12315B"/>
+                </a:solidFill>
+                <a:latin typeface="Cambria" pitchFamily="34" charset="0"/>
+                <a:ea typeface="Cambria" pitchFamily="34" charset="-122"/>
+                <a:cs typeface="Cambria" pitchFamily="34" charset="-120"/>
+              </a:rPr>
+              <a:t>60</a:t>
+            </a:r>
+            <a:pPr algn="ctr" indent="0" marL="0">
+              <a:buNone/>
+            </a:pPr>
+            <a:r>
+              <a:rPr lang="en-US" sz="1300" b="1" dirty="0">
+                <a:solidFill>
+                  <a:srgbClr val="2E6FB5"/>
+                </a:solidFill>
+                <a:latin typeface="Cambria" pitchFamily="34" charset="0"/>
+                <a:ea typeface="Cambria" pitchFamily="34" charset="-122"/>
+                <a:cs typeface="Cambria" pitchFamily="34" charset="-120"/>
+              </a:rPr>
+              <a:t>%</a:t>
+            </a:r>
+            <a:endParaRPr lang="en-US" sz="2600" dirty="0"/>
+          </a:p>
+        </p:txBody>
+      </p:sp>
+      <p:sp>
+        <p:nvSpPr>
+          <p:cNvPr id="58" name="Text 56"/>
+          <p:cNvSpPr/>
+          <p:nvPr/>
+        </p:nvSpPr>
+        <p:spPr>
+          <a:xfrm>
+            <a:off x="2834640" y="5907024"/>
+            <a:ext cx="1920240" cy="502920"/>
+          </a:xfrm>
+          <a:prstGeom prst="rect">
+            <a:avLst/>
+          </a:prstGeom>
+          <a:noFill/>
+          <a:ln/>
+        </p:spPr>
+        <p:txBody>
+          <a:bodyPr wrap="square" lIns="0" tIns="0" rIns="0" bIns="0" rtlCol="0" anchor="t"/>
+          <a:lstStyle/>
+          <a:p>
+            <a:pPr algn="ctr" indent="0" marL="0">
+              <a:lnSpc>
+                <a:spcPct val="95000"/>
+              </a:lnSpc>
+              <a:buNone/>
+            </a:pPr>
+            <a:r>
+              <a:rPr lang="en-US" sz="950" dirty="0">
+                <a:solidFill>
+                  <a:srgbClr val="5A6472"/>
+                </a:solidFill>
+                <a:latin typeface="Calibri" pitchFamily="34" charset="0"/>
+                <a:ea typeface="Calibri" pitchFamily="34" charset="-122"/>
+                <a:cs typeface="Calibri" pitchFamily="34" charset="-120"/>
+              </a:rPr>
+              <a:t>Straight-through triage on clean submissions</a:t>
+            </a:r>
+            <a:endParaRPr lang="en-US" sz="950" dirty="0"/>
+          </a:p>
+        </p:txBody>
+      </p:sp>
+      <p:sp>
+        <p:nvSpPr>
+          <p:cNvPr id="59" name="Shape 57"/>
+          <p:cNvSpPr/>
+          <p:nvPr/>
+        </p:nvSpPr>
+        <p:spPr>
+          <a:xfrm>
+            <a:off x="5029200" y="5285232"/>
+            <a:ext cx="2103120" cy="1188720"/>
+          </a:xfrm>
+          <a:prstGeom prst="roundRect">
+            <a:avLst>
+              <a:gd name="adj" fmla="val 4615"/>
+            </a:avLst>
+          </a:prstGeom>
+          <a:solidFill>
+            <a:srgbClr val="EAF1FA"/>
+          </a:solidFill>
+          <a:ln w="12700">
+            <a:solidFill>
+              <a:srgbClr val="D3DCEA"/>
+            </a:solidFill>
+            <a:prstDash val="solid"/>
+          </a:ln>
+        </p:spPr>
+      </p:sp>
+      <p:sp>
+        <p:nvSpPr>
+          <p:cNvPr id="60" name="Text 58"/>
+          <p:cNvSpPr/>
+          <p:nvPr/>
+        </p:nvSpPr>
+        <p:spPr>
+          <a:xfrm>
+            <a:off x="5074920" y="5404104"/>
+            <a:ext cx="2011680" cy="457200"/>
+          </a:xfrm>
+          <a:prstGeom prst="rect">
+            <a:avLst/>
+          </a:prstGeom>
+          <a:noFill/>
+          <a:ln/>
+        </p:spPr>
+        <p:txBody>
+          <a:bodyPr wrap="square" lIns="0" tIns="0" rIns="0" bIns="0" rtlCol="0" anchor="ctr"/>
+          <a:lstStyle/>
+          <a:p>
+            <a:pPr algn="ctr" indent="0" marL="0">
+              <a:buNone/>
+            </a:pPr>
+            <a:r>
+              <a:rPr lang="en-US" sz="2600" b="1" dirty="0">
+                <a:solidFill>
+                  <a:srgbClr val="12315B"/>
+                </a:solidFill>
+                <a:latin typeface="Cambria" pitchFamily="34" charset="0"/>
+                <a:ea typeface="Cambria" pitchFamily="34" charset="-122"/>
+                <a:cs typeface="Cambria" pitchFamily="34" charset="-120"/>
+              </a:rPr>
+              <a:t>2–3</a:t>
+            </a:r>
+            <a:pPr algn="ctr" indent="0" marL="0">
+              <a:buNone/>
+            </a:pPr>
+            <a:r>
+              <a:rPr lang="en-US" sz="1300" b="1" dirty="0">
+                <a:solidFill>
+                  <a:srgbClr val="2E6FB5"/>
+                </a:solidFill>
+                <a:latin typeface="Cambria" pitchFamily="34" charset="0"/>
+                <a:ea typeface="Cambria" pitchFamily="34" charset="-122"/>
+                <a:cs typeface="Cambria" pitchFamily="34" charset="-120"/>
+              </a:rPr>
+              <a:t>pts</a:t>
+            </a:r>
+            <a:endParaRPr lang="en-US" sz="2600" dirty="0"/>
+          </a:p>
+        </p:txBody>
+      </p:sp>
+      <p:sp>
+        <p:nvSpPr>
+          <p:cNvPr id="61" name="Text 59"/>
+          <p:cNvSpPr/>
+          <p:nvPr/>
+        </p:nvSpPr>
+        <p:spPr>
+          <a:xfrm>
+            <a:off x="5120640" y="5907024"/>
+            <a:ext cx="1920240" cy="502920"/>
+          </a:xfrm>
+          <a:prstGeom prst="rect">
+            <a:avLst/>
+          </a:prstGeom>
+          <a:noFill/>
+          <a:ln/>
+        </p:spPr>
+        <p:txBody>
+          <a:bodyPr wrap="square" lIns="0" tIns="0" rIns="0" bIns="0" rtlCol="0" anchor="t"/>
+          <a:lstStyle/>
+          <a:p>
+            <a:pPr algn="ctr" indent="0" marL="0">
+              <a:lnSpc>
+                <a:spcPct val="95000"/>
+              </a:lnSpc>
+              <a:buNone/>
+            </a:pPr>
+            <a:r>
+              <a:rPr lang="en-US" sz="950" dirty="0">
+                <a:solidFill>
+                  <a:srgbClr val="5A6472"/>
+                </a:solidFill>
+                <a:latin typeface="Calibri" pitchFamily="34" charset="0"/>
+                <a:ea typeface="Calibri" pitchFamily="34" charset="-122"/>
+                <a:cs typeface="Calibri" pitchFamily="34" charset="-120"/>
+              </a:rPr>
+              <a:t>Loss-ratio gain from sharper selection</a:t>
+            </a:r>
+            <a:endParaRPr lang="en-US" sz="950" dirty="0"/>
+          </a:p>
+        </p:txBody>
+      </p:sp>
+      <p:sp>
+        <p:nvSpPr>
+          <p:cNvPr id="62" name="Shape 60"/>
+          <p:cNvSpPr/>
+          <p:nvPr/>
+        </p:nvSpPr>
+        <p:spPr>
+          <a:xfrm>
+            <a:off x="7406640" y="4974336"/>
+            <a:ext cx="4297680" cy="1298448"/>
+          </a:xfrm>
+          <a:prstGeom prst="roundRect">
+            <a:avLst>
+              <a:gd name="adj" fmla="val 4225"/>
+            </a:avLst>
+          </a:prstGeom>
+          <a:solidFill>
+            <a:srgbClr val="12315B"/>
+          </a:solidFill>
+          <a:ln/>
+        </p:spPr>
+      </p:sp>
+      <p:sp>
+        <p:nvSpPr>
+          <p:cNvPr id="63" name="Text 61"/>
+          <p:cNvSpPr/>
+          <p:nvPr/>
+        </p:nvSpPr>
+        <p:spPr>
+          <a:xfrm>
+            <a:off x="7662672" y="5120640"/>
+            <a:ext cx="3840480" cy="274320"/>
+          </a:xfrm>
+          <a:prstGeom prst="rect">
+            <a:avLst/>
+          </a:prstGeom>
+          <a:noFill/>
+          <a:ln/>
+        </p:spPr>
+        <p:txBody>
+          <a:bodyPr wrap="square" lIns="0" tIns="0" rIns="0" bIns="0" rtlCol="0" anchor="ctr"/>
+          <a:lstStyle/>
+          <a:p>
+            <a:pPr indent="0" marL="0">
+              <a:buNone/>
+            </a:pPr>
+            <a:r>
+              <a:rPr lang="en-US" sz="1100" b="1" spc="150" kern="0" dirty="0">
+                <a:solidFill>
+                  <a:srgbClr val="9DBDE6"/>
+                </a:solidFill>
+                <a:latin typeface="Calibri" pitchFamily="34" charset="0"/>
+                <a:ea typeface="Calibri" pitchFamily="34" charset="-122"/>
+                <a:cs typeface="Calibri" pitchFamily="34" charset="-120"/>
+              </a:rPr>
+              <a:t>CONTINUOUS FEEDBACK LOOP</a:t>
+            </a:r>
+            <a:endParaRPr lang="en-US" sz="1100" dirty="0"/>
+          </a:p>
+        </p:txBody>
+      </p:sp>
+      <p:sp>
+        <p:nvSpPr>
+          <p:cNvPr id="64" name="Text 62"/>
+          <p:cNvSpPr/>
+          <p:nvPr/>
+        </p:nvSpPr>
+        <p:spPr>
+          <a:xfrm>
+            <a:off x="7662672" y="5431536"/>
+            <a:ext cx="3840480" cy="777240"/>
+          </a:xfrm>
+          <a:prstGeom prst="rect">
+            <a:avLst/>
+          </a:prstGeom>
+          <a:noFill/>
+          <a:ln/>
+        </p:spPr>
+        <p:txBody>
+          <a:bodyPr wrap="square" lIns="0" tIns="0" rIns="0" bIns="0" rtlCol="0" anchor="ctr"/>
+          <a:lstStyle/>
+          <a:p>
+            <a:pPr indent="0" marL="0">
+              <a:lnSpc>
+                <a:spcPct val="100000"/>
+              </a:lnSpc>
+              <a:buNone/>
+            </a:pPr>
+            <a:r>
+              <a:rPr lang="en-US" sz="1200" dirty="0">
+                <a:solidFill>
+                  <a:srgbClr val="FFFFFF"/>
+                </a:solidFill>
+                <a:latin typeface="Calibri" pitchFamily="34" charset="0"/>
+                <a:ea typeface="Calibri" pitchFamily="34" charset="-122"/>
+                <a:cs typeface="Calibri" pitchFamily="34" charset="-120"/>
+              </a:rPr>
+              <a:t>Bound-account outcomes and emerging losses retrain the appetite and pricing models, compounding into a durable underwriting edge.</a:t>
+            </a:r>
+            <a:endParaRPr lang="en-US" sz="1200" dirty="0"/>
+          </a:p>
+        </p:txBody>
+      </p:sp>
+      <p:sp>
+        <p:nvSpPr>
+          <p:cNvPr id="65" name="Shape 63"/>
+          <p:cNvSpPr/>
+          <p:nvPr/>
+        </p:nvSpPr>
+        <p:spPr>
+          <a:xfrm>
+            <a:off x="457200" y="6419088"/>
+            <a:ext cx="11247120" cy="0"/>
+          </a:xfrm>
+          <a:prstGeom prst="line">
+            <a:avLst/>
+          </a:prstGeom>
+          <a:noFill/>
+          <a:ln w="12700">
+            <a:solidFill>
+              <a:srgbClr val="D3DCEA"/>
+            </a:solidFill>
+            <a:prstDash val="solid"/>
+          </a:ln>
+        </p:spPr>
+      </p:sp>
+      <p:sp>
+        <p:nvSpPr>
+          <p:cNvPr id="66" name="Text 64"/>
+          <p:cNvSpPr/>
+          <p:nvPr/>
+        </p:nvSpPr>
+        <p:spPr>
+          <a:xfrm>
+            <a:off x="457200" y="6473952"/>
+            <a:ext cx="7315200" cy="274320"/>
+          </a:xfrm>
+          <a:prstGeom prst="rect">
+            <a:avLst/>
+          </a:prstGeom>
+          <a:noFill/>
+          <a:ln/>
+        </p:spPr>
+        <p:txBody>
+          <a:bodyPr wrap="square" lIns="0" tIns="0" rIns="0" bIns="0" rtlCol="0" anchor="ctr"/>
+          <a:lstStyle/>
+          <a:p>
+            <a:pPr indent="0" marL="0">
+              <a:buNone/>
+            </a:pPr>
+            <a:r>
+              <a:rPr lang="en-US" sz="900" dirty="0">
+                <a:solidFill>
+                  <a:srgbClr val="5A6472"/>
+                </a:solidFill>
+                <a:latin typeface="Calibri" pitchFamily="34" charset="0"/>
+                <a:ea typeface="Calibri" pitchFamily="34" charset="-122"/>
+                <a:cs typeface="Calibri" pitchFamily="34" charset="-120"/>
+              </a:rPr>
+              <a:t>Liberty Mutual  |  AI Signal Portfolio</a:t>
+            </a:r>
+            <a:endParaRPr lang="en-US" sz="900" dirty="0"/>
+          </a:p>
+        </p:txBody>
+      </p:sp>
+      <p:sp>
+        <p:nvSpPr>
+          <p:cNvPr id="67" name="Text 65"/>
+          <p:cNvSpPr/>
+          <p:nvPr/>
+        </p:nvSpPr>
+        <p:spPr>
+          <a:xfrm>
+            <a:off x="9875520" y="6473952"/>
+            <a:ext cx="1280160" cy="274320"/>
+          </a:xfrm>
+          <a:prstGeom prst="rect">
+            <a:avLst/>
+          </a:prstGeom>
+          <a:noFill/>
+          <a:ln/>
+        </p:spPr>
+        <p:txBody>
+          <a:bodyPr wrap="square" lIns="0" tIns="0" rIns="0" bIns="0" rtlCol="0" anchor="ctr"/>
+          <a:lstStyle/>
+          <a:p>
+            <a:pPr algn="r" indent="0" marL="0">
+              <a:buNone/>
+            </a:pPr>
+            <a:r>
+              <a:rPr lang="en-US" sz="900" dirty="0">
+                <a:solidFill>
+                  <a:srgbClr val="5A6472"/>
+                </a:solidFill>
+                <a:latin typeface="Calibri" pitchFamily="34" charset="0"/>
+                <a:ea typeface="Calibri" pitchFamily="34" charset="-122"/>
+                <a:cs typeface="Calibri" pitchFamily="34" charset="-120"/>
+              </a:rPr>
               <a:t>CONFIDENTIAL</a:t>
             </a:r>
             <a:endParaRPr lang="en-US" sz="900" dirty="0"/>
@@ -3204,13 +5454,13 @@
       </p:sp>
       <p:sp>
         <p:nvSpPr>
-          <p:cNvPr id="32" name="Text 30"/>
-          <p:cNvSpPr/>
-          <p:nvPr/>
-        </p:nvSpPr>
-        <p:spPr>
-          <a:xfrm>
-            <a:off x="11155680" y="6473952"/>
+          <p:cNvPr id="68" name="Text 66"/>
+          <p:cNvSpPr/>
+          <p:nvPr/>
+        </p:nvSpPr>
+        <p:spPr>
+          <a:xfrm>
+            <a:off x="11247120" y="6473952"/>
             <a:ext cx="457200" cy="274320"/>
           </a:xfrm>
           <a:prstGeom prst="rect">

--- a/Liberty_Mutual_AI_Signals.pptx
+++ b/Liberty_Mutual_AI_Signals.pptx
@@ -972,7 +972,7 @@
         </p:nvSpPr>
         <p:spPr>
           <a:xfrm>
-            <a:off x="457200" y="384048"/>
+            <a:off x="457200" y="365760"/>
             <a:ext cx="7315200" cy="274320"/>
           </a:xfrm>
           <a:prstGeom prst="rect">
@@ -1011,7 +1011,7 @@
         </p:nvSpPr>
         <p:spPr>
           <a:xfrm>
-            <a:off x="457200" y="658368"/>
+            <a:off x="457200" y="640080"/>
             <a:ext cx="11247120" cy="566928"/>
           </a:xfrm>
           <a:prstGeom prst="rect">
@@ -1031,7 +1031,7 @@
               <a:buNone/>
             </a:pPr>
             <a:r>
-              <a:rPr lang="en-US" sz="2700" b="1" dirty="0">
+              <a:rPr lang="en-US" sz="2600" b="1" dirty="0">
                 <a:solidFill>
                   <a:srgbClr val="1A2333"/>
                 </a:solidFill>
@@ -1039,108 +1039,30 @@
                 <a:ea typeface="Cambria" pitchFamily="34" charset="-122"/>
                 <a:cs typeface="Cambria" pitchFamily="34" charset="-120"/>
               </a:rPr>
-              <a:t>Renewal Improvement: turning at-risk policies into retained premium</a:t>
-            </a:r>
-            <a:endParaRPr lang="en-US" sz="2700" dirty="0"/>
-          </a:p>
-        </p:txBody>
-      </p:sp>
-      <p:sp>
-        <p:nvSpPr>
-          <p:cNvPr id="4" name="Text 2"/>
-          <p:cNvSpPr/>
-          <p:nvPr/>
-        </p:nvSpPr>
-        <p:spPr>
-          <a:xfrm>
-            <a:off x="457200" y="1280160"/>
-            <a:ext cx="11247120" cy="365760"/>
-          </a:xfrm>
-          <a:prstGeom prst="rect">
-            <a:avLst/>
-          </a:prstGeom>
-          <a:noFill/>
-          <a:ln/>
-        </p:spPr>
-        <p:txBody>
-          <a:bodyPr wrap="square" lIns="0" tIns="0" rIns="0" bIns="0" rtlCol="0" anchor="ctr"/>
-          <a:lstStyle/>
-          <a:p>
-            <a:pPr indent="0" marL="0">
-              <a:buNone/>
-            </a:pPr>
-            <a:r>
-              <a:rPr lang="en-US" sz="1350" i="1" dirty="0">
-                <a:solidFill>
-                  <a:srgbClr val="2E6FB5"/>
-                </a:solidFill>
-                <a:latin typeface="Calibri" pitchFamily="34" charset="0"/>
-                <a:ea typeface="Calibri" pitchFamily="34" charset="-122"/>
-                <a:cs typeface="Calibri" pitchFamily="34" charset="-120"/>
-              </a:rPr>
-              <a:t>A daily churn signal flags renewal risk 60–90 days out and drives the right retention action on the policies where it changes the outcome.</a:t>
-            </a:r>
-            <a:endParaRPr lang="en-US" sz="1350" dirty="0"/>
-          </a:p>
-        </p:txBody>
-      </p:sp>
-      <p:sp>
-        <p:nvSpPr>
-          <p:cNvPr id="5" name="Text 3"/>
-          <p:cNvSpPr/>
-          <p:nvPr/>
-        </p:nvSpPr>
-        <p:spPr>
-          <a:xfrm>
-            <a:off x="457200" y="1755648"/>
-            <a:ext cx="5486400" cy="256032"/>
-          </a:xfrm>
-          <a:prstGeom prst="rect">
-            <a:avLst/>
-          </a:prstGeom>
-          <a:noFill/>
-          <a:ln/>
-        </p:spPr>
-        <p:txBody>
-          <a:bodyPr wrap="square" lIns="0" tIns="0" rIns="0" bIns="0" rtlCol="0" anchor="ctr"/>
-          <a:lstStyle/>
-          <a:p>
-            <a:pPr indent="0" marL="0">
-              <a:buNone/>
-            </a:pPr>
-            <a:r>
-              <a:rPr lang="en-US" sz="1100" b="1" spc="200" kern="0" dirty="0">
-                <a:solidFill>
-                  <a:srgbClr val="12315B"/>
-                </a:solidFill>
-                <a:latin typeface="Calibri" pitchFamily="34" charset="0"/>
-                <a:ea typeface="Calibri" pitchFamily="34" charset="-122"/>
-                <a:cs typeface="Calibri" pitchFamily="34" charset="-120"/>
-              </a:rPr>
-              <a:t>END-TO-END JOURNEY</a:t>
-            </a:r>
-            <a:endParaRPr lang="en-US" sz="1100" dirty="0"/>
-          </a:p>
-        </p:txBody>
-      </p:sp>
-      <p:sp>
-        <p:nvSpPr>
-          <p:cNvPr id="6" name="Shape 4"/>
-          <p:cNvSpPr/>
-          <p:nvPr/>
-        </p:nvSpPr>
-        <p:spPr>
-          <a:xfrm>
-            <a:off x="457200" y="2084832"/>
-            <a:ext cx="2044598" cy="2286000"/>
+              <a:t>Renewal Improvement: a churn signal that protects premium before customers walk</a:t>
+            </a:r>
+            <a:endParaRPr lang="en-US" sz="2600" dirty="0"/>
+          </a:p>
+        </p:txBody>
+      </p:sp>
+      <p:sp>
+        <p:nvSpPr>
+          <p:cNvPr id="4" name="Shape 2"/>
+          <p:cNvSpPr/>
+          <p:nvPr/>
+        </p:nvSpPr>
+        <p:spPr>
+          <a:xfrm>
+            <a:off x="457200" y="1298448"/>
+            <a:ext cx="11247120" cy="512064"/>
           </a:xfrm>
           <a:prstGeom prst="roundRect">
             <a:avLst>
-              <a:gd name="adj" fmla="val 2236"/>
+              <a:gd name="adj" fmla="val 8929"/>
             </a:avLst>
           </a:prstGeom>
           <a:solidFill>
-            <a:srgbClr val="FFFFFF"/>
+            <a:srgbClr val="EAF1FA"/>
           </a:solidFill>
           <a:ln w="12700">
             <a:solidFill>
@@ -1152,13 +1074,132 @@
       </p:sp>
       <p:sp>
         <p:nvSpPr>
+          <p:cNvPr id="5" name="Text 3"/>
+          <p:cNvSpPr/>
+          <p:nvPr/>
+        </p:nvSpPr>
+        <p:spPr>
+          <a:xfrm>
+            <a:off x="685800" y="1298448"/>
+            <a:ext cx="10789920" cy="512064"/>
+          </a:xfrm>
+          <a:prstGeom prst="rect">
+            <a:avLst/>
+          </a:prstGeom>
+          <a:noFill/>
+          <a:ln/>
+        </p:spPr>
+        <p:txBody>
+          <a:bodyPr wrap="square" lIns="0" tIns="0" rIns="0" bIns="0" rtlCol="0" anchor="ctr"/>
+          <a:lstStyle/>
+          <a:p>
+            <a:pPr indent="0" marL="0">
+              <a:buNone/>
+            </a:pPr>
+            <a:r>
+              <a:rPr lang="en-US" sz="1100" b="1" spc="100" kern="0" dirty="0">
+                <a:solidFill>
+                  <a:srgbClr val="12315B"/>
+                </a:solidFill>
+                <a:latin typeface="Calibri" pitchFamily="34" charset="0"/>
+                <a:ea typeface="Calibri" pitchFamily="34" charset="-122"/>
+                <a:cs typeface="Calibri" pitchFamily="34" charset="-120"/>
+              </a:rPr>
+              <a:t>THE CHALLENGE    </a:t>
+            </a:r>
+            <a:pPr indent="0" marL="0">
+              <a:buNone/>
+            </a:pPr>
+            <a:r>
+              <a:rPr lang="en-US" sz="1250" i="1" dirty="0">
+                <a:solidFill>
+                  <a:srgbClr val="1A2333"/>
+                </a:solidFill>
+                <a:latin typeface="Calibri" pitchFamily="34" charset="0"/>
+                <a:ea typeface="Calibri" pitchFamily="34" charset="-122"/>
+                <a:cs typeface="Calibri" pitchFamily="34" charset="-120"/>
+              </a:rPr>
+              <a:t>Most lapses are predictable and preventable — yet retention effort is spread evenly, spent late, and aimed at the wrong policies.</a:t>
+            </a:r>
+            <a:endParaRPr lang="en-US" sz="1100" dirty="0"/>
+          </a:p>
+        </p:txBody>
+      </p:sp>
+      <p:sp>
+        <p:nvSpPr>
+          <p:cNvPr id="6" name="Text 4"/>
+          <p:cNvSpPr/>
+          <p:nvPr/>
+        </p:nvSpPr>
+        <p:spPr>
+          <a:xfrm>
+            <a:off x="457200" y="1938528"/>
+            <a:ext cx="5486400" cy="256032"/>
+          </a:xfrm>
+          <a:prstGeom prst="rect">
+            <a:avLst/>
+          </a:prstGeom>
+          <a:noFill/>
+          <a:ln/>
+        </p:spPr>
+        <p:txBody>
+          <a:bodyPr wrap="square" lIns="0" tIns="0" rIns="0" bIns="0" rtlCol="0" anchor="ctr"/>
+          <a:lstStyle/>
+          <a:p>
+            <a:pPr indent="0" marL="0">
+              <a:buNone/>
+            </a:pPr>
+            <a:r>
+              <a:rPr lang="en-US" sz="1100" b="1" spc="200" kern="0" dirty="0">
+                <a:solidFill>
+                  <a:srgbClr val="12315B"/>
+                </a:solidFill>
+                <a:latin typeface="Calibri" pitchFamily="34" charset="0"/>
+                <a:ea typeface="Calibri" pitchFamily="34" charset="-122"/>
+                <a:cs typeface="Calibri" pitchFamily="34" charset="-120"/>
+              </a:rPr>
+              <a:t>HOW THE SIGNAL RESPONDS</a:t>
+            </a:r>
+            <a:endParaRPr lang="en-US" sz="1100" dirty="0"/>
+          </a:p>
+        </p:txBody>
+      </p:sp>
+      <p:sp>
+        <p:nvSpPr>
           <p:cNvPr id="7" name="Shape 5"/>
           <p:cNvSpPr/>
           <p:nvPr/>
         </p:nvSpPr>
         <p:spPr>
           <a:xfrm>
-            <a:off x="603504" y="2231136"/>
+            <a:off x="457200" y="2249424"/>
+            <a:ext cx="2044598" cy="2103120"/>
+          </a:xfrm>
+          <a:prstGeom prst="roundRect">
+            <a:avLst>
+              <a:gd name="adj" fmla="val 2236"/>
+            </a:avLst>
+          </a:prstGeom>
+          <a:solidFill>
+            <a:srgbClr val="FFFFFF"/>
+          </a:solidFill>
+          <a:ln w="12700">
+            <a:solidFill>
+              <a:srgbClr val="D3DCEA"/>
+            </a:solidFill>
+            <a:prstDash val="solid"/>
+          </a:ln>
+        </p:spPr>
+      </p:sp>
+      <p:sp>
+        <p:nvSpPr>
+          <p:cNvPr id="8" name="Shape 6"/>
+          <p:cNvSpPr/>
+          <p:nvPr/>
+        </p:nvSpPr>
+        <p:spPr>
+          <a:xfrm>
+            <a:off x="603504" y="2395728"/>
             <a:ext cx="365760" cy="365760"/>
           </a:xfrm>
           <a:prstGeom prst="roundRect">
@@ -1174,13 +1215,13 @@
       </p:sp>
       <p:sp>
         <p:nvSpPr>
-          <p:cNvPr id="8" name="Text 6"/>
-          <p:cNvSpPr/>
-          <p:nvPr/>
-        </p:nvSpPr>
-        <p:spPr>
-          <a:xfrm>
-            <a:off x="603504" y="2231136"/>
+          <p:cNvPr id="9" name="Text 7"/>
+          <p:cNvSpPr/>
+          <p:nvPr/>
+        </p:nvSpPr>
+        <p:spPr>
+          <a:xfrm>
+            <a:off x="603504" y="2395728"/>
             <a:ext cx="365760" cy="365760"/>
           </a:xfrm>
           <a:prstGeom prst="rect">
@@ -1213,13 +1254,13 @@
       </p:sp>
       <p:sp>
         <p:nvSpPr>
-          <p:cNvPr id="9" name="Text 7"/>
-          <p:cNvSpPr/>
-          <p:nvPr/>
-        </p:nvSpPr>
-        <p:spPr>
-          <a:xfrm>
-            <a:off x="1060704" y="2212848"/>
+          <p:cNvPr id="10" name="Text 8"/>
+          <p:cNvSpPr/>
+          <p:nvPr/>
+        </p:nvSpPr>
+        <p:spPr>
+          <a:xfrm>
+            <a:off x="1060704" y="2377440"/>
             <a:ext cx="1313078" cy="640080"/>
           </a:xfrm>
           <a:prstGeom prst="rect">
@@ -1255,13 +1296,13 @@
       </p:sp>
       <p:sp>
         <p:nvSpPr>
-          <p:cNvPr id="10" name="Shape 8"/>
-          <p:cNvSpPr/>
-          <p:nvPr/>
-        </p:nvSpPr>
-        <p:spPr>
-          <a:xfrm>
-            <a:off x="640080" y="3008376"/>
+          <p:cNvPr id="11" name="Shape 9"/>
+          <p:cNvSpPr/>
+          <p:nvPr/>
+        </p:nvSpPr>
+        <p:spPr>
+          <a:xfrm>
+            <a:off x="640080" y="3172968"/>
             <a:ext cx="73152" cy="73152"/>
           </a:xfrm>
           <a:prstGeom prst="rect">
@@ -1275,14 +1316,14 @@
       </p:sp>
       <p:sp>
         <p:nvSpPr>
-          <p:cNvPr id="11" name="Text 9"/>
-          <p:cNvSpPr/>
-          <p:nvPr/>
-        </p:nvSpPr>
-        <p:spPr>
-          <a:xfrm>
-            <a:off x="804672" y="2926080"/>
-            <a:ext cx="1532534" cy="566928"/>
+          <p:cNvPr id="12" name="Text 10"/>
+          <p:cNvSpPr/>
+          <p:nvPr/>
+        </p:nvSpPr>
+        <p:spPr>
+          <a:xfrm>
+            <a:off x="804672" y="3090672"/>
+            <a:ext cx="1532534" cy="548640"/>
           </a:xfrm>
           <a:prstGeom prst="rect">
             <a:avLst/>
@@ -1317,13 +1358,13 @@
       </p:sp>
       <p:sp>
         <p:nvSpPr>
-          <p:cNvPr id="12" name="Shape 10"/>
-          <p:cNvSpPr/>
-          <p:nvPr/>
-        </p:nvSpPr>
-        <p:spPr>
-          <a:xfrm>
-            <a:off x="640080" y="3611880"/>
+          <p:cNvPr id="13" name="Shape 11"/>
+          <p:cNvSpPr/>
+          <p:nvPr/>
+        </p:nvSpPr>
+        <p:spPr>
+          <a:xfrm>
+            <a:off x="640080" y="3758184"/>
             <a:ext cx="73152" cy="73152"/>
           </a:xfrm>
           <a:prstGeom prst="rect">
@@ -1337,14 +1378,14 @@
       </p:sp>
       <p:sp>
         <p:nvSpPr>
-          <p:cNvPr id="13" name="Text 11"/>
-          <p:cNvSpPr/>
-          <p:nvPr/>
-        </p:nvSpPr>
-        <p:spPr>
-          <a:xfrm>
-            <a:off x="804672" y="3529584"/>
-            <a:ext cx="1532534" cy="566928"/>
+          <p:cNvPr id="14" name="Text 12"/>
+          <p:cNvSpPr/>
+          <p:nvPr/>
+        </p:nvSpPr>
+        <p:spPr>
+          <a:xfrm>
+            <a:off x="804672" y="3675888"/>
+            <a:ext cx="1532534" cy="548640"/>
           </a:xfrm>
           <a:prstGeom prst="rect">
             <a:avLst/>
@@ -1379,13 +1420,13 @@
       </p:sp>
       <p:sp>
         <p:nvSpPr>
-          <p:cNvPr id="14" name="Shape 12"/>
-          <p:cNvSpPr/>
-          <p:nvPr/>
-        </p:nvSpPr>
-        <p:spPr>
-          <a:xfrm>
-            <a:off x="2483510" y="3099816"/>
+          <p:cNvPr id="15" name="Shape 13"/>
+          <p:cNvSpPr/>
+          <p:nvPr/>
+        </p:nvSpPr>
+        <p:spPr>
+          <a:xfrm>
+            <a:off x="2483510" y="3172968"/>
             <a:ext cx="292608" cy="256032"/>
           </a:xfrm>
           <a:prstGeom prst="chevron">
@@ -1404,14 +1445,14 @@
       </p:sp>
       <p:sp>
         <p:nvSpPr>
-          <p:cNvPr id="15" name="Shape 13"/>
-          <p:cNvSpPr/>
-          <p:nvPr/>
-        </p:nvSpPr>
-        <p:spPr>
-          <a:xfrm>
-            <a:off x="2757830" y="2084832"/>
-            <a:ext cx="2044598" cy="2286000"/>
+          <p:cNvPr id="16" name="Shape 14"/>
+          <p:cNvSpPr/>
+          <p:nvPr/>
+        </p:nvSpPr>
+        <p:spPr>
+          <a:xfrm>
+            <a:off x="2757830" y="2249424"/>
+            <a:ext cx="2044598" cy="2103120"/>
           </a:xfrm>
           <a:prstGeom prst="roundRect">
             <a:avLst>
@@ -1431,13 +1472,13 @@
       </p:sp>
       <p:sp>
         <p:nvSpPr>
-          <p:cNvPr id="16" name="Shape 14"/>
-          <p:cNvSpPr/>
-          <p:nvPr/>
-        </p:nvSpPr>
-        <p:spPr>
-          <a:xfrm>
-            <a:off x="2904134" y="2231136"/>
+          <p:cNvPr id="17" name="Shape 15"/>
+          <p:cNvSpPr/>
+          <p:nvPr/>
+        </p:nvSpPr>
+        <p:spPr>
+          <a:xfrm>
+            <a:off x="2904134" y="2395728"/>
             <a:ext cx="365760" cy="365760"/>
           </a:xfrm>
           <a:prstGeom prst="roundRect">
@@ -1453,13 +1494,13 @@
       </p:sp>
       <p:sp>
         <p:nvSpPr>
-          <p:cNvPr id="17" name="Text 15"/>
-          <p:cNvSpPr/>
-          <p:nvPr/>
-        </p:nvSpPr>
-        <p:spPr>
-          <a:xfrm>
-            <a:off x="2904134" y="2231136"/>
+          <p:cNvPr id="18" name="Text 16"/>
+          <p:cNvSpPr/>
+          <p:nvPr/>
+        </p:nvSpPr>
+        <p:spPr>
+          <a:xfrm>
+            <a:off x="2904134" y="2395728"/>
             <a:ext cx="365760" cy="365760"/>
           </a:xfrm>
           <a:prstGeom prst="rect">
@@ -1492,13 +1533,13 @@
       </p:sp>
       <p:sp>
         <p:nvSpPr>
-          <p:cNvPr id="18" name="Text 16"/>
-          <p:cNvSpPr/>
-          <p:nvPr/>
-        </p:nvSpPr>
-        <p:spPr>
-          <a:xfrm>
-            <a:off x="3361334" y="2212848"/>
+          <p:cNvPr id="19" name="Text 17"/>
+          <p:cNvSpPr/>
+          <p:nvPr/>
+        </p:nvSpPr>
+        <p:spPr>
+          <a:xfrm>
+            <a:off x="3361334" y="2377440"/>
             <a:ext cx="1313078" cy="640080"/>
           </a:xfrm>
           <a:prstGeom prst="rect">
@@ -1534,13 +1575,13 @@
       </p:sp>
       <p:sp>
         <p:nvSpPr>
-          <p:cNvPr id="19" name="Shape 17"/>
-          <p:cNvSpPr/>
-          <p:nvPr/>
-        </p:nvSpPr>
-        <p:spPr>
-          <a:xfrm>
-            <a:off x="2940710" y="3008376"/>
+          <p:cNvPr id="20" name="Shape 18"/>
+          <p:cNvSpPr/>
+          <p:nvPr/>
+        </p:nvSpPr>
+        <p:spPr>
+          <a:xfrm>
+            <a:off x="2940710" y="3172968"/>
             <a:ext cx="73152" cy="73152"/>
           </a:xfrm>
           <a:prstGeom prst="rect">
@@ -1554,14 +1595,14 @@
       </p:sp>
       <p:sp>
         <p:nvSpPr>
-          <p:cNvPr id="20" name="Text 18"/>
-          <p:cNvSpPr/>
-          <p:nvPr/>
-        </p:nvSpPr>
-        <p:spPr>
-          <a:xfrm>
-            <a:off x="3105302" y="2926080"/>
-            <a:ext cx="1532534" cy="566928"/>
+          <p:cNvPr id="21" name="Text 19"/>
+          <p:cNvSpPr/>
+          <p:nvPr/>
+        </p:nvSpPr>
+        <p:spPr>
+          <a:xfrm>
+            <a:off x="3105302" y="3090672"/>
+            <a:ext cx="1532534" cy="548640"/>
           </a:xfrm>
           <a:prstGeom prst="rect">
             <a:avLst/>
@@ -1596,13 +1637,13 @@
       </p:sp>
       <p:sp>
         <p:nvSpPr>
-          <p:cNvPr id="21" name="Shape 19"/>
-          <p:cNvSpPr/>
-          <p:nvPr/>
-        </p:nvSpPr>
-        <p:spPr>
-          <a:xfrm>
-            <a:off x="2940710" y="3611880"/>
+          <p:cNvPr id="22" name="Shape 20"/>
+          <p:cNvSpPr/>
+          <p:nvPr/>
+        </p:nvSpPr>
+        <p:spPr>
+          <a:xfrm>
+            <a:off x="2940710" y="3758184"/>
             <a:ext cx="73152" cy="73152"/>
           </a:xfrm>
           <a:prstGeom prst="rect">
@@ -1616,14 +1657,14 @@
       </p:sp>
       <p:sp>
         <p:nvSpPr>
-          <p:cNvPr id="22" name="Text 20"/>
-          <p:cNvSpPr/>
-          <p:nvPr/>
-        </p:nvSpPr>
-        <p:spPr>
-          <a:xfrm>
-            <a:off x="3105302" y="3529584"/>
-            <a:ext cx="1532534" cy="566928"/>
+          <p:cNvPr id="23" name="Text 21"/>
+          <p:cNvSpPr/>
+          <p:nvPr/>
+        </p:nvSpPr>
+        <p:spPr>
+          <a:xfrm>
+            <a:off x="3105302" y="3675888"/>
+            <a:ext cx="1532534" cy="548640"/>
           </a:xfrm>
           <a:prstGeom prst="rect">
             <a:avLst/>
@@ -1658,13 +1699,13 @@
       </p:sp>
       <p:sp>
         <p:nvSpPr>
-          <p:cNvPr id="23" name="Shape 21"/>
-          <p:cNvSpPr/>
-          <p:nvPr/>
-        </p:nvSpPr>
-        <p:spPr>
-          <a:xfrm>
-            <a:off x="4784141" y="3099816"/>
+          <p:cNvPr id="24" name="Shape 22"/>
+          <p:cNvSpPr/>
+          <p:nvPr/>
+        </p:nvSpPr>
+        <p:spPr>
+          <a:xfrm>
+            <a:off x="4784141" y="3172968"/>
             <a:ext cx="292608" cy="256032"/>
           </a:xfrm>
           <a:prstGeom prst="chevron">
@@ -1683,14 +1724,14 @@
       </p:sp>
       <p:sp>
         <p:nvSpPr>
-          <p:cNvPr id="24" name="Shape 22"/>
-          <p:cNvSpPr/>
-          <p:nvPr/>
-        </p:nvSpPr>
-        <p:spPr>
-          <a:xfrm>
-            <a:off x="5058461" y="2084832"/>
-            <a:ext cx="2044598" cy="2286000"/>
+          <p:cNvPr id="25" name="Shape 23"/>
+          <p:cNvSpPr/>
+          <p:nvPr/>
+        </p:nvSpPr>
+        <p:spPr>
+          <a:xfrm>
+            <a:off x="5058461" y="2249424"/>
+            <a:ext cx="2044598" cy="2103120"/>
           </a:xfrm>
           <a:prstGeom prst="roundRect">
             <a:avLst>
@@ -1710,13 +1751,13 @@
       </p:sp>
       <p:sp>
         <p:nvSpPr>
-          <p:cNvPr id="25" name="Shape 23"/>
-          <p:cNvSpPr/>
-          <p:nvPr/>
-        </p:nvSpPr>
-        <p:spPr>
-          <a:xfrm>
-            <a:off x="5204765" y="2231136"/>
+          <p:cNvPr id="26" name="Shape 24"/>
+          <p:cNvSpPr/>
+          <p:nvPr/>
+        </p:nvSpPr>
+        <p:spPr>
+          <a:xfrm>
+            <a:off x="5204765" y="2395728"/>
             <a:ext cx="365760" cy="365760"/>
           </a:xfrm>
           <a:prstGeom prst="roundRect">
@@ -1732,13 +1773,13 @@
       </p:sp>
       <p:sp>
         <p:nvSpPr>
-          <p:cNvPr id="26" name="Text 24"/>
-          <p:cNvSpPr/>
-          <p:nvPr/>
-        </p:nvSpPr>
-        <p:spPr>
-          <a:xfrm>
-            <a:off x="5204765" y="2231136"/>
+          <p:cNvPr id="27" name="Text 25"/>
+          <p:cNvSpPr/>
+          <p:nvPr/>
+        </p:nvSpPr>
+        <p:spPr>
+          <a:xfrm>
+            <a:off x="5204765" y="2395728"/>
             <a:ext cx="365760" cy="365760"/>
           </a:xfrm>
           <a:prstGeom prst="rect">
@@ -1771,13 +1812,13 @@
       </p:sp>
       <p:sp>
         <p:nvSpPr>
-          <p:cNvPr id="27" name="Text 25"/>
-          <p:cNvSpPr/>
-          <p:nvPr/>
-        </p:nvSpPr>
-        <p:spPr>
-          <a:xfrm>
-            <a:off x="5661965" y="2212848"/>
+          <p:cNvPr id="28" name="Text 26"/>
+          <p:cNvSpPr/>
+          <p:nvPr/>
+        </p:nvSpPr>
+        <p:spPr>
+          <a:xfrm>
+            <a:off x="5661965" y="2377440"/>
             <a:ext cx="1313078" cy="640080"/>
           </a:xfrm>
           <a:prstGeom prst="rect">
@@ -1813,13 +1854,13 @@
       </p:sp>
       <p:sp>
         <p:nvSpPr>
-          <p:cNvPr id="28" name="Shape 26"/>
-          <p:cNvSpPr/>
-          <p:nvPr/>
-        </p:nvSpPr>
-        <p:spPr>
-          <a:xfrm>
-            <a:off x="5241341" y="3008376"/>
+          <p:cNvPr id="29" name="Shape 27"/>
+          <p:cNvSpPr/>
+          <p:nvPr/>
+        </p:nvSpPr>
+        <p:spPr>
+          <a:xfrm>
+            <a:off x="5241341" y="3172968"/>
             <a:ext cx="73152" cy="73152"/>
           </a:xfrm>
           <a:prstGeom prst="rect">
@@ -1833,14 +1874,14 @@
       </p:sp>
       <p:sp>
         <p:nvSpPr>
-          <p:cNvPr id="29" name="Text 27"/>
-          <p:cNvSpPr/>
-          <p:nvPr/>
-        </p:nvSpPr>
-        <p:spPr>
-          <a:xfrm>
-            <a:off x="5405933" y="2926080"/>
-            <a:ext cx="1532534" cy="566928"/>
+          <p:cNvPr id="30" name="Text 28"/>
+          <p:cNvSpPr/>
+          <p:nvPr/>
+        </p:nvSpPr>
+        <p:spPr>
+          <a:xfrm>
+            <a:off x="5405933" y="3090672"/>
+            <a:ext cx="1532534" cy="548640"/>
           </a:xfrm>
           <a:prstGeom prst="rect">
             <a:avLst/>
@@ -1875,13 +1916,13 @@
       </p:sp>
       <p:sp>
         <p:nvSpPr>
-          <p:cNvPr id="30" name="Shape 28"/>
-          <p:cNvSpPr/>
-          <p:nvPr/>
-        </p:nvSpPr>
-        <p:spPr>
-          <a:xfrm>
-            <a:off x="5241341" y="3611880"/>
+          <p:cNvPr id="31" name="Shape 29"/>
+          <p:cNvSpPr/>
+          <p:nvPr/>
+        </p:nvSpPr>
+        <p:spPr>
+          <a:xfrm>
+            <a:off x="5241341" y="3758184"/>
             <a:ext cx="73152" cy="73152"/>
           </a:xfrm>
           <a:prstGeom prst="rect">
@@ -1895,14 +1936,14 @@
       </p:sp>
       <p:sp>
         <p:nvSpPr>
-          <p:cNvPr id="31" name="Text 29"/>
-          <p:cNvSpPr/>
-          <p:nvPr/>
-        </p:nvSpPr>
-        <p:spPr>
-          <a:xfrm>
-            <a:off x="5405933" y="3529584"/>
-            <a:ext cx="1532534" cy="566928"/>
+          <p:cNvPr id="32" name="Text 30"/>
+          <p:cNvSpPr/>
+          <p:nvPr/>
+        </p:nvSpPr>
+        <p:spPr>
+          <a:xfrm>
+            <a:off x="5405933" y="3675888"/>
+            <a:ext cx="1532534" cy="548640"/>
           </a:xfrm>
           <a:prstGeom prst="rect">
             <a:avLst/>
@@ -1937,13 +1978,13 @@
       </p:sp>
       <p:sp>
         <p:nvSpPr>
-          <p:cNvPr id="32" name="Shape 30"/>
-          <p:cNvSpPr/>
-          <p:nvPr/>
-        </p:nvSpPr>
-        <p:spPr>
-          <a:xfrm>
-            <a:off x="7084771" y="3099816"/>
+          <p:cNvPr id="33" name="Shape 31"/>
+          <p:cNvSpPr/>
+          <p:nvPr/>
+        </p:nvSpPr>
+        <p:spPr>
+          <a:xfrm>
+            <a:off x="7084771" y="3172968"/>
             <a:ext cx="292608" cy="256032"/>
           </a:xfrm>
           <a:prstGeom prst="chevron">
@@ -1962,14 +2003,14 @@
       </p:sp>
       <p:sp>
         <p:nvSpPr>
-          <p:cNvPr id="33" name="Shape 31"/>
-          <p:cNvSpPr/>
-          <p:nvPr/>
-        </p:nvSpPr>
-        <p:spPr>
-          <a:xfrm>
-            <a:off x="7359091" y="2084832"/>
-            <a:ext cx="2044598" cy="2286000"/>
+          <p:cNvPr id="34" name="Shape 32"/>
+          <p:cNvSpPr/>
+          <p:nvPr/>
+        </p:nvSpPr>
+        <p:spPr>
+          <a:xfrm>
+            <a:off x="7359091" y="2249424"/>
+            <a:ext cx="2044598" cy="2103120"/>
           </a:xfrm>
           <a:prstGeom prst="roundRect">
             <a:avLst>
@@ -1989,13 +2030,13 @@
       </p:sp>
       <p:sp>
         <p:nvSpPr>
-          <p:cNvPr id="34" name="Shape 32"/>
-          <p:cNvSpPr/>
-          <p:nvPr/>
-        </p:nvSpPr>
-        <p:spPr>
-          <a:xfrm>
-            <a:off x="7505395" y="2231136"/>
+          <p:cNvPr id="35" name="Shape 33"/>
+          <p:cNvSpPr/>
+          <p:nvPr/>
+        </p:nvSpPr>
+        <p:spPr>
+          <a:xfrm>
+            <a:off x="7505395" y="2395728"/>
             <a:ext cx="365760" cy="365760"/>
           </a:xfrm>
           <a:prstGeom prst="roundRect">
@@ -2011,13 +2052,13 @@
       </p:sp>
       <p:sp>
         <p:nvSpPr>
-          <p:cNvPr id="35" name="Text 33"/>
-          <p:cNvSpPr/>
-          <p:nvPr/>
-        </p:nvSpPr>
-        <p:spPr>
-          <a:xfrm>
-            <a:off x="7505395" y="2231136"/>
+          <p:cNvPr id="36" name="Text 34"/>
+          <p:cNvSpPr/>
+          <p:nvPr/>
+        </p:nvSpPr>
+        <p:spPr>
+          <a:xfrm>
+            <a:off x="7505395" y="2395728"/>
             <a:ext cx="365760" cy="365760"/>
           </a:xfrm>
           <a:prstGeom prst="rect">
@@ -2050,13 +2091,13 @@
       </p:sp>
       <p:sp>
         <p:nvSpPr>
-          <p:cNvPr id="36" name="Text 34"/>
-          <p:cNvSpPr/>
-          <p:nvPr/>
-        </p:nvSpPr>
-        <p:spPr>
-          <a:xfrm>
-            <a:off x="7962595" y="2212848"/>
+          <p:cNvPr id="37" name="Text 35"/>
+          <p:cNvSpPr/>
+          <p:nvPr/>
+        </p:nvSpPr>
+        <p:spPr>
+          <a:xfrm>
+            <a:off x="7962595" y="2377440"/>
             <a:ext cx="1313078" cy="640080"/>
           </a:xfrm>
           <a:prstGeom prst="rect">
@@ -2092,13 +2133,13 @@
       </p:sp>
       <p:sp>
         <p:nvSpPr>
-          <p:cNvPr id="37" name="Shape 35"/>
-          <p:cNvSpPr/>
-          <p:nvPr/>
-        </p:nvSpPr>
-        <p:spPr>
-          <a:xfrm>
-            <a:off x="7541971" y="3008376"/>
+          <p:cNvPr id="38" name="Shape 36"/>
+          <p:cNvSpPr/>
+          <p:nvPr/>
+        </p:nvSpPr>
+        <p:spPr>
+          <a:xfrm>
+            <a:off x="7541971" y="3172968"/>
             <a:ext cx="73152" cy="73152"/>
           </a:xfrm>
           <a:prstGeom prst="rect">
@@ -2112,14 +2153,14 @@
       </p:sp>
       <p:sp>
         <p:nvSpPr>
-          <p:cNvPr id="38" name="Text 36"/>
-          <p:cNvSpPr/>
-          <p:nvPr/>
-        </p:nvSpPr>
-        <p:spPr>
-          <a:xfrm>
-            <a:off x="7706563" y="2926080"/>
-            <a:ext cx="1532534" cy="566928"/>
+          <p:cNvPr id="39" name="Text 37"/>
+          <p:cNvSpPr/>
+          <p:nvPr/>
+        </p:nvSpPr>
+        <p:spPr>
+          <a:xfrm>
+            <a:off x="7706563" y="3090672"/>
+            <a:ext cx="1532534" cy="548640"/>
           </a:xfrm>
           <a:prstGeom prst="rect">
             <a:avLst/>
@@ -2154,13 +2195,13 @@
       </p:sp>
       <p:sp>
         <p:nvSpPr>
-          <p:cNvPr id="39" name="Shape 37"/>
-          <p:cNvSpPr/>
-          <p:nvPr/>
-        </p:nvSpPr>
-        <p:spPr>
-          <a:xfrm>
-            <a:off x="7541971" y="3611880"/>
+          <p:cNvPr id="40" name="Shape 38"/>
+          <p:cNvSpPr/>
+          <p:nvPr/>
+        </p:nvSpPr>
+        <p:spPr>
+          <a:xfrm>
+            <a:off x="7541971" y="3758184"/>
             <a:ext cx="73152" cy="73152"/>
           </a:xfrm>
           <a:prstGeom prst="rect">
@@ -2174,14 +2215,14 @@
       </p:sp>
       <p:sp>
         <p:nvSpPr>
-          <p:cNvPr id="40" name="Text 38"/>
-          <p:cNvSpPr/>
-          <p:nvPr/>
-        </p:nvSpPr>
-        <p:spPr>
-          <a:xfrm>
-            <a:off x="7706563" y="3529584"/>
-            <a:ext cx="1532534" cy="566928"/>
+          <p:cNvPr id="41" name="Text 39"/>
+          <p:cNvSpPr/>
+          <p:nvPr/>
+        </p:nvSpPr>
+        <p:spPr>
+          <a:xfrm>
+            <a:off x="7706563" y="3675888"/>
+            <a:ext cx="1532534" cy="548640"/>
           </a:xfrm>
           <a:prstGeom prst="rect">
             <a:avLst/>
@@ -2216,13 +2257,13 @@
       </p:sp>
       <p:sp>
         <p:nvSpPr>
-          <p:cNvPr id="41" name="Shape 39"/>
-          <p:cNvSpPr/>
-          <p:nvPr/>
-        </p:nvSpPr>
-        <p:spPr>
-          <a:xfrm>
-            <a:off x="9385402" y="3099816"/>
+          <p:cNvPr id="42" name="Shape 40"/>
+          <p:cNvSpPr/>
+          <p:nvPr/>
+        </p:nvSpPr>
+        <p:spPr>
+          <a:xfrm>
+            <a:off x="9385402" y="3172968"/>
             <a:ext cx="292608" cy="256032"/>
           </a:xfrm>
           <a:prstGeom prst="chevron">
@@ -2241,14 +2282,14 @@
       </p:sp>
       <p:sp>
         <p:nvSpPr>
-          <p:cNvPr id="42" name="Shape 40"/>
-          <p:cNvSpPr/>
-          <p:nvPr/>
-        </p:nvSpPr>
-        <p:spPr>
-          <a:xfrm>
-            <a:off x="9659722" y="2084832"/>
-            <a:ext cx="2044598" cy="2286000"/>
+          <p:cNvPr id="43" name="Shape 41"/>
+          <p:cNvSpPr/>
+          <p:nvPr/>
+        </p:nvSpPr>
+        <p:spPr>
+          <a:xfrm>
+            <a:off x="9659722" y="2249424"/>
+            <a:ext cx="2044598" cy="2103120"/>
           </a:xfrm>
           <a:prstGeom prst="roundRect">
             <a:avLst>
@@ -2268,13 +2309,13 @@
       </p:sp>
       <p:sp>
         <p:nvSpPr>
-          <p:cNvPr id="43" name="Shape 41"/>
-          <p:cNvSpPr/>
-          <p:nvPr/>
-        </p:nvSpPr>
-        <p:spPr>
-          <a:xfrm>
-            <a:off x="9806026" y="2231136"/>
+          <p:cNvPr id="44" name="Shape 42"/>
+          <p:cNvSpPr/>
+          <p:nvPr/>
+        </p:nvSpPr>
+        <p:spPr>
+          <a:xfrm>
+            <a:off x="9806026" y="2395728"/>
             <a:ext cx="365760" cy="365760"/>
           </a:xfrm>
           <a:prstGeom prst="roundRect">
@@ -2290,13 +2331,13 @@
       </p:sp>
       <p:sp>
         <p:nvSpPr>
-          <p:cNvPr id="44" name="Text 42"/>
-          <p:cNvSpPr/>
-          <p:nvPr/>
-        </p:nvSpPr>
-        <p:spPr>
-          <a:xfrm>
-            <a:off x="9806026" y="2231136"/>
+          <p:cNvPr id="45" name="Text 43"/>
+          <p:cNvSpPr/>
+          <p:nvPr/>
+        </p:nvSpPr>
+        <p:spPr>
+          <a:xfrm>
+            <a:off x="9806026" y="2395728"/>
             <a:ext cx="365760" cy="365760"/>
           </a:xfrm>
           <a:prstGeom prst="rect">
@@ -2329,13 +2370,13 @@
       </p:sp>
       <p:sp>
         <p:nvSpPr>
-          <p:cNvPr id="45" name="Text 43"/>
-          <p:cNvSpPr/>
-          <p:nvPr/>
-        </p:nvSpPr>
-        <p:spPr>
-          <a:xfrm>
-            <a:off x="10263226" y="2212848"/>
+          <p:cNvPr id="46" name="Text 44"/>
+          <p:cNvSpPr/>
+          <p:nvPr/>
+        </p:nvSpPr>
+        <p:spPr>
+          <a:xfrm>
+            <a:off x="10263226" y="2377440"/>
             <a:ext cx="1313078" cy="640080"/>
           </a:xfrm>
           <a:prstGeom prst="rect">
@@ -2371,13 +2412,13 @@
       </p:sp>
       <p:sp>
         <p:nvSpPr>
-          <p:cNvPr id="46" name="Shape 44"/>
-          <p:cNvSpPr/>
-          <p:nvPr/>
-        </p:nvSpPr>
-        <p:spPr>
-          <a:xfrm>
-            <a:off x="9842602" y="3008376"/>
+          <p:cNvPr id="47" name="Shape 45"/>
+          <p:cNvSpPr/>
+          <p:nvPr/>
+        </p:nvSpPr>
+        <p:spPr>
+          <a:xfrm>
+            <a:off x="9842602" y="3172968"/>
             <a:ext cx="73152" cy="73152"/>
           </a:xfrm>
           <a:prstGeom prst="rect">
@@ -2391,14 +2432,14 @@
       </p:sp>
       <p:sp>
         <p:nvSpPr>
-          <p:cNvPr id="47" name="Text 45"/>
-          <p:cNvSpPr/>
-          <p:nvPr/>
-        </p:nvSpPr>
-        <p:spPr>
-          <a:xfrm>
-            <a:off x="10007194" y="2926080"/>
-            <a:ext cx="1532534" cy="566928"/>
+          <p:cNvPr id="48" name="Text 46"/>
+          <p:cNvSpPr/>
+          <p:nvPr/>
+        </p:nvSpPr>
+        <p:spPr>
+          <a:xfrm>
+            <a:off x="10007194" y="3090672"/>
+            <a:ext cx="1532534" cy="548640"/>
           </a:xfrm>
           <a:prstGeom prst="rect">
             <a:avLst/>
@@ -2433,13 +2474,13 @@
       </p:sp>
       <p:sp>
         <p:nvSpPr>
-          <p:cNvPr id="48" name="Shape 46"/>
-          <p:cNvSpPr/>
-          <p:nvPr/>
-        </p:nvSpPr>
-        <p:spPr>
-          <a:xfrm>
-            <a:off x="9842602" y="3611880"/>
+          <p:cNvPr id="49" name="Shape 47"/>
+          <p:cNvSpPr/>
+          <p:nvPr/>
+        </p:nvSpPr>
+        <p:spPr>
+          <a:xfrm>
+            <a:off x="9842602" y="3758184"/>
             <a:ext cx="73152" cy="73152"/>
           </a:xfrm>
           <a:prstGeom prst="rect">
@@ -2453,14 +2494,14 @@
       </p:sp>
       <p:sp>
         <p:nvSpPr>
-          <p:cNvPr id="49" name="Text 47"/>
-          <p:cNvSpPr/>
-          <p:nvPr/>
-        </p:nvSpPr>
-        <p:spPr>
-          <a:xfrm>
-            <a:off x="10007194" y="3529584"/>
-            <a:ext cx="1532534" cy="566928"/>
+          <p:cNvPr id="50" name="Text 48"/>
+          <p:cNvSpPr/>
+          <p:nvPr/>
+        </p:nvSpPr>
+        <p:spPr>
+          <a:xfrm>
+            <a:off x="10007194" y="3675888"/>
+            <a:ext cx="1532534" cy="548640"/>
           </a:xfrm>
           <a:prstGeom prst="rect">
             <a:avLst/>
@@ -2495,14 +2536,14 @@
       </p:sp>
       <p:sp>
         <p:nvSpPr>
-          <p:cNvPr id="50" name="Text 48"/>
-          <p:cNvSpPr/>
-          <p:nvPr/>
-        </p:nvSpPr>
-        <p:spPr>
-          <a:xfrm>
-            <a:off x="457200" y="4498848"/>
-            <a:ext cx="11247120" cy="292608"/>
+          <p:cNvPr id="51" name="Text 49"/>
+          <p:cNvSpPr/>
+          <p:nvPr/>
+        </p:nvSpPr>
+        <p:spPr>
+          <a:xfrm>
+            <a:off x="457200" y="4480560"/>
+            <a:ext cx="11247120" cy="274320"/>
           </a:xfrm>
           <a:prstGeom prst="rect">
             <a:avLst/>
@@ -2548,13 +2589,13 @@
       </p:sp>
       <p:sp>
         <p:nvSpPr>
-          <p:cNvPr id="51" name="Shape 49"/>
-          <p:cNvSpPr/>
-          <p:nvPr/>
-        </p:nvSpPr>
-        <p:spPr>
-          <a:xfrm>
-            <a:off x="457200" y="4864608"/>
+          <p:cNvPr id="52" name="Shape 50"/>
+          <p:cNvSpPr/>
+          <p:nvPr/>
+        </p:nvSpPr>
+        <p:spPr>
+          <a:xfrm>
+            <a:off x="457200" y="4828032"/>
             <a:ext cx="11247120" cy="0"/>
           </a:xfrm>
           <a:prstGeom prst="line">
@@ -2571,13 +2612,13 @@
       </p:sp>
       <p:sp>
         <p:nvSpPr>
-          <p:cNvPr id="52" name="Text 50"/>
-          <p:cNvSpPr/>
-          <p:nvPr/>
-        </p:nvSpPr>
-        <p:spPr>
-          <a:xfrm>
-            <a:off x="457200" y="4974336"/>
+          <p:cNvPr id="53" name="Text 51"/>
+          <p:cNvSpPr/>
+          <p:nvPr/>
+        </p:nvSpPr>
+        <p:spPr>
+          <a:xfrm>
+            <a:off x="457200" y="4937760"/>
             <a:ext cx="5486400" cy="256032"/>
           </a:xfrm>
           <a:prstGeom prst="rect">
@@ -2602,7 +2643,7 @@
                 <a:ea typeface="Calibri" pitchFamily="34" charset="-122"/>
                 <a:cs typeface="Calibri" pitchFamily="34" charset="-120"/>
               </a:rPr>
-              <a:t>PROOF OF VALUE</a:t>
+              <a:t>THE PAYOFF</a:t>
             </a:r>
             <a:endParaRPr lang="en-US" sz="1100" dirty="0"/>
           </a:p>
@@ -2610,18 +2651,18 @@
       </p:sp>
       <p:sp>
         <p:nvSpPr>
-          <p:cNvPr id="53" name="Shape 51"/>
-          <p:cNvSpPr/>
-          <p:nvPr/>
-        </p:nvSpPr>
-        <p:spPr>
-          <a:xfrm>
-            <a:off x="457200" y="5285232"/>
-            <a:ext cx="2103120" cy="1188720"/>
+          <p:cNvPr id="54" name="Shape 52"/>
+          <p:cNvSpPr/>
+          <p:nvPr/>
+        </p:nvSpPr>
+        <p:spPr>
+          <a:xfrm>
+            <a:off x="457200" y="5230368"/>
+            <a:ext cx="2103120" cy="1152144"/>
           </a:xfrm>
           <a:prstGeom prst="roundRect">
             <a:avLst>
-              <a:gd name="adj" fmla="val 4615"/>
+              <a:gd name="adj" fmla="val 4762"/>
             </a:avLst>
           </a:prstGeom>
           <a:solidFill>
@@ -2637,14 +2678,14 @@
       </p:sp>
       <p:sp>
         <p:nvSpPr>
-          <p:cNvPr id="54" name="Text 52"/>
-          <p:cNvSpPr/>
-          <p:nvPr/>
-        </p:nvSpPr>
-        <p:spPr>
-          <a:xfrm>
-            <a:off x="502920" y="5404104"/>
-            <a:ext cx="2011680" cy="457200"/>
+          <p:cNvPr id="55" name="Text 53"/>
+          <p:cNvSpPr/>
+          <p:nvPr/>
+        </p:nvSpPr>
+        <p:spPr>
+          <a:xfrm>
+            <a:off x="502920" y="5340096"/>
+            <a:ext cx="2011680" cy="438912"/>
           </a:xfrm>
           <a:prstGeom prst="rect">
             <a:avLst/>
@@ -2660,7 +2701,7 @@
               <a:buNone/>
             </a:pPr>
             <a:r>
-              <a:rPr lang="en-US" sz="2600" b="1" dirty="0">
+              <a:rPr lang="en-US" sz="2500" b="1" dirty="0">
                 <a:solidFill>
                   <a:srgbClr val="12315B"/>
                 </a:solidFill>
@@ -2684,20 +2725,20 @@
               </a:rPr>
               <a:t>pts</a:t>
             </a:r>
-            <a:endParaRPr lang="en-US" sz="2600" dirty="0"/>
-          </a:p>
-        </p:txBody>
-      </p:sp>
-      <p:sp>
-        <p:nvSpPr>
-          <p:cNvPr id="55" name="Text 53"/>
-          <p:cNvSpPr/>
-          <p:nvPr/>
-        </p:nvSpPr>
-        <p:spPr>
-          <a:xfrm>
-            <a:off x="548640" y="5907024"/>
-            <a:ext cx="1920240" cy="502920"/>
+            <a:endParaRPr lang="en-US" sz="2500" dirty="0"/>
+          </a:p>
+        </p:txBody>
+      </p:sp>
+      <p:sp>
+        <p:nvSpPr>
+          <p:cNvPr id="56" name="Text 54"/>
+          <p:cNvSpPr/>
+          <p:nvPr/>
+        </p:nvSpPr>
+        <p:spPr>
+          <a:xfrm>
+            <a:off x="548640" y="5815584"/>
+            <a:ext cx="1920240" cy="512064"/>
           </a:xfrm>
           <a:prstGeom prst="rect">
             <a:avLst/>
@@ -2732,18 +2773,18 @@
       </p:sp>
       <p:sp>
         <p:nvSpPr>
-          <p:cNvPr id="56" name="Shape 54"/>
-          <p:cNvSpPr/>
-          <p:nvPr/>
-        </p:nvSpPr>
-        <p:spPr>
-          <a:xfrm>
-            <a:off x="2743200" y="5285232"/>
-            <a:ext cx="2103120" cy="1188720"/>
+          <p:cNvPr id="57" name="Shape 55"/>
+          <p:cNvSpPr/>
+          <p:nvPr/>
+        </p:nvSpPr>
+        <p:spPr>
+          <a:xfrm>
+            <a:off x="2743200" y="5230368"/>
+            <a:ext cx="2103120" cy="1152144"/>
           </a:xfrm>
           <a:prstGeom prst="roundRect">
             <a:avLst>
-              <a:gd name="adj" fmla="val 4615"/>
+              <a:gd name="adj" fmla="val 4762"/>
             </a:avLst>
           </a:prstGeom>
           <a:solidFill>
@@ -2759,14 +2800,14 @@
       </p:sp>
       <p:sp>
         <p:nvSpPr>
-          <p:cNvPr id="57" name="Text 55"/>
-          <p:cNvSpPr/>
-          <p:nvPr/>
-        </p:nvSpPr>
-        <p:spPr>
-          <a:xfrm>
-            <a:off x="2788920" y="5404104"/>
-            <a:ext cx="2011680" cy="457200"/>
+          <p:cNvPr id="58" name="Text 56"/>
+          <p:cNvSpPr/>
+          <p:nvPr/>
+        </p:nvSpPr>
+        <p:spPr>
+          <a:xfrm>
+            <a:off x="2788920" y="5340096"/>
+            <a:ext cx="2011680" cy="438912"/>
           </a:xfrm>
           <a:prstGeom prst="rect">
             <a:avLst/>
@@ -2782,7 +2823,7 @@
               <a:buNone/>
             </a:pPr>
             <a:r>
-              <a:rPr lang="en-US" sz="2600" b="1" dirty="0">
+              <a:rPr lang="en-US" sz="2500" b="1" dirty="0">
                 <a:solidFill>
                   <a:srgbClr val="12315B"/>
                 </a:solidFill>
@@ -2795,20 +2836,20 @@
             <a:pPr algn="ctr" indent="0" marL="0">
               <a:buNone/>
             </a:pPr>
-            <a:endParaRPr lang="en-US" sz="2600" dirty="0"/>
-          </a:p>
-        </p:txBody>
-      </p:sp>
-      <p:sp>
-        <p:nvSpPr>
-          <p:cNvPr id="58" name="Text 56"/>
-          <p:cNvSpPr/>
-          <p:nvPr/>
-        </p:nvSpPr>
-        <p:spPr>
-          <a:xfrm>
-            <a:off x="2834640" y="5907024"/>
-            <a:ext cx="1920240" cy="502920"/>
+            <a:endParaRPr lang="en-US" sz="2500" dirty="0"/>
+          </a:p>
+        </p:txBody>
+      </p:sp>
+      <p:sp>
+        <p:nvSpPr>
+          <p:cNvPr id="59" name="Text 57"/>
+          <p:cNvSpPr/>
+          <p:nvPr/>
+        </p:nvSpPr>
+        <p:spPr>
+          <a:xfrm>
+            <a:off x="2834640" y="5815584"/>
+            <a:ext cx="1920240" cy="512064"/>
           </a:xfrm>
           <a:prstGeom prst="rect">
             <a:avLst/>
@@ -2843,18 +2884,18 @@
       </p:sp>
       <p:sp>
         <p:nvSpPr>
-          <p:cNvPr id="59" name="Shape 57"/>
-          <p:cNvSpPr/>
-          <p:nvPr/>
-        </p:nvSpPr>
-        <p:spPr>
-          <a:xfrm>
-            <a:off x="5029200" y="5285232"/>
-            <a:ext cx="2103120" cy="1188720"/>
+          <p:cNvPr id="60" name="Shape 58"/>
+          <p:cNvSpPr/>
+          <p:nvPr/>
+        </p:nvSpPr>
+        <p:spPr>
+          <a:xfrm>
+            <a:off x="5029200" y="5230368"/>
+            <a:ext cx="2103120" cy="1152144"/>
           </a:xfrm>
           <a:prstGeom prst="roundRect">
             <a:avLst>
-              <a:gd name="adj" fmla="val 4615"/>
+              <a:gd name="adj" fmla="val 4762"/>
             </a:avLst>
           </a:prstGeom>
           <a:solidFill>
@@ -2870,14 +2911,14 @@
       </p:sp>
       <p:sp>
         <p:nvSpPr>
-          <p:cNvPr id="60" name="Text 58"/>
-          <p:cNvSpPr/>
-          <p:nvPr/>
-        </p:nvSpPr>
-        <p:spPr>
-          <a:xfrm>
-            <a:off x="5074920" y="5404104"/>
-            <a:ext cx="2011680" cy="457200"/>
+          <p:cNvPr id="61" name="Text 59"/>
+          <p:cNvSpPr/>
+          <p:nvPr/>
+        </p:nvSpPr>
+        <p:spPr>
+          <a:xfrm>
+            <a:off x="5074920" y="5340096"/>
+            <a:ext cx="2011680" cy="438912"/>
           </a:xfrm>
           <a:prstGeom prst="rect">
             <a:avLst/>
@@ -2893,7 +2934,7 @@
               <a:buNone/>
             </a:pPr>
             <a:r>
-              <a:rPr lang="en-US" sz="2600" b="1" dirty="0">
+              <a:rPr lang="en-US" sz="2500" b="1" dirty="0">
                 <a:solidFill>
                   <a:srgbClr val="12315B"/>
                 </a:solidFill>
@@ -2917,20 +2958,20 @@
               </a:rPr>
               <a:t>d</a:t>
             </a:r>
-            <a:endParaRPr lang="en-US" sz="2600" dirty="0"/>
-          </a:p>
-        </p:txBody>
-      </p:sp>
-      <p:sp>
-        <p:nvSpPr>
-          <p:cNvPr id="61" name="Text 59"/>
-          <p:cNvSpPr/>
-          <p:nvPr/>
-        </p:nvSpPr>
-        <p:spPr>
-          <a:xfrm>
-            <a:off x="5120640" y="5907024"/>
-            <a:ext cx="1920240" cy="502920"/>
+            <a:endParaRPr lang="en-US" sz="2500" dirty="0"/>
+          </a:p>
+        </p:txBody>
+      </p:sp>
+      <p:sp>
+        <p:nvSpPr>
+          <p:cNvPr id="62" name="Text 60"/>
+          <p:cNvSpPr/>
+          <p:nvPr/>
+        </p:nvSpPr>
+        <p:spPr>
+          <a:xfrm>
+            <a:off x="5120640" y="5815584"/>
+            <a:ext cx="1920240" cy="512064"/>
           </a:xfrm>
           <a:prstGeom prst="rect">
             <a:avLst/>
@@ -2965,13 +3006,13 @@
       </p:sp>
       <p:sp>
         <p:nvSpPr>
-          <p:cNvPr id="62" name="Shape 60"/>
-          <p:cNvSpPr/>
-          <p:nvPr/>
-        </p:nvSpPr>
-        <p:spPr>
-          <a:xfrm>
-            <a:off x="7406640" y="4974336"/>
+          <p:cNvPr id="63" name="Shape 61"/>
+          <p:cNvSpPr/>
+          <p:nvPr/>
+        </p:nvSpPr>
+        <p:spPr>
+          <a:xfrm>
+            <a:off x="7406640" y="4937760"/>
             <a:ext cx="4297680" cy="1298448"/>
           </a:xfrm>
           <a:prstGeom prst="roundRect">
@@ -2987,13 +3028,13 @@
       </p:sp>
       <p:sp>
         <p:nvSpPr>
-          <p:cNvPr id="63" name="Text 61"/>
-          <p:cNvSpPr/>
-          <p:nvPr/>
-        </p:nvSpPr>
-        <p:spPr>
-          <a:xfrm>
-            <a:off x="7662672" y="5120640"/>
+          <p:cNvPr id="64" name="Text 62"/>
+          <p:cNvSpPr/>
+          <p:nvPr/>
+        </p:nvSpPr>
+        <p:spPr>
+          <a:xfrm>
+            <a:off x="7662672" y="5084064"/>
             <a:ext cx="3840480" cy="274320"/>
           </a:xfrm>
           <a:prstGeom prst="rect">
@@ -3018,7 +3059,7 @@
                 <a:ea typeface="Calibri" pitchFamily="34" charset="-122"/>
                 <a:cs typeface="Calibri" pitchFamily="34" charset="-120"/>
               </a:rPr>
-              <a:t>CONTINUOUS FEEDBACK LOOP</a:t>
+              <a:t>COMPOUNDING ADVANTAGE</a:t>
             </a:r>
             <a:endParaRPr lang="en-US" sz="1100" dirty="0"/>
           </a:p>
@@ -3026,13 +3067,13 @@
       </p:sp>
       <p:sp>
         <p:nvSpPr>
-          <p:cNvPr id="64" name="Text 62"/>
-          <p:cNvSpPr/>
-          <p:nvPr/>
-        </p:nvSpPr>
-        <p:spPr>
-          <a:xfrm>
-            <a:off x="7662672" y="5431536"/>
+          <p:cNvPr id="65" name="Text 63"/>
+          <p:cNvSpPr/>
+          <p:nvPr/>
+        </p:nvSpPr>
+        <p:spPr>
+          <a:xfrm>
+            <a:off x="7662672" y="5394960"/>
             <a:ext cx="3840480" cy="777240"/>
           </a:xfrm>
           <a:prstGeom prst="rect">
@@ -3068,7 +3109,7 @@
       </p:sp>
       <p:sp>
         <p:nvSpPr>
-          <p:cNvPr id="65" name="Shape 63"/>
+          <p:cNvPr id="66" name="Shape 64"/>
           <p:cNvSpPr/>
           <p:nvPr/>
         </p:nvSpPr>
@@ -3091,7 +3132,7 @@
       </p:sp>
       <p:sp>
         <p:nvSpPr>
-          <p:cNvPr id="66" name="Text 64"/>
+          <p:cNvPr id="67" name="Text 65"/>
           <p:cNvSpPr/>
           <p:nvPr/>
         </p:nvSpPr>
@@ -3130,7 +3171,7 @@
       </p:sp>
       <p:sp>
         <p:nvSpPr>
-          <p:cNvPr id="67" name="Text 65"/>
+          <p:cNvPr id="68" name="Text 66"/>
           <p:cNvSpPr/>
           <p:nvPr/>
         </p:nvSpPr>
@@ -3169,7 +3210,7 @@
       </p:sp>
       <p:sp>
         <p:nvSpPr>
-          <p:cNvPr id="68" name="Text 66"/>
+          <p:cNvPr id="69" name="Text 67"/>
           <p:cNvSpPr/>
           <p:nvPr/>
         </p:nvSpPr>
@@ -3246,7 +3287,7 @@
         </p:nvSpPr>
         <p:spPr>
           <a:xfrm>
-            <a:off x="457200" y="384048"/>
+            <a:off x="457200" y="365760"/>
             <a:ext cx="7315200" cy="274320"/>
           </a:xfrm>
           <a:prstGeom prst="rect">
@@ -3285,7 +3326,7 @@
         </p:nvSpPr>
         <p:spPr>
           <a:xfrm>
-            <a:off x="457200" y="658368"/>
+            <a:off x="457200" y="640080"/>
             <a:ext cx="11247120" cy="566928"/>
           </a:xfrm>
           <a:prstGeom prst="rect">
@@ -3305,7 +3346,7 @@
               <a:buNone/>
             </a:pPr>
             <a:r>
-              <a:rPr lang="en-US" sz="2700" b="1" dirty="0">
+              <a:rPr lang="en-US" sz="2600" b="1" dirty="0">
                 <a:solidFill>
                   <a:srgbClr val="1A2333"/>
                 </a:solidFill>
@@ -3313,108 +3354,30 @@
                 <a:ea typeface="Cambria" pitchFamily="34" charset="-122"/>
                 <a:cs typeface="Cambria" pitchFamily="34" charset="-120"/>
               </a:rPr>
-              <a:t>Underwriting of the Future: augmenting the underwriter, not replacing judgment</a:t>
-            </a:r>
-            <a:endParaRPr lang="en-US" sz="2700" dirty="0"/>
-          </a:p>
-        </p:txBody>
-      </p:sp>
-      <p:sp>
-        <p:nvSpPr>
-          <p:cNvPr id="4" name="Text 2"/>
-          <p:cNvSpPr/>
-          <p:nvPr/>
-        </p:nvSpPr>
-        <p:spPr>
-          <a:xfrm>
-            <a:off x="457200" y="1280160"/>
-            <a:ext cx="11247120" cy="365760"/>
-          </a:xfrm>
-          <a:prstGeom prst="rect">
-            <a:avLst/>
-          </a:prstGeom>
-          <a:noFill/>
-          <a:ln/>
-        </p:spPr>
-        <p:txBody>
-          <a:bodyPr wrap="square" lIns="0" tIns="0" rIns="0" bIns="0" rtlCol="0" anchor="ctr"/>
-          <a:lstStyle/>
-          <a:p>
-            <a:pPr indent="0" marL="0">
-              <a:buNone/>
-            </a:pPr>
-            <a:r>
-              <a:rPr lang="en-US" sz="1350" i="1" dirty="0">
-                <a:solidFill>
-                  <a:srgbClr val="2E6FB5"/>
-                </a:solidFill>
-                <a:latin typeface="Calibri" pitchFamily="34" charset="0"/>
-                <a:ea typeface="Calibri" pitchFamily="34" charset="-122"/>
-                <a:cs typeface="Calibri" pitchFamily="34" charset="-120"/>
-              </a:rPr>
-              <a:t>AI structures the submission, enriches the risk and pre-fills the decision — underwriters spend their time on the accounts that need a human.</a:t>
-            </a:r>
-            <a:endParaRPr lang="en-US" sz="1350" dirty="0"/>
-          </a:p>
-        </p:txBody>
-      </p:sp>
-      <p:sp>
-        <p:nvSpPr>
-          <p:cNvPr id="5" name="Text 3"/>
-          <p:cNvSpPr/>
-          <p:nvPr/>
-        </p:nvSpPr>
-        <p:spPr>
-          <a:xfrm>
-            <a:off x="457200" y="1755648"/>
-            <a:ext cx="5486400" cy="256032"/>
-          </a:xfrm>
-          <a:prstGeom prst="rect">
-            <a:avLst/>
-          </a:prstGeom>
-          <a:noFill/>
-          <a:ln/>
-        </p:spPr>
-        <p:txBody>
-          <a:bodyPr wrap="square" lIns="0" tIns="0" rIns="0" bIns="0" rtlCol="0" anchor="ctr"/>
-          <a:lstStyle/>
-          <a:p>
-            <a:pPr indent="0" marL="0">
-              <a:buNone/>
-            </a:pPr>
-            <a:r>
-              <a:rPr lang="en-US" sz="1100" b="1" spc="200" kern="0" dirty="0">
-                <a:solidFill>
-                  <a:srgbClr val="12315B"/>
-                </a:solidFill>
-                <a:latin typeface="Calibri" pitchFamily="34" charset="0"/>
-                <a:ea typeface="Calibri" pitchFamily="34" charset="-122"/>
-                <a:cs typeface="Calibri" pitchFamily="34" charset="-120"/>
-              </a:rPr>
-              <a:t>END-TO-END JOURNEY</a:t>
-            </a:r>
-            <a:endParaRPr lang="en-US" sz="1100" dirty="0"/>
-          </a:p>
-        </p:txBody>
-      </p:sp>
-      <p:sp>
-        <p:nvSpPr>
-          <p:cNvPr id="6" name="Shape 4"/>
-          <p:cNvSpPr/>
-          <p:nvPr/>
-        </p:nvSpPr>
-        <p:spPr>
-          <a:xfrm>
-            <a:off x="457200" y="2084832"/>
-            <a:ext cx="2044598" cy="2286000"/>
+              <a:t>Underwriting of the Future: write better risk faster by augmenting the underwriter</a:t>
+            </a:r>
+            <a:endParaRPr lang="en-US" sz="2600" dirty="0"/>
+          </a:p>
+        </p:txBody>
+      </p:sp>
+      <p:sp>
+        <p:nvSpPr>
+          <p:cNvPr id="4" name="Shape 2"/>
+          <p:cNvSpPr/>
+          <p:nvPr/>
+        </p:nvSpPr>
+        <p:spPr>
+          <a:xfrm>
+            <a:off x="457200" y="1298448"/>
+            <a:ext cx="11247120" cy="512064"/>
           </a:xfrm>
           <a:prstGeom prst="roundRect">
             <a:avLst>
-              <a:gd name="adj" fmla="val 2236"/>
+              <a:gd name="adj" fmla="val 8929"/>
             </a:avLst>
           </a:prstGeom>
           <a:solidFill>
-            <a:srgbClr val="FFFFFF"/>
+            <a:srgbClr val="EAF1FA"/>
           </a:solidFill>
           <a:ln w="12700">
             <a:solidFill>
@@ -3426,13 +3389,132 @@
       </p:sp>
       <p:sp>
         <p:nvSpPr>
+          <p:cNvPr id="5" name="Text 3"/>
+          <p:cNvSpPr/>
+          <p:nvPr/>
+        </p:nvSpPr>
+        <p:spPr>
+          <a:xfrm>
+            <a:off x="685800" y="1298448"/>
+            <a:ext cx="10789920" cy="512064"/>
+          </a:xfrm>
+          <a:prstGeom prst="rect">
+            <a:avLst/>
+          </a:prstGeom>
+          <a:noFill/>
+          <a:ln/>
+        </p:spPr>
+        <p:txBody>
+          <a:bodyPr wrap="square" lIns="0" tIns="0" rIns="0" bIns="0" rtlCol="0" anchor="ctr"/>
+          <a:lstStyle/>
+          <a:p>
+            <a:pPr indent="0" marL="0">
+              <a:buNone/>
+            </a:pPr>
+            <a:r>
+              <a:rPr lang="en-US" sz="1100" b="1" spc="100" kern="0" dirty="0">
+                <a:solidFill>
+                  <a:srgbClr val="12315B"/>
+                </a:solidFill>
+                <a:latin typeface="Calibri" pitchFamily="34" charset="0"/>
+                <a:ea typeface="Calibri" pitchFamily="34" charset="-122"/>
+                <a:cs typeface="Calibri" pitchFamily="34" charset="-120"/>
+              </a:rPr>
+              <a:t>THE CHALLENGE    </a:t>
+            </a:r>
+            <a:pPr indent="0" marL="0">
+              <a:buNone/>
+            </a:pPr>
+            <a:r>
+              <a:rPr lang="en-US" sz="1250" i="1" dirty="0">
+                <a:solidFill>
+                  <a:srgbClr val="1A2333"/>
+                </a:solidFill>
+                <a:latin typeface="Calibri" pitchFamily="34" charset="0"/>
+                <a:ea typeface="Calibri" pitchFamily="34" charset="-122"/>
+                <a:cs typeface="Calibri" pitchFamily="34" charset="-120"/>
+              </a:rPr>
+              <a:t>Manual intake and inconsistent risk selection slow quotes, drain underwriter capacity, and let mispriced accounts onto the book.</a:t>
+            </a:r>
+            <a:endParaRPr lang="en-US" sz="1100" dirty="0"/>
+          </a:p>
+        </p:txBody>
+      </p:sp>
+      <p:sp>
+        <p:nvSpPr>
+          <p:cNvPr id="6" name="Text 4"/>
+          <p:cNvSpPr/>
+          <p:nvPr/>
+        </p:nvSpPr>
+        <p:spPr>
+          <a:xfrm>
+            <a:off x="457200" y="1938528"/>
+            <a:ext cx="5486400" cy="256032"/>
+          </a:xfrm>
+          <a:prstGeom prst="rect">
+            <a:avLst/>
+          </a:prstGeom>
+          <a:noFill/>
+          <a:ln/>
+        </p:spPr>
+        <p:txBody>
+          <a:bodyPr wrap="square" lIns="0" tIns="0" rIns="0" bIns="0" rtlCol="0" anchor="ctr"/>
+          <a:lstStyle/>
+          <a:p>
+            <a:pPr indent="0" marL="0">
+              <a:buNone/>
+            </a:pPr>
+            <a:r>
+              <a:rPr lang="en-US" sz="1100" b="1" spc="200" kern="0" dirty="0">
+                <a:solidFill>
+                  <a:srgbClr val="12315B"/>
+                </a:solidFill>
+                <a:latin typeface="Calibri" pitchFamily="34" charset="0"/>
+                <a:ea typeface="Calibri" pitchFamily="34" charset="-122"/>
+                <a:cs typeface="Calibri" pitchFamily="34" charset="-120"/>
+              </a:rPr>
+              <a:t>HOW THE SIGNAL RESPONDS</a:t>
+            </a:r>
+            <a:endParaRPr lang="en-US" sz="1100" dirty="0"/>
+          </a:p>
+        </p:txBody>
+      </p:sp>
+      <p:sp>
+        <p:nvSpPr>
           <p:cNvPr id="7" name="Shape 5"/>
           <p:cNvSpPr/>
           <p:nvPr/>
         </p:nvSpPr>
         <p:spPr>
           <a:xfrm>
-            <a:off x="603504" y="2231136"/>
+            <a:off x="457200" y="2249424"/>
+            <a:ext cx="2044598" cy="2103120"/>
+          </a:xfrm>
+          <a:prstGeom prst="roundRect">
+            <a:avLst>
+              <a:gd name="adj" fmla="val 2236"/>
+            </a:avLst>
+          </a:prstGeom>
+          <a:solidFill>
+            <a:srgbClr val="FFFFFF"/>
+          </a:solidFill>
+          <a:ln w="12700">
+            <a:solidFill>
+              <a:srgbClr val="D3DCEA"/>
+            </a:solidFill>
+            <a:prstDash val="solid"/>
+          </a:ln>
+        </p:spPr>
+      </p:sp>
+      <p:sp>
+        <p:nvSpPr>
+          <p:cNvPr id="8" name="Shape 6"/>
+          <p:cNvSpPr/>
+          <p:nvPr/>
+        </p:nvSpPr>
+        <p:spPr>
+          <a:xfrm>
+            <a:off x="603504" y="2395728"/>
             <a:ext cx="365760" cy="365760"/>
           </a:xfrm>
           <a:prstGeom prst="roundRect">
@@ -3448,13 +3530,13 @@
       </p:sp>
       <p:sp>
         <p:nvSpPr>
-          <p:cNvPr id="8" name="Text 6"/>
-          <p:cNvSpPr/>
-          <p:nvPr/>
-        </p:nvSpPr>
-        <p:spPr>
-          <a:xfrm>
-            <a:off x="603504" y="2231136"/>
+          <p:cNvPr id="9" name="Text 7"/>
+          <p:cNvSpPr/>
+          <p:nvPr/>
+        </p:nvSpPr>
+        <p:spPr>
+          <a:xfrm>
+            <a:off x="603504" y="2395728"/>
             <a:ext cx="365760" cy="365760"/>
           </a:xfrm>
           <a:prstGeom prst="rect">
@@ -3487,13 +3569,13 @@
       </p:sp>
       <p:sp>
         <p:nvSpPr>
-          <p:cNvPr id="9" name="Text 7"/>
-          <p:cNvSpPr/>
-          <p:nvPr/>
-        </p:nvSpPr>
-        <p:spPr>
-          <a:xfrm>
-            <a:off x="1060704" y="2212848"/>
+          <p:cNvPr id="10" name="Text 8"/>
+          <p:cNvSpPr/>
+          <p:nvPr/>
+        </p:nvSpPr>
+        <p:spPr>
+          <a:xfrm>
+            <a:off x="1060704" y="2377440"/>
             <a:ext cx="1313078" cy="640080"/>
           </a:xfrm>
           <a:prstGeom prst="rect">
@@ -3529,13 +3611,13 @@
       </p:sp>
       <p:sp>
         <p:nvSpPr>
-          <p:cNvPr id="10" name="Shape 8"/>
-          <p:cNvSpPr/>
-          <p:nvPr/>
-        </p:nvSpPr>
-        <p:spPr>
-          <a:xfrm>
-            <a:off x="640080" y="3008376"/>
+          <p:cNvPr id="11" name="Shape 9"/>
+          <p:cNvSpPr/>
+          <p:nvPr/>
+        </p:nvSpPr>
+        <p:spPr>
+          <a:xfrm>
+            <a:off x="640080" y="3172968"/>
             <a:ext cx="73152" cy="73152"/>
           </a:xfrm>
           <a:prstGeom prst="rect">
@@ -3549,14 +3631,14 @@
       </p:sp>
       <p:sp>
         <p:nvSpPr>
-          <p:cNvPr id="11" name="Text 9"/>
-          <p:cNvSpPr/>
-          <p:nvPr/>
-        </p:nvSpPr>
-        <p:spPr>
-          <a:xfrm>
-            <a:off x="804672" y="2926080"/>
-            <a:ext cx="1532534" cy="566928"/>
+          <p:cNvPr id="12" name="Text 10"/>
+          <p:cNvSpPr/>
+          <p:nvPr/>
+        </p:nvSpPr>
+        <p:spPr>
+          <a:xfrm>
+            <a:off x="804672" y="3090672"/>
+            <a:ext cx="1532534" cy="548640"/>
           </a:xfrm>
           <a:prstGeom prst="rect">
             <a:avLst/>
@@ -3591,13 +3673,13 @@
       </p:sp>
       <p:sp>
         <p:nvSpPr>
-          <p:cNvPr id="12" name="Shape 10"/>
-          <p:cNvSpPr/>
-          <p:nvPr/>
-        </p:nvSpPr>
-        <p:spPr>
-          <a:xfrm>
-            <a:off x="640080" y="3611880"/>
+          <p:cNvPr id="13" name="Shape 11"/>
+          <p:cNvSpPr/>
+          <p:nvPr/>
+        </p:nvSpPr>
+        <p:spPr>
+          <a:xfrm>
+            <a:off x="640080" y="3758184"/>
             <a:ext cx="73152" cy="73152"/>
           </a:xfrm>
           <a:prstGeom prst="rect">
@@ -3611,14 +3693,14 @@
       </p:sp>
       <p:sp>
         <p:nvSpPr>
-          <p:cNvPr id="13" name="Text 11"/>
-          <p:cNvSpPr/>
-          <p:nvPr/>
-        </p:nvSpPr>
-        <p:spPr>
-          <a:xfrm>
-            <a:off x="804672" y="3529584"/>
-            <a:ext cx="1532534" cy="566928"/>
+          <p:cNvPr id="14" name="Text 12"/>
+          <p:cNvSpPr/>
+          <p:nvPr/>
+        </p:nvSpPr>
+        <p:spPr>
+          <a:xfrm>
+            <a:off x="804672" y="3675888"/>
+            <a:ext cx="1532534" cy="548640"/>
           </a:xfrm>
           <a:prstGeom prst="rect">
             <a:avLst/>
@@ -3653,13 +3735,13 @@
       </p:sp>
       <p:sp>
         <p:nvSpPr>
-          <p:cNvPr id="14" name="Shape 12"/>
-          <p:cNvSpPr/>
-          <p:nvPr/>
-        </p:nvSpPr>
-        <p:spPr>
-          <a:xfrm>
-            <a:off x="2483510" y="3099816"/>
+          <p:cNvPr id="15" name="Shape 13"/>
+          <p:cNvSpPr/>
+          <p:nvPr/>
+        </p:nvSpPr>
+        <p:spPr>
+          <a:xfrm>
+            <a:off x="2483510" y="3172968"/>
             <a:ext cx="292608" cy="256032"/>
           </a:xfrm>
           <a:prstGeom prst="chevron">
@@ -3678,14 +3760,14 @@
       </p:sp>
       <p:sp>
         <p:nvSpPr>
-          <p:cNvPr id="15" name="Shape 13"/>
-          <p:cNvSpPr/>
-          <p:nvPr/>
-        </p:nvSpPr>
-        <p:spPr>
-          <a:xfrm>
-            <a:off x="2757830" y="2084832"/>
-            <a:ext cx="2044598" cy="2286000"/>
+          <p:cNvPr id="16" name="Shape 14"/>
+          <p:cNvSpPr/>
+          <p:nvPr/>
+        </p:nvSpPr>
+        <p:spPr>
+          <a:xfrm>
+            <a:off x="2757830" y="2249424"/>
+            <a:ext cx="2044598" cy="2103120"/>
           </a:xfrm>
           <a:prstGeom prst="roundRect">
             <a:avLst>
@@ -3705,13 +3787,13 @@
       </p:sp>
       <p:sp>
         <p:nvSpPr>
-          <p:cNvPr id="16" name="Shape 14"/>
-          <p:cNvSpPr/>
-          <p:nvPr/>
-        </p:nvSpPr>
-        <p:spPr>
-          <a:xfrm>
-            <a:off x="2904134" y="2231136"/>
+          <p:cNvPr id="17" name="Shape 15"/>
+          <p:cNvSpPr/>
+          <p:nvPr/>
+        </p:nvSpPr>
+        <p:spPr>
+          <a:xfrm>
+            <a:off x="2904134" y="2395728"/>
             <a:ext cx="365760" cy="365760"/>
           </a:xfrm>
           <a:prstGeom prst="roundRect">
@@ -3727,13 +3809,13 @@
       </p:sp>
       <p:sp>
         <p:nvSpPr>
-          <p:cNvPr id="17" name="Text 15"/>
-          <p:cNvSpPr/>
-          <p:nvPr/>
-        </p:nvSpPr>
-        <p:spPr>
-          <a:xfrm>
-            <a:off x="2904134" y="2231136"/>
+          <p:cNvPr id="18" name="Text 16"/>
+          <p:cNvSpPr/>
+          <p:nvPr/>
+        </p:nvSpPr>
+        <p:spPr>
+          <a:xfrm>
+            <a:off x="2904134" y="2395728"/>
             <a:ext cx="365760" cy="365760"/>
           </a:xfrm>
           <a:prstGeom prst="rect">
@@ -3766,13 +3848,13 @@
       </p:sp>
       <p:sp>
         <p:nvSpPr>
-          <p:cNvPr id="18" name="Text 16"/>
-          <p:cNvSpPr/>
-          <p:nvPr/>
-        </p:nvSpPr>
-        <p:spPr>
-          <a:xfrm>
-            <a:off x="3361334" y="2212848"/>
+          <p:cNvPr id="19" name="Text 17"/>
+          <p:cNvSpPr/>
+          <p:nvPr/>
+        </p:nvSpPr>
+        <p:spPr>
+          <a:xfrm>
+            <a:off x="3361334" y="2377440"/>
             <a:ext cx="1313078" cy="640080"/>
           </a:xfrm>
           <a:prstGeom prst="rect">
@@ -3808,13 +3890,13 @@
       </p:sp>
       <p:sp>
         <p:nvSpPr>
-          <p:cNvPr id="19" name="Shape 17"/>
-          <p:cNvSpPr/>
-          <p:nvPr/>
-        </p:nvSpPr>
-        <p:spPr>
-          <a:xfrm>
-            <a:off x="2940710" y="3008376"/>
+          <p:cNvPr id="20" name="Shape 18"/>
+          <p:cNvSpPr/>
+          <p:nvPr/>
+        </p:nvSpPr>
+        <p:spPr>
+          <a:xfrm>
+            <a:off x="2940710" y="3172968"/>
             <a:ext cx="73152" cy="73152"/>
           </a:xfrm>
           <a:prstGeom prst="rect">
@@ -3828,14 +3910,14 @@
       </p:sp>
       <p:sp>
         <p:nvSpPr>
-          <p:cNvPr id="20" name="Text 18"/>
-          <p:cNvSpPr/>
-          <p:nvPr/>
-        </p:nvSpPr>
-        <p:spPr>
-          <a:xfrm>
-            <a:off x="3105302" y="2926080"/>
-            <a:ext cx="1532534" cy="566928"/>
+          <p:cNvPr id="21" name="Text 19"/>
+          <p:cNvSpPr/>
+          <p:nvPr/>
+        </p:nvSpPr>
+        <p:spPr>
+          <a:xfrm>
+            <a:off x="3105302" y="3090672"/>
+            <a:ext cx="1532534" cy="548640"/>
           </a:xfrm>
           <a:prstGeom prst="rect">
             <a:avLst/>
@@ -3870,13 +3952,13 @@
       </p:sp>
       <p:sp>
         <p:nvSpPr>
-          <p:cNvPr id="21" name="Shape 19"/>
-          <p:cNvSpPr/>
-          <p:nvPr/>
-        </p:nvSpPr>
-        <p:spPr>
-          <a:xfrm>
-            <a:off x="2940710" y="3611880"/>
+          <p:cNvPr id="22" name="Shape 20"/>
+          <p:cNvSpPr/>
+          <p:nvPr/>
+        </p:nvSpPr>
+        <p:spPr>
+          <a:xfrm>
+            <a:off x="2940710" y="3758184"/>
             <a:ext cx="73152" cy="73152"/>
           </a:xfrm>
           <a:prstGeom prst="rect">
@@ -3890,14 +3972,14 @@
       </p:sp>
       <p:sp>
         <p:nvSpPr>
-          <p:cNvPr id="22" name="Text 20"/>
-          <p:cNvSpPr/>
-          <p:nvPr/>
-        </p:nvSpPr>
-        <p:spPr>
-          <a:xfrm>
-            <a:off x="3105302" y="3529584"/>
-            <a:ext cx="1532534" cy="566928"/>
+          <p:cNvPr id="23" name="Text 21"/>
+          <p:cNvSpPr/>
+          <p:nvPr/>
+        </p:nvSpPr>
+        <p:spPr>
+          <a:xfrm>
+            <a:off x="3105302" y="3675888"/>
+            <a:ext cx="1532534" cy="548640"/>
           </a:xfrm>
           <a:prstGeom prst="rect">
             <a:avLst/>
@@ -3932,13 +4014,13 @@
       </p:sp>
       <p:sp>
         <p:nvSpPr>
-          <p:cNvPr id="23" name="Shape 21"/>
-          <p:cNvSpPr/>
-          <p:nvPr/>
-        </p:nvSpPr>
-        <p:spPr>
-          <a:xfrm>
-            <a:off x="4784141" y="3099816"/>
+          <p:cNvPr id="24" name="Shape 22"/>
+          <p:cNvSpPr/>
+          <p:nvPr/>
+        </p:nvSpPr>
+        <p:spPr>
+          <a:xfrm>
+            <a:off x="4784141" y="3172968"/>
             <a:ext cx="292608" cy="256032"/>
           </a:xfrm>
           <a:prstGeom prst="chevron">
@@ -3957,14 +4039,14 @@
       </p:sp>
       <p:sp>
         <p:nvSpPr>
-          <p:cNvPr id="24" name="Shape 22"/>
-          <p:cNvSpPr/>
-          <p:nvPr/>
-        </p:nvSpPr>
-        <p:spPr>
-          <a:xfrm>
-            <a:off x="5058461" y="2084832"/>
-            <a:ext cx="2044598" cy="2286000"/>
+          <p:cNvPr id="25" name="Shape 23"/>
+          <p:cNvSpPr/>
+          <p:nvPr/>
+        </p:nvSpPr>
+        <p:spPr>
+          <a:xfrm>
+            <a:off x="5058461" y="2249424"/>
+            <a:ext cx="2044598" cy="2103120"/>
           </a:xfrm>
           <a:prstGeom prst="roundRect">
             <a:avLst>
@@ -3984,13 +4066,13 @@
       </p:sp>
       <p:sp>
         <p:nvSpPr>
-          <p:cNvPr id="25" name="Shape 23"/>
-          <p:cNvSpPr/>
-          <p:nvPr/>
-        </p:nvSpPr>
-        <p:spPr>
-          <a:xfrm>
-            <a:off x="5204765" y="2231136"/>
+          <p:cNvPr id="26" name="Shape 24"/>
+          <p:cNvSpPr/>
+          <p:nvPr/>
+        </p:nvSpPr>
+        <p:spPr>
+          <a:xfrm>
+            <a:off x="5204765" y="2395728"/>
             <a:ext cx="365760" cy="365760"/>
           </a:xfrm>
           <a:prstGeom prst="roundRect">
@@ -4006,13 +4088,13 @@
       </p:sp>
       <p:sp>
         <p:nvSpPr>
-          <p:cNvPr id="26" name="Text 24"/>
-          <p:cNvSpPr/>
-          <p:nvPr/>
-        </p:nvSpPr>
-        <p:spPr>
-          <a:xfrm>
-            <a:off x="5204765" y="2231136"/>
+          <p:cNvPr id="27" name="Text 25"/>
+          <p:cNvSpPr/>
+          <p:nvPr/>
+        </p:nvSpPr>
+        <p:spPr>
+          <a:xfrm>
+            <a:off x="5204765" y="2395728"/>
             <a:ext cx="365760" cy="365760"/>
           </a:xfrm>
           <a:prstGeom prst="rect">
@@ -4045,13 +4127,13 @@
       </p:sp>
       <p:sp>
         <p:nvSpPr>
-          <p:cNvPr id="27" name="Text 25"/>
-          <p:cNvSpPr/>
-          <p:nvPr/>
-        </p:nvSpPr>
-        <p:spPr>
-          <a:xfrm>
-            <a:off x="5661965" y="2212848"/>
+          <p:cNvPr id="28" name="Text 26"/>
+          <p:cNvSpPr/>
+          <p:nvPr/>
+        </p:nvSpPr>
+        <p:spPr>
+          <a:xfrm>
+            <a:off x="5661965" y="2377440"/>
             <a:ext cx="1313078" cy="640080"/>
           </a:xfrm>
           <a:prstGeom prst="rect">
@@ -4087,13 +4169,13 @@
       </p:sp>
       <p:sp>
         <p:nvSpPr>
-          <p:cNvPr id="28" name="Shape 26"/>
-          <p:cNvSpPr/>
-          <p:nvPr/>
-        </p:nvSpPr>
-        <p:spPr>
-          <a:xfrm>
-            <a:off x="5241341" y="3008376"/>
+          <p:cNvPr id="29" name="Shape 27"/>
+          <p:cNvSpPr/>
+          <p:nvPr/>
+        </p:nvSpPr>
+        <p:spPr>
+          <a:xfrm>
+            <a:off x="5241341" y="3172968"/>
             <a:ext cx="73152" cy="73152"/>
           </a:xfrm>
           <a:prstGeom prst="rect">
@@ -4107,14 +4189,14 @@
       </p:sp>
       <p:sp>
         <p:nvSpPr>
-          <p:cNvPr id="29" name="Text 27"/>
-          <p:cNvSpPr/>
-          <p:nvPr/>
-        </p:nvSpPr>
-        <p:spPr>
-          <a:xfrm>
-            <a:off x="5405933" y="2926080"/>
-            <a:ext cx="1532534" cy="566928"/>
+          <p:cNvPr id="30" name="Text 28"/>
+          <p:cNvSpPr/>
+          <p:nvPr/>
+        </p:nvSpPr>
+        <p:spPr>
+          <a:xfrm>
+            <a:off x="5405933" y="3090672"/>
+            <a:ext cx="1532534" cy="548640"/>
           </a:xfrm>
           <a:prstGeom prst="rect">
             <a:avLst/>
@@ -4149,13 +4231,13 @@
       </p:sp>
       <p:sp>
         <p:nvSpPr>
-          <p:cNvPr id="30" name="Shape 28"/>
-          <p:cNvSpPr/>
-          <p:nvPr/>
-        </p:nvSpPr>
-        <p:spPr>
-          <a:xfrm>
-            <a:off x="5241341" y="3611880"/>
+          <p:cNvPr id="31" name="Shape 29"/>
+          <p:cNvSpPr/>
+          <p:nvPr/>
+        </p:nvSpPr>
+        <p:spPr>
+          <a:xfrm>
+            <a:off x="5241341" y="3758184"/>
             <a:ext cx="73152" cy="73152"/>
           </a:xfrm>
           <a:prstGeom prst="rect">
@@ -4169,14 +4251,14 @@
       </p:sp>
       <p:sp>
         <p:nvSpPr>
-          <p:cNvPr id="31" name="Text 29"/>
-          <p:cNvSpPr/>
-          <p:nvPr/>
-        </p:nvSpPr>
-        <p:spPr>
-          <a:xfrm>
-            <a:off x="5405933" y="3529584"/>
-            <a:ext cx="1532534" cy="566928"/>
+          <p:cNvPr id="32" name="Text 30"/>
+          <p:cNvSpPr/>
+          <p:nvPr/>
+        </p:nvSpPr>
+        <p:spPr>
+          <a:xfrm>
+            <a:off x="5405933" y="3675888"/>
+            <a:ext cx="1532534" cy="548640"/>
           </a:xfrm>
           <a:prstGeom prst="rect">
             <a:avLst/>
@@ -4211,13 +4293,13 @@
       </p:sp>
       <p:sp>
         <p:nvSpPr>
-          <p:cNvPr id="32" name="Shape 30"/>
-          <p:cNvSpPr/>
-          <p:nvPr/>
-        </p:nvSpPr>
-        <p:spPr>
-          <a:xfrm>
-            <a:off x="7084771" y="3099816"/>
+          <p:cNvPr id="33" name="Shape 31"/>
+          <p:cNvSpPr/>
+          <p:nvPr/>
+        </p:nvSpPr>
+        <p:spPr>
+          <a:xfrm>
+            <a:off x="7084771" y="3172968"/>
             <a:ext cx="292608" cy="256032"/>
           </a:xfrm>
           <a:prstGeom prst="chevron">
@@ -4236,14 +4318,14 @@
       </p:sp>
       <p:sp>
         <p:nvSpPr>
-          <p:cNvPr id="33" name="Shape 31"/>
-          <p:cNvSpPr/>
-          <p:nvPr/>
-        </p:nvSpPr>
-        <p:spPr>
-          <a:xfrm>
-            <a:off x="7359091" y="2084832"/>
-            <a:ext cx="2044598" cy="2286000"/>
+          <p:cNvPr id="34" name="Shape 32"/>
+          <p:cNvSpPr/>
+          <p:nvPr/>
+        </p:nvSpPr>
+        <p:spPr>
+          <a:xfrm>
+            <a:off x="7359091" y="2249424"/>
+            <a:ext cx="2044598" cy="2103120"/>
           </a:xfrm>
           <a:prstGeom prst="roundRect">
             <a:avLst>
@@ -4263,13 +4345,13 @@
       </p:sp>
       <p:sp>
         <p:nvSpPr>
-          <p:cNvPr id="34" name="Shape 32"/>
-          <p:cNvSpPr/>
-          <p:nvPr/>
-        </p:nvSpPr>
-        <p:spPr>
-          <a:xfrm>
-            <a:off x="7505395" y="2231136"/>
+          <p:cNvPr id="35" name="Shape 33"/>
+          <p:cNvSpPr/>
+          <p:nvPr/>
+        </p:nvSpPr>
+        <p:spPr>
+          <a:xfrm>
+            <a:off x="7505395" y="2395728"/>
             <a:ext cx="365760" cy="365760"/>
           </a:xfrm>
           <a:prstGeom prst="roundRect">
@@ -4285,13 +4367,13 @@
       </p:sp>
       <p:sp>
         <p:nvSpPr>
-          <p:cNvPr id="35" name="Text 33"/>
-          <p:cNvSpPr/>
-          <p:nvPr/>
-        </p:nvSpPr>
-        <p:spPr>
-          <a:xfrm>
-            <a:off x="7505395" y="2231136"/>
+          <p:cNvPr id="36" name="Text 34"/>
+          <p:cNvSpPr/>
+          <p:nvPr/>
+        </p:nvSpPr>
+        <p:spPr>
+          <a:xfrm>
+            <a:off x="7505395" y="2395728"/>
             <a:ext cx="365760" cy="365760"/>
           </a:xfrm>
           <a:prstGeom prst="rect">
@@ -4324,13 +4406,13 @@
       </p:sp>
       <p:sp>
         <p:nvSpPr>
-          <p:cNvPr id="36" name="Text 34"/>
-          <p:cNvSpPr/>
-          <p:nvPr/>
-        </p:nvSpPr>
-        <p:spPr>
-          <a:xfrm>
-            <a:off x="7962595" y="2212848"/>
+          <p:cNvPr id="37" name="Text 35"/>
+          <p:cNvSpPr/>
+          <p:nvPr/>
+        </p:nvSpPr>
+        <p:spPr>
+          <a:xfrm>
+            <a:off x="7962595" y="2377440"/>
             <a:ext cx="1313078" cy="640080"/>
           </a:xfrm>
           <a:prstGeom prst="rect">
@@ -4366,13 +4448,13 @@
       </p:sp>
       <p:sp>
         <p:nvSpPr>
-          <p:cNvPr id="37" name="Shape 35"/>
-          <p:cNvSpPr/>
-          <p:nvPr/>
-        </p:nvSpPr>
-        <p:spPr>
-          <a:xfrm>
-            <a:off x="7541971" y="3008376"/>
+          <p:cNvPr id="38" name="Shape 36"/>
+          <p:cNvSpPr/>
+          <p:nvPr/>
+        </p:nvSpPr>
+        <p:spPr>
+          <a:xfrm>
+            <a:off x="7541971" y="3172968"/>
             <a:ext cx="73152" cy="73152"/>
           </a:xfrm>
           <a:prstGeom prst="rect">
@@ -4386,14 +4468,14 @@
       </p:sp>
       <p:sp>
         <p:nvSpPr>
-          <p:cNvPr id="38" name="Text 36"/>
-          <p:cNvSpPr/>
-          <p:nvPr/>
-        </p:nvSpPr>
-        <p:spPr>
-          <a:xfrm>
-            <a:off x="7706563" y="2926080"/>
-            <a:ext cx="1532534" cy="566928"/>
+          <p:cNvPr id="39" name="Text 37"/>
+          <p:cNvSpPr/>
+          <p:nvPr/>
+        </p:nvSpPr>
+        <p:spPr>
+          <a:xfrm>
+            <a:off x="7706563" y="3090672"/>
+            <a:ext cx="1532534" cy="548640"/>
           </a:xfrm>
           <a:prstGeom prst="rect">
             <a:avLst/>
@@ -4428,13 +4510,13 @@
       </p:sp>
       <p:sp>
         <p:nvSpPr>
-          <p:cNvPr id="39" name="Shape 37"/>
-          <p:cNvSpPr/>
-          <p:nvPr/>
-        </p:nvSpPr>
-        <p:spPr>
-          <a:xfrm>
-            <a:off x="7541971" y="3611880"/>
+          <p:cNvPr id="40" name="Shape 38"/>
+          <p:cNvSpPr/>
+          <p:nvPr/>
+        </p:nvSpPr>
+        <p:spPr>
+          <a:xfrm>
+            <a:off x="7541971" y="3758184"/>
             <a:ext cx="73152" cy="73152"/>
           </a:xfrm>
           <a:prstGeom prst="rect">
@@ -4448,14 +4530,14 @@
       </p:sp>
       <p:sp>
         <p:nvSpPr>
-          <p:cNvPr id="40" name="Text 38"/>
-          <p:cNvSpPr/>
-          <p:nvPr/>
-        </p:nvSpPr>
-        <p:spPr>
-          <a:xfrm>
-            <a:off x="7706563" y="3529584"/>
-            <a:ext cx="1532534" cy="566928"/>
+          <p:cNvPr id="41" name="Text 39"/>
+          <p:cNvSpPr/>
+          <p:nvPr/>
+        </p:nvSpPr>
+        <p:spPr>
+          <a:xfrm>
+            <a:off x="7706563" y="3675888"/>
+            <a:ext cx="1532534" cy="548640"/>
           </a:xfrm>
           <a:prstGeom prst="rect">
             <a:avLst/>
@@ -4490,13 +4572,13 @@
       </p:sp>
       <p:sp>
         <p:nvSpPr>
-          <p:cNvPr id="41" name="Shape 39"/>
-          <p:cNvSpPr/>
-          <p:nvPr/>
-        </p:nvSpPr>
-        <p:spPr>
-          <a:xfrm>
-            <a:off x="9385402" y="3099816"/>
+          <p:cNvPr id="42" name="Shape 40"/>
+          <p:cNvSpPr/>
+          <p:nvPr/>
+        </p:nvSpPr>
+        <p:spPr>
+          <a:xfrm>
+            <a:off x="9385402" y="3172968"/>
             <a:ext cx="292608" cy="256032"/>
           </a:xfrm>
           <a:prstGeom prst="chevron">
@@ -4515,14 +4597,14 @@
       </p:sp>
       <p:sp>
         <p:nvSpPr>
-          <p:cNvPr id="42" name="Shape 40"/>
-          <p:cNvSpPr/>
-          <p:nvPr/>
-        </p:nvSpPr>
-        <p:spPr>
-          <a:xfrm>
-            <a:off x="9659722" y="2084832"/>
-            <a:ext cx="2044598" cy="2286000"/>
+          <p:cNvPr id="43" name="Shape 41"/>
+          <p:cNvSpPr/>
+          <p:nvPr/>
+        </p:nvSpPr>
+        <p:spPr>
+          <a:xfrm>
+            <a:off x="9659722" y="2249424"/>
+            <a:ext cx="2044598" cy="2103120"/>
           </a:xfrm>
           <a:prstGeom prst="roundRect">
             <a:avLst>
@@ -4542,13 +4624,13 @@
       </p:sp>
       <p:sp>
         <p:nvSpPr>
-          <p:cNvPr id="43" name="Shape 41"/>
-          <p:cNvSpPr/>
-          <p:nvPr/>
-        </p:nvSpPr>
-        <p:spPr>
-          <a:xfrm>
-            <a:off x="9806026" y="2231136"/>
+          <p:cNvPr id="44" name="Shape 42"/>
+          <p:cNvSpPr/>
+          <p:nvPr/>
+        </p:nvSpPr>
+        <p:spPr>
+          <a:xfrm>
+            <a:off x="9806026" y="2395728"/>
             <a:ext cx="365760" cy="365760"/>
           </a:xfrm>
           <a:prstGeom prst="roundRect">
@@ -4564,13 +4646,13 @@
       </p:sp>
       <p:sp>
         <p:nvSpPr>
-          <p:cNvPr id="44" name="Text 42"/>
-          <p:cNvSpPr/>
-          <p:nvPr/>
-        </p:nvSpPr>
-        <p:spPr>
-          <a:xfrm>
-            <a:off x="9806026" y="2231136"/>
+          <p:cNvPr id="45" name="Text 43"/>
+          <p:cNvSpPr/>
+          <p:nvPr/>
+        </p:nvSpPr>
+        <p:spPr>
+          <a:xfrm>
+            <a:off x="9806026" y="2395728"/>
             <a:ext cx="365760" cy="365760"/>
           </a:xfrm>
           <a:prstGeom prst="rect">
@@ -4603,13 +4685,13 @@
       </p:sp>
       <p:sp>
         <p:nvSpPr>
-          <p:cNvPr id="45" name="Text 43"/>
-          <p:cNvSpPr/>
-          <p:nvPr/>
-        </p:nvSpPr>
-        <p:spPr>
-          <a:xfrm>
-            <a:off x="10263226" y="2212848"/>
+          <p:cNvPr id="46" name="Text 44"/>
+          <p:cNvSpPr/>
+          <p:nvPr/>
+        </p:nvSpPr>
+        <p:spPr>
+          <a:xfrm>
+            <a:off x="10263226" y="2377440"/>
             <a:ext cx="1313078" cy="640080"/>
           </a:xfrm>
           <a:prstGeom prst="rect">
@@ -4645,13 +4727,13 @@
       </p:sp>
       <p:sp>
         <p:nvSpPr>
-          <p:cNvPr id="46" name="Shape 44"/>
-          <p:cNvSpPr/>
-          <p:nvPr/>
-        </p:nvSpPr>
-        <p:spPr>
-          <a:xfrm>
-            <a:off x="9842602" y="3008376"/>
+          <p:cNvPr id="47" name="Shape 45"/>
+          <p:cNvSpPr/>
+          <p:nvPr/>
+        </p:nvSpPr>
+        <p:spPr>
+          <a:xfrm>
+            <a:off x="9842602" y="3172968"/>
             <a:ext cx="73152" cy="73152"/>
           </a:xfrm>
           <a:prstGeom prst="rect">
@@ -4665,14 +4747,14 @@
       </p:sp>
       <p:sp>
         <p:nvSpPr>
-          <p:cNvPr id="47" name="Text 45"/>
-          <p:cNvSpPr/>
-          <p:nvPr/>
-        </p:nvSpPr>
-        <p:spPr>
-          <a:xfrm>
-            <a:off x="10007194" y="2926080"/>
-            <a:ext cx="1532534" cy="566928"/>
+          <p:cNvPr id="48" name="Text 46"/>
+          <p:cNvSpPr/>
+          <p:nvPr/>
+        </p:nvSpPr>
+        <p:spPr>
+          <a:xfrm>
+            <a:off x="10007194" y="3090672"/>
+            <a:ext cx="1532534" cy="548640"/>
           </a:xfrm>
           <a:prstGeom prst="rect">
             <a:avLst/>
@@ -4707,13 +4789,13 @@
       </p:sp>
       <p:sp>
         <p:nvSpPr>
-          <p:cNvPr id="48" name="Shape 46"/>
-          <p:cNvSpPr/>
-          <p:nvPr/>
-        </p:nvSpPr>
-        <p:spPr>
-          <a:xfrm>
-            <a:off x="9842602" y="3611880"/>
+          <p:cNvPr id="49" name="Shape 47"/>
+          <p:cNvSpPr/>
+          <p:nvPr/>
+        </p:nvSpPr>
+        <p:spPr>
+          <a:xfrm>
+            <a:off x="9842602" y="3758184"/>
             <a:ext cx="73152" cy="73152"/>
           </a:xfrm>
           <a:prstGeom prst="rect">
@@ -4727,14 +4809,14 @@
       </p:sp>
       <p:sp>
         <p:nvSpPr>
-          <p:cNvPr id="49" name="Text 47"/>
-          <p:cNvSpPr/>
-          <p:nvPr/>
-        </p:nvSpPr>
-        <p:spPr>
-          <a:xfrm>
-            <a:off x="10007194" y="3529584"/>
-            <a:ext cx="1532534" cy="566928"/>
+          <p:cNvPr id="50" name="Text 48"/>
+          <p:cNvSpPr/>
+          <p:nvPr/>
+        </p:nvSpPr>
+        <p:spPr>
+          <a:xfrm>
+            <a:off x="10007194" y="3675888"/>
+            <a:ext cx="1532534" cy="548640"/>
           </a:xfrm>
           <a:prstGeom prst="rect">
             <a:avLst/>
@@ -4769,14 +4851,14 @@
       </p:sp>
       <p:sp>
         <p:nvSpPr>
-          <p:cNvPr id="50" name="Text 48"/>
-          <p:cNvSpPr/>
-          <p:nvPr/>
-        </p:nvSpPr>
-        <p:spPr>
-          <a:xfrm>
-            <a:off x="457200" y="4498848"/>
-            <a:ext cx="11247120" cy="292608"/>
+          <p:cNvPr id="51" name="Text 49"/>
+          <p:cNvSpPr/>
+          <p:nvPr/>
+        </p:nvSpPr>
+        <p:spPr>
+          <a:xfrm>
+            <a:off x="457200" y="4480560"/>
+            <a:ext cx="11247120" cy="274320"/>
           </a:xfrm>
           <a:prstGeom prst="rect">
             <a:avLst/>
@@ -4822,13 +4904,13 @@
       </p:sp>
       <p:sp>
         <p:nvSpPr>
-          <p:cNvPr id="51" name="Shape 49"/>
-          <p:cNvSpPr/>
-          <p:nvPr/>
-        </p:nvSpPr>
-        <p:spPr>
-          <a:xfrm>
-            <a:off x="457200" y="4864608"/>
+          <p:cNvPr id="52" name="Shape 50"/>
+          <p:cNvSpPr/>
+          <p:nvPr/>
+        </p:nvSpPr>
+        <p:spPr>
+          <a:xfrm>
+            <a:off x="457200" y="4828032"/>
             <a:ext cx="11247120" cy="0"/>
           </a:xfrm>
           <a:prstGeom prst="line">
@@ -4845,13 +4927,13 @@
       </p:sp>
       <p:sp>
         <p:nvSpPr>
-          <p:cNvPr id="52" name="Text 50"/>
-          <p:cNvSpPr/>
-          <p:nvPr/>
-        </p:nvSpPr>
-        <p:spPr>
-          <a:xfrm>
-            <a:off x="457200" y="4974336"/>
+          <p:cNvPr id="53" name="Text 51"/>
+          <p:cNvSpPr/>
+          <p:nvPr/>
+        </p:nvSpPr>
+        <p:spPr>
+          <a:xfrm>
+            <a:off x="457200" y="4937760"/>
             <a:ext cx="5486400" cy="256032"/>
           </a:xfrm>
           <a:prstGeom prst="rect">
@@ -4876,7 +4958,7 @@
                 <a:ea typeface="Calibri" pitchFamily="34" charset="-122"/>
                 <a:cs typeface="Calibri" pitchFamily="34" charset="-120"/>
               </a:rPr>
-              <a:t>PROOF OF VALUE</a:t>
+              <a:t>THE PAYOFF</a:t>
             </a:r>
             <a:endParaRPr lang="en-US" sz="1100" dirty="0"/>
           </a:p>
@@ -4884,18 +4966,18 @@
       </p:sp>
       <p:sp>
         <p:nvSpPr>
-          <p:cNvPr id="53" name="Shape 51"/>
-          <p:cNvSpPr/>
-          <p:nvPr/>
-        </p:nvSpPr>
-        <p:spPr>
-          <a:xfrm>
-            <a:off x="457200" y="5285232"/>
-            <a:ext cx="2103120" cy="1188720"/>
+          <p:cNvPr id="54" name="Shape 52"/>
+          <p:cNvSpPr/>
+          <p:nvPr/>
+        </p:nvSpPr>
+        <p:spPr>
+          <a:xfrm>
+            <a:off x="457200" y="5230368"/>
+            <a:ext cx="2103120" cy="1152144"/>
           </a:xfrm>
           <a:prstGeom prst="roundRect">
             <a:avLst>
-              <a:gd name="adj" fmla="val 4615"/>
+              <a:gd name="adj" fmla="val 4762"/>
             </a:avLst>
           </a:prstGeom>
           <a:solidFill>
@@ -4911,14 +4993,14 @@
       </p:sp>
       <p:sp>
         <p:nvSpPr>
-          <p:cNvPr id="54" name="Text 52"/>
-          <p:cNvSpPr/>
-          <p:nvPr/>
-        </p:nvSpPr>
-        <p:spPr>
-          <a:xfrm>
-            <a:off x="502920" y="5404104"/>
-            <a:ext cx="2011680" cy="457200"/>
+          <p:cNvPr id="55" name="Text 53"/>
+          <p:cNvSpPr/>
+          <p:nvPr/>
+        </p:nvSpPr>
+        <p:spPr>
+          <a:xfrm>
+            <a:off x="502920" y="5340096"/>
+            <a:ext cx="2011680" cy="438912"/>
           </a:xfrm>
           <a:prstGeom prst="rect">
             <a:avLst/>
@@ -4934,7 +5016,7 @@
               <a:buNone/>
             </a:pPr>
             <a:r>
-              <a:rPr lang="en-US" sz="2600" b="1" dirty="0">
+              <a:rPr lang="en-US" sz="2500" b="1" dirty="0">
                 <a:solidFill>
                   <a:srgbClr val="12315B"/>
                 </a:solidFill>
@@ -4958,20 +5040,20 @@
               </a:rPr>
               <a:t>%</a:t>
             </a:r>
-            <a:endParaRPr lang="en-US" sz="2600" dirty="0"/>
-          </a:p>
-        </p:txBody>
-      </p:sp>
-      <p:sp>
-        <p:nvSpPr>
-          <p:cNvPr id="55" name="Text 53"/>
-          <p:cNvSpPr/>
-          <p:nvPr/>
-        </p:nvSpPr>
-        <p:spPr>
-          <a:xfrm>
-            <a:off x="548640" y="5907024"/>
-            <a:ext cx="1920240" cy="502920"/>
+            <a:endParaRPr lang="en-US" sz="2500" dirty="0"/>
+          </a:p>
+        </p:txBody>
+      </p:sp>
+      <p:sp>
+        <p:nvSpPr>
+          <p:cNvPr id="56" name="Text 54"/>
+          <p:cNvSpPr/>
+          <p:nvPr/>
+        </p:nvSpPr>
+        <p:spPr>
+          <a:xfrm>
+            <a:off x="548640" y="5815584"/>
+            <a:ext cx="1920240" cy="512064"/>
           </a:xfrm>
           <a:prstGeom prst="rect">
             <a:avLst/>
@@ -5006,18 +5088,18 @@
       </p:sp>
       <p:sp>
         <p:nvSpPr>
-          <p:cNvPr id="56" name="Shape 54"/>
-          <p:cNvSpPr/>
-          <p:nvPr/>
-        </p:nvSpPr>
-        <p:spPr>
-          <a:xfrm>
-            <a:off x="2743200" y="5285232"/>
-            <a:ext cx="2103120" cy="1188720"/>
+          <p:cNvPr id="57" name="Shape 55"/>
+          <p:cNvSpPr/>
+          <p:nvPr/>
+        </p:nvSpPr>
+        <p:spPr>
+          <a:xfrm>
+            <a:off x="2743200" y="5230368"/>
+            <a:ext cx="2103120" cy="1152144"/>
           </a:xfrm>
           <a:prstGeom prst="roundRect">
             <a:avLst>
-              <a:gd name="adj" fmla="val 4615"/>
+              <a:gd name="adj" fmla="val 4762"/>
             </a:avLst>
           </a:prstGeom>
           <a:solidFill>
@@ -5033,14 +5115,14 @@
       </p:sp>
       <p:sp>
         <p:nvSpPr>
-          <p:cNvPr id="57" name="Text 55"/>
-          <p:cNvSpPr/>
-          <p:nvPr/>
-        </p:nvSpPr>
-        <p:spPr>
-          <a:xfrm>
-            <a:off x="2788920" y="5404104"/>
-            <a:ext cx="2011680" cy="457200"/>
+          <p:cNvPr id="58" name="Text 56"/>
+          <p:cNvSpPr/>
+          <p:nvPr/>
+        </p:nvSpPr>
+        <p:spPr>
+          <a:xfrm>
+            <a:off x="2788920" y="5340096"/>
+            <a:ext cx="2011680" cy="438912"/>
           </a:xfrm>
           <a:prstGeom prst="rect">
             <a:avLst/>
@@ -5056,7 +5138,7 @@
               <a:buNone/>
             </a:pPr>
             <a:r>
-              <a:rPr lang="en-US" sz="2600" b="1" dirty="0">
+              <a:rPr lang="en-US" sz="2500" b="1" dirty="0">
                 <a:solidFill>
                   <a:srgbClr val="12315B"/>
                 </a:solidFill>
@@ -5080,20 +5162,20 @@
               </a:rPr>
               <a:t>%</a:t>
             </a:r>
-            <a:endParaRPr lang="en-US" sz="2600" dirty="0"/>
-          </a:p>
-        </p:txBody>
-      </p:sp>
-      <p:sp>
-        <p:nvSpPr>
-          <p:cNvPr id="58" name="Text 56"/>
-          <p:cNvSpPr/>
-          <p:nvPr/>
-        </p:nvSpPr>
-        <p:spPr>
-          <a:xfrm>
-            <a:off x="2834640" y="5907024"/>
-            <a:ext cx="1920240" cy="502920"/>
+            <a:endParaRPr lang="en-US" sz="2500" dirty="0"/>
+          </a:p>
+        </p:txBody>
+      </p:sp>
+      <p:sp>
+        <p:nvSpPr>
+          <p:cNvPr id="59" name="Text 57"/>
+          <p:cNvSpPr/>
+          <p:nvPr/>
+        </p:nvSpPr>
+        <p:spPr>
+          <a:xfrm>
+            <a:off x="2834640" y="5815584"/>
+            <a:ext cx="1920240" cy="512064"/>
           </a:xfrm>
           <a:prstGeom prst="rect">
             <a:avLst/>
@@ -5128,18 +5210,18 @@
       </p:sp>
       <p:sp>
         <p:nvSpPr>
-          <p:cNvPr id="59" name="Shape 57"/>
-          <p:cNvSpPr/>
-          <p:nvPr/>
-        </p:nvSpPr>
-        <p:spPr>
-          <a:xfrm>
-            <a:off x="5029200" y="5285232"/>
-            <a:ext cx="2103120" cy="1188720"/>
+          <p:cNvPr id="60" name="Shape 58"/>
+          <p:cNvSpPr/>
+          <p:nvPr/>
+        </p:nvSpPr>
+        <p:spPr>
+          <a:xfrm>
+            <a:off x="5029200" y="5230368"/>
+            <a:ext cx="2103120" cy="1152144"/>
           </a:xfrm>
           <a:prstGeom prst="roundRect">
             <a:avLst>
-              <a:gd name="adj" fmla="val 4615"/>
+              <a:gd name="adj" fmla="val 4762"/>
             </a:avLst>
           </a:prstGeom>
           <a:solidFill>
@@ -5155,14 +5237,14 @@
       </p:sp>
       <p:sp>
         <p:nvSpPr>
-          <p:cNvPr id="60" name="Text 58"/>
-          <p:cNvSpPr/>
-          <p:nvPr/>
-        </p:nvSpPr>
-        <p:spPr>
-          <a:xfrm>
-            <a:off x="5074920" y="5404104"/>
-            <a:ext cx="2011680" cy="457200"/>
+          <p:cNvPr id="61" name="Text 59"/>
+          <p:cNvSpPr/>
+          <p:nvPr/>
+        </p:nvSpPr>
+        <p:spPr>
+          <a:xfrm>
+            <a:off x="5074920" y="5340096"/>
+            <a:ext cx="2011680" cy="438912"/>
           </a:xfrm>
           <a:prstGeom prst="rect">
             <a:avLst/>
@@ -5178,7 +5260,7 @@
               <a:buNone/>
             </a:pPr>
             <a:r>
-              <a:rPr lang="en-US" sz="2600" b="1" dirty="0">
+              <a:rPr lang="en-US" sz="2500" b="1" dirty="0">
                 <a:solidFill>
                   <a:srgbClr val="12315B"/>
                 </a:solidFill>
@@ -5202,20 +5284,20 @@
               </a:rPr>
               <a:t>pts</a:t>
             </a:r>
-            <a:endParaRPr lang="en-US" sz="2600" dirty="0"/>
-          </a:p>
-        </p:txBody>
-      </p:sp>
-      <p:sp>
-        <p:nvSpPr>
-          <p:cNvPr id="61" name="Text 59"/>
-          <p:cNvSpPr/>
-          <p:nvPr/>
-        </p:nvSpPr>
-        <p:spPr>
-          <a:xfrm>
-            <a:off x="5120640" y="5907024"/>
-            <a:ext cx="1920240" cy="502920"/>
+            <a:endParaRPr lang="en-US" sz="2500" dirty="0"/>
+          </a:p>
+        </p:txBody>
+      </p:sp>
+      <p:sp>
+        <p:nvSpPr>
+          <p:cNvPr id="62" name="Text 60"/>
+          <p:cNvSpPr/>
+          <p:nvPr/>
+        </p:nvSpPr>
+        <p:spPr>
+          <a:xfrm>
+            <a:off x="5120640" y="5815584"/>
+            <a:ext cx="1920240" cy="512064"/>
           </a:xfrm>
           <a:prstGeom prst="rect">
             <a:avLst/>
@@ -5250,13 +5332,13 @@
       </p:sp>
       <p:sp>
         <p:nvSpPr>
-          <p:cNvPr id="62" name="Shape 60"/>
-          <p:cNvSpPr/>
-          <p:nvPr/>
-        </p:nvSpPr>
-        <p:spPr>
-          <a:xfrm>
-            <a:off x="7406640" y="4974336"/>
+          <p:cNvPr id="63" name="Shape 61"/>
+          <p:cNvSpPr/>
+          <p:nvPr/>
+        </p:nvSpPr>
+        <p:spPr>
+          <a:xfrm>
+            <a:off x="7406640" y="4937760"/>
             <a:ext cx="4297680" cy="1298448"/>
           </a:xfrm>
           <a:prstGeom prst="roundRect">
@@ -5272,13 +5354,13 @@
       </p:sp>
       <p:sp>
         <p:nvSpPr>
-          <p:cNvPr id="63" name="Text 61"/>
-          <p:cNvSpPr/>
-          <p:nvPr/>
-        </p:nvSpPr>
-        <p:spPr>
-          <a:xfrm>
-            <a:off x="7662672" y="5120640"/>
+          <p:cNvPr id="64" name="Text 62"/>
+          <p:cNvSpPr/>
+          <p:nvPr/>
+        </p:nvSpPr>
+        <p:spPr>
+          <a:xfrm>
+            <a:off x="7662672" y="5084064"/>
             <a:ext cx="3840480" cy="274320"/>
           </a:xfrm>
           <a:prstGeom prst="rect">
@@ -5303,7 +5385,7 @@
                 <a:ea typeface="Calibri" pitchFamily="34" charset="-122"/>
                 <a:cs typeface="Calibri" pitchFamily="34" charset="-120"/>
               </a:rPr>
-              <a:t>CONTINUOUS FEEDBACK LOOP</a:t>
+              <a:t>COMPOUNDING ADVANTAGE</a:t>
             </a:r>
             <a:endParaRPr lang="en-US" sz="1100" dirty="0"/>
           </a:p>
@@ -5311,13 +5393,13 @@
       </p:sp>
       <p:sp>
         <p:nvSpPr>
-          <p:cNvPr id="64" name="Text 62"/>
-          <p:cNvSpPr/>
-          <p:nvPr/>
-        </p:nvSpPr>
-        <p:spPr>
-          <a:xfrm>
-            <a:off x="7662672" y="5431536"/>
+          <p:cNvPr id="65" name="Text 63"/>
+          <p:cNvSpPr/>
+          <p:nvPr/>
+        </p:nvSpPr>
+        <p:spPr>
+          <a:xfrm>
+            <a:off x="7662672" y="5394960"/>
             <a:ext cx="3840480" cy="777240"/>
           </a:xfrm>
           <a:prstGeom prst="rect">
@@ -5353,7 +5435,7 @@
       </p:sp>
       <p:sp>
         <p:nvSpPr>
-          <p:cNvPr id="65" name="Shape 63"/>
+          <p:cNvPr id="66" name="Shape 64"/>
           <p:cNvSpPr/>
           <p:nvPr/>
         </p:nvSpPr>
@@ -5376,7 +5458,7 @@
       </p:sp>
       <p:sp>
         <p:nvSpPr>
-          <p:cNvPr id="66" name="Text 64"/>
+          <p:cNvPr id="67" name="Text 65"/>
           <p:cNvSpPr/>
           <p:nvPr/>
         </p:nvSpPr>
@@ -5415,7 +5497,7 @@
       </p:sp>
       <p:sp>
         <p:nvSpPr>
-          <p:cNvPr id="67" name="Text 65"/>
+          <p:cNvPr id="68" name="Text 66"/>
           <p:cNvSpPr/>
           <p:nvPr/>
         </p:nvSpPr>
@@ -5454,7 +5536,7 @@
       </p:sp>
       <p:sp>
         <p:nvSpPr>
-          <p:cNvPr id="68" name="Text 66"/>
+          <p:cNvPr id="69" name="Text 67"/>
           <p:cNvSpPr/>
           <p:nvPr/>
         </p:nvSpPr>

--- a/Liberty_Mutual_AI_Signals.pptx
+++ b/Liberty_Mutual_AI_Signals.pptx
@@ -997,7 +997,7 @@
                 <a:ea typeface="Calibri" pitchFamily="34" charset="-122"/>
                 <a:cs typeface="Calibri" pitchFamily="34" charset="-120"/>
               </a:rPr>
-              <a:t>RETAIL  ·  SIGNAL 1</a:t>
+              <a:t>RETAIL  ·  SIGNAL 1  ·  RENEWAL IMPROVEMENT</a:t>
             </a:r>
             <a:endParaRPr lang="en-US" sz="1200" dirty="0"/>
           </a:p>
@@ -1039,7 +1039,7 @@
                 <a:ea typeface="Cambria" pitchFamily="34" charset="-122"/>
                 <a:cs typeface="Cambria" pitchFamily="34" charset="-120"/>
               </a:rPr>
-              <a:t>Renewal Improvement: a churn signal that protects premium before customers walk</a:t>
+              <a:t>Defend at-risk auto renewals before the customer shops</a:t>
             </a:r>
             <a:endParaRPr lang="en-US" sz="2600" dirty="0"/>
           </a:p>
@@ -1105,13 +1105,13 @@
                 <a:ea typeface="Calibri" pitchFamily="34" charset="-122"/>
                 <a:cs typeface="Calibri" pitchFamily="34" charset="-120"/>
               </a:rPr>
-              <a:t>THE CHALLENGE    </a:t>
+              <a:t>THE SIGNAL    </a:t>
             </a:r>
             <a:pPr indent="0" marL="0">
               <a:buNone/>
             </a:pPr>
             <a:r>
-              <a:rPr lang="en-US" sz="1250" i="1" dirty="0">
+              <a:rPr lang="en-US" sz="1200" i="1" dirty="0">
                 <a:solidFill>
                   <a:srgbClr val="1A2333"/>
                 </a:solidFill>
@@ -1119,7 +1119,7 @@
                 <a:ea typeface="Calibri" pitchFamily="34" charset="-122"/>
                 <a:cs typeface="Calibri" pitchFamily="34" charset="-120"/>
               </a:rPr>
-              <a:t>Most lapses are predictable and preventable — yet retention effort is spread evenly, spent late, and aimed at the wrong policies.</a:t>
+              <a:t>Auto retention has fallen 7.1 pts (73.5% → 66.4%). 550,849 high-LTV, claims-free renewals show shopping signals ~30–45 days out — worth $909M NWP / $2.27B CLV.</a:t>
             </a:r>
             <a:endParaRPr lang="en-US" sz="1100" dirty="0"/>
           </a:p>
@@ -1134,7 +1134,7 @@
         <p:spPr>
           <a:xfrm>
             <a:off x="457200" y="1938528"/>
-            <a:ext cx="5486400" cy="256032"/>
+            <a:ext cx="9144000" cy="256032"/>
           </a:xfrm>
           <a:prstGeom prst="rect">
             <a:avLst/>
@@ -1150,7 +1150,7 @@
               <a:buNone/>
             </a:pPr>
             <a:r>
-              <a:rPr lang="en-US" sz="1100" b="1" spc="200" kern="0" dirty="0">
+              <a:rPr lang="en-US" sz="1100" b="1" spc="150" kern="0" dirty="0">
                 <a:solidFill>
                   <a:srgbClr val="12315B"/>
                 </a:solidFill>
@@ -1158,7 +1158,7 @@
                 <a:ea typeface="Calibri" pitchFamily="34" charset="-122"/>
                 <a:cs typeface="Calibri" pitchFamily="34" charset="-120"/>
               </a:rPr>
-              <a:t>HOW THE SIGNAL RESPONDS</a:t>
+              <a:t>THE DECISION LOOP  ·  WHAT THE USER WALKS THROUGH ON SCREEN</a:t>
             </a:r>
             <a:endParaRPr lang="en-US" sz="1100" dirty="0"/>
           </a:p>
@@ -1261,7 +1261,7 @@
         <p:spPr>
           <a:xfrm>
             <a:off x="1060704" y="2377440"/>
-            <a:ext cx="1313078" cy="640080"/>
+            <a:ext cx="1313078" cy="256032"/>
           </a:xfrm>
           <a:prstGeom prst="rect">
             <a:avLst/>
@@ -1271,6 +1271,104 @@
         </p:spPr>
         <p:txBody>
           <a:bodyPr wrap="square" lIns="0" tIns="0" rIns="0" bIns="0" rtlCol="0" anchor="ctr"/>
+          <a:lstStyle/>
+          <a:p>
+            <a:pPr indent="0" marL="0">
+              <a:buNone/>
+            </a:pPr>
+            <a:r>
+              <a:rPr lang="en-US" sz="1300" b="1" dirty="0">
+                <a:solidFill>
+                  <a:srgbClr val="12315B"/>
+                </a:solidFill>
+                <a:latin typeface="Calibri" pitchFamily="34" charset="0"/>
+                <a:ea typeface="Calibri" pitchFamily="34" charset="-122"/>
+                <a:cs typeface="Calibri" pitchFamily="34" charset="-120"/>
+              </a:rPr>
+              <a:t>Sense</a:t>
+            </a:r>
+            <a:endParaRPr lang="en-US" sz="1300" dirty="0"/>
+          </a:p>
+        </p:txBody>
+      </p:sp>
+      <p:sp>
+        <p:nvSpPr>
+          <p:cNvPr id="11" name="Text 9"/>
+          <p:cNvSpPr/>
+          <p:nvPr/>
+        </p:nvSpPr>
+        <p:spPr>
+          <a:xfrm>
+            <a:off x="1060704" y="2633472"/>
+            <a:ext cx="1331366" cy="201168"/>
+          </a:xfrm>
+          <a:prstGeom prst="rect">
+            <a:avLst/>
+          </a:prstGeom>
+          <a:noFill/>
+          <a:ln/>
+        </p:spPr>
+        <p:txBody>
+          <a:bodyPr wrap="square" lIns="0" tIns="0" rIns="0" bIns="0" rtlCol="0" anchor="ctr"/>
+          <a:lstStyle/>
+          <a:p>
+            <a:pPr indent="0" marL="0">
+              <a:buNone/>
+            </a:pPr>
+            <a:r>
+              <a:rPr lang="en-US" sz="800" b="1" spc="100" kern="0" dirty="0">
+                <a:solidFill>
+                  <a:srgbClr val="2E6FB5"/>
+                </a:solidFill>
+                <a:latin typeface="Calibri" pitchFamily="34" charset="0"/>
+                <a:ea typeface="Calibri" pitchFamily="34" charset="-122"/>
+                <a:cs typeface="Calibri" pitchFamily="34" charset="-120"/>
+              </a:rPr>
+              <a:t>DECISION COCKPIT</a:t>
+            </a:r>
+            <a:endParaRPr lang="en-US" sz="800" dirty="0"/>
+          </a:p>
+        </p:txBody>
+      </p:sp>
+      <p:sp>
+        <p:nvSpPr>
+          <p:cNvPr id="12" name="Shape 10"/>
+          <p:cNvSpPr/>
+          <p:nvPr/>
+        </p:nvSpPr>
+        <p:spPr>
+          <a:xfrm>
+            <a:off x="640080" y="3127248"/>
+            <a:ext cx="73152" cy="73152"/>
+          </a:xfrm>
+          <a:prstGeom prst="rect">
+            <a:avLst/>
+          </a:prstGeom>
+          <a:solidFill>
+            <a:srgbClr val="2E6FB5"/>
+          </a:solidFill>
+          <a:ln/>
+        </p:spPr>
+      </p:sp>
+      <p:sp>
+        <p:nvSpPr>
+          <p:cNvPr id="13" name="Text 11"/>
+          <p:cNvSpPr/>
+          <p:nvPr/>
+        </p:nvSpPr>
+        <p:spPr>
+          <a:xfrm>
+            <a:off x="804672" y="3044952"/>
+            <a:ext cx="1532534" cy="566928"/>
+          </a:xfrm>
+          <a:prstGeom prst="rect">
+            <a:avLst/>
+          </a:prstGeom>
+          <a:noFill/>
+          <a:ln/>
+        </p:spPr>
+        <p:txBody>
+          <a:bodyPr wrap="square" lIns="0" tIns="0" rIns="0" bIns="0" rtlCol="0" anchor="t"/>
           <a:lstStyle/>
           <a:p>
             <a:pPr indent="0" marL="0">
@@ -1280,29 +1378,29 @@
               <a:buNone/>
             </a:pPr>
             <a:r>
-              <a:rPr lang="en-US" sz="1250" b="1" dirty="0">
-                <a:solidFill>
-                  <a:srgbClr val="12315B"/>
-                </a:solidFill>
-                <a:latin typeface="Calibri" pitchFamily="34" charset="0"/>
-                <a:ea typeface="Calibri" pitchFamily="34" charset="-122"/>
-                <a:cs typeface="Calibri" pitchFamily="34" charset="-120"/>
-              </a:rPr>
-              <a:t>Trigger &amp; data capture</a:t>
-            </a:r>
-            <a:endParaRPr lang="en-US" sz="1250" dirty="0"/>
-          </a:p>
-        </p:txBody>
-      </p:sp>
-      <p:sp>
-        <p:nvSpPr>
-          <p:cNvPr id="11" name="Shape 9"/>
-          <p:cNvSpPr/>
-          <p:nvPr/>
-        </p:nvSpPr>
-        <p:spPr>
-          <a:xfrm>
-            <a:off x="640080" y="3172968"/>
+              <a:rPr lang="en-US" sz="950" dirty="0">
+                <a:solidFill>
+                  <a:srgbClr val="5A6472"/>
+                </a:solidFill>
+                <a:latin typeface="Calibri" pitchFamily="34" charset="0"/>
+                <a:ea typeface="Calibri" pitchFamily="34" charset="-122"/>
+                <a:cs typeface="Calibri" pitchFamily="34" charset="-120"/>
+              </a:rPr>
+              <a:t>Auto-renewal signal tile fires in the retail cockpit</a:t>
+            </a:r>
+            <a:endParaRPr lang="en-US" sz="950" dirty="0"/>
+          </a:p>
+        </p:txBody>
+      </p:sp>
+      <p:sp>
+        <p:nvSpPr>
+          <p:cNvPr id="14" name="Shape 12"/>
+          <p:cNvSpPr/>
+          <p:nvPr/>
+        </p:nvSpPr>
+        <p:spPr>
+          <a:xfrm>
+            <a:off x="640080" y="3730752"/>
             <a:ext cx="73152" cy="73152"/>
           </a:xfrm>
           <a:prstGeom prst="rect">
@@ -1316,14 +1414,14 @@
       </p:sp>
       <p:sp>
         <p:nvSpPr>
-          <p:cNvPr id="12" name="Text 10"/>
-          <p:cNvSpPr/>
-          <p:nvPr/>
-        </p:nvSpPr>
-        <p:spPr>
-          <a:xfrm>
-            <a:off x="804672" y="3090672"/>
-            <a:ext cx="1532534" cy="548640"/>
+          <p:cNvPr id="15" name="Text 13"/>
+          <p:cNvSpPr/>
+          <p:nvPr/>
+        </p:nvSpPr>
+        <p:spPr>
+          <a:xfrm>
+            <a:off x="804672" y="3648456"/>
+            <a:ext cx="1532534" cy="566928"/>
           </a:xfrm>
           <a:prstGeom prst="rect">
             <a:avLst/>
@@ -1342,7 +1440,7 @@
               <a:buNone/>
             </a:pPr>
             <a:r>
-              <a:rPr lang="en-US" sz="1000" dirty="0">
+              <a:rPr lang="en-US" sz="950" dirty="0">
                 <a:solidFill>
                   <a:srgbClr val="5A6472"/>
                 </a:solidFill>
@@ -1350,77 +1448,15 @@
                 <a:ea typeface="Calibri" pitchFamily="34" charset="-122"/>
                 <a:cs typeface="Calibri" pitchFamily="34" charset="-120"/>
               </a:rPr>
-              <a:t>Enters the 90-day renewal window</a:t>
-            </a:r>
-            <a:endParaRPr lang="en-US" sz="1000" dirty="0"/>
-          </a:p>
-        </p:txBody>
-      </p:sp>
-      <p:sp>
-        <p:nvSpPr>
-          <p:cNvPr id="13" name="Shape 11"/>
-          <p:cNvSpPr/>
-          <p:nvPr/>
-        </p:nvSpPr>
-        <p:spPr>
-          <a:xfrm>
-            <a:off x="640080" y="3758184"/>
-            <a:ext cx="73152" cy="73152"/>
-          </a:xfrm>
-          <a:prstGeom prst="rect">
-            <a:avLst/>
-          </a:prstGeom>
-          <a:solidFill>
-            <a:srgbClr val="2E6FB5"/>
-          </a:solidFill>
-          <a:ln/>
-        </p:spPr>
-      </p:sp>
-      <p:sp>
-        <p:nvSpPr>
-          <p:cNvPr id="14" name="Text 12"/>
-          <p:cNvSpPr/>
-          <p:nvPr/>
-        </p:nvSpPr>
-        <p:spPr>
-          <a:xfrm>
-            <a:off x="804672" y="3675888"/>
-            <a:ext cx="1532534" cy="548640"/>
-          </a:xfrm>
-          <a:prstGeom prst="rect">
-            <a:avLst/>
-          </a:prstGeom>
-          <a:noFill/>
-          <a:ln/>
-        </p:spPr>
-        <p:txBody>
-          <a:bodyPr wrap="square" lIns="0" tIns="0" rIns="0" bIns="0" rtlCol="0" anchor="t"/>
-          <a:lstStyle/>
-          <a:p>
-            <a:pPr indent="0" marL="0">
-              <a:lnSpc>
-                <a:spcPct val="95000"/>
-              </a:lnSpc>
-              <a:buNone/>
-            </a:pPr>
-            <a:r>
-              <a:rPr lang="en-US" sz="1000" dirty="0">
-                <a:solidFill>
-                  <a:srgbClr val="5A6472"/>
-                </a:solidFill>
-                <a:latin typeface="Calibri" pitchFamily="34" charset="0"/>
-                <a:ea typeface="Calibri" pitchFamily="34" charset="-122"/>
-                <a:cs typeface="Calibri" pitchFamily="34" charset="-120"/>
-              </a:rPr>
-              <a:t>Tenure, price, claims &amp; competitor rates</a:t>
-            </a:r>
-            <a:endParaRPr lang="en-US" sz="1000" dirty="0"/>
-          </a:p>
-        </p:txBody>
-      </p:sp>
-      <p:sp>
-        <p:nvSpPr>
-          <p:cNvPr id="15" name="Shape 13"/>
+              <a:t>550,849 at-risk renewals · $909M NWP at stake</a:t>
+            </a:r>
+            <a:endParaRPr lang="en-US" sz="950" dirty="0"/>
+          </a:p>
+        </p:txBody>
+      </p:sp>
+      <p:sp>
+        <p:nvSpPr>
+          <p:cNvPr id="16" name="Shape 14"/>
           <p:cNvSpPr/>
           <p:nvPr/>
         </p:nvSpPr>
@@ -1445,7 +1481,7 @@
       </p:sp>
       <p:sp>
         <p:nvSpPr>
-          <p:cNvPr id="16" name="Shape 14"/>
+          <p:cNvPr id="17" name="Shape 15"/>
           <p:cNvSpPr/>
           <p:nvPr/>
         </p:nvSpPr>
@@ -1472,7 +1508,7 @@
       </p:sp>
       <p:sp>
         <p:nvSpPr>
-          <p:cNvPr id="17" name="Shape 15"/>
+          <p:cNvPr id="18" name="Shape 16"/>
           <p:cNvSpPr/>
           <p:nvPr/>
         </p:nvSpPr>
@@ -1494,7 +1530,7 @@
       </p:sp>
       <p:sp>
         <p:nvSpPr>
-          <p:cNvPr id="18" name="Text 16"/>
+          <p:cNvPr id="19" name="Text 17"/>
           <p:cNvSpPr/>
           <p:nvPr/>
         </p:nvSpPr>
@@ -1533,14 +1569,14 @@
       </p:sp>
       <p:sp>
         <p:nvSpPr>
-          <p:cNvPr id="19" name="Text 17"/>
+          <p:cNvPr id="20" name="Text 18"/>
           <p:cNvSpPr/>
           <p:nvPr/>
         </p:nvSpPr>
         <p:spPr>
           <a:xfrm>
             <a:off x="3361334" y="2377440"/>
-            <a:ext cx="1313078" cy="640080"/>
+            <a:ext cx="1313078" cy="256032"/>
           </a:xfrm>
           <a:prstGeom prst="rect">
             <a:avLst/>
@@ -1550,6 +1586,104 @@
         </p:spPr>
         <p:txBody>
           <a:bodyPr wrap="square" lIns="0" tIns="0" rIns="0" bIns="0" rtlCol="0" anchor="ctr"/>
+          <a:lstStyle/>
+          <a:p>
+            <a:pPr indent="0" marL="0">
+              <a:buNone/>
+            </a:pPr>
+            <a:r>
+              <a:rPr lang="en-US" sz="1300" b="1" dirty="0">
+                <a:solidFill>
+                  <a:srgbClr val="12315B"/>
+                </a:solidFill>
+                <a:latin typeface="Calibri" pitchFamily="34" charset="0"/>
+                <a:ea typeface="Calibri" pitchFamily="34" charset="-122"/>
+                <a:cs typeface="Calibri" pitchFamily="34" charset="-120"/>
+              </a:rPr>
+              <a:t>Hypothesize</a:t>
+            </a:r>
+            <a:endParaRPr lang="en-US" sz="1300" dirty="0"/>
+          </a:p>
+        </p:txBody>
+      </p:sp>
+      <p:sp>
+        <p:nvSpPr>
+          <p:cNvPr id="21" name="Text 19"/>
+          <p:cNvSpPr/>
+          <p:nvPr/>
+        </p:nvSpPr>
+        <p:spPr>
+          <a:xfrm>
+            <a:off x="3361334" y="2633472"/>
+            <a:ext cx="1331366" cy="201168"/>
+          </a:xfrm>
+          <a:prstGeom prst="rect">
+            <a:avLst/>
+          </a:prstGeom>
+          <a:noFill/>
+          <a:ln/>
+        </p:spPr>
+        <p:txBody>
+          <a:bodyPr wrap="square" lIns="0" tIns="0" rIns="0" bIns="0" rtlCol="0" anchor="ctr"/>
+          <a:lstStyle/>
+          <a:p>
+            <a:pPr indent="0" marL="0">
+              <a:buNone/>
+            </a:pPr>
+            <a:r>
+              <a:rPr lang="en-US" sz="800" b="1" spc="100" kern="0" dirty="0">
+                <a:solidFill>
+                  <a:srgbClr val="2E6FB5"/>
+                </a:solidFill>
+                <a:latin typeface="Calibri" pitchFamily="34" charset="0"/>
+                <a:ea typeface="Calibri" pitchFamily="34" charset="-122"/>
+                <a:cs typeface="Calibri" pitchFamily="34" charset="-120"/>
+              </a:rPr>
+              <a:t>ANALYSE</a:t>
+            </a:r>
+            <a:endParaRPr lang="en-US" sz="800" dirty="0"/>
+          </a:p>
+        </p:txBody>
+      </p:sp>
+      <p:sp>
+        <p:nvSpPr>
+          <p:cNvPr id="22" name="Shape 20"/>
+          <p:cNvSpPr/>
+          <p:nvPr/>
+        </p:nvSpPr>
+        <p:spPr>
+          <a:xfrm>
+            <a:off x="2940710" y="3127248"/>
+            <a:ext cx="73152" cy="73152"/>
+          </a:xfrm>
+          <a:prstGeom prst="rect">
+            <a:avLst/>
+          </a:prstGeom>
+          <a:solidFill>
+            <a:srgbClr val="2E6FB5"/>
+          </a:solidFill>
+          <a:ln/>
+        </p:spPr>
+      </p:sp>
+      <p:sp>
+        <p:nvSpPr>
+          <p:cNvPr id="23" name="Text 21"/>
+          <p:cNvSpPr/>
+          <p:nvPr/>
+        </p:nvSpPr>
+        <p:spPr>
+          <a:xfrm>
+            <a:off x="3105302" y="3044952"/>
+            <a:ext cx="1532534" cy="566928"/>
+          </a:xfrm>
+          <a:prstGeom prst="rect">
+            <a:avLst/>
+          </a:prstGeom>
+          <a:noFill/>
+          <a:ln/>
+        </p:spPr>
+        <p:txBody>
+          <a:bodyPr wrap="square" lIns="0" tIns="0" rIns="0" bIns="0" rtlCol="0" anchor="t"/>
           <a:lstStyle/>
           <a:p>
             <a:pPr indent="0" marL="0">
@@ -1559,29 +1693,29 @@
               <a:buNone/>
             </a:pPr>
             <a:r>
-              <a:rPr lang="en-US" sz="1250" b="1" dirty="0">
-                <a:solidFill>
-                  <a:srgbClr val="12315B"/>
-                </a:solidFill>
-                <a:latin typeface="Calibri" pitchFamily="34" charset="0"/>
-                <a:ea typeface="Calibri" pitchFamily="34" charset="-122"/>
-                <a:cs typeface="Calibri" pitchFamily="34" charset="-120"/>
-              </a:rPr>
-              <a:t>Churn risk scoring</a:t>
-            </a:r>
-            <a:endParaRPr lang="en-US" sz="1250" dirty="0"/>
-          </a:p>
-        </p:txBody>
-      </p:sp>
-      <p:sp>
-        <p:nvSpPr>
-          <p:cNvPr id="20" name="Shape 18"/>
-          <p:cNvSpPr/>
-          <p:nvPr/>
-        </p:nvSpPr>
-        <p:spPr>
-          <a:xfrm>
-            <a:off x="2940710" y="3172968"/>
+              <a:rPr lang="en-US" sz="950" dirty="0">
+                <a:solidFill>
+                  <a:srgbClr val="5A6472"/>
+                </a:solidFill>
+                <a:latin typeface="Calibri" pitchFamily="34" charset="0"/>
+                <a:ea typeface="Calibri" pitchFamily="34" charset="-122"/>
+                <a:cs typeface="Calibri" pitchFamily="34" charset="-120"/>
+              </a:rPr>
+              <a:t>“Defend at-risk auto renewals” — elasticity-first</a:t>
+            </a:r>
+            <a:endParaRPr lang="en-US" sz="950" dirty="0"/>
+          </a:p>
+        </p:txBody>
+      </p:sp>
+      <p:sp>
+        <p:nvSpPr>
+          <p:cNvPr id="24" name="Shape 22"/>
+          <p:cNvSpPr/>
+          <p:nvPr/>
+        </p:nvSpPr>
+        <p:spPr>
+          <a:xfrm>
+            <a:off x="2940710" y="3730752"/>
             <a:ext cx="73152" cy="73152"/>
           </a:xfrm>
           <a:prstGeom prst="rect">
@@ -1595,14 +1729,14 @@
       </p:sp>
       <p:sp>
         <p:nvSpPr>
-          <p:cNvPr id="21" name="Text 19"/>
-          <p:cNvSpPr/>
-          <p:nvPr/>
-        </p:nvSpPr>
-        <p:spPr>
-          <a:xfrm>
-            <a:off x="3105302" y="3090672"/>
-            <a:ext cx="1532534" cy="548640"/>
+          <p:cNvPr id="25" name="Text 23"/>
+          <p:cNvSpPr/>
+          <p:nvPr/>
+        </p:nvSpPr>
+        <p:spPr>
+          <a:xfrm>
+            <a:off x="3105302" y="3648456"/>
+            <a:ext cx="1532534" cy="566928"/>
           </a:xfrm>
           <a:prstGeom prst="rect">
             <a:avLst/>
@@ -1621,7 +1755,7 @@
               <a:buNone/>
             </a:pPr>
             <a:r>
-              <a:rPr lang="en-US" sz="1000" dirty="0">
+              <a:rPr lang="en-US" sz="950" dirty="0">
                 <a:solidFill>
                   <a:srgbClr val="5A6472"/>
                 </a:solidFill>
@@ -1629,77 +1763,15 @@
                 <a:ea typeface="Calibri" pitchFamily="34" charset="-122"/>
                 <a:cs typeface="Calibri" pitchFamily="34" charset="-120"/>
               </a:rPr>
-              <a:t>Daily lapse-propensity score, 0–100</a:t>
-            </a:r>
-            <a:endParaRPr lang="en-US" sz="1000" dirty="0"/>
-          </a:p>
-        </p:txBody>
-      </p:sp>
-      <p:sp>
-        <p:nvSpPr>
-          <p:cNvPr id="22" name="Shape 20"/>
-          <p:cNvSpPr/>
-          <p:nvPr/>
-        </p:nvSpPr>
-        <p:spPr>
-          <a:xfrm>
-            <a:off x="2940710" y="3758184"/>
-            <a:ext cx="73152" cy="73152"/>
-          </a:xfrm>
-          <a:prstGeom prst="rect">
-            <a:avLst/>
-          </a:prstGeom>
-          <a:solidFill>
-            <a:srgbClr val="2E6FB5"/>
-          </a:solidFill>
-          <a:ln/>
-        </p:spPr>
-      </p:sp>
-      <p:sp>
-        <p:nvSpPr>
-          <p:cNvPr id="23" name="Text 21"/>
-          <p:cNvSpPr/>
-          <p:nvPr/>
-        </p:nvSpPr>
-        <p:spPr>
-          <a:xfrm>
-            <a:off x="3105302" y="3675888"/>
-            <a:ext cx="1532534" cy="548640"/>
-          </a:xfrm>
-          <a:prstGeom prst="rect">
-            <a:avLst/>
-          </a:prstGeom>
-          <a:noFill/>
-          <a:ln/>
-        </p:spPr>
-        <p:txBody>
-          <a:bodyPr wrap="square" lIns="0" tIns="0" rIns="0" bIns="0" rtlCol="0" anchor="t"/>
-          <a:lstStyle/>
-          <a:p>
-            <a:pPr indent="0" marL="0">
-              <a:lnSpc>
-                <a:spcPct val="95000"/>
-              </a:lnSpc>
-              <a:buNone/>
-            </a:pPr>
-            <a:r>
-              <a:rPr lang="en-US" sz="1000" dirty="0">
-                <a:solidFill>
-                  <a:srgbClr val="5A6472"/>
-                </a:solidFill>
-                <a:latin typeface="Calibri" pitchFamily="34" charset="0"/>
-                <a:ea typeface="Calibri" pitchFamily="34" charset="-122"/>
-                <a:cs typeface="Calibri" pitchFamily="34" charset="-120"/>
-              </a:rPr>
-              <a:t>Price sensitivity, life-events, engagement</a:t>
-            </a:r>
-            <a:endParaRPr lang="en-US" sz="1000" dirty="0"/>
-          </a:p>
-        </p:txBody>
-      </p:sp>
-      <p:sp>
-        <p:nvSpPr>
-          <p:cNvPr id="24" name="Shape 22"/>
+              <a:t>3 archetypes: Shopping Renewer + Silent Pre-Shopper act; Sticky-Bundled excluded</a:t>
+            </a:r>
+            <a:endParaRPr lang="en-US" sz="950" dirty="0"/>
+          </a:p>
+        </p:txBody>
+      </p:sp>
+      <p:sp>
+        <p:nvSpPr>
+          <p:cNvPr id="26" name="Shape 24"/>
           <p:cNvSpPr/>
           <p:nvPr/>
         </p:nvSpPr>
@@ -1724,7 +1796,7 @@
       </p:sp>
       <p:sp>
         <p:nvSpPr>
-          <p:cNvPr id="25" name="Shape 23"/>
+          <p:cNvPr id="27" name="Shape 25"/>
           <p:cNvSpPr/>
           <p:nvPr/>
         </p:nvSpPr>
@@ -1751,7 +1823,7 @@
       </p:sp>
       <p:sp>
         <p:nvSpPr>
-          <p:cNvPr id="26" name="Shape 24"/>
+          <p:cNvPr id="28" name="Shape 26"/>
           <p:cNvSpPr/>
           <p:nvPr/>
         </p:nvSpPr>
@@ -1773,7 +1845,7 @@
       </p:sp>
       <p:sp>
         <p:nvSpPr>
-          <p:cNvPr id="27" name="Text 25"/>
+          <p:cNvPr id="29" name="Text 27"/>
           <p:cNvSpPr/>
           <p:nvPr/>
         </p:nvSpPr>
@@ -1812,14 +1884,14 @@
       </p:sp>
       <p:sp>
         <p:nvSpPr>
-          <p:cNvPr id="28" name="Text 26"/>
+          <p:cNvPr id="30" name="Text 28"/>
           <p:cNvSpPr/>
           <p:nvPr/>
         </p:nvSpPr>
         <p:spPr>
           <a:xfrm>
             <a:off x="5661965" y="2377440"/>
-            <a:ext cx="1313078" cy="640080"/>
+            <a:ext cx="1313078" cy="256032"/>
           </a:xfrm>
           <a:prstGeom prst="rect">
             <a:avLst/>
@@ -1829,6 +1901,104 @@
         </p:spPr>
         <p:txBody>
           <a:bodyPr wrap="square" lIns="0" tIns="0" rIns="0" bIns="0" rtlCol="0" anchor="ctr"/>
+          <a:lstStyle/>
+          <a:p>
+            <a:pPr indent="0" marL="0">
+              <a:buNone/>
+            </a:pPr>
+            <a:r>
+              <a:rPr lang="en-US" sz="1300" b="1" dirty="0">
+                <a:solidFill>
+                  <a:srgbClr val="12315B"/>
+                </a:solidFill>
+                <a:latin typeface="Calibri" pitchFamily="34" charset="0"/>
+                <a:ea typeface="Calibri" pitchFamily="34" charset="-122"/>
+                <a:cs typeface="Calibri" pitchFamily="34" charset="-120"/>
+              </a:rPr>
+              <a:t>Test</a:t>
+            </a:r>
+            <a:endParaRPr lang="en-US" sz="1300" dirty="0"/>
+          </a:p>
+        </p:txBody>
+      </p:sp>
+      <p:sp>
+        <p:nvSpPr>
+          <p:cNvPr id="31" name="Text 29"/>
+          <p:cNvSpPr/>
+          <p:nvPr/>
+        </p:nvSpPr>
+        <p:spPr>
+          <a:xfrm>
+            <a:off x="5661965" y="2633472"/>
+            <a:ext cx="1331366" cy="201168"/>
+          </a:xfrm>
+          <a:prstGeom prst="rect">
+            <a:avLst/>
+          </a:prstGeom>
+          <a:noFill/>
+          <a:ln/>
+        </p:spPr>
+        <p:txBody>
+          <a:bodyPr wrap="square" lIns="0" tIns="0" rIns="0" bIns="0" rtlCol="0" anchor="ctr"/>
+          <a:lstStyle/>
+          <a:p>
+            <a:pPr indent="0" marL="0">
+              <a:buNone/>
+            </a:pPr>
+            <a:r>
+              <a:rPr lang="en-US" sz="800" b="1" spc="100" kern="0" dirty="0">
+                <a:solidFill>
+                  <a:srgbClr val="2E6FB5"/>
+                </a:solidFill>
+                <a:latin typeface="Calibri" pitchFamily="34" charset="0"/>
+                <a:ea typeface="Calibri" pitchFamily="34" charset="-122"/>
+                <a:cs typeface="Calibri" pitchFamily="34" charset="-120"/>
+              </a:rPr>
+              <a:t>SIMULATION STUDIO</a:t>
+            </a:r>
+            <a:endParaRPr lang="en-US" sz="800" dirty="0"/>
+          </a:p>
+        </p:txBody>
+      </p:sp>
+      <p:sp>
+        <p:nvSpPr>
+          <p:cNvPr id="32" name="Shape 30"/>
+          <p:cNvSpPr/>
+          <p:nvPr/>
+        </p:nvSpPr>
+        <p:spPr>
+          <a:xfrm>
+            <a:off x="5241341" y="3127248"/>
+            <a:ext cx="73152" cy="73152"/>
+          </a:xfrm>
+          <a:prstGeom prst="rect">
+            <a:avLst/>
+          </a:prstGeom>
+          <a:solidFill>
+            <a:srgbClr val="2E6FB5"/>
+          </a:solidFill>
+          <a:ln/>
+        </p:spPr>
+      </p:sp>
+      <p:sp>
+        <p:nvSpPr>
+          <p:cNvPr id="33" name="Text 31"/>
+          <p:cNvSpPr/>
+          <p:nvPr/>
+        </p:nvSpPr>
+        <p:spPr>
+          <a:xfrm>
+            <a:off x="5405933" y="3044952"/>
+            <a:ext cx="1532534" cy="566928"/>
+          </a:xfrm>
+          <a:prstGeom prst="rect">
+            <a:avLst/>
+          </a:prstGeom>
+          <a:noFill/>
+          <a:ln/>
+        </p:spPr>
+        <p:txBody>
+          <a:bodyPr wrap="square" lIns="0" tIns="0" rIns="0" bIns="0" rtlCol="0" anchor="t"/>
           <a:lstStyle/>
           <a:p>
             <a:pPr indent="0" marL="0">
@@ -1838,29 +2008,29 @@
               <a:buNone/>
             </a:pPr>
             <a:r>
-              <a:rPr lang="en-US" sz="1250" b="1" dirty="0">
-                <a:solidFill>
-                  <a:srgbClr val="12315B"/>
-                </a:solidFill>
-                <a:latin typeface="Calibri" pitchFamily="34" charset="0"/>
-                <a:ea typeface="Calibri" pitchFamily="34" charset="-122"/>
-                <a:cs typeface="Calibri" pitchFamily="34" charset="-120"/>
-              </a:rPr>
-              <a:t>Prioritize the movable middle</a:t>
-            </a:r>
-            <a:endParaRPr lang="en-US" sz="1250" dirty="0"/>
-          </a:p>
-        </p:txBody>
-      </p:sp>
-      <p:sp>
-        <p:nvSpPr>
-          <p:cNvPr id="29" name="Shape 27"/>
-          <p:cNvSpPr/>
-          <p:nvPr/>
-        </p:nvSpPr>
-        <p:spPr>
-          <a:xfrm>
-            <a:off x="5241341" y="3172968"/>
+              <a:rPr lang="en-US" sz="950" dirty="0">
+                <a:solidFill>
+                  <a:srgbClr val="5A6472"/>
+                </a:solidFill>
+                <a:latin typeface="Calibri" pitchFamily="34" charset="0"/>
+                <a:ea typeface="Calibri" pitchFamily="34" charset="-122"/>
+                <a:cs typeface="Calibri" pitchFamily="34" charset="-120"/>
+              </a:rPr>
+              <a:t>What-If levers or If-What goal-seek: reprice, offer, holdout</a:t>
+            </a:r>
+            <a:endParaRPr lang="en-US" sz="950" dirty="0"/>
+          </a:p>
+        </p:txBody>
+      </p:sp>
+      <p:sp>
+        <p:nvSpPr>
+          <p:cNvPr id="34" name="Shape 32"/>
+          <p:cNvSpPr/>
+          <p:nvPr/>
+        </p:nvSpPr>
+        <p:spPr>
+          <a:xfrm>
+            <a:off x="5241341" y="3730752"/>
             <a:ext cx="73152" cy="73152"/>
           </a:xfrm>
           <a:prstGeom prst="rect">
@@ -1874,14 +2044,14 @@
       </p:sp>
       <p:sp>
         <p:nvSpPr>
-          <p:cNvPr id="30" name="Text 28"/>
-          <p:cNvSpPr/>
-          <p:nvPr/>
-        </p:nvSpPr>
-        <p:spPr>
-          <a:xfrm>
-            <a:off x="5405933" y="3090672"/>
-            <a:ext cx="1532534" cy="548640"/>
+          <p:cNvPr id="35" name="Text 33"/>
+          <p:cNvSpPr/>
+          <p:nvPr/>
+        </p:nvSpPr>
+        <p:spPr>
+          <a:xfrm>
+            <a:off x="5405933" y="3648456"/>
+            <a:ext cx="1532534" cy="566928"/>
           </a:xfrm>
           <a:prstGeom prst="rect">
             <a:avLst/>
@@ -1900,7 +2070,7 @@
               <a:buNone/>
             </a:pPr>
             <a:r>
-              <a:rPr lang="en-US" sz="1000" dirty="0">
+              <a:rPr lang="en-US" sz="950" dirty="0">
                 <a:solidFill>
                   <a:srgbClr val="5A6472"/>
                 </a:solidFill>
@@ -1908,77 +2078,15 @@
                 <a:ea typeface="Calibri" pitchFamily="34" charset="-122"/>
                 <a:cs typeface="Calibri" pitchFamily="34" charset="-120"/>
               </a:rPr>
-              <a:t>Ranked by value × movability</a:t>
-            </a:r>
-            <a:endParaRPr lang="en-US" sz="1000" dirty="0"/>
-          </a:p>
-        </p:txBody>
-      </p:sp>
-      <p:sp>
-        <p:nvSpPr>
-          <p:cNvPr id="31" name="Shape 29"/>
-          <p:cNvSpPr/>
-          <p:nvPr/>
-        </p:nvSpPr>
-        <p:spPr>
-          <a:xfrm>
-            <a:off x="5241341" y="3758184"/>
-            <a:ext cx="73152" cy="73152"/>
-          </a:xfrm>
-          <a:prstGeom prst="rect">
-            <a:avLst/>
-          </a:prstGeom>
-          <a:solidFill>
-            <a:srgbClr val="2E6FB5"/>
-          </a:solidFill>
-          <a:ln/>
-        </p:spPr>
-      </p:sp>
-      <p:sp>
-        <p:nvSpPr>
-          <p:cNvPr id="32" name="Text 30"/>
-          <p:cNvSpPr/>
-          <p:nvPr/>
-        </p:nvSpPr>
-        <p:spPr>
-          <a:xfrm>
-            <a:off x="5405933" y="3675888"/>
-            <a:ext cx="1532534" cy="548640"/>
-          </a:xfrm>
-          <a:prstGeom prst="rect">
-            <a:avLst/>
-          </a:prstGeom>
-          <a:noFill/>
-          <a:ln/>
-        </p:spPr>
-        <p:txBody>
-          <a:bodyPr wrap="square" lIns="0" tIns="0" rIns="0" bIns="0" rtlCol="0" anchor="t"/>
-          <a:lstStyle/>
-          <a:p>
-            <a:pPr indent="0" marL="0">
-              <a:lnSpc>
-                <a:spcPct val="95000"/>
-              </a:lnSpc>
-              <a:buNone/>
-            </a:pPr>
-            <a:r>
-              <a:rPr lang="en-US" sz="1000" dirty="0">
-                <a:solidFill>
-                  <a:srgbClr val="5A6472"/>
-                </a:solidFill>
-                <a:latin typeface="Calibri" pitchFamily="34" charset="0"/>
-                <a:ea typeface="Calibri" pitchFamily="34" charset="-122"/>
-                <a:cs typeface="Calibri" pitchFamily="34" charset="-120"/>
-              </a:rPr>
-              <a:t>Targets the high-premium middle</a:t>
-            </a:r>
-            <a:endParaRPr lang="en-US" sz="1000" dirty="0"/>
-          </a:p>
-        </p:txBody>
-      </p:sp>
-      <p:sp>
-        <p:nvSpPr>
-          <p:cNvPr id="33" name="Shape 31"/>
+              <a:t>Live fair-lending pill vs 0.85 floor</a:t>
+            </a:r>
+            <a:endParaRPr lang="en-US" sz="950" dirty="0"/>
+          </a:p>
+        </p:txBody>
+      </p:sp>
+      <p:sp>
+        <p:nvSpPr>
+          <p:cNvPr id="36" name="Shape 34"/>
           <p:cNvSpPr/>
           <p:nvPr/>
         </p:nvSpPr>
@@ -2003,7 +2111,7 @@
       </p:sp>
       <p:sp>
         <p:nvSpPr>
-          <p:cNvPr id="34" name="Shape 32"/>
+          <p:cNvPr id="37" name="Shape 35"/>
           <p:cNvSpPr/>
           <p:nvPr/>
         </p:nvSpPr>
@@ -2030,7 +2138,7 @@
       </p:sp>
       <p:sp>
         <p:nvSpPr>
-          <p:cNvPr id="35" name="Shape 33"/>
+          <p:cNvPr id="38" name="Shape 36"/>
           <p:cNvSpPr/>
           <p:nvPr/>
         </p:nvSpPr>
@@ -2052,7 +2160,7 @@
       </p:sp>
       <p:sp>
         <p:nvSpPr>
-          <p:cNvPr id="36" name="Text 34"/>
+          <p:cNvPr id="39" name="Text 37"/>
           <p:cNvSpPr/>
           <p:nvPr/>
         </p:nvSpPr>
@@ -2091,14 +2199,14 @@
       </p:sp>
       <p:sp>
         <p:nvSpPr>
-          <p:cNvPr id="37" name="Text 35"/>
+          <p:cNvPr id="40" name="Text 38"/>
           <p:cNvSpPr/>
           <p:nvPr/>
         </p:nvSpPr>
         <p:spPr>
           <a:xfrm>
             <a:off x="7962595" y="2377440"/>
-            <a:ext cx="1313078" cy="640080"/>
+            <a:ext cx="1313078" cy="256032"/>
           </a:xfrm>
           <a:prstGeom prst="rect">
             <a:avLst/>
@@ -2108,6 +2216,104 @@
         </p:spPr>
         <p:txBody>
           <a:bodyPr wrap="square" lIns="0" tIns="0" rIns="0" bIns="0" rtlCol="0" anchor="ctr"/>
+          <a:lstStyle/>
+          <a:p>
+            <a:pPr indent="0" marL="0">
+              <a:buNone/>
+            </a:pPr>
+            <a:r>
+              <a:rPr lang="en-US" sz="1300" b="1" dirty="0">
+                <a:solidFill>
+                  <a:srgbClr val="12315B"/>
+                </a:solidFill>
+                <a:latin typeface="Calibri" pitchFamily="34" charset="0"/>
+                <a:ea typeface="Calibri" pitchFamily="34" charset="-122"/>
+                <a:cs typeface="Calibri" pitchFamily="34" charset="-120"/>
+              </a:rPr>
+              <a:t>Deploy</a:t>
+            </a:r>
+            <a:endParaRPr lang="en-US" sz="1300" dirty="0"/>
+          </a:p>
+        </p:txBody>
+      </p:sp>
+      <p:sp>
+        <p:nvSpPr>
+          <p:cNvPr id="41" name="Text 39"/>
+          <p:cNvSpPr/>
+          <p:nvPr/>
+        </p:nvSpPr>
+        <p:spPr>
+          <a:xfrm>
+            <a:off x="7962595" y="2633472"/>
+            <a:ext cx="1331366" cy="201168"/>
+          </a:xfrm>
+          <a:prstGeom prst="rect">
+            <a:avLst/>
+          </a:prstGeom>
+          <a:noFill/>
+          <a:ln/>
+        </p:spPr>
+        <p:txBody>
+          <a:bodyPr wrap="square" lIns="0" tIns="0" rIns="0" bIns="0" rtlCol="0" anchor="ctr"/>
+          <a:lstStyle/>
+          <a:p>
+            <a:pPr indent="0" marL="0">
+              <a:buNone/>
+            </a:pPr>
+            <a:r>
+              <a:rPr lang="en-US" sz="800" b="1" spc="100" kern="0" dirty="0">
+                <a:solidFill>
+                  <a:srgbClr val="2E6FB5"/>
+                </a:solidFill>
+                <a:latin typeface="Calibri" pitchFamily="34" charset="0"/>
+                <a:ea typeface="Calibri" pitchFamily="34" charset="-122"/>
+                <a:cs typeface="Calibri" pitchFamily="34" charset="-120"/>
+              </a:rPr>
+              <a:t>APPROVAL → RCT</a:t>
+            </a:r>
+            <a:endParaRPr lang="en-US" sz="800" dirty="0"/>
+          </a:p>
+        </p:txBody>
+      </p:sp>
+      <p:sp>
+        <p:nvSpPr>
+          <p:cNvPr id="42" name="Shape 40"/>
+          <p:cNvSpPr/>
+          <p:nvPr/>
+        </p:nvSpPr>
+        <p:spPr>
+          <a:xfrm>
+            <a:off x="7541971" y="3127248"/>
+            <a:ext cx="73152" cy="73152"/>
+          </a:xfrm>
+          <a:prstGeom prst="rect">
+            <a:avLst/>
+          </a:prstGeom>
+          <a:solidFill>
+            <a:srgbClr val="2E6FB5"/>
+          </a:solidFill>
+          <a:ln/>
+        </p:spPr>
+      </p:sp>
+      <p:sp>
+        <p:nvSpPr>
+          <p:cNvPr id="43" name="Text 41"/>
+          <p:cNvSpPr/>
+          <p:nvPr/>
+        </p:nvSpPr>
+        <p:spPr>
+          <a:xfrm>
+            <a:off x="7706563" y="3044952"/>
+            <a:ext cx="1532534" cy="566928"/>
+          </a:xfrm>
+          <a:prstGeom prst="rect">
+            <a:avLst/>
+          </a:prstGeom>
+          <a:noFill/>
+          <a:ln/>
+        </p:spPr>
+        <p:txBody>
+          <a:bodyPr wrap="square" lIns="0" tIns="0" rIns="0" bIns="0" rtlCol="0" anchor="t"/>
           <a:lstStyle/>
           <a:p>
             <a:pPr indent="0" marL="0">
@@ -2117,29 +2323,29 @@
               <a:buNone/>
             </a:pPr>
             <a:r>
-              <a:rPr lang="en-US" sz="1250" b="1" dirty="0">
-                <a:solidFill>
-                  <a:srgbClr val="12315B"/>
-                </a:solidFill>
-                <a:latin typeface="Calibri" pitchFamily="34" charset="0"/>
-                <a:ea typeface="Calibri" pitchFamily="34" charset="-122"/>
-                <a:cs typeface="Calibri" pitchFamily="34" charset="-120"/>
-              </a:rPr>
-              <a:t>Retention action orchestration</a:t>
-            </a:r>
-            <a:endParaRPr lang="en-US" sz="1250" dirty="0"/>
-          </a:p>
-        </p:txBody>
-      </p:sp>
-      <p:sp>
-        <p:nvSpPr>
-          <p:cNvPr id="38" name="Shape 36"/>
-          <p:cNvSpPr/>
-          <p:nvPr/>
-        </p:nvSpPr>
-        <p:spPr>
-          <a:xfrm>
-            <a:off x="7541971" y="3172968"/>
+              <a:rPr lang="en-US" sz="950" dirty="0">
+                <a:solidFill>
+                  <a:srgbClr val="5A6472"/>
+                </a:solidFill>
+                <a:latin typeface="Calibri" pitchFamily="34" charset="0"/>
+                <a:ea typeface="Calibri" pitchFamily="34" charset="-122"/>
+                <a:cs typeface="Calibri" pitchFamily="34" charset="-120"/>
+              </a:rPr>
+              <a:t>Risk · MRM · Business Lead sign-off, then compliance gate</a:t>
+            </a:r>
+            <a:endParaRPr lang="en-US" sz="950" dirty="0"/>
+          </a:p>
+        </p:txBody>
+      </p:sp>
+      <p:sp>
+        <p:nvSpPr>
+          <p:cNvPr id="44" name="Shape 42"/>
+          <p:cNvSpPr/>
+          <p:nvPr/>
+        </p:nvSpPr>
+        <p:spPr>
+          <a:xfrm>
+            <a:off x="7541971" y="3730752"/>
             <a:ext cx="73152" cy="73152"/>
           </a:xfrm>
           <a:prstGeom prst="rect">
@@ -2153,14 +2359,14 @@
       </p:sp>
       <p:sp>
         <p:nvSpPr>
-          <p:cNvPr id="39" name="Text 37"/>
-          <p:cNvSpPr/>
-          <p:nvPr/>
-        </p:nvSpPr>
-        <p:spPr>
-          <a:xfrm>
-            <a:off x="7706563" y="3090672"/>
-            <a:ext cx="1532534" cy="548640"/>
+          <p:cNvPr id="45" name="Text 43"/>
+          <p:cNvSpPr/>
+          <p:nvPr/>
+        </p:nvSpPr>
+        <p:spPr>
+          <a:xfrm>
+            <a:off x="7706563" y="3648456"/>
+            <a:ext cx="1532534" cy="566928"/>
           </a:xfrm>
           <a:prstGeom prst="rect">
             <a:avLst/>
@@ -2179,7 +2385,7 @@
               <a:buNone/>
             </a:pPr>
             <a:r>
-              <a:rPr lang="en-US" sz="1000" dirty="0">
+              <a:rPr lang="en-US" sz="950" dirty="0">
                 <a:solidFill>
                   <a:srgbClr val="5A6472"/>
                 </a:solidFill>
@@ -2187,77 +2393,15 @@
                 <a:ea typeface="Calibri" pitchFamily="34" charset="-122"/>
                 <a:cs typeface="Calibri" pitchFamily="34" charset="-120"/>
               </a:rPr>
-              <a:t>Best next action: price, bundle or call</a:t>
-            </a:r>
-            <a:endParaRPr lang="en-US" sz="1000" dirty="0"/>
-          </a:p>
-        </p:txBody>
-      </p:sp>
-      <p:sp>
-        <p:nvSpPr>
-          <p:cNvPr id="40" name="Shape 38"/>
-          <p:cNvSpPr/>
-          <p:nvPr/>
-        </p:nvSpPr>
-        <p:spPr>
-          <a:xfrm>
-            <a:off x="7541971" y="3758184"/>
-            <a:ext cx="73152" cy="73152"/>
-          </a:xfrm>
-          <a:prstGeom prst="rect">
-            <a:avLst/>
-          </a:prstGeom>
-          <a:solidFill>
-            <a:srgbClr val="2E6FB5"/>
-          </a:solidFill>
-          <a:ln/>
-        </p:spPr>
-      </p:sp>
-      <p:sp>
-        <p:nvSpPr>
-          <p:cNvPr id="41" name="Text 39"/>
-          <p:cNvSpPr/>
-          <p:nvPr/>
-        </p:nvSpPr>
-        <p:spPr>
-          <a:xfrm>
-            <a:off x="7706563" y="3675888"/>
-            <a:ext cx="1532534" cy="548640"/>
-          </a:xfrm>
-          <a:prstGeom prst="rect">
-            <a:avLst/>
-          </a:prstGeom>
-          <a:noFill/>
-          <a:ln/>
-        </p:spPr>
-        <p:txBody>
-          <a:bodyPr wrap="square" lIns="0" tIns="0" rIns="0" bIns="0" rtlCol="0" anchor="t"/>
-          <a:lstStyle/>
-          <a:p>
-            <a:pPr indent="0" marL="0">
-              <a:lnSpc>
-                <a:spcPct val="95000"/>
-              </a:lnSpc>
-              <a:buNone/>
-            </a:pPr>
-            <a:r>
-              <a:rPr lang="en-US" sz="1000" dirty="0">
-                <a:solidFill>
-                  <a:srgbClr val="5A6472"/>
-                </a:solidFill>
-                <a:latin typeface="Calibri" pitchFamily="34" charset="0"/>
-                <a:ea typeface="Calibri" pitchFamily="34" charset="-122"/>
-                <a:cs typeface="Calibri" pitchFamily="34" charset="-120"/>
-              </a:rPr>
-              <a:t>Executed via CRM &amp; channel systems</a:t>
-            </a:r>
-            <a:endParaRPr lang="en-US" sz="1000" dirty="0"/>
-          </a:p>
-        </p:txBody>
-      </p:sp>
-      <p:sp>
-        <p:nvSpPr>
-          <p:cNvPr id="42" name="Shape 40"/>
+              <a:t>440,679 treatment · 110,170 holdout · auto-rollback armed</a:t>
+            </a:r>
+            <a:endParaRPr lang="en-US" sz="950" dirty="0"/>
+          </a:p>
+        </p:txBody>
+      </p:sp>
+      <p:sp>
+        <p:nvSpPr>
+          <p:cNvPr id="46" name="Shape 44"/>
           <p:cNvSpPr/>
           <p:nvPr/>
         </p:nvSpPr>
@@ -2282,7 +2426,7 @@
       </p:sp>
       <p:sp>
         <p:nvSpPr>
-          <p:cNvPr id="43" name="Shape 41"/>
+          <p:cNvPr id="47" name="Shape 45"/>
           <p:cNvSpPr/>
           <p:nvPr/>
         </p:nvSpPr>
@@ -2309,7 +2453,7 @@
       </p:sp>
       <p:sp>
         <p:nvSpPr>
-          <p:cNvPr id="44" name="Shape 42"/>
+          <p:cNvPr id="48" name="Shape 46"/>
           <p:cNvSpPr/>
           <p:nvPr/>
         </p:nvSpPr>
@@ -2331,7 +2475,7 @@
       </p:sp>
       <p:sp>
         <p:nvSpPr>
-          <p:cNvPr id="45" name="Text 43"/>
+          <p:cNvPr id="49" name="Text 47"/>
           <p:cNvSpPr/>
           <p:nvPr/>
         </p:nvSpPr>
@@ -2370,14 +2514,14 @@
       </p:sp>
       <p:sp>
         <p:nvSpPr>
-          <p:cNvPr id="46" name="Text 44"/>
+          <p:cNvPr id="50" name="Text 48"/>
           <p:cNvSpPr/>
           <p:nvPr/>
         </p:nvSpPr>
         <p:spPr>
           <a:xfrm>
             <a:off x="10263226" y="2377440"/>
-            <a:ext cx="1313078" cy="640080"/>
+            <a:ext cx="1313078" cy="256032"/>
           </a:xfrm>
           <a:prstGeom prst="rect">
             <a:avLst/>
@@ -2387,6 +2531,104 @@
         </p:spPr>
         <p:txBody>
           <a:bodyPr wrap="square" lIns="0" tIns="0" rIns="0" bIns="0" rtlCol="0" anchor="ctr"/>
+          <a:lstStyle/>
+          <a:p>
+            <a:pPr indent="0" marL="0">
+              <a:buNone/>
+            </a:pPr>
+            <a:r>
+              <a:rPr lang="en-US" sz="1300" b="1" dirty="0">
+                <a:solidFill>
+                  <a:srgbClr val="12315B"/>
+                </a:solidFill>
+                <a:latin typeface="Calibri" pitchFamily="34" charset="0"/>
+                <a:ea typeface="Calibri" pitchFamily="34" charset="-122"/>
+                <a:cs typeface="Calibri" pitchFamily="34" charset="-120"/>
+              </a:rPr>
+              <a:t>Learn</a:t>
+            </a:r>
+            <a:endParaRPr lang="en-US" sz="1300" dirty="0"/>
+          </a:p>
+        </p:txBody>
+      </p:sp>
+      <p:sp>
+        <p:nvSpPr>
+          <p:cNvPr id="51" name="Text 49"/>
+          <p:cNvSpPr/>
+          <p:nvPr/>
+        </p:nvSpPr>
+        <p:spPr>
+          <a:xfrm>
+            <a:off x="10263226" y="2633472"/>
+            <a:ext cx="1331366" cy="201168"/>
+          </a:xfrm>
+          <a:prstGeom prst="rect">
+            <a:avLst/>
+          </a:prstGeom>
+          <a:noFill/>
+          <a:ln/>
+        </p:spPr>
+        <p:txBody>
+          <a:bodyPr wrap="square" lIns="0" tIns="0" rIns="0" bIns="0" rtlCol="0" anchor="ctr"/>
+          <a:lstStyle/>
+          <a:p>
+            <a:pPr indent="0" marL="0">
+              <a:buNone/>
+            </a:pPr>
+            <a:r>
+              <a:rPr lang="en-US" sz="800" b="1" spc="100" kern="0" dirty="0">
+                <a:solidFill>
+                  <a:srgbClr val="2E6FB5"/>
+                </a:solidFill>
+                <a:latin typeface="Calibri" pitchFamily="34" charset="0"/>
+                <a:ea typeface="Calibri" pitchFamily="34" charset="-122"/>
+                <a:cs typeface="Calibri" pitchFamily="34" charset="-120"/>
+              </a:rPr>
+              <a:t>MEASURED</a:t>
+            </a:r>
+            <a:endParaRPr lang="en-US" sz="800" dirty="0"/>
+          </a:p>
+        </p:txBody>
+      </p:sp>
+      <p:sp>
+        <p:nvSpPr>
+          <p:cNvPr id="52" name="Shape 50"/>
+          <p:cNvSpPr/>
+          <p:nvPr/>
+        </p:nvSpPr>
+        <p:spPr>
+          <a:xfrm>
+            <a:off x="9842602" y="3127248"/>
+            <a:ext cx="73152" cy="73152"/>
+          </a:xfrm>
+          <a:prstGeom prst="rect">
+            <a:avLst/>
+          </a:prstGeom>
+          <a:solidFill>
+            <a:srgbClr val="2E6FB5"/>
+          </a:solidFill>
+          <a:ln/>
+        </p:spPr>
+      </p:sp>
+      <p:sp>
+        <p:nvSpPr>
+          <p:cNvPr id="53" name="Text 51"/>
+          <p:cNvSpPr/>
+          <p:nvPr/>
+        </p:nvSpPr>
+        <p:spPr>
+          <a:xfrm>
+            <a:off x="10007194" y="3044952"/>
+            <a:ext cx="1532534" cy="566928"/>
+          </a:xfrm>
+          <a:prstGeom prst="rect">
+            <a:avLst/>
+          </a:prstGeom>
+          <a:noFill/>
+          <a:ln/>
+        </p:spPr>
+        <p:txBody>
+          <a:bodyPr wrap="square" lIns="0" tIns="0" rIns="0" bIns="0" rtlCol="0" anchor="t"/>
           <a:lstStyle/>
           <a:p>
             <a:pPr indent="0" marL="0">
@@ -2396,29 +2638,29 @@
               <a:buNone/>
             </a:pPr>
             <a:r>
-              <a:rPr lang="en-US" sz="1250" b="1" dirty="0">
-                <a:solidFill>
-                  <a:srgbClr val="12315B"/>
-                </a:solidFill>
-                <a:latin typeface="Calibri" pitchFamily="34" charset="0"/>
-                <a:ea typeface="Calibri" pitchFamily="34" charset="-122"/>
-                <a:cs typeface="Calibri" pitchFamily="34" charset="-120"/>
-              </a:rPr>
-              <a:t>Measure &amp; learn</a:t>
-            </a:r>
-            <a:endParaRPr lang="en-US" sz="1250" dirty="0"/>
-          </a:p>
-        </p:txBody>
-      </p:sp>
-      <p:sp>
-        <p:nvSpPr>
-          <p:cNvPr id="47" name="Shape 45"/>
-          <p:cNvSpPr/>
-          <p:nvPr/>
-        </p:nvSpPr>
-        <p:spPr>
-          <a:xfrm>
-            <a:off x="9842602" y="3172968"/>
+              <a:rPr lang="en-US" sz="950" dirty="0">
+                <a:solidFill>
+                  <a:srgbClr val="5A6472"/>
+                </a:solidFill>
+                <a:latin typeface="Calibri" pitchFamily="34" charset="0"/>
+                <a:ea typeface="Calibri" pitchFamily="34" charset="-122"/>
+                <a:cs typeface="Calibri" pitchFamily="34" charset="-120"/>
+              </a:rPr>
+              <a:t>Realised vs predicted; writeback to the elasticity model</a:t>
+            </a:r>
+            <a:endParaRPr lang="en-US" sz="950" dirty="0"/>
+          </a:p>
+        </p:txBody>
+      </p:sp>
+      <p:sp>
+        <p:nvSpPr>
+          <p:cNvPr id="54" name="Shape 52"/>
+          <p:cNvSpPr/>
+          <p:nvPr/>
+        </p:nvSpPr>
+        <p:spPr>
+          <a:xfrm>
+            <a:off x="9842602" y="3730752"/>
             <a:ext cx="73152" cy="73152"/>
           </a:xfrm>
           <a:prstGeom prst="rect">
@@ -2432,14 +2674,14 @@
       </p:sp>
       <p:sp>
         <p:nvSpPr>
-          <p:cNvPr id="48" name="Text 46"/>
-          <p:cNvSpPr/>
-          <p:nvPr/>
-        </p:nvSpPr>
-        <p:spPr>
-          <a:xfrm>
-            <a:off x="10007194" y="3090672"/>
-            <a:ext cx="1532534" cy="548640"/>
+          <p:cNvPr id="55" name="Text 53"/>
+          <p:cNvSpPr/>
+          <p:nvPr/>
+        </p:nvSpPr>
+        <p:spPr>
+          <a:xfrm>
+            <a:off x="10007194" y="3648456"/>
+            <a:ext cx="1532534" cy="566928"/>
           </a:xfrm>
           <a:prstGeom prst="rect">
             <a:avLst/>
@@ -2458,7 +2700,7 @@
               <a:buNone/>
             </a:pPr>
             <a:r>
-              <a:rPr lang="en-US" sz="1000" dirty="0">
+              <a:rPr lang="en-US" sz="950" dirty="0">
                 <a:solidFill>
                   <a:srgbClr val="5A6472"/>
                 </a:solidFill>
@@ -2466,77 +2708,15 @@
                 <a:ea typeface="Calibri" pitchFamily="34" charset="-122"/>
                 <a:cs typeface="Calibri" pitchFamily="34" charset="-120"/>
               </a:rPr>
-              <a:t>Lift measured vs. a holdout</a:t>
-            </a:r>
-            <a:endParaRPr lang="en-US" sz="1000" dirty="0"/>
-          </a:p>
-        </p:txBody>
-      </p:sp>
-      <p:sp>
-        <p:nvSpPr>
-          <p:cNvPr id="49" name="Shape 47"/>
-          <p:cNvSpPr/>
-          <p:nvPr/>
-        </p:nvSpPr>
-        <p:spPr>
-          <a:xfrm>
-            <a:off x="9842602" y="3758184"/>
-            <a:ext cx="73152" cy="73152"/>
-          </a:xfrm>
-          <a:prstGeom prst="rect">
-            <a:avLst/>
-          </a:prstGeom>
-          <a:solidFill>
-            <a:srgbClr val="2E6FB5"/>
-          </a:solidFill>
-          <a:ln/>
-        </p:spPr>
-      </p:sp>
-      <p:sp>
-        <p:nvSpPr>
-          <p:cNvPr id="50" name="Text 48"/>
-          <p:cNvSpPr/>
-          <p:nvPr/>
-        </p:nvSpPr>
-        <p:spPr>
-          <a:xfrm>
-            <a:off x="10007194" y="3675888"/>
-            <a:ext cx="1532534" cy="548640"/>
-          </a:xfrm>
-          <a:prstGeom prst="rect">
-            <a:avLst/>
-          </a:prstGeom>
-          <a:noFill/>
-          <a:ln/>
-        </p:spPr>
-        <p:txBody>
-          <a:bodyPr wrap="square" lIns="0" tIns="0" rIns="0" bIns="0" rtlCol="0" anchor="t"/>
-          <a:lstStyle/>
-          <a:p>
-            <a:pPr indent="0" marL="0">
-              <a:lnSpc>
-                <a:spcPct val="95000"/>
-              </a:lnSpc>
-              <a:buNone/>
-            </a:pPr>
-            <a:r>
-              <a:rPr lang="en-US" sz="1000" dirty="0">
-                <a:solidFill>
-                  <a:srgbClr val="5A6472"/>
-                </a:solidFill>
-                <a:latin typeface="Calibri" pitchFamily="34" charset="0"/>
-                <a:ea typeface="Calibri" pitchFamily="34" charset="-122"/>
-                <a:cs typeface="Calibri" pitchFamily="34" charset="-120"/>
-              </a:rPr>
-              <a:t>Outcomes retrain the model weekly</a:t>
-            </a:r>
-            <a:endParaRPr lang="en-US" sz="1000" dirty="0"/>
-          </a:p>
-        </p:txBody>
-      </p:sp>
-      <p:sp>
-        <p:nvSpPr>
-          <p:cNvPr id="51" name="Text 49"/>
+              <a:t>Lapse 30% → 11% held across the 8-wk pilot</a:t>
+            </a:r>
+            <a:endParaRPr lang="en-US" sz="950" dirty="0"/>
+          </a:p>
+        </p:txBody>
+      </p:sp>
+      <p:sp>
+        <p:nvSpPr>
+          <p:cNvPr id="56" name="Text 54"/>
           <p:cNvSpPr/>
           <p:nvPr/>
         </p:nvSpPr>
@@ -2567,7 +2747,7 @@
                 <a:ea typeface="Calibri" pitchFamily="34" charset="-122"/>
                 <a:cs typeface="Calibri" pitchFamily="34" charset="-120"/>
               </a:rPr>
-              <a:t>ENABLING DATA &amp; SYSTEMS   </a:t>
+              <a:t>MODELS &amp; GUARDRAILS   </a:t>
             </a:r>
             <a:pPr indent="0" marL="0">
               <a:buNone/>
@@ -2581,7 +2761,7 @@
                 <a:ea typeface="Calibri" pitchFamily="34" charset="-122"/>
                 <a:cs typeface="Calibri" pitchFamily="34" charset="-120"/>
               </a:rPr>
-              <a:t>Policy admin · Claims history · CRM &amp; agency · Pricing engine · Competitor rate feed · Marketing automation</a:t>
+              <a:t>Rate-elasticity · stickiness (0.70 gate) · shopping-propensity · fair-lending margin under NAIC Model Bulletin 24-08</a:t>
             </a:r>
             <a:endParaRPr lang="en-US" sz="1050" dirty="0"/>
           </a:p>
@@ -2589,7 +2769,7 @@
       </p:sp>
       <p:sp>
         <p:nvSpPr>
-          <p:cNvPr id="52" name="Shape 50"/>
+          <p:cNvPr id="57" name="Shape 55"/>
           <p:cNvSpPr/>
           <p:nvPr/>
         </p:nvSpPr>
@@ -2612,14 +2792,14 @@
       </p:sp>
       <p:sp>
         <p:nvSpPr>
-          <p:cNvPr id="53" name="Text 51"/>
+          <p:cNvPr id="58" name="Text 56"/>
           <p:cNvSpPr/>
           <p:nvPr/>
         </p:nvSpPr>
         <p:spPr>
           <a:xfrm>
             <a:off x="457200" y="4937760"/>
-            <a:ext cx="5486400" cy="256032"/>
+            <a:ext cx="6400800" cy="256032"/>
           </a:xfrm>
           <a:prstGeom prst="rect">
             <a:avLst/>
@@ -2635,7 +2815,7 @@
               <a:buNone/>
             </a:pPr>
             <a:r>
-              <a:rPr lang="en-US" sz="1100" b="1" spc="200" kern="0" dirty="0">
+              <a:rPr lang="en-US" sz="1100" b="1" spc="100" kern="0" dirty="0">
                 <a:solidFill>
                   <a:srgbClr val="12315B"/>
                 </a:solidFill>
@@ -2643,7 +2823,7 @@
                 <a:ea typeface="Calibri" pitchFamily="34" charset="-122"/>
                 <a:cs typeface="Calibri" pitchFamily="34" charset="-120"/>
               </a:rPr>
-              <a:t>THE PAYOFF</a:t>
+              <a:t>PROOF  ·  SIMULATED, THEN MEASURED IN PILOT</a:t>
             </a:r>
             <a:endParaRPr lang="en-US" sz="1100" dirty="0"/>
           </a:p>
@@ -2651,7 +2831,7 @@
       </p:sp>
       <p:sp>
         <p:nvSpPr>
-          <p:cNvPr id="54" name="Shape 52"/>
+          <p:cNvPr id="59" name="Shape 57"/>
           <p:cNvSpPr/>
           <p:nvPr/>
         </p:nvSpPr>
@@ -2678,7 +2858,7 @@
       </p:sp>
       <p:sp>
         <p:nvSpPr>
-          <p:cNvPr id="55" name="Text 53"/>
+          <p:cNvPr id="60" name="Text 58"/>
           <p:cNvSpPr/>
           <p:nvPr/>
         </p:nvSpPr>
@@ -2701,7 +2881,7 @@
               <a:buNone/>
             </a:pPr>
             <a:r>
-              <a:rPr lang="en-US" sz="2500" b="1" dirty="0">
+              <a:rPr lang="en-US" sz="2200" b="1" dirty="0">
                 <a:solidFill>
                   <a:srgbClr val="12315B"/>
                 </a:solidFill>
@@ -2709,29 +2889,18 @@
                 <a:ea typeface="Cambria" pitchFamily="34" charset="-122"/>
                 <a:cs typeface="Cambria" pitchFamily="34" charset="-120"/>
               </a:rPr>
-              <a:t>3–5</a:t>
+              <a:t>$138.2M</a:t>
             </a:r>
             <a:pPr algn="ctr" indent="0" marL="0">
               <a:buNone/>
             </a:pPr>
-            <a:r>
-              <a:rPr lang="en-US" sz="1300" b="1" dirty="0">
-                <a:solidFill>
-                  <a:srgbClr val="2E6FB5"/>
-                </a:solidFill>
-                <a:latin typeface="Cambria" pitchFamily="34" charset="0"/>
-                <a:ea typeface="Cambria" pitchFamily="34" charset="-122"/>
-                <a:cs typeface="Cambria" pitchFamily="34" charset="-120"/>
-              </a:rPr>
-              <a:t>pts</a:t>
-            </a:r>
-            <a:endParaRPr lang="en-US" sz="2500" dirty="0"/>
-          </a:p>
-        </p:txBody>
-      </p:sp>
-      <p:sp>
-        <p:nvSpPr>
-          <p:cNvPr id="56" name="Text 54"/>
+            <a:endParaRPr lang="en-US" sz="2200" dirty="0"/>
+          </a:p>
+        </p:txBody>
+      </p:sp>
+      <p:sp>
+        <p:nvSpPr>
+          <p:cNvPr id="61" name="Text 59"/>
           <p:cNvSpPr/>
           <p:nvPr/>
         </p:nvSpPr>
@@ -2765,7 +2934,7 @@
                 <a:ea typeface="Calibri" pitchFamily="34" charset="-122"/>
                 <a:cs typeface="Calibri" pitchFamily="34" charset="-120"/>
               </a:rPr>
-              <a:t>Retention-rate lift on targeted segments</a:t>
+              <a:t>Protected NWP per year</a:t>
             </a:r>
             <a:endParaRPr lang="en-US" sz="950" dirty="0"/>
           </a:p>
@@ -2773,7 +2942,7 @@
       </p:sp>
       <p:sp>
         <p:nvSpPr>
-          <p:cNvPr id="57" name="Shape 55"/>
+          <p:cNvPr id="62" name="Shape 60"/>
           <p:cNvSpPr/>
           <p:nvPr/>
         </p:nvSpPr>
@@ -2800,7 +2969,7 @@
       </p:sp>
       <p:sp>
         <p:nvSpPr>
-          <p:cNvPr id="58" name="Text 56"/>
+          <p:cNvPr id="63" name="Text 61"/>
           <p:cNvSpPr/>
           <p:nvPr/>
         </p:nvSpPr>
@@ -2823,7 +2992,7 @@
               <a:buNone/>
             </a:pPr>
             <a:r>
-              <a:rPr lang="en-US" sz="2500" b="1" dirty="0">
+              <a:rPr lang="en-US" sz="2200" b="1" dirty="0">
                 <a:solidFill>
                   <a:srgbClr val="12315B"/>
                 </a:solidFill>
@@ -2831,18 +3000,29 @@
                 <a:ea typeface="Cambria" pitchFamily="34" charset="-122"/>
                 <a:cs typeface="Cambria" pitchFamily="34" charset="-120"/>
               </a:rPr>
-              <a:t>8:1</a:t>
+              <a:t>−19</a:t>
             </a:r>
             <a:pPr algn="ctr" indent="0" marL="0">
               <a:buNone/>
             </a:pPr>
-            <a:endParaRPr lang="en-US" sz="2500" dirty="0"/>
-          </a:p>
-        </p:txBody>
-      </p:sp>
-      <p:sp>
-        <p:nvSpPr>
-          <p:cNvPr id="59" name="Text 57"/>
+            <a:r>
+              <a:rPr lang="en-US" sz="1200" b="1" dirty="0">
+                <a:solidFill>
+                  <a:srgbClr val="2E6FB5"/>
+                </a:solidFill>
+                <a:latin typeface="Cambria" pitchFamily="34" charset="0"/>
+                <a:ea typeface="Cambria" pitchFamily="34" charset="-122"/>
+                <a:cs typeface="Cambria" pitchFamily="34" charset="-120"/>
+              </a:rPr>
+              <a:t> pts</a:t>
+            </a:r>
+            <a:endParaRPr lang="en-US" sz="2200" dirty="0"/>
+          </a:p>
+        </p:txBody>
+      </p:sp>
+      <p:sp>
+        <p:nvSpPr>
+          <p:cNvPr id="64" name="Text 62"/>
           <p:cNvSpPr/>
           <p:nvPr/>
         </p:nvSpPr>
@@ -2876,7 +3056,7 @@
                 <a:ea typeface="Calibri" pitchFamily="34" charset="-122"/>
                 <a:cs typeface="Calibri" pitchFamily="34" charset="-120"/>
               </a:rPr>
-              <a:t>ROI vs. untargeted outreach</a:t>
+              <a:t>Lapse reduction (30% → 11%)</a:t>
             </a:r>
             <a:endParaRPr lang="en-US" sz="950" dirty="0"/>
           </a:p>
@@ -2884,7 +3064,7 @@
       </p:sp>
       <p:sp>
         <p:nvSpPr>
-          <p:cNvPr id="60" name="Shape 58"/>
+          <p:cNvPr id="65" name="Shape 63"/>
           <p:cNvSpPr/>
           <p:nvPr/>
         </p:nvSpPr>
@@ -2911,7 +3091,7 @@
       </p:sp>
       <p:sp>
         <p:nvSpPr>
-          <p:cNvPr id="61" name="Text 59"/>
+          <p:cNvPr id="66" name="Text 64"/>
           <p:cNvSpPr/>
           <p:nvPr/>
         </p:nvSpPr>
@@ -2934,7 +3114,7 @@
               <a:buNone/>
             </a:pPr>
             <a:r>
-              <a:rPr lang="en-US" sz="2500" b="1" dirty="0">
+              <a:rPr lang="en-US" sz="2200" b="1" dirty="0">
                 <a:solidFill>
                   <a:srgbClr val="12315B"/>
                 </a:solidFill>
@@ -2942,29 +3122,18 @@
                 <a:ea typeface="Cambria" pitchFamily="34" charset="-122"/>
                 <a:cs typeface="Cambria" pitchFamily="34" charset="-120"/>
               </a:rPr>
-              <a:t>60–90</a:t>
+              <a:t>0.93</a:t>
             </a:r>
             <a:pPr algn="ctr" indent="0" marL="0">
               <a:buNone/>
             </a:pPr>
-            <a:r>
-              <a:rPr lang="en-US" sz="1300" b="1" dirty="0">
-                <a:solidFill>
-                  <a:srgbClr val="2E6FB5"/>
-                </a:solidFill>
-                <a:latin typeface="Cambria" pitchFamily="34" charset="0"/>
-                <a:ea typeface="Cambria" pitchFamily="34" charset="-122"/>
-                <a:cs typeface="Cambria" pitchFamily="34" charset="-120"/>
-              </a:rPr>
-              <a:t>d</a:t>
-            </a:r>
-            <a:endParaRPr lang="en-US" sz="2500" dirty="0"/>
-          </a:p>
-        </p:txBody>
-      </p:sp>
-      <p:sp>
-        <p:nvSpPr>
-          <p:cNvPr id="62" name="Text 60"/>
+            <a:endParaRPr lang="en-US" sz="2200" dirty="0"/>
+          </a:p>
+        </p:txBody>
+      </p:sp>
+      <p:sp>
+        <p:nvSpPr>
+          <p:cNvPr id="67" name="Text 65"/>
           <p:cNvSpPr/>
           <p:nvPr/>
         </p:nvSpPr>
@@ -2998,7 +3167,7 @@
                 <a:ea typeface="Calibri" pitchFamily="34" charset="-122"/>
                 <a:cs typeface="Calibri" pitchFamily="34" charset="-120"/>
               </a:rPr>
-              <a:t>Lead time before renewal date</a:t>
+              <a:t>Fair-lending margin vs 0.85 floor</a:t>
             </a:r>
             <a:endParaRPr lang="en-US" sz="950" dirty="0"/>
           </a:p>
@@ -3006,7 +3175,7 @@
       </p:sp>
       <p:sp>
         <p:nvSpPr>
-          <p:cNvPr id="63" name="Shape 61"/>
+          <p:cNvPr id="68" name="Shape 66"/>
           <p:cNvSpPr/>
           <p:nvPr/>
         </p:nvSpPr>
@@ -3028,7 +3197,7 @@
       </p:sp>
       <p:sp>
         <p:nvSpPr>
-          <p:cNvPr id="64" name="Text 62"/>
+          <p:cNvPr id="69" name="Text 67"/>
           <p:cNvSpPr/>
           <p:nvPr/>
         </p:nvSpPr>
@@ -3059,7 +3228,7 @@
                 <a:ea typeface="Calibri" pitchFamily="34" charset="-122"/>
                 <a:cs typeface="Calibri" pitchFamily="34" charset="-120"/>
               </a:rPr>
-              <a:t>COMPOUNDING ADVANTAGE</a:t>
+              <a:t>WHERE NOT TO ACT</a:t>
             </a:r>
             <a:endParaRPr lang="en-US" sz="1100" dirty="0"/>
           </a:p>
@@ -3067,14 +3236,14 @@
       </p:sp>
       <p:sp>
         <p:nvSpPr>
-          <p:cNvPr id="65" name="Text 63"/>
-          <p:cNvSpPr/>
-          <p:nvPr/>
-        </p:nvSpPr>
-        <p:spPr>
-          <a:xfrm>
-            <a:off x="7662672" y="5394960"/>
-            <a:ext cx="3840480" cy="777240"/>
+          <p:cNvPr id="70" name="Text 68"/>
+          <p:cNvSpPr/>
+          <p:nvPr/>
+        </p:nvSpPr>
+        <p:spPr>
+          <a:xfrm>
+            <a:off x="7662672" y="5376672"/>
+            <a:ext cx="3840480" cy="822960"/>
           </a:xfrm>
           <a:prstGeom prst="rect">
             <a:avLst/>
@@ -3088,12 +3257,12 @@
           <a:p>
             <a:pPr indent="0" marL="0">
               <a:lnSpc>
-                <a:spcPct val="100000"/>
+                <a:spcPct val="98000"/>
               </a:lnSpc>
               <a:buNone/>
             </a:pPr>
             <a:r>
-              <a:rPr lang="en-US" sz="1200" dirty="0">
+              <a:rPr lang="en-US" sz="1100" dirty="0">
                 <a:solidFill>
                   <a:srgbClr val="FFFFFF"/>
                 </a:solidFill>
@@ -3101,15 +3270,15 @@
                 <a:ea typeface="Calibri" pitchFamily="34" charset="-122"/>
                 <a:cs typeface="Calibri" pitchFamily="34" charset="-120"/>
               </a:rPr>
-              <a:t>Every renew / lapse result flows back into training, so targeting and offer economics sharpen with each renewal cycle.</a:t>
-            </a:r>
-            <a:endParaRPr lang="en-US" sz="1200" dirty="0"/>
-          </a:p>
-        </p:txBody>
-      </p:sp>
-      <p:sp>
-        <p:nvSpPr>
-          <p:cNvPr id="66" name="Shape 64"/>
+              <a:t>The Sticky-Bundled archetype — deeply bundled, auto-pay, 8-yr tenure, 0.77 stickiness — gets NO discount. Repricing the operationally loyal is margin given away and a fair-lending basis failure.</a:t>
+            </a:r>
+            <a:endParaRPr lang="en-US" sz="1100" dirty="0"/>
+          </a:p>
+        </p:txBody>
+      </p:sp>
+      <p:sp>
+        <p:nvSpPr>
+          <p:cNvPr id="71" name="Shape 69"/>
           <p:cNvSpPr/>
           <p:nvPr/>
         </p:nvSpPr>
@@ -3132,7 +3301,7 @@
       </p:sp>
       <p:sp>
         <p:nvSpPr>
-          <p:cNvPr id="67" name="Text 65"/>
+          <p:cNvPr id="72" name="Text 70"/>
           <p:cNvSpPr/>
           <p:nvPr/>
         </p:nvSpPr>
@@ -3163,7 +3332,7 @@
                 <a:ea typeface="Calibri" pitchFamily="34" charset="-122"/>
                 <a:cs typeface="Calibri" pitchFamily="34" charset="-120"/>
               </a:rPr>
-              <a:t>Liberty Mutual  |  AI Signal Portfolio</a:t>
+              <a:t>Liberty Mutual · TwinX Decision Cockpit</a:t>
             </a:r>
             <a:endParaRPr lang="en-US" sz="900" dirty="0"/>
           </a:p>
@@ -3171,7 +3340,7 @@
       </p:sp>
       <p:sp>
         <p:nvSpPr>
-          <p:cNvPr id="68" name="Text 66"/>
+          <p:cNvPr id="73" name="Text 71"/>
           <p:cNvSpPr/>
           <p:nvPr/>
         </p:nvSpPr>
@@ -3210,7 +3379,7 @@
       </p:sp>
       <p:sp>
         <p:nvSpPr>
-          <p:cNvPr id="69" name="Text 67"/>
+          <p:cNvPr id="74" name="Text 72"/>
           <p:cNvSpPr/>
           <p:nvPr/>
         </p:nvSpPr>
@@ -3312,7 +3481,7 @@
                 <a:ea typeface="Calibri" pitchFamily="34" charset="-122"/>
                 <a:cs typeface="Calibri" pitchFamily="34" charset="-120"/>
               </a:rPr>
-              <a:t>COMMERCIAL  ·  SIGNAL 2</a:t>
+              <a:t>COMMERCIAL  ·  SIGNAL 2  ·  UNDERWRITING OF THE FUTURE</a:t>
             </a:r>
             <a:endParaRPr lang="en-US" sz="1200" dirty="0"/>
           </a:p>
@@ -3354,7 +3523,7 @@
                 <a:ea typeface="Cambria" pitchFamily="34" charset="-122"/>
                 <a:cs typeface="Cambria" pitchFamily="34" charset="-120"/>
               </a:rPr>
-              <a:t>Underwriting of the Future: write better risk faster by augmenting the underwriter</a:t>
+              <a:t>Win back the growing small-commercial account</a:t>
             </a:r>
             <a:endParaRPr lang="en-US" sz="2600" dirty="0"/>
           </a:p>
@@ -3420,13 +3589,13 @@
                 <a:ea typeface="Calibri" pitchFamily="34" charset="-122"/>
                 <a:cs typeface="Calibri" pitchFamily="34" charset="-120"/>
               </a:rPr>
-              <a:t>THE CHALLENGE    </a:t>
+              <a:t>THE SIGNAL    </a:t>
             </a:r>
             <a:pPr indent="0" marL="0">
               <a:buNone/>
             </a:pPr>
             <a:r>
-              <a:rPr lang="en-US" sz="1250" i="1" dirty="0">
+              <a:rPr lang="en-US" sz="1200" i="1" dirty="0">
                 <a:solidFill>
                   <a:srgbClr val="1A2333"/>
                 </a:solidFill>
@@ -3434,7 +3603,7 @@
                 <a:ea typeface="Calibri" pitchFamily="34" charset="-122"/>
                 <a:cs typeface="Calibri" pitchFamily="34" charset="-120"/>
               </a:rPr>
-              <a:t>Manual intake and inconsistent risk selection slow quotes, drain underwriter capacity, and let mispriced accounts onto the book.</a:t>
+              <a:t>38,400 small businesses are entering expansion — and 61% are placing the new / expanded coverage off-us with insurtechs (Next · Hiscox · biBERK): ~$2.1B of premium leaving.</a:t>
             </a:r>
             <a:endParaRPr lang="en-US" sz="1100" dirty="0"/>
           </a:p>
@@ -3449,7 +3618,7 @@
         <p:spPr>
           <a:xfrm>
             <a:off x="457200" y="1938528"/>
-            <a:ext cx="5486400" cy="256032"/>
+            <a:ext cx="9144000" cy="256032"/>
           </a:xfrm>
           <a:prstGeom prst="rect">
             <a:avLst/>
@@ -3465,7 +3634,7 @@
               <a:buNone/>
             </a:pPr>
             <a:r>
-              <a:rPr lang="en-US" sz="1100" b="1" spc="200" kern="0" dirty="0">
+              <a:rPr lang="en-US" sz="1100" b="1" spc="150" kern="0" dirty="0">
                 <a:solidFill>
                   <a:srgbClr val="12315B"/>
                 </a:solidFill>
@@ -3473,7 +3642,7 @@
                 <a:ea typeface="Calibri" pitchFamily="34" charset="-122"/>
                 <a:cs typeface="Calibri" pitchFamily="34" charset="-120"/>
               </a:rPr>
-              <a:t>HOW THE SIGNAL RESPONDS</a:t>
+              <a:t>THE DECISION LOOP  ·  WHAT THE USER WALKS THROUGH ON SCREEN</a:t>
             </a:r>
             <a:endParaRPr lang="en-US" sz="1100" dirty="0"/>
           </a:p>
@@ -3576,7 +3745,7 @@
         <p:spPr>
           <a:xfrm>
             <a:off x="1060704" y="2377440"/>
-            <a:ext cx="1313078" cy="640080"/>
+            <a:ext cx="1313078" cy="256032"/>
           </a:xfrm>
           <a:prstGeom prst="rect">
             <a:avLst/>
@@ -3586,6 +3755,104 @@
         </p:spPr>
         <p:txBody>
           <a:bodyPr wrap="square" lIns="0" tIns="0" rIns="0" bIns="0" rtlCol="0" anchor="ctr"/>
+          <a:lstStyle/>
+          <a:p>
+            <a:pPr indent="0" marL="0">
+              <a:buNone/>
+            </a:pPr>
+            <a:r>
+              <a:rPr lang="en-US" sz="1300" b="1" dirty="0">
+                <a:solidFill>
+                  <a:srgbClr val="12315B"/>
+                </a:solidFill>
+                <a:latin typeface="Calibri" pitchFamily="34" charset="0"/>
+                <a:ea typeface="Calibri" pitchFamily="34" charset="-122"/>
+                <a:cs typeface="Calibri" pitchFamily="34" charset="-120"/>
+              </a:rPr>
+              <a:t>Sense</a:t>
+            </a:r>
+            <a:endParaRPr lang="en-US" sz="1300" dirty="0"/>
+          </a:p>
+        </p:txBody>
+      </p:sp>
+      <p:sp>
+        <p:nvSpPr>
+          <p:cNvPr id="11" name="Text 9"/>
+          <p:cNvSpPr/>
+          <p:nvPr/>
+        </p:nvSpPr>
+        <p:spPr>
+          <a:xfrm>
+            <a:off x="1060704" y="2633472"/>
+            <a:ext cx="1331366" cy="201168"/>
+          </a:xfrm>
+          <a:prstGeom prst="rect">
+            <a:avLst/>
+          </a:prstGeom>
+          <a:noFill/>
+          <a:ln/>
+        </p:spPr>
+        <p:txBody>
+          <a:bodyPr wrap="square" lIns="0" tIns="0" rIns="0" bIns="0" rtlCol="0" anchor="ctr"/>
+          <a:lstStyle/>
+          <a:p>
+            <a:pPr indent="0" marL="0">
+              <a:buNone/>
+            </a:pPr>
+            <a:r>
+              <a:rPr lang="en-US" sz="800" b="1" spc="100" kern="0" dirty="0">
+                <a:solidFill>
+                  <a:srgbClr val="2E6FB5"/>
+                </a:solidFill>
+                <a:latin typeface="Calibri" pitchFamily="34" charset="0"/>
+                <a:ea typeface="Calibri" pitchFamily="34" charset="-122"/>
+                <a:cs typeface="Calibri" pitchFamily="34" charset="-120"/>
+              </a:rPr>
+              <a:t>DECISION COCKPIT</a:t>
+            </a:r>
+            <a:endParaRPr lang="en-US" sz="800" dirty="0"/>
+          </a:p>
+        </p:txBody>
+      </p:sp>
+      <p:sp>
+        <p:nvSpPr>
+          <p:cNvPr id="12" name="Shape 10"/>
+          <p:cNvSpPr/>
+          <p:nvPr/>
+        </p:nvSpPr>
+        <p:spPr>
+          <a:xfrm>
+            <a:off x="640080" y="3127248"/>
+            <a:ext cx="73152" cy="73152"/>
+          </a:xfrm>
+          <a:prstGeom prst="rect">
+            <a:avLst/>
+          </a:prstGeom>
+          <a:solidFill>
+            <a:srgbClr val="2E6FB5"/>
+          </a:solidFill>
+          <a:ln/>
+        </p:spPr>
+      </p:sp>
+      <p:sp>
+        <p:nvSpPr>
+          <p:cNvPr id="13" name="Text 11"/>
+          <p:cNvSpPr/>
+          <p:nvPr/>
+        </p:nvSpPr>
+        <p:spPr>
+          <a:xfrm>
+            <a:off x="804672" y="3044952"/>
+            <a:ext cx="1532534" cy="566928"/>
+          </a:xfrm>
+          <a:prstGeom prst="rect">
+            <a:avLst/>
+          </a:prstGeom>
+          <a:noFill/>
+          <a:ln/>
+        </p:spPr>
+        <p:txBody>
+          <a:bodyPr wrap="square" lIns="0" tIns="0" rIns="0" bIns="0" rtlCol="0" anchor="t"/>
           <a:lstStyle/>
           <a:p>
             <a:pPr indent="0" marL="0">
@@ -3595,29 +3862,29 @@
               <a:buNone/>
             </a:pPr>
             <a:r>
-              <a:rPr lang="en-US" sz="1250" b="1" dirty="0">
-                <a:solidFill>
-                  <a:srgbClr val="12315B"/>
-                </a:solidFill>
-                <a:latin typeface="Calibri" pitchFamily="34" charset="0"/>
-                <a:ea typeface="Calibri" pitchFamily="34" charset="-122"/>
-                <a:cs typeface="Calibri" pitchFamily="34" charset="-120"/>
-              </a:rPr>
-              <a:t>Submission intake</a:t>
-            </a:r>
-            <a:endParaRPr lang="en-US" sz="1250" dirty="0"/>
-          </a:p>
-        </p:txBody>
-      </p:sp>
-      <p:sp>
-        <p:nvSpPr>
-          <p:cNvPr id="11" name="Shape 9"/>
-          <p:cNvSpPr/>
-          <p:nvPr/>
-        </p:nvSpPr>
-        <p:spPr>
-          <a:xfrm>
-            <a:off x="640080" y="3172968"/>
+              <a:rPr lang="en-US" sz="950" dirty="0">
+                <a:solidFill>
+                  <a:srgbClr val="5A6472"/>
+                </a:solidFill>
+                <a:latin typeface="Calibri" pitchFamily="34" charset="0"/>
+                <a:ea typeface="Calibri" pitchFamily="34" charset="-122"/>
+                <a:cs typeface="Calibri" pitchFamily="34" charset="-120"/>
+              </a:rPr>
+              <a:t>Small-commercial growth signal fires in the commercial cockpit</a:t>
+            </a:r>
+            <a:endParaRPr lang="en-US" sz="950" dirty="0"/>
+          </a:p>
+        </p:txBody>
+      </p:sp>
+      <p:sp>
+        <p:nvSpPr>
+          <p:cNvPr id="14" name="Shape 12"/>
+          <p:cNvSpPr/>
+          <p:nvPr/>
+        </p:nvSpPr>
+        <p:spPr>
+          <a:xfrm>
+            <a:off x="640080" y="3730752"/>
             <a:ext cx="73152" cy="73152"/>
           </a:xfrm>
           <a:prstGeom prst="rect">
@@ -3631,14 +3898,14 @@
       </p:sp>
       <p:sp>
         <p:nvSpPr>
-          <p:cNvPr id="12" name="Text 10"/>
-          <p:cNvSpPr/>
-          <p:nvPr/>
-        </p:nvSpPr>
-        <p:spPr>
-          <a:xfrm>
-            <a:off x="804672" y="3090672"/>
-            <a:ext cx="1532534" cy="548640"/>
+          <p:cNvPr id="15" name="Text 13"/>
+          <p:cNvSpPr/>
+          <p:nvPr/>
+        </p:nvSpPr>
+        <p:spPr>
+          <a:xfrm>
+            <a:off x="804672" y="3648456"/>
+            <a:ext cx="1532534" cy="566928"/>
           </a:xfrm>
           <a:prstGeom prst="rect">
             <a:avLst/>
@@ -3657,7 +3924,7 @@
               <a:buNone/>
             </a:pPr>
             <a:r>
-              <a:rPr lang="en-US" sz="1000" dirty="0">
+              <a:rPr lang="en-US" sz="950" dirty="0">
                 <a:solidFill>
                   <a:srgbClr val="5A6472"/>
                 </a:solidFill>
@@ -3665,77 +3932,15 @@
                 <a:ea typeface="Calibri" pitchFamily="34" charset="-122"/>
                 <a:cs typeface="Calibri" pitchFamily="34" charset="-120"/>
               </a:rPr>
-              <a:t>Lands in the UW workbench</a:t>
-            </a:r>
-            <a:endParaRPr lang="en-US" sz="1000" dirty="0"/>
-          </a:p>
-        </p:txBody>
-      </p:sp>
-      <p:sp>
-        <p:nvSpPr>
-          <p:cNvPr id="13" name="Shape 11"/>
-          <p:cNvSpPr/>
-          <p:nvPr/>
-        </p:nvSpPr>
-        <p:spPr>
-          <a:xfrm>
-            <a:off x="640080" y="3758184"/>
-            <a:ext cx="73152" cy="73152"/>
-          </a:xfrm>
-          <a:prstGeom prst="rect">
-            <a:avLst/>
-          </a:prstGeom>
-          <a:solidFill>
-            <a:srgbClr val="2E6FB5"/>
-          </a:solidFill>
-          <a:ln/>
-        </p:spPr>
-      </p:sp>
-      <p:sp>
-        <p:nvSpPr>
-          <p:cNvPr id="14" name="Text 12"/>
-          <p:cNvSpPr/>
-          <p:nvPr/>
-        </p:nvSpPr>
-        <p:spPr>
-          <a:xfrm>
-            <a:off x="804672" y="3675888"/>
-            <a:ext cx="1532534" cy="548640"/>
-          </a:xfrm>
-          <a:prstGeom prst="rect">
-            <a:avLst/>
-          </a:prstGeom>
-          <a:noFill/>
-          <a:ln/>
-        </p:spPr>
-        <p:txBody>
-          <a:bodyPr wrap="square" lIns="0" tIns="0" rIns="0" bIns="0" rtlCol="0" anchor="t"/>
-          <a:lstStyle/>
-          <a:p>
-            <a:pPr indent="0" marL="0">
-              <a:lnSpc>
-                <a:spcPct val="95000"/>
-              </a:lnSpc>
-              <a:buNone/>
-            </a:pPr>
-            <a:r>
-              <a:rPr lang="en-US" sz="1000" dirty="0">
-                <a:solidFill>
-                  <a:srgbClr val="5A6472"/>
-                </a:solidFill>
-                <a:latin typeface="Calibri" pitchFamily="34" charset="0"/>
-                <a:ea typeface="Calibri" pitchFamily="34" charset="-122"/>
-                <a:cs typeface="Calibri" pitchFamily="34" charset="-120"/>
-              </a:rPr>
-              <a:t>AI extracts ACORD, loss runs &amp; financials</a:t>
-            </a:r>
-            <a:endParaRPr lang="en-US" sz="1000" dirty="0"/>
-          </a:p>
-        </p:txBody>
-      </p:sp>
-      <p:sp>
-        <p:nvSpPr>
-          <p:cNvPr id="15" name="Shape 13"/>
+              <a:t>38,400 growing accounts · $2.1B premium off-us</a:t>
+            </a:r>
+            <a:endParaRPr lang="en-US" sz="950" dirty="0"/>
+          </a:p>
+        </p:txBody>
+      </p:sp>
+      <p:sp>
+        <p:nvSpPr>
+          <p:cNvPr id="16" name="Shape 14"/>
           <p:cNvSpPr/>
           <p:nvPr/>
         </p:nvSpPr>
@@ -3760,7 +3965,7 @@
       </p:sp>
       <p:sp>
         <p:nvSpPr>
-          <p:cNvPr id="16" name="Shape 14"/>
+          <p:cNvPr id="17" name="Shape 15"/>
           <p:cNvSpPr/>
           <p:nvPr/>
         </p:nvSpPr>
@@ -3787,7 +3992,7 @@
       </p:sp>
       <p:sp>
         <p:nvSpPr>
-          <p:cNvPr id="17" name="Shape 15"/>
+          <p:cNvPr id="18" name="Shape 16"/>
           <p:cNvSpPr/>
           <p:nvPr/>
         </p:nvSpPr>
@@ -3809,7 +4014,7 @@
       </p:sp>
       <p:sp>
         <p:nvSpPr>
-          <p:cNvPr id="18" name="Text 16"/>
+          <p:cNvPr id="19" name="Text 17"/>
           <p:cNvSpPr/>
           <p:nvPr/>
         </p:nvSpPr>
@@ -3848,14 +4053,14 @@
       </p:sp>
       <p:sp>
         <p:nvSpPr>
-          <p:cNvPr id="19" name="Text 17"/>
+          <p:cNvPr id="20" name="Text 18"/>
           <p:cNvSpPr/>
           <p:nvPr/>
         </p:nvSpPr>
         <p:spPr>
           <a:xfrm>
             <a:off x="3361334" y="2377440"/>
-            <a:ext cx="1313078" cy="640080"/>
+            <a:ext cx="1313078" cy="256032"/>
           </a:xfrm>
           <a:prstGeom prst="rect">
             <a:avLst/>
@@ -3865,6 +4070,104 @@
         </p:spPr>
         <p:txBody>
           <a:bodyPr wrap="square" lIns="0" tIns="0" rIns="0" bIns="0" rtlCol="0" anchor="ctr"/>
+          <a:lstStyle/>
+          <a:p>
+            <a:pPr indent="0" marL="0">
+              <a:buNone/>
+            </a:pPr>
+            <a:r>
+              <a:rPr lang="en-US" sz="1300" b="1" dirty="0">
+                <a:solidFill>
+                  <a:srgbClr val="12315B"/>
+                </a:solidFill>
+                <a:latin typeface="Calibri" pitchFamily="34" charset="0"/>
+                <a:ea typeface="Calibri" pitchFamily="34" charset="-122"/>
+                <a:cs typeface="Calibri" pitchFamily="34" charset="-120"/>
+              </a:rPr>
+              <a:t>Hypothesize</a:t>
+            </a:r>
+            <a:endParaRPr lang="en-US" sz="1300" dirty="0"/>
+          </a:p>
+        </p:txBody>
+      </p:sp>
+      <p:sp>
+        <p:nvSpPr>
+          <p:cNvPr id="21" name="Text 19"/>
+          <p:cNvSpPr/>
+          <p:nvPr/>
+        </p:nvSpPr>
+        <p:spPr>
+          <a:xfrm>
+            <a:off x="3361334" y="2633472"/>
+            <a:ext cx="1331366" cy="201168"/>
+          </a:xfrm>
+          <a:prstGeom prst="rect">
+            <a:avLst/>
+          </a:prstGeom>
+          <a:noFill/>
+          <a:ln/>
+        </p:spPr>
+        <p:txBody>
+          <a:bodyPr wrap="square" lIns="0" tIns="0" rIns="0" bIns="0" rtlCol="0" anchor="ctr"/>
+          <a:lstStyle/>
+          <a:p>
+            <a:pPr indent="0" marL="0">
+              <a:buNone/>
+            </a:pPr>
+            <a:r>
+              <a:rPr lang="en-US" sz="800" b="1" spc="100" kern="0" dirty="0">
+                <a:solidFill>
+                  <a:srgbClr val="2E6FB5"/>
+                </a:solidFill>
+                <a:latin typeface="Calibri" pitchFamily="34" charset="0"/>
+                <a:ea typeface="Calibri" pitchFamily="34" charset="-122"/>
+                <a:cs typeface="Calibri" pitchFamily="34" charset="-120"/>
+              </a:rPr>
+              <a:t>ANALYSE</a:t>
+            </a:r>
+            <a:endParaRPr lang="en-US" sz="800" dirty="0"/>
+          </a:p>
+        </p:txBody>
+      </p:sp>
+      <p:sp>
+        <p:nvSpPr>
+          <p:cNvPr id="22" name="Shape 20"/>
+          <p:cNvSpPr/>
+          <p:nvPr/>
+        </p:nvSpPr>
+        <p:spPr>
+          <a:xfrm>
+            <a:off x="2940710" y="3127248"/>
+            <a:ext cx="73152" cy="73152"/>
+          </a:xfrm>
+          <a:prstGeom prst="rect">
+            <a:avLst/>
+          </a:prstGeom>
+          <a:solidFill>
+            <a:srgbClr val="2E6FB5"/>
+          </a:solidFill>
+          <a:ln/>
+        </p:spPr>
+      </p:sp>
+      <p:sp>
+        <p:nvSpPr>
+          <p:cNvPr id="23" name="Text 21"/>
+          <p:cNvSpPr/>
+          <p:nvPr/>
+        </p:nvSpPr>
+        <p:spPr>
+          <a:xfrm>
+            <a:off x="3105302" y="3044952"/>
+            <a:ext cx="1532534" cy="566928"/>
+          </a:xfrm>
+          <a:prstGeom prst="rect">
+            <a:avLst/>
+          </a:prstGeom>
+          <a:noFill/>
+          <a:ln/>
+        </p:spPr>
+        <p:txBody>
+          <a:bodyPr wrap="square" lIns="0" tIns="0" rIns="0" bIns="0" rtlCol="0" anchor="t"/>
           <a:lstStyle/>
           <a:p>
             <a:pPr indent="0" marL="0">
@@ -3874,29 +4177,29 @@
               <a:buNone/>
             </a:pPr>
             <a:r>
-              <a:rPr lang="en-US" sz="1250" b="1" dirty="0">
-                <a:solidFill>
-                  <a:srgbClr val="12315B"/>
-                </a:solidFill>
-                <a:latin typeface="Calibri" pitchFamily="34" charset="0"/>
-                <a:ea typeface="Calibri" pitchFamily="34" charset="-122"/>
-                <a:cs typeface="Calibri" pitchFamily="34" charset="-120"/>
-              </a:rPr>
-              <a:t>Risk enrichment</a:t>
-            </a:r>
-            <a:endParaRPr lang="en-US" sz="1250" dirty="0"/>
-          </a:p>
-        </p:txBody>
-      </p:sp>
-      <p:sp>
-        <p:nvSpPr>
-          <p:cNvPr id="20" name="Shape 18"/>
-          <p:cNvSpPr/>
-          <p:nvPr/>
-        </p:nvSpPr>
-        <p:spPr>
-          <a:xfrm>
-            <a:off x="2940710" y="3172968"/>
+              <a:rPr lang="en-US" sz="950" dirty="0">
+                <a:solidFill>
+                  <a:srgbClr val="5A6472"/>
+                </a:solidFill>
+                <a:latin typeface="Calibri" pitchFamily="34" charset="0"/>
+                <a:ea typeface="Calibri" pitchFamily="34" charset="-122"/>
+                <a:cs typeface="Calibri" pitchFamily="34" charset="-120"/>
+              </a:rPr>
+              <a:t>“Win back the growing account” — precision underwriting</a:t>
+            </a:r>
+            <a:endParaRPr lang="en-US" sz="950" dirty="0"/>
+          </a:p>
+        </p:txBody>
+      </p:sp>
+      <p:sp>
+        <p:nvSpPr>
+          <p:cNvPr id="24" name="Shape 22"/>
+          <p:cNvSpPr/>
+          <p:nvPr/>
+        </p:nvSpPr>
+        <p:spPr>
+          <a:xfrm>
+            <a:off x="2940710" y="3730752"/>
             <a:ext cx="73152" cy="73152"/>
           </a:xfrm>
           <a:prstGeom prst="rect">
@@ -3910,14 +4213,14 @@
       </p:sp>
       <p:sp>
         <p:nvSpPr>
-          <p:cNvPr id="21" name="Text 19"/>
-          <p:cNvSpPr/>
-          <p:nvPr/>
-        </p:nvSpPr>
-        <p:spPr>
-          <a:xfrm>
-            <a:off x="3105302" y="3090672"/>
-            <a:ext cx="1532534" cy="548640"/>
+          <p:cNvPr id="25" name="Text 23"/>
+          <p:cNvSpPr/>
+          <p:nvPr/>
+        </p:nvSpPr>
+        <p:spPr>
+          <a:xfrm>
+            <a:off x="3105302" y="3648456"/>
+            <a:ext cx="1532534" cy="566928"/>
           </a:xfrm>
           <a:prstGeom prst="rect">
             <a:avLst/>
@@ -3936,7 +4239,7 @@
               <a:buNone/>
             </a:pPr>
             <a:r>
-              <a:rPr lang="en-US" sz="1000" dirty="0">
+              <a:rPr lang="en-US" sz="950" dirty="0">
                 <a:solidFill>
                   <a:srgbClr val="5A6472"/>
                 </a:solidFill>
@@ -3944,77 +4247,15 @@
                 <a:ea typeface="Calibri" pitchFamily="34" charset="-122"/>
                 <a:cs typeface="Calibri" pitchFamily="34" charset="-120"/>
               </a:rPr>
-              <a:t>Appends property, firmographic &amp; cat data</a:t>
-            </a:r>
-            <a:endParaRPr lang="en-US" sz="1000" dirty="0"/>
-          </a:p>
-        </p:txBody>
-      </p:sp>
-      <p:sp>
-        <p:nvSpPr>
-          <p:cNvPr id="22" name="Shape 20"/>
-          <p:cNvSpPr/>
-          <p:nvPr/>
-        </p:nvSpPr>
-        <p:spPr>
-          <a:xfrm>
-            <a:off x="2940710" y="3758184"/>
-            <a:ext cx="73152" cy="73152"/>
-          </a:xfrm>
-          <a:prstGeom prst="rect">
-            <a:avLst/>
-          </a:prstGeom>
-          <a:solidFill>
-            <a:srgbClr val="2E6FB5"/>
-          </a:solidFill>
-          <a:ln/>
-        </p:spPr>
-      </p:sp>
-      <p:sp>
-        <p:nvSpPr>
-          <p:cNvPr id="23" name="Text 21"/>
-          <p:cNvSpPr/>
-          <p:nvPr/>
-        </p:nvSpPr>
-        <p:spPr>
-          <a:xfrm>
-            <a:off x="3105302" y="3675888"/>
-            <a:ext cx="1532534" cy="548640"/>
-          </a:xfrm>
-          <a:prstGeom prst="rect">
-            <a:avLst/>
-          </a:prstGeom>
-          <a:noFill/>
-          <a:ln/>
-        </p:spPr>
-        <p:txBody>
-          <a:bodyPr wrap="square" lIns="0" tIns="0" rIns="0" bIns="0" rtlCol="0" anchor="t"/>
-          <a:lstStyle/>
-          <a:p>
-            <a:pPr indent="0" marL="0">
-              <a:lnSpc>
-                <a:spcPct val="95000"/>
-              </a:lnSpc>
-              <a:buNone/>
-            </a:pPr>
-            <a:r>
-              <a:rPr lang="en-US" sz="1000" dirty="0">
-                <a:solidFill>
-                  <a:srgbClr val="5A6472"/>
-                </a:solidFill>
-                <a:latin typeface="Calibri" pitchFamily="34" charset="0"/>
-                <a:ea typeface="Calibri" pitchFamily="34" charset="-122"/>
-                <a:cs typeface="Calibri" pitchFamily="34" charset="-120"/>
-              </a:rPr>
-              <a:t>Rebuilds exposure &amp; prior-loss view</a:t>
-            </a:r>
-            <a:endParaRPr lang="en-US" sz="1000" dirty="0"/>
-          </a:p>
-        </p:txBody>
-      </p:sp>
-      <p:sp>
-        <p:nvSpPr>
-          <p:cNvPr id="24" name="Shape 22"/>
+              <a:t>Drivers: off-us placement, payroll, new site, fleet, revenue surge</a:t>
+            </a:r>
+            <a:endParaRPr lang="en-US" sz="950" dirty="0"/>
+          </a:p>
+        </p:txBody>
+      </p:sp>
+      <p:sp>
+        <p:nvSpPr>
+          <p:cNvPr id="26" name="Shape 24"/>
           <p:cNvSpPr/>
           <p:nvPr/>
         </p:nvSpPr>
@@ -4039,7 +4280,7 @@
       </p:sp>
       <p:sp>
         <p:nvSpPr>
-          <p:cNvPr id="25" name="Shape 23"/>
+          <p:cNvPr id="27" name="Shape 25"/>
           <p:cNvSpPr/>
           <p:nvPr/>
         </p:nvSpPr>
@@ -4066,7 +4307,7 @@
       </p:sp>
       <p:sp>
         <p:nvSpPr>
-          <p:cNvPr id="26" name="Shape 24"/>
+          <p:cNvPr id="28" name="Shape 26"/>
           <p:cNvSpPr/>
           <p:nvPr/>
         </p:nvSpPr>
@@ -4088,7 +4329,7 @@
       </p:sp>
       <p:sp>
         <p:nvSpPr>
-          <p:cNvPr id="27" name="Text 25"/>
+          <p:cNvPr id="29" name="Text 27"/>
           <p:cNvSpPr/>
           <p:nvPr/>
         </p:nvSpPr>
@@ -4127,14 +4368,14 @@
       </p:sp>
       <p:sp>
         <p:nvSpPr>
-          <p:cNvPr id="28" name="Text 26"/>
+          <p:cNvPr id="30" name="Text 28"/>
           <p:cNvSpPr/>
           <p:nvPr/>
         </p:nvSpPr>
         <p:spPr>
           <a:xfrm>
             <a:off x="5661965" y="2377440"/>
-            <a:ext cx="1313078" cy="640080"/>
+            <a:ext cx="1313078" cy="256032"/>
           </a:xfrm>
           <a:prstGeom prst="rect">
             <a:avLst/>
@@ -4144,6 +4385,104 @@
         </p:spPr>
         <p:txBody>
           <a:bodyPr wrap="square" lIns="0" tIns="0" rIns="0" bIns="0" rtlCol="0" anchor="ctr"/>
+          <a:lstStyle/>
+          <a:p>
+            <a:pPr indent="0" marL="0">
+              <a:buNone/>
+            </a:pPr>
+            <a:r>
+              <a:rPr lang="en-US" sz="1300" b="1" dirty="0">
+                <a:solidFill>
+                  <a:srgbClr val="12315B"/>
+                </a:solidFill>
+                <a:latin typeface="Calibri" pitchFamily="34" charset="0"/>
+                <a:ea typeface="Calibri" pitchFamily="34" charset="-122"/>
+                <a:cs typeface="Calibri" pitchFamily="34" charset="-120"/>
+              </a:rPr>
+              <a:t>Test</a:t>
+            </a:r>
+            <a:endParaRPr lang="en-US" sz="1300" dirty="0"/>
+          </a:p>
+        </p:txBody>
+      </p:sp>
+      <p:sp>
+        <p:nvSpPr>
+          <p:cNvPr id="31" name="Text 29"/>
+          <p:cNvSpPr/>
+          <p:nvPr/>
+        </p:nvSpPr>
+        <p:spPr>
+          <a:xfrm>
+            <a:off x="5661965" y="2633472"/>
+            <a:ext cx="1331366" cy="201168"/>
+          </a:xfrm>
+          <a:prstGeom prst="rect">
+            <a:avLst/>
+          </a:prstGeom>
+          <a:noFill/>
+          <a:ln/>
+        </p:spPr>
+        <p:txBody>
+          <a:bodyPr wrap="square" lIns="0" tIns="0" rIns="0" bIns="0" rtlCol="0" anchor="ctr"/>
+          <a:lstStyle/>
+          <a:p>
+            <a:pPr indent="0" marL="0">
+              <a:buNone/>
+            </a:pPr>
+            <a:r>
+              <a:rPr lang="en-US" sz="800" b="1" spc="100" kern="0" dirty="0">
+                <a:solidFill>
+                  <a:srgbClr val="2E6FB5"/>
+                </a:solidFill>
+                <a:latin typeface="Calibri" pitchFamily="34" charset="0"/>
+                <a:ea typeface="Calibri" pitchFamily="34" charset="-122"/>
+                <a:cs typeface="Calibri" pitchFamily="34" charset="-120"/>
+              </a:rPr>
+              <a:t>SIMULATION STUDIO</a:t>
+            </a:r>
+            <a:endParaRPr lang="en-US" sz="800" dirty="0"/>
+          </a:p>
+        </p:txBody>
+      </p:sp>
+      <p:sp>
+        <p:nvSpPr>
+          <p:cNvPr id="32" name="Shape 30"/>
+          <p:cNvSpPr/>
+          <p:nvPr/>
+        </p:nvSpPr>
+        <p:spPr>
+          <a:xfrm>
+            <a:off x="5241341" y="3127248"/>
+            <a:ext cx="73152" cy="73152"/>
+          </a:xfrm>
+          <a:prstGeom prst="rect">
+            <a:avLst/>
+          </a:prstGeom>
+          <a:solidFill>
+            <a:srgbClr val="2E6FB5"/>
+          </a:solidFill>
+          <a:ln/>
+        </p:spPr>
+      </p:sp>
+      <p:sp>
+        <p:nvSpPr>
+          <p:cNvPr id="33" name="Text 31"/>
+          <p:cNvSpPr/>
+          <p:nvPr/>
+        </p:nvSpPr>
+        <p:spPr>
+          <a:xfrm>
+            <a:off x="5405933" y="3044952"/>
+            <a:ext cx="1532534" cy="566928"/>
+          </a:xfrm>
+          <a:prstGeom prst="rect">
+            <a:avLst/>
+          </a:prstGeom>
+          <a:noFill/>
+          <a:ln/>
+        </p:spPr>
+        <p:txBody>
+          <a:bodyPr wrap="square" lIns="0" tIns="0" rIns="0" bIns="0" rtlCol="0" anchor="t"/>
           <a:lstStyle/>
           <a:p>
             <a:pPr indent="0" marL="0">
@@ -4153,29 +4492,29 @@
               <a:buNone/>
             </a:pPr>
             <a:r>
-              <a:rPr lang="en-US" sz="1250" b="1" dirty="0">
-                <a:solidFill>
-                  <a:srgbClr val="12315B"/>
-                </a:solidFill>
-                <a:latin typeface="Calibri" pitchFamily="34" charset="0"/>
-                <a:ea typeface="Calibri" pitchFamily="34" charset="-122"/>
-                <a:cs typeface="Calibri" pitchFamily="34" charset="-120"/>
-              </a:rPr>
-              <a:t>Triage &amp; appetite check</a:t>
-            </a:r>
-            <a:endParaRPr lang="en-US" sz="1250" dirty="0"/>
-          </a:p>
-        </p:txBody>
-      </p:sp>
-      <p:sp>
-        <p:nvSpPr>
-          <p:cNvPr id="29" name="Shape 27"/>
-          <p:cNvSpPr/>
-          <p:nvPr/>
-        </p:nvSpPr>
-        <p:spPr>
-          <a:xfrm>
-            <a:off x="5241341" y="3172968"/>
+              <a:rPr lang="en-US" sz="950" dirty="0">
+                <a:solidFill>
+                  <a:srgbClr val="5A6472"/>
+                </a:solidFill>
+                <a:latin typeface="Calibri" pitchFamily="34" charset="0"/>
+                <a:ea typeface="Calibri" pitchFamily="34" charset="-122"/>
+                <a:cs typeface="Calibri" pitchFamily="34" charset="-120"/>
+              </a:rPr>
+              <a:t>Levers: lead line, rate-discount ceiling, bundle, channel</a:t>
+            </a:r>
+            <a:endParaRPr lang="en-US" sz="950" dirty="0"/>
+          </a:p>
+        </p:txBody>
+      </p:sp>
+      <p:sp>
+        <p:nvSpPr>
+          <p:cNvPr id="34" name="Shape 32"/>
+          <p:cNvSpPr/>
+          <p:nvPr/>
+        </p:nvSpPr>
+        <p:spPr>
+          <a:xfrm>
+            <a:off x="5241341" y="3730752"/>
             <a:ext cx="73152" cy="73152"/>
           </a:xfrm>
           <a:prstGeom prst="rect">
@@ -4189,14 +4528,14 @@
       </p:sp>
       <p:sp>
         <p:nvSpPr>
-          <p:cNvPr id="30" name="Text 28"/>
-          <p:cNvSpPr/>
-          <p:nvPr/>
-        </p:nvSpPr>
-        <p:spPr>
-          <a:xfrm>
-            <a:off x="5405933" y="3090672"/>
-            <a:ext cx="1532534" cy="548640"/>
+          <p:cNvPr id="35" name="Text 33"/>
+          <p:cNvSpPr/>
+          <p:nvPr/>
+        </p:nvSpPr>
+        <p:spPr>
+          <a:xfrm>
+            <a:off x="5405933" y="3648456"/>
+            <a:ext cx="1532534" cy="566928"/>
           </a:xfrm>
           <a:prstGeom prst="rect">
             <a:avLst/>
@@ -4215,7 +4554,7 @@
               <a:buNone/>
             </a:pPr>
             <a:r>
-              <a:rPr lang="en-US" sz="1000" dirty="0">
+              <a:rPr lang="en-US" sz="950" dirty="0">
                 <a:solidFill>
                   <a:srgbClr val="5A6472"/>
                 </a:solidFill>
@@ -4223,77 +4562,15 @@
                 <a:ea typeface="Calibri" pitchFamily="34" charset="-122"/>
                 <a:cs typeface="Calibri" pitchFamily="34" charset="-120"/>
               </a:rPr>
-              <a:t>Automated appetite-fit scoring</a:t>
-            </a:r>
-            <a:endParaRPr lang="en-US" sz="1000" dirty="0"/>
-          </a:p>
-        </p:txBody>
-      </p:sp>
-      <p:sp>
-        <p:nvSpPr>
-          <p:cNvPr id="31" name="Shape 29"/>
-          <p:cNvSpPr/>
-          <p:nvPr/>
-        </p:nvSpPr>
-        <p:spPr>
-          <a:xfrm>
-            <a:off x="5241341" y="3758184"/>
-            <a:ext cx="73152" cy="73152"/>
-          </a:xfrm>
-          <a:prstGeom prst="rect">
-            <a:avLst/>
-          </a:prstGeom>
-          <a:solidFill>
-            <a:srgbClr val="2E6FB5"/>
-          </a:solidFill>
-          <a:ln/>
-        </p:spPr>
-      </p:sp>
-      <p:sp>
-        <p:nvSpPr>
-          <p:cNvPr id="32" name="Text 30"/>
-          <p:cNvSpPr/>
-          <p:nvPr/>
-        </p:nvSpPr>
-        <p:spPr>
-          <a:xfrm>
-            <a:off x="5405933" y="3675888"/>
-            <a:ext cx="1532534" cy="548640"/>
-          </a:xfrm>
-          <a:prstGeom prst="rect">
-            <a:avLst/>
-          </a:prstGeom>
-          <a:noFill/>
-          <a:ln/>
-        </p:spPr>
-        <p:txBody>
-          <a:bodyPr wrap="square" lIns="0" tIns="0" rIns="0" bIns="0" rtlCol="0" anchor="t"/>
-          <a:lstStyle/>
-          <a:p>
-            <a:pPr indent="0" marL="0">
-              <a:lnSpc>
-                <a:spcPct val="95000"/>
-              </a:lnSpc>
-              <a:buNone/>
-            </a:pPr>
-            <a:r>
-              <a:rPr lang="en-US" sz="1000" dirty="0">
-                <a:solidFill>
-                  <a:srgbClr val="5A6472"/>
-                </a:solidFill>
-                <a:latin typeface="Calibri" pitchFamily="34" charset="0"/>
-                <a:ea typeface="Calibri" pitchFamily="34" charset="-122"/>
-                <a:cs typeface="Calibri" pitchFamily="34" charset="-120"/>
-              </a:rPr>
-              <a:t>Auto-declines misfits, speeds clean risks</a:t>
-            </a:r>
-            <a:endParaRPr lang="en-US" sz="1000" dirty="0"/>
-          </a:p>
-        </p:txBody>
-      </p:sp>
-      <p:sp>
-        <p:nvSpPr>
-          <p:cNvPr id="33" name="Shape 31"/>
+              <a:t>Hard rate-adequacy floor + loss-ratio limit</a:t>
+            </a:r>
+            <a:endParaRPr lang="en-US" sz="950" dirty="0"/>
+          </a:p>
+        </p:txBody>
+      </p:sp>
+      <p:sp>
+        <p:nvSpPr>
+          <p:cNvPr id="36" name="Shape 34"/>
           <p:cNvSpPr/>
           <p:nvPr/>
         </p:nvSpPr>
@@ -4318,7 +4595,7 @@
       </p:sp>
       <p:sp>
         <p:nvSpPr>
-          <p:cNvPr id="34" name="Shape 32"/>
+          <p:cNvPr id="37" name="Shape 35"/>
           <p:cNvSpPr/>
           <p:nvPr/>
         </p:nvSpPr>
@@ -4345,7 +4622,7 @@
       </p:sp>
       <p:sp>
         <p:nvSpPr>
-          <p:cNvPr id="35" name="Shape 33"/>
+          <p:cNvPr id="38" name="Shape 36"/>
           <p:cNvSpPr/>
           <p:nvPr/>
         </p:nvSpPr>
@@ -4367,7 +4644,7 @@
       </p:sp>
       <p:sp>
         <p:nvSpPr>
-          <p:cNvPr id="36" name="Text 34"/>
+          <p:cNvPr id="39" name="Text 37"/>
           <p:cNvSpPr/>
           <p:nvPr/>
         </p:nvSpPr>
@@ -4406,14 +4683,14 @@
       </p:sp>
       <p:sp>
         <p:nvSpPr>
-          <p:cNvPr id="37" name="Text 35"/>
+          <p:cNvPr id="40" name="Text 38"/>
           <p:cNvSpPr/>
           <p:nvPr/>
         </p:nvSpPr>
         <p:spPr>
           <a:xfrm>
             <a:off x="7962595" y="2377440"/>
-            <a:ext cx="1313078" cy="640080"/>
+            <a:ext cx="1313078" cy="256032"/>
           </a:xfrm>
           <a:prstGeom prst="rect">
             <a:avLst/>
@@ -4423,6 +4700,104 @@
         </p:spPr>
         <p:txBody>
           <a:bodyPr wrap="square" lIns="0" tIns="0" rIns="0" bIns="0" rtlCol="0" anchor="ctr"/>
+          <a:lstStyle/>
+          <a:p>
+            <a:pPr indent="0" marL="0">
+              <a:buNone/>
+            </a:pPr>
+            <a:r>
+              <a:rPr lang="en-US" sz="1300" b="1" dirty="0">
+                <a:solidFill>
+                  <a:srgbClr val="12315B"/>
+                </a:solidFill>
+                <a:latin typeface="Calibri" pitchFamily="34" charset="0"/>
+                <a:ea typeface="Calibri" pitchFamily="34" charset="-122"/>
+                <a:cs typeface="Calibri" pitchFamily="34" charset="-120"/>
+              </a:rPr>
+              <a:t>Deploy</a:t>
+            </a:r>
+            <a:endParaRPr lang="en-US" sz="1300" dirty="0"/>
+          </a:p>
+        </p:txBody>
+      </p:sp>
+      <p:sp>
+        <p:nvSpPr>
+          <p:cNvPr id="41" name="Text 39"/>
+          <p:cNvSpPr/>
+          <p:nvPr/>
+        </p:nvSpPr>
+        <p:spPr>
+          <a:xfrm>
+            <a:off x="7962595" y="2633472"/>
+            <a:ext cx="1331366" cy="201168"/>
+          </a:xfrm>
+          <a:prstGeom prst="rect">
+            <a:avLst/>
+          </a:prstGeom>
+          <a:noFill/>
+          <a:ln/>
+        </p:spPr>
+        <p:txBody>
+          <a:bodyPr wrap="square" lIns="0" tIns="0" rIns="0" bIns="0" rtlCol="0" anchor="ctr"/>
+          <a:lstStyle/>
+          <a:p>
+            <a:pPr indent="0" marL="0">
+              <a:buNone/>
+            </a:pPr>
+            <a:r>
+              <a:rPr lang="en-US" sz="800" b="1" spc="100" kern="0" dirty="0">
+                <a:solidFill>
+                  <a:srgbClr val="2E6FB5"/>
+                </a:solidFill>
+                <a:latin typeface="Calibri" pitchFamily="34" charset="0"/>
+                <a:ea typeface="Calibri" pitchFamily="34" charset="-122"/>
+                <a:cs typeface="Calibri" pitchFamily="34" charset="-120"/>
+              </a:rPr>
+              <a:t>APPROVAL → RCT</a:t>
+            </a:r>
+            <a:endParaRPr lang="en-US" sz="800" dirty="0"/>
+          </a:p>
+        </p:txBody>
+      </p:sp>
+      <p:sp>
+        <p:nvSpPr>
+          <p:cNvPr id="42" name="Shape 40"/>
+          <p:cNvSpPr/>
+          <p:nvPr/>
+        </p:nvSpPr>
+        <p:spPr>
+          <a:xfrm>
+            <a:off x="7541971" y="3127248"/>
+            <a:ext cx="73152" cy="73152"/>
+          </a:xfrm>
+          <a:prstGeom prst="rect">
+            <a:avLst/>
+          </a:prstGeom>
+          <a:solidFill>
+            <a:srgbClr val="2E6FB5"/>
+          </a:solidFill>
+          <a:ln/>
+        </p:spPr>
+      </p:sp>
+      <p:sp>
+        <p:nvSpPr>
+          <p:cNvPr id="43" name="Text 41"/>
+          <p:cNvSpPr/>
+          <p:nvPr/>
+        </p:nvSpPr>
+        <p:spPr>
+          <a:xfrm>
+            <a:off x="7706563" y="3044952"/>
+            <a:ext cx="1532534" cy="566928"/>
+          </a:xfrm>
+          <a:prstGeom prst="rect">
+            <a:avLst/>
+          </a:prstGeom>
+          <a:noFill/>
+          <a:ln/>
+        </p:spPr>
+        <p:txBody>
+          <a:bodyPr wrap="square" lIns="0" tIns="0" rIns="0" bIns="0" rtlCol="0" anchor="t"/>
           <a:lstStyle/>
           <a:p>
             <a:pPr indent="0" marL="0">
@@ -4432,29 +4807,29 @@
               <a:buNone/>
             </a:pPr>
             <a:r>
-              <a:rPr lang="en-US" sz="1250" b="1" dirty="0">
-                <a:solidFill>
-                  <a:srgbClr val="12315B"/>
-                </a:solidFill>
-                <a:latin typeface="Calibri" pitchFamily="34" charset="0"/>
-                <a:ea typeface="Calibri" pitchFamily="34" charset="-122"/>
-                <a:cs typeface="Calibri" pitchFamily="34" charset="-120"/>
-              </a:rPr>
-              <a:t>Pricing &amp; recommendation</a:t>
-            </a:r>
-            <a:endParaRPr lang="en-US" sz="1250" dirty="0"/>
-          </a:p>
-        </p:txBody>
-      </p:sp>
-      <p:sp>
-        <p:nvSpPr>
-          <p:cNvPr id="38" name="Shape 36"/>
-          <p:cNvSpPr/>
-          <p:nvPr/>
-        </p:nvSpPr>
-        <p:spPr>
-          <a:xfrm>
-            <a:off x="7541971" y="3172968"/>
+              <a:rPr lang="en-US" sz="950" dirty="0">
+                <a:solidFill>
+                  <a:srgbClr val="5A6472"/>
+                </a:solidFill>
+                <a:latin typeface="Calibri" pitchFamily="34" charset="0"/>
+                <a:ea typeface="Calibri" pitchFamily="34" charset="-122"/>
+                <a:cs typeface="Calibri" pitchFamily="34" charset="-120"/>
+              </a:rPr>
+              <a:t>Underwriting · Actuarial sign-off, then compliance gate</a:t>
+            </a:r>
+            <a:endParaRPr lang="en-US" sz="950" dirty="0"/>
+          </a:p>
+        </p:txBody>
+      </p:sp>
+      <p:sp>
+        <p:nvSpPr>
+          <p:cNvPr id="44" name="Shape 42"/>
+          <p:cNvSpPr/>
+          <p:nvPr/>
+        </p:nvSpPr>
+        <p:spPr>
+          <a:xfrm>
+            <a:off x="7541971" y="3730752"/>
             <a:ext cx="73152" cy="73152"/>
           </a:xfrm>
           <a:prstGeom prst="rect">
@@ -4468,14 +4843,14 @@
       </p:sp>
       <p:sp>
         <p:nvSpPr>
-          <p:cNvPr id="39" name="Text 37"/>
-          <p:cNvSpPr/>
-          <p:nvPr/>
-        </p:nvSpPr>
-        <p:spPr>
-          <a:xfrm>
-            <a:off x="7706563" y="3090672"/>
-            <a:ext cx="1532534" cy="548640"/>
+          <p:cNvPr id="45" name="Text 43"/>
+          <p:cNvSpPr/>
+          <p:nvPr/>
+        </p:nvSpPr>
+        <p:spPr>
+          <a:xfrm>
+            <a:off x="7706563" y="3648456"/>
+            <a:ext cx="1532534" cy="566928"/>
           </a:xfrm>
           <a:prstGeom prst="rect">
             <a:avLst/>
@@ -4494,7 +4869,7 @@
               <a:buNone/>
             </a:pPr>
             <a:r>
-              <a:rPr lang="en-US" sz="1000" dirty="0">
+              <a:rPr lang="en-US" sz="950" dirty="0">
                 <a:solidFill>
                   <a:srgbClr val="5A6472"/>
                 </a:solidFill>
@@ -4502,77 +4877,15 @@
                 <a:ea typeface="Calibri" pitchFamily="34" charset="-122"/>
                 <a:cs typeface="Calibri" pitchFamily="34" charset="-120"/>
               </a:rPr>
-              <a:t>Model-suggested price &amp; terms</a:t>
-            </a:r>
-            <a:endParaRPr lang="en-US" sz="1000" dirty="0"/>
-          </a:p>
-        </p:txBody>
-      </p:sp>
-      <p:sp>
-        <p:nvSpPr>
-          <p:cNvPr id="40" name="Shape 38"/>
-          <p:cNvSpPr/>
-          <p:nvPr/>
-        </p:nvSpPr>
-        <p:spPr>
-          <a:xfrm>
-            <a:off x="7541971" y="3758184"/>
-            <a:ext cx="73152" cy="73152"/>
-          </a:xfrm>
-          <a:prstGeom prst="rect">
-            <a:avLst/>
-          </a:prstGeom>
-          <a:solidFill>
-            <a:srgbClr val="2E6FB5"/>
-          </a:solidFill>
-          <a:ln/>
-        </p:spPr>
-      </p:sp>
-      <p:sp>
-        <p:nvSpPr>
-          <p:cNvPr id="41" name="Text 39"/>
-          <p:cNvSpPr/>
-          <p:nvPr/>
-        </p:nvSpPr>
-        <p:spPr>
-          <a:xfrm>
-            <a:off x="7706563" y="3675888"/>
-            <a:ext cx="1532534" cy="548640"/>
-          </a:xfrm>
-          <a:prstGeom prst="rect">
-            <a:avLst/>
-          </a:prstGeom>
-          <a:noFill/>
-          <a:ln/>
-        </p:spPr>
-        <p:txBody>
-          <a:bodyPr wrap="square" lIns="0" tIns="0" rIns="0" bIns="0" rtlCol="0" anchor="t"/>
-          <a:lstStyle/>
-          <a:p>
-            <a:pPr indent="0" marL="0">
-              <a:lnSpc>
-                <a:spcPct val="95000"/>
-              </a:lnSpc>
-              <a:buNone/>
-            </a:pPr>
-            <a:r>
-              <a:rPr lang="en-US" sz="1000" dirty="0">
-                <a:solidFill>
-                  <a:srgbClr val="5A6472"/>
-                </a:solidFill>
-                <a:latin typeface="Calibri" pitchFamily="34" charset="0"/>
-                <a:ea typeface="Calibri" pitchFamily="34" charset="-122"/>
-                <a:cs typeface="Calibri" pitchFamily="34" charset="-120"/>
-              </a:rPr>
-              <a:t>With rationale and risk flags</a:t>
-            </a:r>
-            <a:endParaRPr lang="en-US" sz="1000" dirty="0"/>
-          </a:p>
-        </p:txBody>
-      </p:sp>
-      <p:sp>
-        <p:nvSpPr>
-          <p:cNvPr id="42" name="Shape 40"/>
+              <a:t>34,560 treatment · 3,840 holdout (90 / 10)</a:t>
+            </a:r>
+            <a:endParaRPr lang="en-US" sz="950" dirty="0"/>
+          </a:p>
+        </p:txBody>
+      </p:sp>
+      <p:sp>
+        <p:nvSpPr>
+          <p:cNvPr id="46" name="Shape 44"/>
           <p:cNvSpPr/>
           <p:nvPr/>
         </p:nvSpPr>
@@ -4597,7 +4910,7 @@
       </p:sp>
       <p:sp>
         <p:nvSpPr>
-          <p:cNvPr id="43" name="Shape 41"/>
+          <p:cNvPr id="47" name="Shape 45"/>
           <p:cNvSpPr/>
           <p:nvPr/>
         </p:nvSpPr>
@@ -4624,7 +4937,7 @@
       </p:sp>
       <p:sp>
         <p:nvSpPr>
-          <p:cNvPr id="44" name="Shape 42"/>
+          <p:cNvPr id="48" name="Shape 46"/>
           <p:cNvSpPr/>
           <p:nvPr/>
         </p:nvSpPr>
@@ -4646,7 +4959,7 @@
       </p:sp>
       <p:sp>
         <p:nvSpPr>
-          <p:cNvPr id="45" name="Text 43"/>
+          <p:cNvPr id="49" name="Text 47"/>
           <p:cNvSpPr/>
           <p:nvPr/>
         </p:nvSpPr>
@@ -4685,14 +4998,14 @@
       </p:sp>
       <p:sp>
         <p:nvSpPr>
-          <p:cNvPr id="46" name="Text 44"/>
+          <p:cNvPr id="50" name="Text 48"/>
           <p:cNvSpPr/>
           <p:nvPr/>
         </p:nvSpPr>
         <p:spPr>
           <a:xfrm>
             <a:off x="10263226" y="2377440"/>
-            <a:ext cx="1313078" cy="640080"/>
+            <a:ext cx="1313078" cy="256032"/>
           </a:xfrm>
           <a:prstGeom prst="rect">
             <a:avLst/>
@@ -4702,6 +5015,104 @@
         </p:spPr>
         <p:txBody>
           <a:bodyPr wrap="square" lIns="0" tIns="0" rIns="0" bIns="0" rtlCol="0" anchor="ctr"/>
+          <a:lstStyle/>
+          <a:p>
+            <a:pPr indent="0" marL="0">
+              <a:buNone/>
+            </a:pPr>
+            <a:r>
+              <a:rPr lang="en-US" sz="1300" b="1" dirty="0">
+                <a:solidFill>
+                  <a:srgbClr val="12315B"/>
+                </a:solidFill>
+                <a:latin typeface="Calibri" pitchFamily="34" charset="0"/>
+                <a:ea typeface="Calibri" pitchFamily="34" charset="-122"/>
+                <a:cs typeface="Calibri" pitchFamily="34" charset="-120"/>
+              </a:rPr>
+              <a:t>Learn</a:t>
+            </a:r>
+            <a:endParaRPr lang="en-US" sz="1300" dirty="0"/>
+          </a:p>
+        </p:txBody>
+      </p:sp>
+      <p:sp>
+        <p:nvSpPr>
+          <p:cNvPr id="51" name="Text 49"/>
+          <p:cNvSpPr/>
+          <p:nvPr/>
+        </p:nvSpPr>
+        <p:spPr>
+          <a:xfrm>
+            <a:off x="10263226" y="2633472"/>
+            <a:ext cx="1331366" cy="201168"/>
+          </a:xfrm>
+          <a:prstGeom prst="rect">
+            <a:avLst/>
+          </a:prstGeom>
+          <a:noFill/>
+          <a:ln/>
+        </p:spPr>
+        <p:txBody>
+          <a:bodyPr wrap="square" lIns="0" tIns="0" rIns="0" bIns="0" rtlCol="0" anchor="ctr"/>
+          <a:lstStyle/>
+          <a:p>
+            <a:pPr indent="0" marL="0">
+              <a:buNone/>
+            </a:pPr>
+            <a:r>
+              <a:rPr lang="en-US" sz="800" b="1" spc="100" kern="0" dirty="0">
+                <a:solidFill>
+                  <a:srgbClr val="2E6FB5"/>
+                </a:solidFill>
+                <a:latin typeface="Calibri" pitchFamily="34" charset="0"/>
+                <a:ea typeface="Calibri" pitchFamily="34" charset="-122"/>
+                <a:cs typeface="Calibri" pitchFamily="34" charset="-120"/>
+              </a:rPr>
+              <a:t>MEASURED</a:t>
+            </a:r>
+            <a:endParaRPr lang="en-US" sz="800" dirty="0"/>
+          </a:p>
+        </p:txBody>
+      </p:sp>
+      <p:sp>
+        <p:nvSpPr>
+          <p:cNvPr id="52" name="Shape 50"/>
+          <p:cNvSpPr/>
+          <p:nvPr/>
+        </p:nvSpPr>
+        <p:spPr>
+          <a:xfrm>
+            <a:off x="9842602" y="3127248"/>
+            <a:ext cx="73152" cy="73152"/>
+          </a:xfrm>
+          <a:prstGeom prst="rect">
+            <a:avLst/>
+          </a:prstGeom>
+          <a:solidFill>
+            <a:srgbClr val="2E6FB5"/>
+          </a:solidFill>
+          <a:ln/>
+        </p:spPr>
+      </p:sp>
+      <p:sp>
+        <p:nvSpPr>
+          <p:cNvPr id="53" name="Text 51"/>
+          <p:cNvSpPr/>
+          <p:nvPr/>
+        </p:nvSpPr>
+        <p:spPr>
+          <a:xfrm>
+            <a:off x="10007194" y="3044952"/>
+            <a:ext cx="1532534" cy="566928"/>
+          </a:xfrm>
+          <a:prstGeom prst="rect">
+            <a:avLst/>
+          </a:prstGeom>
+          <a:noFill/>
+          <a:ln/>
+        </p:spPr>
+        <p:txBody>
+          <a:bodyPr wrap="square" lIns="0" tIns="0" rIns="0" bIns="0" rtlCol="0" anchor="t"/>
           <a:lstStyle/>
           <a:p>
             <a:pPr indent="0" marL="0">
@@ -4711,29 +5122,29 @@
               <a:buNone/>
             </a:pPr>
             <a:r>
-              <a:rPr lang="en-US" sz="1250" b="1" dirty="0">
-                <a:solidFill>
-                  <a:srgbClr val="12315B"/>
-                </a:solidFill>
-                <a:latin typeface="Calibri" pitchFamily="34" charset="0"/>
-                <a:ea typeface="Calibri" pitchFamily="34" charset="-122"/>
-                <a:cs typeface="Calibri" pitchFamily="34" charset="-120"/>
-              </a:rPr>
-              <a:t>Underwriter decision</a:t>
-            </a:r>
-            <a:endParaRPr lang="en-US" sz="1250" dirty="0"/>
-          </a:p>
-        </p:txBody>
-      </p:sp>
-      <p:sp>
-        <p:nvSpPr>
-          <p:cNvPr id="47" name="Shape 45"/>
-          <p:cNvSpPr/>
-          <p:nvPr/>
-        </p:nvSpPr>
-        <p:spPr>
-          <a:xfrm>
-            <a:off x="9842602" y="3172968"/>
+              <a:rPr lang="en-US" sz="950" dirty="0">
+                <a:solidFill>
+                  <a:srgbClr val="5A6472"/>
+                </a:solidFill>
+                <a:latin typeface="Calibri" pitchFamily="34" charset="0"/>
+                <a:ea typeface="Calibri" pitchFamily="34" charset="-122"/>
+                <a:cs typeface="Calibri" pitchFamily="34" charset="-120"/>
+              </a:rPr>
+              <a:t>Per-segment realised vs predicted; writeback to appetite</a:t>
+            </a:r>
+            <a:endParaRPr lang="en-US" sz="950" dirty="0"/>
+          </a:p>
+        </p:txBody>
+      </p:sp>
+      <p:sp>
+        <p:nvSpPr>
+          <p:cNvPr id="54" name="Shape 52"/>
+          <p:cNvSpPr/>
+          <p:nvPr/>
+        </p:nvSpPr>
+        <p:spPr>
+          <a:xfrm>
+            <a:off x="9842602" y="3730752"/>
             <a:ext cx="73152" cy="73152"/>
           </a:xfrm>
           <a:prstGeom prst="rect">
@@ -4747,14 +5158,14 @@
       </p:sp>
       <p:sp>
         <p:nvSpPr>
-          <p:cNvPr id="48" name="Text 46"/>
-          <p:cNvSpPr/>
-          <p:nvPr/>
-        </p:nvSpPr>
-        <p:spPr>
-          <a:xfrm>
-            <a:off x="10007194" y="3090672"/>
-            <a:ext cx="1532534" cy="548640"/>
+          <p:cNvPr id="55" name="Text 53"/>
+          <p:cNvSpPr/>
+          <p:nvPr/>
+        </p:nvSpPr>
+        <p:spPr>
+          <a:xfrm>
+            <a:off x="10007194" y="3648456"/>
+            <a:ext cx="1532534" cy="566928"/>
           </a:xfrm>
           <a:prstGeom prst="rect">
             <a:avLst/>
@@ -4773,7 +5184,7 @@
               <a:buNone/>
             </a:pPr>
             <a:r>
-              <a:rPr lang="en-US" sz="1000" dirty="0">
+              <a:rPr lang="en-US" sz="950" dirty="0">
                 <a:solidFill>
                   <a:srgbClr val="5A6472"/>
                 </a:solidFill>
@@ -4781,77 +5192,15 @@
                 <a:ea typeface="Calibri" pitchFamily="34" charset="-122"/>
                 <a:cs typeface="Calibri" pitchFamily="34" charset="-120"/>
               </a:rPr>
-              <a:t>Reviews the decision-ready package</a:t>
-            </a:r>
-            <a:endParaRPr lang="en-US" sz="1000" dirty="0"/>
-          </a:p>
-        </p:txBody>
-      </p:sp>
-      <p:sp>
-        <p:nvSpPr>
-          <p:cNvPr id="49" name="Shape 47"/>
-          <p:cNvSpPr/>
-          <p:nvPr/>
-        </p:nvSpPr>
-        <p:spPr>
-          <a:xfrm>
-            <a:off x="9842602" y="3758184"/>
-            <a:ext cx="73152" cy="73152"/>
-          </a:xfrm>
-          <a:prstGeom prst="rect">
-            <a:avLst/>
-          </a:prstGeom>
-          <a:solidFill>
-            <a:srgbClr val="2E6FB5"/>
-          </a:solidFill>
-          <a:ln/>
-        </p:spPr>
-      </p:sp>
-      <p:sp>
-        <p:nvSpPr>
-          <p:cNvPr id="50" name="Text 48"/>
-          <p:cNvSpPr/>
-          <p:nvPr/>
-        </p:nvSpPr>
-        <p:spPr>
-          <a:xfrm>
-            <a:off x="10007194" y="3675888"/>
-            <a:ext cx="1532534" cy="548640"/>
-          </a:xfrm>
-          <a:prstGeom prst="rect">
-            <a:avLst/>
-          </a:prstGeom>
-          <a:noFill/>
-          <a:ln/>
-        </p:spPr>
-        <p:txBody>
-          <a:bodyPr wrap="square" lIns="0" tIns="0" rIns="0" bIns="0" rtlCol="0" anchor="t"/>
-          <a:lstStyle/>
-          <a:p>
-            <a:pPr indent="0" marL="0">
-              <a:lnSpc>
-                <a:spcPct val="95000"/>
-              </a:lnSpc>
-              <a:buNone/>
-            </a:pPr>
-            <a:r>
-              <a:rPr lang="en-US" sz="1000" dirty="0">
-                <a:solidFill>
-                  <a:srgbClr val="5A6472"/>
-                </a:solidFill>
-                <a:latin typeface="Calibri" pitchFamily="34" charset="0"/>
-                <a:ea typeface="Calibri" pitchFamily="34" charset="-122"/>
-                <a:cs typeface="Calibri" pitchFamily="34" charset="-120"/>
-              </a:rPr>
-              <a:t>Judges complex risks, binds &amp; documents</a:t>
-            </a:r>
-            <a:endParaRPr lang="en-US" sz="1000" dirty="0"/>
-          </a:p>
-        </p:txBody>
-      </p:sp>
-      <p:sp>
-        <p:nvSpPr>
-          <p:cNvPr id="51" name="Text 49"/>
+              <a:t>Bind lift held; loss ratio inside the limit</a:t>
+            </a:r>
+            <a:endParaRPr lang="en-US" sz="950" dirty="0"/>
+          </a:p>
+        </p:txBody>
+      </p:sp>
+      <p:sp>
+        <p:nvSpPr>
+          <p:cNvPr id="56" name="Text 54"/>
           <p:cNvSpPr/>
           <p:nvPr/>
         </p:nvSpPr>
@@ -4882,7 +5231,7 @@
                 <a:ea typeface="Calibri" pitchFamily="34" charset="-122"/>
                 <a:cs typeface="Calibri" pitchFamily="34" charset="-120"/>
               </a:rPr>
-              <a:t>ENABLING DATA &amp; SYSTEMS   </a:t>
+              <a:t>MODELS &amp; GUARDRAILS   </a:t>
             </a:r>
             <a:pPr indent="0" marL="0">
               <a:buNone/>
@@ -4896,7 +5245,7 @@
                 <a:ea typeface="Calibri" pitchFamily="34" charset="-122"/>
                 <a:cs typeface="Calibri" pitchFamily="34" charset="-120"/>
               </a:rPr>
-              <a:t>UW workbench · Document AI · Third-party data vendors · Catastrophe models · Rating engine · Policy admin</a:t>
+              <a:t>Liberty submission + loss data · elasticity-aware pricing · rate-adequacy floor · loss-ratio limit · pricing-consistency (NAIC 24-08)</a:t>
             </a:r>
             <a:endParaRPr lang="en-US" sz="1050" dirty="0"/>
           </a:p>
@@ -4904,7 +5253,7 @@
       </p:sp>
       <p:sp>
         <p:nvSpPr>
-          <p:cNvPr id="52" name="Shape 50"/>
+          <p:cNvPr id="57" name="Shape 55"/>
           <p:cNvSpPr/>
           <p:nvPr/>
         </p:nvSpPr>
@@ -4927,14 +5276,14 @@
       </p:sp>
       <p:sp>
         <p:nvSpPr>
-          <p:cNvPr id="53" name="Text 51"/>
+          <p:cNvPr id="58" name="Text 56"/>
           <p:cNvSpPr/>
           <p:nvPr/>
         </p:nvSpPr>
         <p:spPr>
           <a:xfrm>
             <a:off x="457200" y="4937760"/>
-            <a:ext cx="5486400" cy="256032"/>
+            <a:ext cx="6400800" cy="256032"/>
           </a:xfrm>
           <a:prstGeom prst="rect">
             <a:avLst/>
@@ -4950,7 +5299,7 @@
               <a:buNone/>
             </a:pPr>
             <a:r>
-              <a:rPr lang="en-US" sz="1100" b="1" spc="200" kern="0" dirty="0">
+              <a:rPr lang="en-US" sz="1100" b="1" spc="100" kern="0" dirty="0">
                 <a:solidFill>
                   <a:srgbClr val="12315B"/>
                 </a:solidFill>
@@ -4958,7 +5307,7 @@
                 <a:ea typeface="Calibri" pitchFamily="34" charset="-122"/>
                 <a:cs typeface="Calibri" pitchFamily="34" charset="-120"/>
               </a:rPr>
-              <a:t>THE PAYOFF</a:t>
+              <a:t>PROOF  ·  SIMULATED, THEN MEASURED IN PILOT</a:t>
             </a:r>
             <a:endParaRPr lang="en-US" sz="1100" dirty="0"/>
           </a:p>
@@ -4966,7 +5315,7 @@
       </p:sp>
       <p:sp>
         <p:nvSpPr>
-          <p:cNvPr id="54" name="Shape 52"/>
+          <p:cNvPr id="59" name="Shape 57"/>
           <p:cNvSpPr/>
           <p:nvPr/>
         </p:nvSpPr>
@@ -4993,7 +5342,7 @@
       </p:sp>
       <p:sp>
         <p:nvSpPr>
-          <p:cNvPr id="55" name="Text 53"/>
+          <p:cNvPr id="60" name="Text 58"/>
           <p:cNvSpPr/>
           <p:nvPr/>
         </p:nvSpPr>
@@ -5016,7 +5365,7 @@
               <a:buNone/>
             </a:pPr>
             <a:r>
-              <a:rPr lang="en-US" sz="2500" b="1" dirty="0">
+              <a:rPr lang="en-US" sz="2200" b="1" dirty="0">
                 <a:solidFill>
                   <a:srgbClr val="12315B"/>
                 </a:solidFill>
@@ -5024,13 +5373,13 @@
                 <a:ea typeface="Cambria" pitchFamily="34" charset="-122"/>
                 <a:cs typeface="Cambria" pitchFamily="34" charset="-120"/>
               </a:rPr>
-              <a:t>40</a:t>
+              <a:t>8.4→19.1</a:t>
             </a:r>
             <a:pPr algn="ctr" indent="0" marL="0">
               <a:buNone/>
             </a:pPr>
             <a:r>
-              <a:rPr lang="en-US" sz="1300" b="1" dirty="0">
+              <a:rPr lang="en-US" sz="1200" b="1" dirty="0">
                 <a:solidFill>
                   <a:srgbClr val="2E6FB5"/>
                 </a:solidFill>
@@ -5038,15 +5387,15 @@
                 <a:ea typeface="Cambria" pitchFamily="34" charset="-122"/>
                 <a:cs typeface="Cambria" pitchFamily="34" charset="-120"/>
               </a:rPr>
-              <a:t>%</a:t>
-            </a:r>
-            <a:endParaRPr lang="en-US" sz="2500" dirty="0"/>
-          </a:p>
-        </p:txBody>
-      </p:sp>
-      <p:sp>
-        <p:nvSpPr>
-          <p:cNvPr id="56" name="Text 54"/>
+              <a:t> %</a:t>
+            </a:r>
+            <a:endParaRPr lang="en-US" sz="2200" dirty="0"/>
+          </a:p>
+        </p:txBody>
+      </p:sp>
+      <p:sp>
+        <p:nvSpPr>
+          <p:cNvPr id="61" name="Text 59"/>
           <p:cNvSpPr/>
           <p:nvPr/>
         </p:nvSpPr>
@@ -5080,7 +5429,7 @@
                 <a:ea typeface="Calibri" pitchFamily="34" charset="-122"/>
                 <a:cs typeface="Calibri" pitchFamily="34" charset="-120"/>
               </a:rPr>
-              <a:t>Faster quote turnaround on in-appetite risks</a:t>
+              <a:t>Quote-to-bind conversion</a:t>
             </a:r>
             <a:endParaRPr lang="en-US" sz="950" dirty="0"/>
           </a:p>
@@ -5088,7 +5437,7 @@
       </p:sp>
       <p:sp>
         <p:nvSpPr>
-          <p:cNvPr id="57" name="Shape 55"/>
+          <p:cNvPr id="62" name="Shape 60"/>
           <p:cNvSpPr/>
           <p:nvPr/>
         </p:nvSpPr>
@@ -5115,7 +5464,7 @@
       </p:sp>
       <p:sp>
         <p:nvSpPr>
-          <p:cNvPr id="58" name="Text 56"/>
+          <p:cNvPr id="63" name="Text 61"/>
           <p:cNvSpPr/>
           <p:nvPr/>
         </p:nvSpPr>
@@ -5138,7 +5487,7 @@
               <a:buNone/>
             </a:pPr>
             <a:r>
-              <a:rPr lang="en-US" sz="2500" b="1" dirty="0">
+              <a:rPr lang="en-US" sz="2200" b="1" dirty="0">
                 <a:solidFill>
                   <a:srgbClr val="12315B"/>
                 </a:solidFill>
@@ -5146,29 +5495,18 @@
                 <a:ea typeface="Cambria" pitchFamily="34" charset="-122"/>
                 <a:cs typeface="Cambria" pitchFamily="34" charset="-120"/>
               </a:rPr>
-              <a:t>60</a:t>
+              <a:t>+$31M</a:t>
             </a:r>
             <a:pPr algn="ctr" indent="0" marL="0">
               <a:buNone/>
             </a:pPr>
-            <a:r>
-              <a:rPr lang="en-US" sz="1300" b="1" dirty="0">
-                <a:solidFill>
-                  <a:srgbClr val="2E6FB5"/>
-                </a:solidFill>
-                <a:latin typeface="Cambria" pitchFamily="34" charset="0"/>
-                <a:ea typeface="Cambria" pitchFamily="34" charset="-122"/>
-                <a:cs typeface="Cambria" pitchFamily="34" charset="-120"/>
-              </a:rPr>
-              <a:t>%</a:t>
-            </a:r>
-            <a:endParaRPr lang="en-US" sz="2500" dirty="0"/>
-          </a:p>
-        </p:txBody>
-      </p:sp>
-      <p:sp>
-        <p:nvSpPr>
-          <p:cNvPr id="59" name="Text 57"/>
+            <a:endParaRPr lang="en-US" sz="2200" dirty="0"/>
+          </a:p>
+        </p:txBody>
+      </p:sp>
+      <p:sp>
+        <p:nvSpPr>
+          <p:cNvPr id="64" name="Text 62"/>
           <p:cNvSpPr/>
           <p:nvPr/>
         </p:nvSpPr>
@@ -5202,7 +5540,7 @@
                 <a:ea typeface="Calibri" pitchFamily="34" charset="-122"/>
                 <a:cs typeface="Calibri" pitchFamily="34" charset="-120"/>
               </a:rPr>
-              <a:t>Straight-through triage on clean submissions</a:t>
+              <a:t>Incremental Yr-1 NWP</a:t>
             </a:r>
             <a:endParaRPr lang="en-US" sz="950" dirty="0"/>
           </a:p>
@@ -5210,7 +5548,7 @@
       </p:sp>
       <p:sp>
         <p:nvSpPr>
-          <p:cNvPr id="60" name="Shape 58"/>
+          <p:cNvPr id="65" name="Shape 63"/>
           <p:cNvSpPr/>
           <p:nvPr/>
         </p:nvSpPr>
@@ -5237,7 +5575,7 @@
       </p:sp>
       <p:sp>
         <p:nvSpPr>
-          <p:cNvPr id="61" name="Text 59"/>
+          <p:cNvPr id="66" name="Text 64"/>
           <p:cNvSpPr/>
           <p:nvPr/>
         </p:nvSpPr>
@@ -5260,7 +5598,7 @@
               <a:buNone/>
             </a:pPr>
             <a:r>
-              <a:rPr lang="en-US" sz="2500" b="1" dirty="0">
+              <a:rPr lang="en-US" sz="2200" b="1" dirty="0">
                 <a:solidFill>
                   <a:srgbClr val="12315B"/>
                 </a:solidFill>
@@ -5268,29 +5606,18 @@
                 <a:ea typeface="Cambria" pitchFamily="34" charset="-122"/>
                 <a:cs typeface="Cambria" pitchFamily="34" charset="-120"/>
               </a:rPr>
-              <a:t>2–3</a:t>
+              <a:t>+0.4</a:t>
             </a:r>
             <a:pPr algn="ctr" indent="0" marL="0">
               <a:buNone/>
             </a:pPr>
-            <a:r>
-              <a:rPr lang="en-US" sz="1300" b="1" dirty="0">
-                <a:solidFill>
-                  <a:srgbClr val="2E6FB5"/>
-                </a:solidFill>
-                <a:latin typeface="Cambria" pitchFamily="34" charset="0"/>
-                <a:ea typeface="Cambria" pitchFamily="34" charset="-122"/>
-                <a:cs typeface="Cambria" pitchFamily="34" charset="-120"/>
-              </a:rPr>
-              <a:t>pts</a:t>
-            </a:r>
-            <a:endParaRPr lang="en-US" sz="2500" dirty="0"/>
-          </a:p>
-        </p:txBody>
-      </p:sp>
-      <p:sp>
-        <p:nvSpPr>
-          <p:cNvPr id="62" name="Text 60"/>
+            <a:endParaRPr lang="en-US" sz="2200" dirty="0"/>
+          </a:p>
+        </p:txBody>
+      </p:sp>
+      <p:sp>
+        <p:nvSpPr>
+          <p:cNvPr id="67" name="Text 65"/>
           <p:cNvSpPr/>
           <p:nvPr/>
         </p:nvSpPr>
@@ -5324,7 +5651,7 @@
                 <a:ea typeface="Calibri" pitchFamily="34" charset="-122"/>
                 <a:cs typeface="Calibri" pitchFamily="34" charset="-120"/>
               </a:rPr>
-              <a:t>Loss-ratio gain from sharper selection</a:t>
+              <a:t>Lines per account (cross-line)</a:t>
             </a:r>
             <a:endParaRPr lang="en-US" sz="950" dirty="0"/>
           </a:p>
@@ -5332,7 +5659,7 @@
       </p:sp>
       <p:sp>
         <p:nvSpPr>
-          <p:cNvPr id="63" name="Shape 61"/>
+          <p:cNvPr id="68" name="Shape 66"/>
           <p:cNvSpPr/>
           <p:nvPr/>
         </p:nvSpPr>
@@ -5354,7 +5681,7 @@
       </p:sp>
       <p:sp>
         <p:nvSpPr>
-          <p:cNvPr id="64" name="Text 62"/>
+          <p:cNvPr id="69" name="Text 67"/>
           <p:cNvSpPr/>
           <p:nvPr/>
         </p:nvSpPr>
@@ -5385,7 +5712,7 @@
                 <a:ea typeface="Calibri" pitchFamily="34" charset="-122"/>
                 <a:cs typeface="Calibri" pitchFamily="34" charset="-120"/>
               </a:rPr>
-              <a:t>COMPOUNDING ADVANTAGE</a:t>
+              <a:t>WHERE NOT TO ACT</a:t>
             </a:r>
             <a:endParaRPr lang="en-US" sz="1100" dirty="0"/>
           </a:p>
@@ -5393,14 +5720,14 @@
       </p:sp>
       <p:sp>
         <p:nvSpPr>
-          <p:cNvPr id="65" name="Text 63"/>
-          <p:cNvSpPr/>
-          <p:nvPr/>
-        </p:nvSpPr>
-        <p:spPr>
-          <a:xfrm>
-            <a:off x="7662672" y="5394960"/>
-            <a:ext cx="3840480" cy="777240"/>
+          <p:cNvPr id="70" name="Text 68"/>
+          <p:cNvSpPr/>
+          <p:nvPr/>
+        </p:nvSpPr>
+        <p:spPr>
+          <a:xfrm>
+            <a:off x="7662672" y="5376672"/>
+            <a:ext cx="3840480" cy="822960"/>
           </a:xfrm>
           <a:prstGeom prst="rect">
             <a:avLst/>
@@ -5414,12 +5741,12 @@
           <a:p>
             <a:pPr indent="0" marL="0">
               <a:lnSpc>
-                <a:spcPct val="100000"/>
+                <a:spcPct val="98000"/>
               </a:lnSpc>
               <a:buNone/>
             </a:pPr>
             <a:r>
-              <a:rPr lang="en-US" sz="1200" dirty="0">
+              <a:rPr lang="en-US" sz="1100" dirty="0">
                 <a:solidFill>
                   <a:srgbClr val="FFFFFF"/>
                 </a:solidFill>
@@ -5427,15 +5754,15 @@
                 <a:ea typeface="Calibri" pitchFamily="34" charset="-122"/>
                 <a:cs typeface="Calibri" pitchFamily="34" charset="-120"/>
               </a:rPr>
-              <a:t>Bound-account outcomes and emerging losses retrain the appetite and pricing models, compounding into a durable underwriting edge.</a:t>
-            </a:r>
-            <a:endParaRPr lang="en-US" sz="1200" dirty="0"/>
-          </a:p>
-        </p:txBody>
-      </p:sp>
-      <p:sp>
-        <p:nvSpPr>
-          <p:cNvPr id="66" name="Shape 64"/>
+              <a:t>The Watch / Hold segment — ~2,900 accounts with an adverse loss trend and thin rate adequacy — gets NO quote. Writing it would buy conversion below adequacy and re-open the loss-ratio problem.</a:t>
+            </a:r>
+            <a:endParaRPr lang="en-US" sz="1100" dirty="0"/>
+          </a:p>
+        </p:txBody>
+      </p:sp>
+      <p:sp>
+        <p:nvSpPr>
+          <p:cNvPr id="71" name="Shape 69"/>
           <p:cNvSpPr/>
           <p:nvPr/>
         </p:nvSpPr>
@@ -5458,7 +5785,7 @@
       </p:sp>
       <p:sp>
         <p:nvSpPr>
-          <p:cNvPr id="67" name="Text 65"/>
+          <p:cNvPr id="72" name="Text 70"/>
           <p:cNvSpPr/>
           <p:nvPr/>
         </p:nvSpPr>
@@ -5489,7 +5816,7 @@
                 <a:ea typeface="Calibri" pitchFamily="34" charset="-122"/>
                 <a:cs typeface="Calibri" pitchFamily="34" charset="-120"/>
               </a:rPr>
-              <a:t>Liberty Mutual  |  AI Signal Portfolio</a:t>
+              <a:t>Liberty Mutual · TwinX Decision Cockpit</a:t>
             </a:r>
             <a:endParaRPr lang="en-US" sz="900" dirty="0"/>
           </a:p>
@@ -5497,7 +5824,7 @@
       </p:sp>
       <p:sp>
         <p:nvSpPr>
-          <p:cNvPr id="68" name="Text 66"/>
+          <p:cNvPr id="73" name="Text 71"/>
           <p:cNvSpPr/>
           <p:nvPr/>
         </p:nvSpPr>
@@ -5536,7 +5863,7 @@
       </p:sp>
       <p:sp>
         <p:nvSpPr>
-          <p:cNvPr id="69" name="Text 67"/>
+          <p:cNvPr id="74" name="Text 72"/>
           <p:cNvSpPr/>
           <p:nvPr/>
         </p:nvSpPr>
